--- a/slides/exports/redhat-ai-tax-administration.pptx
+++ b/slides/exports/redhat-ai-tax-administration.pptx
@@ -580,7 +580,7 @@
           <a:lstStyle/>
           <a:p>
             <a:r>
-              <a:t>Do not lead with the technology. Lead with the shape of the problem: seasonal demand against a fixed workforce, decades of correspondence logic locked in code nobody wants to touch, and data spread across systems never designed to talk. AI is interesting here because it works on unstructured language - which is most of what a tax agency handles.</a:t>
+              <a:t>Do not lead with the technology. Lead with the shape of the problem. The chart is the argument: a year of demand arrives in six weeks, far above any capacity you can justify staffing year-round. The shaded gap is what automation absorbs. The card on the right that matters most is the last one: the data cannot leave, so the platform is the decision.</a:t>
             </a:r>
           </a:p>
         </p:txBody>
@@ -650,7 +650,7 @@
           <a:lstStyle/>
           <a:p>
             <a:r>
-              <a:t>Walk the table top to bottom. The 'yes' rows already have a human reviewer in the loop, which makes them honest places to start. Exam selection is deliberately excluded: that is a determination affecting a taxpayer and needs a much heavier governance conversation. Saying this unprompted buys enormous credibility.</a:t>
+              <a:t>Walk the flow left to right. The red stages already have a human reviewer in the loop, which makes them honest places to start. Exam selection is deliberately gray: that is a determination affecting a taxpayer, and it needs a much heavier governance conversation. Saying this unprompted buys enormous credibility.</a:t>
             </a:r>
           </a:p>
         </p:txBody>
@@ -790,7 +790,7 @@
           <a:lstStyle/>
           <a:p>
             <a:r>
-              <a:t>Read bottom to top. The point is the two vertical concerns: automation and trust are not a layer you add at the end. A project that treats compliance as a phase after deployment discovers, at the worst possible moment, that it cannot produce evidence for anything that already happened.</a:t>
+              <a:t>Read bottom to top. The point is the two vertical pillars: automation and trust are not a layer you add at the end. A project that treats compliance as a phase after deployment discovers, at the worst possible moment, that it cannot produce evidence for anything that already happened.</a:t>
             </a:r>
           </a:p>
         </p:txBody>
@@ -1000,7 +1000,7 @@
           <a:lstStyle/>
           <a:p>
             <a:r>
-              <a:t>Transition slide. Switch to a terminal now. Tell them the labs run in simulate mode on a laptop with no cluster, and in live mode against their own environment - same script, same commands. Run Lab 01 and stop hard on step 4, the endpoint bound to 127.0.0.1.</a:t>
+              <a:t>Transition slide. Switch to a terminal now. Tell them the labs run in simulate mode on a laptop with no cluster, and in live mode against their own environment - same script, same commands. Run Lab 01 and stop hard on step 4, the endpoint bound to 127.0.0.1. The deck's Demo view plays every lab hands-free if you would rather narrate than type.</a:t>
             </a:r>
           </a:p>
         </p:txBody>
@@ -4323,7 +4323,7 @@
         </p:nvSpPr>
         <p:spPr>
           <a:xfrm>
-            <a:off x="777240" y="566928"/>
+            <a:off x="777240" y="502920"/>
             <a:ext cx="10637215" cy="310896"/>
           </a:xfrm>
           <a:prstGeom prst="rect">
@@ -4345,7 +4345,7 @@
             <a:r>
               <a:rPr sz="1100" b="1">
                 <a:solidFill>
-                  <a:srgbClr val="8A7671"/>
+                  <a:srgbClr val="7E6A64"/>
                 </a:solidFill>
                 <a:latin typeface="Red Hat Mono"/>
               </a:rPr>
@@ -4362,8 +4362,8 @@
         </p:nvSpPr>
         <p:spPr>
           <a:xfrm>
-            <a:off x="777240" y="932688"/>
-            <a:ext cx="10637215" cy="914400"/>
+            <a:off x="777240" y="868680"/>
+            <a:ext cx="10637215" cy="822960"/>
           </a:xfrm>
           <a:prstGeom prst="rect">
             <a:avLst/>
@@ -4395,14 +4395,1829 @@
       </p:sp>
       <p:sp>
         <p:nvSpPr>
-          <p:cNvPr id="5" name="Rectangle 4"/>
+          <p:cNvPr id="5" name="Rounded Rectangle 4"/>
           <p:cNvSpPr/>
           <p:nvPr/>
         </p:nvSpPr>
         <p:spPr>
           <a:xfrm>
-            <a:off x="777240" y="2331720"/>
-            <a:ext cx="41148" cy="1737360"/>
+            <a:off x="777240" y="1783080"/>
+            <a:ext cx="6903720" cy="4480560"/>
+          </a:xfrm>
+          <a:prstGeom prst="roundRect">
+            <a:avLst>
+              <a:gd name="adj" fmla="val 4500"/>
+            </a:avLst>
+          </a:prstGeom>
+          <a:solidFill>
+            <a:srgbClr val="FFFFFF"/>
+          </a:solidFill>
+          <a:ln w="12700">
+            <a:solidFill>
+              <a:srgbClr val="E6DDDA"/>
+            </a:solidFill>
+          </a:ln>
+        </p:spPr>
+        <p:style>
+          <a:lnRef idx="1">
+            <a:schemeClr val="accent1"/>
+          </a:lnRef>
+          <a:fillRef idx="3">
+            <a:schemeClr val="accent1"/>
+          </a:fillRef>
+          <a:effectRef idx="2">
+            <a:schemeClr val="accent1"/>
+          </a:effectRef>
+          <a:fontRef idx="minor">
+            <a:schemeClr val="lt1"/>
+          </a:fontRef>
+        </p:style>
+        <p:txBody>
+          <a:bodyPr rtlCol="0" anchor="ctr"/>
+          <a:lstStyle/>
+          <a:p>
+            <a:pPr algn="ctr"/>
+          </a:p>
+        </p:txBody>
+      </p:sp>
+      <p:sp>
+        <p:nvSpPr>
+          <p:cNvPr id="6" name="TextBox 5"/>
+          <p:cNvSpPr txBox="1"/>
+          <p:nvPr/>
+        </p:nvSpPr>
+        <p:spPr>
+          <a:xfrm>
+            <a:off x="1033272" y="1911096"/>
+            <a:ext cx="6446520" cy="548640"/>
+          </a:xfrm>
+          <a:prstGeom prst="rect">
+            <a:avLst/>
+          </a:prstGeom>
+          <a:noFill/>
+        </p:spPr>
+        <p:txBody>
+          <a:bodyPr wrap="square">
+            <a:spAutoFit/>
+          </a:bodyPr>
+          <a:lstStyle/>
+          <a:p>
+            <a:pPr algn="l">
+              <a:spcAft>
+                <a:spcPts val="200"/>
+              </a:spcAft>
+            </a:pPr>
+            <a:r>
+              <a:rPr sz="1600" b="1">
+                <a:solidFill>
+                  <a:srgbClr val="1B1211"/>
+                </a:solidFill>
+                <a:latin typeface="Red Hat Display"/>
+              </a:rPr>
+              <a:t>A year of demand arrives in six weeks</a:t>
+            </a:r>
+          </a:p>
+          <a:p>
+            <a:pPr algn="l">
+              <a:spcAft>
+                <a:spcPts val="0"/>
+              </a:spcAft>
+            </a:pPr>
+            <a:r>
+              <a:rPr sz="1000" b="0">
+                <a:solidFill>
+                  <a:srgbClr val="7E6A64"/>
+                </a:solidFill>
+                <a:latin typeface="Red Hat Text"/>
+              </a:rPr>
+              <a:t>Taxpayer contacts per week — illustrative shape of a filing year</a:t>
+            </a:r>
+          </a:p>
+        </p:txBody>
+      </p:sp>
+      <p:cxnSp>
+        <p:nvCxnSpPr>
+          <p:cNvPr id="7" name="Connector 6"/>
+          <p:cNvCxnSpPr/>
+          <p:nvPr/>
+        </p:nvCxnSpPr>
+        <p:spPr>
+          <a:xfrm>
+            <a:off x="1188720" y="4828032"/>
+            <a:ext cx="6080760" cy="0"/>
+          </a:xfrm>
+          <a:prstGeom prst="line">
+            <a:avLst/>
+          </a:prstGeom>
+          <a:ln w="9525">
+            <a:solidFill>
+              <a:srgbClr val="E6DDDA"/>
+            </a:solidFill>
+          </a:ln>
+          <a:effectLst/>
+        </p:spPr>
+        <p:style>
+          <a:lnRef idx="2">
+            <a:schemeClr val="accent1"/>
+          </a:lnRef>
+          <a:fillRef idx="0">
+            <a:schemeClr val="accent1"/>
+          </a:fillRef>
+          <a:effectRef idx="1">
+            <a:schemeClr val="accent1"/>
+          </a:effectRef>
+          <a:fontRef idx="minor">
+            <a:schemeClr val="tx1"/>
+          </a:fontRef>
+        </p:style>
+      </p:cxnSp>
+      <p:cxnSp>
+        <p:nvCxnSpPr>
+          <p:cNvPr id="8" name="Connector 7"/>
+          <p:cNvCxnSpPr/>
+          <p:nvPr/>
+        </p:nvCxnSpPr>
+        <p:spPr>
+          <a:xfrm>
+            <a:off x="1188720" y="3273552"/>
+            <a:ext cx="6080760" cy="0"/>
+          </a:xfrm>
+          <a:prstGeom prst="line">
+            <a:avLst/>
+          </a:prstGeom>
+          <a:ln w="9525">
+            <a:solidFill>
+              <a:srgbClr val="E6DDDA"/>
+            </a:solidFill>
+          </a:ln>
+          <a:effectLst/>
+        </p:spPr>
+        <p:style>
+          <a:lnRef idx="2">
+            <a:schemeClr val="accent1"/>
+          </a:lnRef>
+          <a:fillRef idx="0">
+            <a:schemeClr val="accent1"/>
+          </a:fillRef>
+          <a:effectRef idx="1">
+            <a:schemeClr val="accent1"/>
+          </a:effectRef>
+          <a:fontRef idx="minor">
+            <a:schemeClr val="tx1"/>
+          </a:fontRef>
+        </p:style>
+      </p:cxnSp>
+      <p:cxnSp>
+        <p:nvCxnSpPr>
+          <p:cNvPr id="9" name="Connector 8"/>
+          <p:cNvCxnSpPr/>
+          <p:nvPr/>
+        </p:nvCxnSpPr>
+        <p:spPr>
+          <a:xfrm>
+            <a:off x="1188720" y="5760720"/>
+            <a:ext cx="6080760" cy="0"/>
+          </a:xfrm>
+          <a:prstGeom prst="line">
+            <a:avLst/>
+          </a:prstGeom>
+          <a:ln w="12700">
+            <a:solidFill>
+              <a:srgbClr val="CFC2BE"/>
+            </a:solidFill>
+          </a:ln>
+          <a:effectLst/>
+        </p:spPr>
+        <p:style>
+          <a:lnRef idx="2">
+            <a:schemeClr val="accent1"/>
+          </a:lnRef>
+          <a:fillRef idx="0">
+            <a:schemeClr val="accent1"/>
+          </a:fillRef>
+          <a:effectRef idx="1">
+            <a:schemeClr val="accent1"/>
+          </a:effectRef>
+          <a:fontRef idx="minor">
+            <a:schemeClr val="tx1"/>
+          </a:fontRef>
+        </p:style>
+      </p:cxnSp>
+      <p:sp>
+        <p:nvSpPr>
+          <p:cNvPr id="10" name="Freeform 9"/>
+          <p:cNvSpPr/>
+          <p:nvPr/>
+        </p:nvSpPr>
+        <p:spPr>
+          <a:xfrm>
+            <a:off x="1188720" y="2651760"/>
+            <a:ext cx="6080760" cy="3108960"/>
+          </a:xfrm>
+          <a:custGeom>
+            <a:avLst/>
+            <a:gdLst/>
+            <a:ahLst/>
+            <a:cxnLst/>
+            <a:rect l="l" t="t" r="r" b="b"/>
+            <a:pathLst>
+              <a:path w="6080760" h="3108960">
+                <a:moveTo>
+                  <a:pt x="0" y="2020824"/>
+                </a:moveTo>
+                <a:lnTo>
+                  <a:pt x="55279" y="2013215"/>
+                </a:lnTo>
+                <a:lnTo>
+                  <a:pt x="110559" y="1991136"/>
+                </a:lnTo>
+                <a:lnTo>
+                  <a:pt x="165838" y="1956746"/>
+                </a:lnTo>
+                <a:lnTo>
+                  <a:pt x="221118" y="1913412"/>
+                </a:lnTo>
+                <a:lnTo>
+                  <a:pt x="276398" y="1865376"/>
+                </a:lnTo>
+                <a:lnTo>
+                  <a:pt x="331677" y="1817339"/>
+                </a:lnTo>
+                <a:lnTo>
+                  <a:pt x="386957" y="1774005"/>
+                </a:lnTo>
+                <a:lnTo>
+                  <a:pt x="442237" y="1739615"/>
+                </a:lnTo>
+                <a:lnTo>
+                  <a:pt x="497516" y="1717536"/>
+                </a:lnTo>
+                <a:lnTo>
+                  <a:pt x="552796" y="1709928"/>
+                </a:lnTo>
+                <a:lnTo>
+                  <a:pt x="608076" y="1689385"/>
+                </a:lnTo>
+                <a:lnTo>
+                  <a:pt x="663355" y="1629770"/>
+                </a:lnTo>
+                <a:lnTo>
+                  <a:pt x="718635" y="1536917"/>
+                </a:lnTo>
+                <a:lnTo>
+                  <a:pt x="773914" y="1419915"/>
+                </a:lnTo>
+                <a:lnTo>
+                  <a:pt x="829194" y="1290218"/>
+                </a:lnTo>
+                <a:lnTo>
+                  <a:pt x="884474" y="1160521"/>
+                </a:lnTo>
+                <a:lnTo>
+                  <a:pt x="939753" y="1043519"/>
+                </a:lnTo>
+                <a:lnTo>
+                  <a:pt x="995033" y="950666"/>
+                </a:lnTo>
+                <a:lnTo>
+                  <a:pt x="1050313" y="891050"/>
+                </a:lnTo>
+                <a:lnTo>
+                  <a:pt x="1105592" y="870508"/>
+                </a:lnTo>
+                <a:lnTo>
+                  <a:pt x="1160872" y="849205"/>
+                </a:lnTo>
+                <a:lnTo>
+                  <a:pt x="1216152" y="787382"/>
+                </a:lnTo>
+                <a:lnTo>
+                  <a:pt x="1271431" y="691090"/>
+                </a:lnTo>
+                <a:lnTo>
+                  <a:pt x="1326711" y="569755"/>
+                </a:lnTo>
+                <a:lnTo>
+                  <a:pt x="1381990" y="435254"/>
+                </a:lnTo>
+                <a:lnTo>
+                  <a:pt x="1437270" y="300753"/>
+                </a:lnTo>
+                <a:lnTo>
+                  <a:pt x="1492550" y="179418"/>
+                </a:lnTo>
+                <a:lnTo>
+                  <a:pt x="1547829" y="83126"/>
+                </a:lnTo>
+                <a:lnTo>
+                  <a:pt x="1603109" y="21302"/>
+                </a:lnTo>
+                <a:lnTo>
+                  <a:pt x="1658389" y="0"/>
+                </a:lnTo>
+                <a:lnTo>
+                  <a:pt x="1713668" y="44127"/>
+                </a:lnTo>
+                <a:lnTo>
+                  <a:pt x="1768948" y="172189"/>
+                </a:lnTo>
+                <a:lnTo>
+                  <a:pt x="1824228" y="371652"/>
+                </a:lnTo>
+                <a:lnTo>
+                  <a:pt x="1879507" y="622989"/>
+                </a:lnTo>
+                <a:lnTo>
+                  <a:pt x="1934787" y="901598"/>
+                </a:lnTo>
+                <a:lnTo>
+                  <a:pt x="1990066" y="1180207"/>
+                </a:lnTo>
+                <a:lnTo>
+                  <a:pt x="2045346" y="1431544"/>
+                </a:lnTo>
+                <a:lnTo>
+                  <a:pt x="2100626" y="1631006"/>
+                </a:lnTo>
+                <a:lnTo>
+                  <a:pt x="2155905" y="1759069"/>
+                </a:lnTo>
+                <a:lnTo>
+                  <a:pt x="2211185" y="1803196"/>
+                </a:lnTo>
+                <a:lnTo>
+                  <a:pt x="2266465" y="1812326"/>
+                </a:lnTo>
+                <a:lnTo>
+                  <a:pt x="2321744" y="1838822"/>
+                </a:lnTo>
+                <a:lnTo>
+                  <a:pt x="2377024" y="1880090"/>
+                </a:lnTo>
+                <a:lnTo>
+                  <a:pt x="2432304" y="1932091"/>
+                </a:lnTo>
+                <a:lnTo>
+                  <a:pt x="2487583" y="1989734"/>
+                </a:lnTo>
+                <a:lnTo>
+                  <a:pt x="2542863" y="2047377"/>
+                </a:lnTo>
+                <a:lnTo>
+                  <a:pt x="2598142" y="2099378"/>
+                </a:lnTo>
+                <a:lnTo>
+                  <a:pt x="2653422" y="2140646"/>
+                </a:lnTo>
+                <a:lnTo>
+                  <a:pt x="2708702" y="2167142"/>
+                </a:lnTo>
+                <a:lnTo>
+                  <a:pt x="2763981" y="2176272"/>
+                </a:lnTo>
+                <a:lnTo>
+                  <a:pt x="2819261" y="2178554"/>
+                </a:lnTo>
+                <a:lnTo>
+                  <a:pt x="2874541" y="2185178"/>
+                </a:lnTo>
+                <a:lnTo>
+                  <a:pt x="2929820" y="2195495"/>
+                </a:lnTo>
+                <a:lnTo>
+                  <a:pt x="2985100" y="2208495"/>
+                </a:lnTo>
+                <a:lnTo>
+                  <a:pt x="3040380" y="2222906"/>
+                </a:lnTo>
+                <a:lnTo>
+                  <a:pt x="3095659" y="2237317"/>
+                </a:lnTo>
+                <a:lnTo>
+                  <a:pt x="3150939" y="2250317"/>
+                </a:lnTo>
+                <a:lnTo>
+                  <a:pt x="3206218" y="2260634"/>
+                </a:lnTo>
+                <a:lnTo>
+                  <a:pt x="3261498" y="2267258"/>
+                </a:lnTo>
+                <a:lnTo>
+                  <a:pt x="3316778" y="2269540"/>
+                </a:lnTo>
+                <a:lnTo>
+                  <a:pt x="3372057" y="2271062"/>
+                </a:lnTo>
+                <a:lnTo>
+                  <a:pt x="3427337" y="2275478"/>
+                </a:lnTo>
+                <a:lnTo>
+                  <a:pt x="3482617" y="2282356"/>
+                </a:lnTo>
+                <a:lnTo>
+                  <a:pt x="3537896" y="2291023"/>
+                </a:lnTo>
+                <a:lnTo>
+                  <a:pt x="3593176" y="2300630"/>
+                </a:lnTo>
+                <a:lnTo>
+                  <a:pt x="3648456" y="2310237"/>
+                </a:lnTo>
+                <a:lnTo>
+                  <a:pt x="3703735" y="2318904"/>
+                </a:lnTo>
+                <a:lnTo>
+                  <a:pt x="3759015" y="2325782"/>
+                </a:lnTo>
+                <a:lnTo>
+                  <a:pt x="3814294" y="2330198"/>
+                </a:lnTo>
+                <a:lnTo>
+                  <a:pt x="3869574" y="2331720"/>
+                </a:lnTo>
+                <a:lnTo>
+                  <a:pt x="3924854" y="2327915"/>
+                </a:lnTo>
+                <a:lnTo>
+                  <a:pt x="3980133" y="2316876"/>
+                </a:lnTo>
+                <a:lnTo>
+                  <a:pt x="4035413" y="2299681"/>
+                </a:lnTo>
+                <a:lnTo>
+                  <a:pt x="4090693" y="2278014"/>
+                </a:lnTo>
+                <a:lnTo>
+                  <a:pt x="4145972" y="2253996"/>
+                </a:lnTo>
+                <a:lnTo>
+                  <a:pt x="4201252" y="2229977"/>
+                </a:lnTo>
+                <a:lnTo>
+                  <a:pt x="4256532" y="2208310"/>
+                </a:lnTo>
+                <a:lnTo>
+                  <a:pt x="4311811" y="2191115"/>
+                </a:lnTo>
+                <a:lnTo>
+                  <a:pt x="4367091" y="2180076"/>
+                </a:lnTo>
+                <a:lnTo>
+                  <a:pt x="4422370" y="2176272"/>
+                </a:lnTo>
+                <a:lnTo>
+                  <a:pt x="4477650" y="2157251"/>
+                </a:lnTo>
+                <a:lnTo>
+                  <a:pt x="4532930" y="2102052"/>
+                </a:lnTo>
+                <a:lnTo>
+                  <a:pt x="4588209" y="2016077"/>
+                </a:lnTo>
+                <a:lnTo>
+                  <a:pt x="4643489" y="1907742"/>
+                </a:lnTo>
+                <a:lnTo>
+                  <a:pt x="4698769" y="1787652"/>
+                </a:lnTo>
+                <a:lnTo>
+                  <a:pt x="4754048" y="1667561"/>
+                </a:lnTo>
+                <a:lnTo>
+                  <a:pt x="4809328" y="1559226"/>
+                </a:lnTo>
+                <a:lnTo>
+                  <a:pt x="4864608" y="1473251"/>
+                </a:lnTo>
+                <a:lnTo>
+                  <a:pt x="4919887" y="1418052"/>
+                </a:lnTo>
+                <a:lnTo>
+                  <a:pt x="4975167" y="1399032"/>
+                </a:lnTo>
+                <a:lnTo>
+                  <a:pt x="5030446" y="1419574"/>
+                </a:lnTo>
+                <a:lnTo>
+                  <a:pt x="5085726" y="1479189"/>
+                </a:lnTo>
+                <a:lnTo>
+                  <a:pt x="5141006" y="1572042"/>
+                </a:lnTo>
+                <a:lnTo>
+                  <a:pt x="5196285" y="1689044"/>
+                </a:lnTo>
+                <a:lnTo>
+                  <a:pt x="5251565" y="1818741"/>
+                </a:lnTo>
+                <a:lnTo>
+                  <a:pt x="5306845" y="1948438"/>
+                </a:lnTo>
+                <a:lnTo>
+                  <a:pt x="5362124" y="2065440"/>
+                </a:lnTo>
+                <a:lnTo>
+                  <a:pt x="5417404" y="2158293"/>
+                </a:lnTo>
+                <a:lnTo>
+                  <a:pt x="5472684" y="2217909"/>
+                </a:lnTo>
+                <a:lnTo>
+                  <a:pt x="5527963" y="2238451"/>
+                </a:lnTo>
+                <a:lnTo>
+                  <a:pt x="5583243" y="2235407"/>
+                </a:lnTo>
+                <a:lnTo>
+                  <a:pt x="5638522" y="2226576"/>
+                </a:lnTo>
+                <a:lnTo>
+                  <a:pt x="5693802" y="2212820"/>
+                </a:lnTo>
+                <a:lnTo>
+                  <a:pt x="5749082" y="2195486"/>
+                </a:lnTo>
+                <a:lnTo>
+                  <a:pt x="5804361" y="2176272"/>
+                </a:lnTo>
+                <a:lnTo>
+                  <a:pt x="5859641" y="2157057"/>
+                </a:lnTo>
+                <a:lnTo>
+                  <a:pt x="5914921" y="2139723"/>
+                </a:lnTo>
+                <a:lnTo>
+                  <a:pt x="5970200" y="2125967"/>
+                </a:lnTo>
+                <a:lnTo>
+                  <a:pt x="6025480" y="2117136"/>
+                </a:lnTo>
+                <a:lnTo>
+                  <a:pt x="6080760" y="2114092"/>
+                </a:lnTo>
+                <a:lnTo>
+                  <a:pt x="6080760" y="3108960"/>
+                </a:lnTo>
+                <a:lnTo>
+                  <a:pt x="0" y="3108960"/>
+                </a:lnTo>
+                <a:close/>
+              </a:path>
+            </a:pathLst>
+          </a:custGeom>
+          <a:solidFill>
+            <a:srgbClr val="F6CDC8"/>
+          </a:solidFill>
+          <a:ln>
+            <a:noFill/>
+          </a:ln>
+          <a:effectLst/>
+        </p:spPr>
+        <p:style>
+          <a:lnRef idx="1">
+            <a:schemeClr val="accent1"/>
+          </a:lnRef>
+          <a:fillRef idx="3">
+            <a:schemeClr val="accent1"/>
+          </a:fillRef>
+          <a:effectRef idx="2">
+            <a:schemeClr val="accent1"/>
+          </a:effectRef>
+          <a:fontRef idx="minor">
+            <a:schemeClr val="lt1"/>
+          </a:fontRef>
+        </p:style>
+        <p:txBody>
+          <a:bodyPr rtlCol="0" anchor="ctr"/>
+          <a:lstStyle/>
+          <a:p>
+            <a:pPr algn="ctr"/>
+          </a:p>
+        </p:txBody>
+      </p:sp>
+      <p:sp>
+        <p:nvSpPr>
+          <p:cNvPr id="11" name="Freeform 10"/>
+          <p:cNvSpPr/>
+          <p:nvPr/>
+        </p:nvSpPr>
+        <p:spPr>
+          <a:xfrm>
+            <a:off x="2073194" y="2651760"/>
+            <a:ext cx="1105592" cy="1181404"/>
+          </a:xfrm>
+          <a:custGeom>
+            <a:avLst/>
+            <a:gdLst/>
+            <a:ahLst/>
+            <a:cxnLst/>
+            <a:rect l="l" t="t" r="r" b="b"/>
+            <a:pathLst>
+              <a:path w="1105592" h="1181404">
+                <a:moveTo>
+                  <a:pt x="0" y="1181404"/>
+                </a:moveTo>
+                <a:lnTo>
+                  <a:pt x="0" y="1160521"/>
+                </a:lnTo>
+                <a:lnTo>
+                  <a:pt x="55279" y="1043519"/>
+                </a:lnTo>
+                <a:lnTo>
+                  <a:pt x="110559" y="950666"/>
+                </a:lnTo>
+                <a:lnTo>
+                  <a:pt x="165839" y="891050"/>
+                </a:lnTo>
+                <a:lnTo>
+                  <a:pt x="221118" y="870508"/>
+                </a:lnTo>
+                <a:lnTo>
+                  <a:pt x="276398" y="849205"/>
+                </a:lnTo>
+                <a:lnTo>
+                  <a:pt x="331678" y="787382"/>
+                </a:lnTo>
+                <a:lnTo>
+                  <a:pt x="386957" y="691090"/>
+                </a:lnTo>
+                <a:lnTo>
+                  <a:pt x="442237" y="569755"/>
+                </a:lnTo>
+                <a:lnTo>
+                  <a:pt x="497516" y="435254"/>
+                </a:lnTo>
+                <a:lnTo>
+                  <a:pt x="552796" y="300753"/>
+                </a:lnTo>
+                <a:lnTo>
+                  <a:pt x="608076" y="179418"/>
+                </a:lnTo>
+                <a:lnTo>
+                  <a:pt x="663355" y="83126"/>
+                </a:lnTo>
+                <a:lnTo>
+                  <a:pt x="718635" y="21302"/>
+                </a:lnTo>
+                <a:lnTo>
+                  <a:pt x="773915" y="0"/>
+                </a:lnTo>
+                <a:lnTo>
+                  <a:pt x="829194" y="44127"/>
+                </a:lnTo>
+                <a:lnTo>
+                  <a:pt x="884474" y="172189"/>
+                </a:lnTo>
+                <a:lnTo>
+                  <a:pt x="939754" y="371652"/>
+                </a:lnTo>
+                <a:lnTo>
+                  <a:pt x="995033" y="622989"/>
+                </a:lnTo>
+                <a:lnTo>
+                  <a:pt x="1050313" y="901598"/>
+                </a:lnTo>
+                <a:lnTo>
+                  <a:pt x="1105592" y="1180207"/>
+                </a:lnTo>
+                <a:lnTo>
+                  <a:pt x="1105592" y="1181404"/>
+                </a:lnTo>
+                <a:close/>
+              </a:path>
+            </a:pathLst>
+          </a:custGeom>
+          <a:solidFill>
+            <a:srgbClr val="EDA79F"/>
+          </a:solidFill>
+          <a:ln>
+            <a:noFill/>
+          </a:ln>
+          <a:effectLst/>
+        </p:spPr>
+        <p:style>
+          <a:lnRef idx="1">
+            <a:schemeClr val="accent1"/>
+          </a:lnRef>
+          <a:fillRef idx="3">
+            <a:schemeClr val="accent1"/>
+          </a:fillRef>
+          <a:effectRef idx="2">
+            <a:schemeClr val="accent1"/>
+          </a:effectRef>
+          <a:fontRef idx="minor">
+            <a:schemeClr val="lt1"/>
+          </a:fontRef>
+        </p:style>
+        <p:txBody>
+          <a:bodyPr rtlCol="0" anchor="ctr"/>
+          <a:lstStyle/>
+          <a:p>
+            <a:pPr algn="ctr"/>
+          </a:p>
+        </p:txBody>
+      </p:sp>
+      <p:sp>
+        <p:nvSpPr>
+          <p:cNvPr id="12" name="Freeform 11"/>
+          <p:cNvSpPr/>
+          <p:nvPr/>
+        </p:nvSpPr>
+        <p:spPr>
+          <a:xfrm>
+            <a:off x="1188720" y="2651760"/>
+            <a:ext cx="6080760" cy="2331720"/>
+          </a:xfrm>
+          <a:custGeom>
+            <a:avLst/>
+            <a:gdLst/>
+            <a:ahLst/>
+            <a:cxnLst/>
+            <a:rect l="l" t="t" r="r" b="b"/>
+            <a:pathLst>
+              <a:path w="6080760" h="2331720">
+                <a:moveTo>
+                  <a:pt x="0" y="2020824"/>
+                </a:moveTo>
+                <a:lnTo>
+                  <a:pt x="55279" y="2013215"/>
+                </a:lnTo>
+                <a:lnTo>
+                  <a:pt x="110559" y="1991136"/>
+                </a:lnTo>
+                <a:lnTo>
+                  <a:pt x="165838" y="1956746"/>
+                </a:lnTo>
+                <a:lnTo>
+                  <a:pt x="221118" y="1913412"/>
+                </a:lnTo>
+                <a:lnTo>
+                  <a:pt x="276398" y="1865376"/>
+                </a:lnTo>
+                <a:lnTo>
+                  <a:pt x="331677" y="1817339"/>
+                </a:lnTo>
+                <a:lnTo>
+                  <a:pt x="386957" y="1774005"/>
+                </a:lnTo>
+                <a:lnTo>
+                  <a:pt x="442237" y="1739615"/>
+                </a:lnTo>
+                <a:lnTo>
+                  <a:pt x="497516" y="1717536"/>
+                </a:lnTo>
+                <a:lnTo>
+                  <a:pt x="552796" y="1709928"/>
+                </a:lnTo>
+                <a:lnTo>
+                  <a:pt x="608076" y="1689385"/>
+                </a:lnTo>
+                <a:lnTo>
+                  <a:pt x="663355" y="1629770"/>
+                </a:lnTo>
+                <a:lnTo>
+                  <a:pt x="718635" y="1536917"/>
+                </a:lnTo>
+                <a:lnTo>
+                  <a:pt x="773914" y="1419915"/>
+                </a:lnTo>
+                <a:lnTo>
+                  <a:pt x="829194" y="1290218"/>
+                </a:lnTo>
+                <a:lnTo>
+                  <a:pt x="884474" y="1160521"/>
+                </a:lnTo>
+                <a:lnTo>
+                  <a:pt x="939753" y="1043519"/>
+                </a:lnTo>
+                <a:lnTo>
+                  <a:pt x="995033" y="950666"/>
+                </a:lnTo>
+                <a:lnTo>
+                  <a:pt x="1050313" y="891050"/>
+                </a:lnTo>
+                <a:lnTo>
+                  <a:pt x="1105592" y="870508"/>
+                </a:lnTo>
+                <a:lnTo>
+                  <a:pt x="1160872" y="849205"/>
+                </a:lnTo>
+                <a:lnTo>
+                  <a:pt x="1216152" y="787382"/>
+                </a:lnTo>
+                <a:lnTo>
+                  <a:pt x="1271431" y="691090"/>
+                </a:lnTo>
+                <a:lnTo>
+                  <a:pt x="1326711" y="569755"/>
+                </a:lnTo>
+                <a:lnTo>
+                  <a:pt x="1381990" y="435254"/>
+                </a:lnTo>
+                <a:lnTo>
+                  <a:pt x="1437270" y="300753"/>
+                </a:lnTo>
+                <a:lnTo>
+                  <a:pt x="1492550" y="179418"/>
+                </a:lnTo>
+                <a:lnTo>
+                  <a:pt x="1547829" y="83126"/>
+                </a:lnTo>
+                <a:lnTo>
+                  <a:pt x="1603109" y="21302"/>
+                </a:lnTo>
+                <a:lnTo>
+                  <a:pt x="1658389" y="0"/>
+                </a:lnTo>
+                <a:lnTo>
+                  <a:pt x="1713668" y="44127"/>
+                </a:lnTo>
+                <a:lnTo>
+                  <a:pt x="1768948" y="172189"/>
+                </a:lnTo>
+                <a:lnTo>
+                  <a:pt x="1824228" y="371652"/>
+                </a:lnTo>
+                <a:lnTo>
+                  <a:pt x="1879507" y="622989"/>
+                </a:lnTo>
+                <a:lnTo>
+                  <a:pt x="1934787" y="901598"/>
+                </a:lnTo>
+                <a:lnTo>
+                  <a:pt x="1990066" y="1180207"/>
+                </a:lnTo>
+                <a:lnTo>
+                  <a:pt x="2045346" y="1431544"/>
+                </a:lnTo>
+                <a:lnTo>
+                  <a:pt x="2100626" y="1631006"/>
+                </a:lnTo>
+                <a:lnTo>
+                  <a:pt x="2155905" y="1759069"/>
+                </a:lnTo>
+                <a:lnTo>
+                  <a:pt x="2211185" y="1803196"/>
+                </a:lnTo>
+                <a:lnTo>
+                  <a:pt x="2266465" y="1812326"/>
+                </a:lnTo>
+                <a:lnTo>
+                  <a:pt x="2321744" y="1838822"/>
+                </a:lnTo>
+                <a:lnTo>
+                  <a:pt x="2377024" y="1880090"/>
+                </a:lnTo>
+                <a:lnTo>
+                  <a:pt x="2432304" y="1932091"/>
+                </a:lnTo>
+                <a:lnTo>
+                  <a:pt x="2487583" y="1989734"/>
+                </a:lnTo>
+                <a:lnTo>
+                  <a:pt x="2542863" y="2047377"/>
+                </a:lnTo>
+                <a:lnTo>
+                  <a:pt x="2598142" y="2099378"/>
+                </a:lnTo>
+                <a:lnTo>
+                  <a:pt x="2653422" y="2140646"/>
+                </a:lnTo>
+                <a:lnTo>
+                  <a:pt x="2708702" y="2167142"/>
+                </a:lnTo>
+                <a:lnTo>
+                  <a:pt x="2763981" y="2176272"/>
+                </a:lnTo>
+                <a:lnTo>
+                  <a:pt x="2819261" y="2178554"/>
+                </a:lnTo>
+                <a:lnTo>
+                  <a:pt x="2874541" y="2185178"/>
+                </a:lnTo>
+                <a:lnTo>
+                  <a:pt x="2929820" y="2195495"/>
+                </a:lnTo>
+                <a:lnTo>
+                  <a:pt x="2985100" y="2208495"/>
+                </a:lnTo>
+                <a:lnTo>
+                  <a:pt x="3040380" y="2222906"/>
+                </a:lnTo>
+                <a:lnTo>
+                  <a:pt x="3095659" y="2237317"/>
+                </a:lnTo>
+                <a:lnTo>
+                  <a:pt x="3150939" y="2250317"/>
+                </a:lnTo>
+                <a:lnTo>
+                  <a:pt x="3206218" y="2260634"/>
+                </a:lnTo>
+                <a:lnTo>
+                  <a:pt x="3261498" y="2267258"/>
+                </a:lnTo>
+                <a:lnTo>
+                  <a:pt x="3316778" y="2269540"/>
+                </a:lnTo>
+                <a:lnTo>
+                  <a:pt x="3372057" y="2271062"/>
+                </a:lnTo>
+                <a:lnTo>
+                  <a:pt x="3427337" y="2275478"/>
+                </a:lnTo>
+                <a:lnTo>
+                  <a:pt x="3482617" y="2282356"/>
+                </a:lnTo>
+                <a:lnTo>
+                  <a:pt x="3537896" y="2291023"/>
+                </a:lnTo>
+                <a:lnTo>
+                  <a:pt x="3593176" y="2300630"/>
+                </a:lnTo>
+                <a:lnTo>
+                  <a:pt x="3648456" y="2310237"/>
+                </a:lnTo>
+                <a:lnTo>
+                  <a:pt x="3703735" y="2318904"/>
+                </a:lnTo>
+                <a:lnTo>
+                  <a:pt x="3759015" y="2325782"/>
+                </a:lnTo>
+                <a:lnTo>
+                  <a:pt x="3814294" y="2330198"/>
+                </a:lnTo>
+                <a:lnTo>
+                  <a:pt x="3869574" y="2331720"/>
+                </a:lnTo>
+                <a:lnTo>
+                  <a:pt x="3924854" y="2327915"/>
+                </a:lnTo>
+                <a:lnTo>
+                  <a:pt x="3980133" y="2316876"/>
+                </a:lnTo>
+                <a:lnTo>
+                  <a:pt x="4035413" y="2299681"/>
+                </a:lnTo>
+                <a:lnTo>
+                  <a:pt x="4090693" y="2278014"/>
+                </a:lnTo>
+                <a:lnTo>
+                  <a:pt x="4145972" y="2253996"/>
+                </a:lnTo>
+                <a:lnTo>
+                  <a:pt x="4201252" y="2229977"/>
+                </a:lnTo>
+                <a:lnTo>
+                  <a:pt x="4256532" y="2208310"/>
+                </a:lnTo>
+                <a:lnTo>
+                  <a:pt x="4311811" y="2191115"/>
+                </a:lnTo>
+                <a:lnTo>
+                  <a:pt x="4367091" y="2180076"/>
+                </a:lnTo>
+                <a:lnTo>
+                  <a:pt x="4422370" y="2176272"/>
+                </a:lnTo>
+                <a:lnTo>
+                  <a:pt x="4477650" y="2157251"/>
+                </a:lnTo>
+                <a:lnTo>
+                  <a:pt x="4532930" y="2102052"/>
+                </a:lnTo>
+                <a:lnTo>
+                  <a:pt x="4588209" y="2016077"/>
+                </a:lnTo>
+                <a:lnTo>
+                  <a:pt x="4643489" y="1907742"/>
+                </a:lnTo>
+                <a:lnTo>
+                  <a:pt x="4698769" y="1787652"/>
+                </a:lnTo>
+                <a:lnTo>
+                  <a:pt x="4754048" y="1667561"/>
+                </a:lnTo>
+                <a:lnTo>
+                  <a:pt x="4809328" y="1559226"/>
+                </a:lnTo>
+                <a:lnTo>
+                  <a:pt x="4864608" y="1473251"/>
+                </a:lnTo>
+                <a:lnTo>
+                  <a:pt x="4919887" y="1418052"/>
+                </a:lnTo>
+                <a:lnTo>
+                  <a:pt x="4975167" y="1399032"/>
+                </a:lnTo>
+                <a:lnTo>
+                  <a:pt x="5030446" y="1419574"/>
+                </a:lnTo>
+                <a:lnTo>
+                  <a:pt x="5085726" y="1479189"/>
+                </a:lnTo>
+                <a:lnTo>
+                  <a:pt x="5141006" y="1572042"/>
+                </a:lnTo>
+                <a:lnTo>
+                  <a:pt x="5196285" y="1689044"/>
+                </a:lnTo>
+                <a:lnTo>
+                  <a:pt x="5251565" y="1818741"/>
+                </a:lnTo>
+                <a:lnTo>
+                  <a:pt x="5306845" y="1948438"/>
+                </a:lnTo>
+                <a:lnTo>
+                  <a:pt x="5362124" y="2065440"/>
+                </a:lnTo>
+                <a:lnTo>
+                  <a:pt x="5417404" y="2158293"/>
+                </a:lnTo>
+                <a:lnTo>
+                  <a:pt x="5472684" y="2217909"/>
+                </a:lnTo>
+                <a:lnTo>
+                  <a:pt x="5527963" y="2238451"/>
+                </a:lnTo>
+                <a:lnTo>
+                  <a:pt x="5583243" y="2235407"/>
+                </a:lnTo>
+                <a:lnTo>
+                  <a:pt x="5638522" y="2226576"/>
+                </a:lnTo>
+                <a:lnTo>
+                  <a:pt x="5693802" y="2212820"/>
+                </a:lnTo>
+                <a:lnTo>
+                  <a:pt x="5749082" y="2195486"/>
+                </a:lnTo>
+                <a:lnTo>
+                  <a:pt x="5804361" y="2176272"/>
+                </a:lnTo>
+                <a:lnTo>
+                  <a:pt x="5859641" y="2157057"/>
+                </a:lnTo>
+                <a:lnTo>
+                  <a:pt x="5914921" y="2139723"/>
+                </a:lnTo>
+                <a:lnTo>
+                  <a:pt x="5970200" y="2125967"/>
+                </a:lnTo>
+                <a:lnTo>
+                  <a:pt x="6025480" y="2117136"/>
+                </a:lnTo>
+                <a:lnTo>
+                  <a:pt x="6080760" y="2114092"/>
+                </a:lnTo>
+              </a:path>
+            </a:pathLst>
+          </a:custGeom>
+          <a:noFill/>
+          <a:ln w="31750">
+            <a:solidFill>
+              <a:srgbClr val="CC0000"/>
+            </a:solidFill>
+          </a:ln>
+          <a:effectLst/>
+        </p:spPr>
+        <p:style>
+          <a:lnRef idx="1">
+            <a:schemeClr val="accent1"/>
+          </a:lnRef>
+          <a:fillRef idx="3">
+            <a:schemeClr val="accent1"/>
+          </a:fillRef>
+          <a:effectRef idx="2">
+            <a:schemeClr val="accent1"/>
+          </a:effectRef>
+          <a:fontRef idx="minor">
+            <a:schemeClr val="lt1"/>
+          </a:fontRef>
+        </p:style>
+        <p:txBody>
+          <a:bodyPr rtlCol="0" anchor="ctr"/>
+          <a:lstStyle/>
+          <a:p>
+            <a:pPr algn="ctr"/>
+          </a:p>
+        </p:txBody>
+      </p:sp>
+      <p:cxnSp>
+        <p:nvCxnSpPr>
+          <p:cNvPr id="13" name="Connector 12"/>
+          <p:cNvCxnSpPr/>
+          <p:nvPr/>
+        </p:nvCxnSpPr>
+        <p:spPr>
+          <a:xfrm>
+            <a:off x="1188720" y="3833164"/>
+            <a:ext cx="6080760" cy="0"/>
+          </a:xfrm>
+          <a:prstGeom prst="line">
+            <a:avLst/>
+          </a:prstGeom>
+          <a:ln w="22225">
+            <a:solidFill>
+              <a:srgbClr val="54423E"/>
+            </a:solidFill>
+          </a:ln>
+          <a:effectLst/>
+        </p:spPr>
+        <p:style>
+          <a:lnRef idx="2">
+            <a:schemeClr val="accent1"/>
+          </a:lnRef>
+          <a:fillRef idx="0">
+            <a:schemeClr val="accent1"/>
+          </a:fillRef>
+          <a:effectRef idx="1">
+            <a:schemeClr val="accent1"/>
+          </a:effectRef>
+          <a:fontRef idx="minor">
+            <a:schemeClr val="tx1"/>
+          </a:fontRef>
+        </p:style>
+      </p:cxnSp>
+      <p:sp>
+        <p:nvSpPr>
+          <p:cNvPr id="14" name="Oval 13"/>
+          <p:cNvSpPr/>
+          <p:nvPr/>
+        </p:nvSpPr>
+        <p:spPr>
+          <a:xfrm>
+            <a:off x="2796309" y="2600960"/>
+            <a:ext cx="101600" cy="101600"/>
+          </a:xfrm>
+          <a:prstGeom prst="ellipse">
+            <a:avLst/>
+          </a:prstGeom>
+          <a:solidFill>
+            <a:srgbClr val="CC0000"/>
+          </a:solidFill>
+          <a:ln w="19050">
+            <a:solidFill>
+              <a:srgbClr val="FFFFFF"/>
+            </a:solidFill>
+          </a:ln>
+          <a:effectLst/>
+        </p:spPr>
+        <p:style>
+          <a:lnRef idx="1">
+            <a:schemeClr val="accent1"/>
+          </a:lnRef>
+          <a:fillRef idx="3">
+            <a:schemeClr val="accent1"/>
+          </a:fillRef>
+          <a:effectRef idx="2">
+            <a:schemeClr val="accent1"/>
+          </a:effectRef>
+          <a:fontRef idx="minor">
+            <a:schemeClr val="lt1"/>
+          </a:fontRef>
+        </p:style>
+        <p:txBody>
+          <a:bodyPr rtlCol="0" anchor="ctr"/>
+          <a:lstStyle/>
+          <a:p>
+            <a:pPr algn="ctr"/>
+          </a:p>
+        </p:txBody>
+      </p:sp>
+      <p:sp>
+        <p:nvSpPr>
+          <p:cNvPr id="15" name="TextBox 14"/>
+          <p:cNvSpPr txBox="1"/>
+          <p:nvPr/>
+        </p:nvSpPr>
+        <p:spPr>
+          <a:xfrm>
+            <a:off x="3011701" y="2523744"/>
+            <a:ext cx="2926080" cy="274320"/>
+          </a:xfrm>
+          <a:prstGeom prst="rect">
+            <a:avLst/>
+          </a:prstGeom>
+          <a:noFill/>
+        </p:spPr>
+        <p:txBody>
+          <a:bodyPr wrap="square">
+            <a:spAutoFit/>
+          </a:bodyPr>
+          <a:lstStyle/>
+          <a:p>
+            <a:pPr algn="l">
+              <a:spcAft>
+                <a:spcPts val="0"/>
+              </a:spcAft>
+            </a:pPr>
+            <a:r>
+              <a:rPr sz="1250" b="1">
+                <a:solidFill>
+                  <a:srgbClr val="1B1211"/>
+                </a:solidFill>
+                <a:latin typeface="Red Hat Display"/>
+              </a:rPr>
+              <a:t>April — 6× the August low</a:t>
+            </a:r>
+          </a:p>
+        </p:txBody>
+      </p:sp>
+      <p:sp>
+        <p:nvSpPr>
+          <p:cNvPr id="16" name="TextBox 15"/>
+          <p:cNvSpPr txBox="1"/>
+          <p:nvPr/>
+        </p:nvSpPr>
+        <p:spPr>
+          <a:xfrm>
+            <a:off x="3350029" y="3273552"/>
+            <a:ext cx="2377440" cy="274320"/>
+          </a:xfrm>
+          <a:prstGeom prst="rect">
+            <a:avLst/>
+          </a:prstGeom>
+          <a:noFill/>
+        </p:spPr>
+        <p:txBody>
+          <a:bodyPr wrap="square">
+            <a:spAutoFit/>
+          </a:bodyPr>
+          <a:lstStyle/>
+          <a:p>
+            <a:pPr algn="l">
+              <a:spcAft>
+                <a:spcPts val="0"/>
+              </a:spcAft>
+            </a:pPr>
+            <a:r>
+              <a:rPr sz="1050" b="0">
+                <a:solidFill>
+                  <a:srgbClr val="54423E"/>
+                </a:solidFill>
+                <a:latin typeface="Red Hat Text"/>
+              </a:rPr>
+              <a:t>the surge automation absorbs</a:t>
+            </a:r>
+          </a:p>
+        </p:txBody>
+      </p:sp>
+      <p:sp>
+        <p:nvSpPr>
+          <p:cNvPr id="17" name="TextBox 16"/>
+          <p:cNvSpPr txBox="1"/>
+          <p:nvPr/>
+        </p:nvSpPr>
+        <p:spPr>
+          <a:xfrm>
+            <a:off x="5788152" y="3595420"/>
+            <a:ext cx="1463040" cy="219456"/>
+          </a:xfrm>
+          <a:prstGeom prst="rect">
+            <a:avLst/>
+          </a:prstGeom>
+          <a:noFill/>
+        </p:spPr>
+        <p:txBody>
+          <a:bodyPr wrap="square">
+            <a:spAutoFit/>
+          </a:bodyPr>
+          <a:lstStyle/>
+          <a:p>
+            <a:pPr algn="r">
+              <a:spcAft>
+                <a:spcPts val="0"/>
+              </a:spcAft>
+            </a:pPr>
+            <a:r>
+              <a:rPr sz="950" b="1">
+                <a:solidFill>
+                  <a:srgbClr val="54423E"/>
+                </a:solidFill>
+                <a:latin typeface="Red Hat Mono"/>
+              </a:rPr>
+              <a:t>staffed capacity</a:t>
+            </a:r>
+          </a:p>
+        </p:txBody>
+      </p:sp>
+      <p:sp>
+        <p:nvSpPr>
+          <p:cNvPr id="18" name="TextBox 17"/>
+          <p:cNvSpPr txBox="1"/>
+          <p:nvPr/>
+        </p:nvSpPr>
+        <p:spPr>
+          <a:xfrm>
+            <a:off x="5615247" y="3730752"/>
+            <a:ext cx="1463040" cy="219456"/>
+          </a:xfrm>
+          <a:prstGeom prst="rect">
+            <a:avLst/>
+          </a:prstGeom>
+          <a:noFill/>
+        </p:spPr>
+        <p:txBody>
+          <a:bodyPr wrap="square">
+            <a:spAutoFit/>
+          </a:bodyPr>
+          <a:lstStyle/>
+          <a:p>
+            <a:pPr algn="ctr">
+              <a:spcAft>
+                <a:spcPts val="0"/>
+              </a:spcAft>
+            </a:pPr>
+            <a:r>
+              <a:rPr sz="900" b="0">
+                <a:solidFill>
+                  <a:srgbClr val="7E6A64"/>
+                </a:solidFill>
+                <a:latin typeface="Red Hat Text"/>
+              </a:rPr>
+              <a:t>extension deadline</a:t>
+            </a:r>
+          </a:p>
+        </p:txBody>
+      </p:sp>
+      <p:sp>
+        <p:nvSpPr>
+          <p:cNvPr id="19" name="TextBox 18"/>
+          <p:cNvSpPr txBox="1"/>
+          <p:nvPr/>
+        </p:nvSpPr>
+        <p:spPr>
+          <a:xfrm>
+            <a:off x="1005840" y="5815584"/>
+            <a:ext cx="365760" cy="219456"/>
+          </a:xfrm>
+          <a:prstGeom prst="rect">
+            <a:avLst/>
+          </a:prstGeom>
+          <a:noFill/>
+        </p:spPr>
+        <p:txBody>
+          <a:bodyPr wrap="square">
+            <a:spAutoFit/>
+          </a:bodyPr>
+          <a:lstStyle/>
+          <a:p>
+            <a:pPr algn="ctr">
+              <a:spcAft>
+                <a:spcPts val="0"/>
+              </a:spcAft>
+            </a:pPr>
+            <a:r>
+              <a:rPr sz="900" b="0">
+                <a:solidFill>
+                  <a:srgbClr val="7E6A64"/>
+                </a:solidFill>
+                <a:latin typeface="Red Hat Mono"/>
+              </a:rPr>
+              <a:t>J</a:t>
+            </a:r>
+          </a:p>
+        </p:txBody>
+      </p:sp>
+      <p:sp>
+        <p:nvSpPr>
+          <p:cNvPr id="20" name="TextBox 19"/>
+          <p:cNvSpPr txBox="1"/>
+          <p:nvPr/>
+        </p:nvSpPr>
+        <p:spPr>
+          <a:xfrm>
+            <a:off x="1558636" y="5815584"/>
+            <a:ext cx="365760" cy="219456"/>
+          </a:xfrm>
+          <a:prstGeom prst="rect">
+            <a:avLst/>
+          </a:prstGeom>
+          <a:noFill/>
+        </p:spPr>
+        <p:txBody>
+          <a:bodyPr wrap="square">
+            <a:spAutoFit/>
+          </a:bodyPr>
+          <a:lstStyle/>
+          <a:p>
+            <a:pPr algn="ctr">
+              <a:spcAft>
+                <a:spcPts val="0"/>
+              </a:spcAft>
+            </a:pPr>
+            <a:r>
+              <a:rPr sz="900" b="0">
+                <a:solidFill>
+                  <a:srgbClr val="7E6A64"/>
+                </a:solidFill>
+                <a:latin typeface="Red Hat Mono"/>
+              </a:rPr>
+              <a:t>F</a:t>
+            </a:r>
+          </a:p>
+        </p:txBody>
+      </p:sp>
+      <p:sp>
+        <p:nvSpPr>
+          <p:cNvPr id="21" name="TextBox 20"/>
+          <p:cNvSpPr txBox="1"/>
+          <p:nvPr/>
+        </p:nvSpPr>
+        <p:spPr>
+          <a:xfrm>
+            <a:off x="2111432" y="5815584"/>
+            <a:ext cx="365760" cy="219456"/>
+          </a:xfrm>
+          <a:prstGeom prst="rect">
+            <a:avLst/>
+          </a:prstGeom>
+          <a:noFill/>
+        </p:spPr>
+        <p:txBody>
+          <a:bodyPr wrap="square">
+            <a:spAutoFit/>
+          </a:bodyPr>
+          <a:lstStyle/>
+          <a:p>
+            <a:pPr algn="ctr">
+              <a:spcAft>
+                <a:spcPts val="0"/>
+              </a:spcAft>
+            </a:pPr>
+            <a:r>
+              <a:rPr sz="900" b="0">
+                <a:solidFill>
+                  <a:srgbClr val="7E6A64"/>
+                </a:solidFill>
+                <a:latin typeface="Red Hat Mono"/>
+              </a:rPr>
+              <a:t>M</a:t>
+            </a:r>
+          </a:p>
+        </p:txBody>
+      </p:sp>
+      <p:sp>
+        <p:nvSpPr>
+          <p:cNvPr id="22" name="TextBox 21"/>
+          <p:cNvSpPr txBox="1"/>
+          <p:nvPr/>
+        </p:nvSpPr>
+        <p:spPr>
+          <a:xfrm>
+            <a:off x="2664229" y="5815584"/>
+            <a:ext cx="365760" cy="219456"/>
+          </a:xfrm>
+          <a:prstGeom prst="rect">
+            <a:avLst/>
+          </a:prstGeom>
+          <a:noFill/>
+        </p:spPr>
+        <p:txBody>
+          <a:bodyPr wrap="square">
+            <a:spAutoFit/>
+          </a:bodyPr>
+          <a:lstStyle/>
+          <a:p>
+            <a:pPr algn="ctr">
+              <a:spcAft>
+                <a:spcPts val="0"/>
+              </a:spcAft>
+            </a:pPr>
+            <a:r>
+              <a:rPr sz="900" b="0">
+                <a:solidFill>
+                  <a:srgbClr val="7E6A64"/>
+                </a:solidFill>
+                <a:latin typeface="Red Hat Mono"/>
+              </a:rPr>
+              <a:t>A</a:t>
+            </a:r>
+          </a:p>
+        </p:txBody>
+      </p:sp>
+      <p:sp>
+        <p:nvSpPr>
+          <p:cNvPr id="23" name="TextBox 22"/>
+          <p:cNvSpPr txBox="1"/>
+          <p:nvPr/>
+        </p:nvSpPr>
+        <p:spPr>
+          <a:xfrm>
+            <a:off x="3217025" y="5815584"/>
+            <a:ext cx="365760" cy="219456"/>
+          </a:xfrm>
+          <a:prstGeom prst="rect">
+            <a:avLst/>
+          </a:prstGeom>
+          <a:noFill/>
+        </p:spPr>
+        <p:txBody>
+          <a:bodyPr wrap="square">
+            <a:spAutoFit/>
+          </a:bodyPr>
+          <a:lstStyle/>
+          <a:p>
+            <a:pPr algn="ctr">
+              <a:spcAft>
+                <a:spcPts val="0"/>
+              </a:spcAft>
+            </a:pPr>
+            <a:r>
+              <a:rPr sz="900" b="0">
+                <a:solidFill>
+                  <a:srgbClr val="7E6A64"/>
+                </a:solidFill>
+                <a:latin typeface="Red Hat Mono"/>
+              </a:rPr>
+              <a:t>M</a:t>
+            </a:r>
+          </a:p>
+        </p:txBody>
+      </p:sp>
+      <p:sp>
+        <p:nvSpPr>
+          <p:cNvPr id="24" name="TextBox 23"/>
+          <p:cNvSpPr txBox="1"/>
+          <p:nvPr/>
+        </p:nvSpPr>
+        <p:spPr>
+          <a:xfrm>
+            <a:off x="3769821" y="5815584"/>
+            <a:ext cx="365760" cy="219456"/>
+          </a:xfrm>
+          <a:prstGeom prst="rect">
+            <a:avLst/>
+          </a:prstGeom>
+          <a:noFill/>
+        </p:spPr>
+        <p:txBody>
+          <a:bodyPr wrap="square">
+            <a:spAutoFit/>
+          </a:bodyPr>
+          <a:lstStyle/>
+          <a:p>
+            <a:pPr algn="ctr">
+              <a:spcAft>
+                <a:spcPts val="0"/>
+              </a:spcAft>
+            </a:pPr>
+            <a:r>
+              <a:rPr sz="900" b="0">
+                <a:solidFill>
+                  <a:srgbClr val="7E6A64"/>
+                </a:solidFill>
+                <a:latin typeface="Red Hat Mono"/>
+              </a:rPr>
+              <a:t>J</a:t>
+            </a:r>
+          </a:p>
+        </p:txBody>
+      </p:sp>
+      <p:sp>
+        <p:nvSpPr>
+          <p:cNvPr id="25" name="TextBox 24"/>
+          <p:cNvSpPr txBox="1"/>
+          <p:nvPr/>
+        </p:nvSpPr>
+        <p:spPr>
+          <a:xfrm>
+            <a:off x="4322618" y="5815584"/>
+            <a:ext cx="365760" cy="219456"/>
+          </a:xfrm>
+          <a:prstGeom prst="rect">
+            <a:avLst/>
+          </a:prstGeom>
+          <a:noFill/>
+        </p:spPr>
+        <p:txBody>
+          <a:bodyPr wrap="square">
+            <a:spAutoFit/>
+          </a:bodyPr>
+          <a:lstStyle/>
+          <a:p>
+            <a:pPr algn="ctr">
+              <a:spcAft>
+                <a:spcPts val="0"/>
+              </a:spcAft>
+            </a:pPr>
+            <a:r>
+              <a:rPr sz="900" b="0">
+                <a:solidFill>
+                  <a:srgbClr val="7E6A64"/>
+                </a:solidFill>
+                <a:latin typeface="Red Hat Mono"/>
+              </a:rPr>
+              <a:t>J</a:t>
+            </a:r>
+          </a:p>
+        </p:txBody>
+      </p:sp>
+      <p:sp>
+        <p:nvSpPr>
+          <p:cNvPr id="26" name="TextBox 25"/>
+          <p:cNvSpPr txBox="1"/>
+          <p:nvPr/>
+        </p:nvSpPr>
+        <p:spPr>
+          <a:xfrm>
+            <a:off x="4875414" y="5815584"/>
+            <a:ext cx="365760" cy="219456"/>
+          </a:xfrm>
+          <a:prstGeom prst="rect">
+            <a:avLst/>
+          </a:prstGeom>
+          <a:noFill/>
+        </p:spPr>
+        <p:txBody>
+          <a:bodyPr wrap="square">
+            <a:spAutoFit/>
+          </a:bodyPr>
+          <a:lstStyle/>
+          <a:p>
+            <a:pPr algn="ctr">
+              <a:spcAft>
+                <a:spcPts val="0"/>
+              </a:spcAft>
+            </a:pPr>
+            <a:r>
+              <a:rPr sz="900" b="0">
+                <a:solidFill>
+                  <a:srgbClr val="7E6A64"/>
+                </a:solidFill>
+                <a:latin typeface="Red Hat Mono"/>
+              </a:rPr>
+              <a:t>A</a:t>
+            </a:r>
+          </a:p>
+        </p:txBody>
+      </p:sp>
+      <p:sp>
+        <p:nvSpPr>
+          <p:cNvPr id="27" name="TextBox 26"/>
+          <p:cNvSpPr txBox="1"/>
+          <p:nvPr/>
+        </p:nvSpPr>
+        <p:spPr>
+          <a:xfrm>
+            <a:off x="5428210" y="5815584"/>
+            <a:ext cx="365760" cy="219456"/>
+          </a:xfrm>
+          <a:prstGeom prst="rect">
+            <a:avLst/>
+          </a:prstGeom>
+          <a:noFill/>
+        </p:spPr>
+        <p:txBody>
+          <a:bodyPr wrap="square">
+            <a:spAutoFit/>
+          </a:bodyPr>
+          <a:lstStyle/>
+          <a:p>
+            <a:pPr algn="ctr">
+              <a:spcAft>
+                <a:spcPts val="0"/>
+              </a:spcAft>
+            </a:pPr>
+            <a:r>
+              <a:rPr sz="900" b="0">
+                <a:solidFill>
+                  <a:srgbClr val="7E6A64"/>
+                </a:solidFill>
+                <a:latin typeface="Red Hat Mono"/>
+              </a:rPr>
+              <a:t>S</a:t>
+            </a:r>
+          </a:p>
+        </p:txBody>
+      </p:sp>
+      <p:sp>
+        <p:nvSpPr>
+          <p:cNvPr id="28" name="TextBox 27"/>
+          <p:cNvSpPr txBox="1"/>
+          <p:nvPr/>
+        </p:nvSpPr>
+        <p:spPr>
+          <a:xfrm>
+            <a:off x="5981007" y="5815584"/>
+            <a:ext cx="365760" cy="219456"/>
+          </a:xfrm>
+          <a:prstGeom prst="rect">
+            <a:avLst/>
+          </a:prstGeom>
+          <a:noFill/>
+        </p:spPr>
+        <p:txBody>
+          <a:bodyPr wrap="square">
+            <a:spAutoFit/>
+          </a:bodyPr>
+          <a:lstStyle/>
+          <a:p>
+            <a:pPr algn="ctr">
+              <a:spcAft>
+                <a:spcPts val="0"/>
+              </a:spcAft>
+            </a:pPr>
+            <a:r>
+              <a:rPr sz="900" b="0">
+                <a:solidFill>
+                  <a:srgbClr val="7E6A64"/>
+                </a:solidFill>
+                <a:latin typeface="Red Hat Mono"/>
+              </a:rPr>
+              <a:t>O</a:t>
+            </a:r>
+          </a:p>
+        </p:txBody>
+      </p:sp>
+      <p:sp>
+        <p:nvSpPr>
+          <p:cNvPr id="29" name="TextBox 28"/>
+          <p:cNvSpPr txBox="1"/>
+          <p:nvPr/>
+        </p:nvSpPr>
+        <p:spPr>
+          <a:xfrm>
+            <a:off x="6533803" y="5815584"/>
+            <a:ext cx="365760" cy="219456"/>
+          </a:xfrm>
+          <a:prstGeom prst="rect">
+            <a:avLst/>
+          </a:prstGeom>
+          <a:noFill/>
+        </p:spPr>
+        <p:txBody>
+          <a:bodyPr wrap="square">
+            <a:spAutoFit/>
+          </a:bodyPr>
+          <a:lstStyle/>
+          <a:p>
+            <a:pPr algn="ctr">
+              <a:spcAft>
+                <a:spcPts val="0"/>
+              </a:spcAft>
+            </a:pPr>
+            <a:r>
+              <a:rPr sz="900" b="0">
+                <a:solidFill>
+                  <a:srgbClr val="7E6A64"/>
+                </a:solidFill>
+                <a:latin typeface="Red Hat Mono"/>
+              </a:rPr>
+              <a:t>N</a:t>
+            </a:r>
+          </a:p>
+        </p:txBody>
+      </p:sp>
+      <p:sp>
+        <p:nvSpPr>
+          <p:cNvPr id="30" name="TextBox 29"/>
+          <p:cNvSpPr txBox="1"/>
+          <p:nvPr/>
+        </p:nvSpPr>
+        <p:spPr>
+          <a:xfrm>
+            <a:off x="7086600" y="5815584"/>
+            <a:ext cx="365760" cy="219456"/>
+          </a:xfrm>
+          <a:prstGeom prst="rect">
+            <a:avLst/>
+          </a:prstGeom>
+          <a:noFill/>
+        </p:spPr>
+        <p:txBody>
+          <a:bodyPr wrap="square">
+            <a:spAutoFit/>
+          </a:bodyPr>
+          <a:lstStyle/>
+          <a:p>
+            <a:pPr algn="ctr">
+              <a:spcAft>
+                <a:spcPts val="0"/>
+              </a:spcAft>
+            </a:pPr>
+            <a:r>
+              <a:rPr sz="900" b="0">
+                <a:solidFill>
+                  <a:srgbClr val="7E6A64"/>
+                </a:solidFill>
+                <a:latin typeface="Red Hat Mono"/>
+              </a:rPr>
+              <a:t>D</a:t>
+            </a:r>
+          </a:p>
+        </p:txBody>
+      </p:sp>
+      <p:sp>
+        <p:nvSpPr>
+          <p:cNvPr id="31" name="Rectangle 30"/>
+          <p:cNvSpPr/>
+          <p:nvPr/>
+        </p:nvSpPr>
+        <p:spPr>
+          <a:xfrm>
+            <a:off x="8001000" y="1783080"/>
+            <a:ext cx="41148" cy="960120"/>
           </a:xfrm>
           <a:prstGeom prst="rect">
             <a:avLst/>
@@ -4439,14 +6254,14 @@
       </p:sp>
       <p:sp>
         <p:nvSpPr>
-          <p:cNvPr id="6" name="TextBox 5"/>
+          <p:cNvPr id="32" name="TextBox 31"/>
           <p:cNvSpPr txBox="1"/>
           <p:nvPr/>
         </p:nvSpPr>
         <p:spPr>
           <a:xfrm>
-            <a:off x="941832" y="2331720"/>
-            <a:ext cx="3186074" cy="1737360"/>
+            <a:off x="8147304" y="1737360"/>
+            <a:ext cx="3419856" cy="960120"/>
           </a:xfrm>
           <a:prstGeom prst="rect">
             <a:avLst/>
@@ -4461,11 +6276,27 @@
           <a:p>
             <a:pPr algn="l">
               <a:spcAft>
-                <a:spcPts val="600"/>
+                <a:spcPts val="300"/>
               </a:spcAft>
             </a:pPr>
             <a:r>
-              <a:rPr sz="1500" b="1">
+              <a:rPr sz="850" b="1">
+                <a:solidFill>
+                  <a:srgbClr val="7E6A64"/>
+                </a:solidFill>
+                <a:latin typeface="Red Hat Mono"/>
+              </a:rPr>
+              <a:t>DEMAND</a:t>
+            </a:r>
+          </a:p>
+          <a:p>
+            <a:pPr algn="l">
+              <a:spcAft>
+                <a:spcPts val="300"/>
+              </a:spcAft>
+            </a:pPr>
+            <a:r>
+              <a:rPr sz="1300" b="1">
                 <a:solidFill>
                   <a:srgbClr val="1B1211"/>
                 </a:solidFill>
@@ -4481,27 +6312,27 @@
               </a:spcAft>
             </a:pPr>
             <a:r>
-              <a:rPr sz="1200" b="0">
+              <a:rPr sz="1000" b="0">
                 <a:solidFill>
                   <a:srgbClr val="54423E"/>
                 </a:solidFill>
                 <a:latin typeface="Red Hat Text"/>
               </a:rPr>
-              <a:t>Filing season concentrates a year of volume into weeks. Idle capacity in August cannot be justified; exhausted capacity in April becomes a headline.</a:t>
-            </a:r>
-          </a:p>
-        </p:txBody>
-      </p:sp>
-      <p:sp>
-        <p:nvSpPr>
-          <p:cNvPr id="7" name="Rectangle 6"/>
+              <a:t>Idle capacity in August is unjustifiable; exhausted capacity in April is a headline.</a:t>
+            </a:r>
+          </a:p>
+        </p:txBody>
+      </p:sp>
+      <p:sp>
+        <p:nvSpPr>
+          <p:cNvPr id="33" name="Rectangle 32"/>
           <p:cNvSpPr/>
           <p:nvPr/>
         </p:nvSpPr>
         <p:spPr>
           <a:xfrm>
-            <a:off x="4420514" y="2331720"/>
-            <a:ext cx="41148" cy="1737360"/>
+            <a:off x="8001000" y="2862072"/>
+            <a:ext cx="41148" cy="960120"/>
           </a:xfrm>
           <a:prstGeom prst="rect">
             <a:avLst/>
@@ -4538,14 +6369,14 @@
       </p:sp>
       <p:sp>
         <p:nvSpPr>
-          <p:cNvPr id="8" name="TextBox 7"/>
+          <p:cNvPr id="34" name="TextBox 33"/>
           <p:cNvSpPr txBox="1"/>
           <p:nvPr/>
         </p:nvSpPr>
         <p:spPr>
           <a:xfrm>
-            <a:off x="4585106" y="2331720"/>
-            <a:ext cx="3186074" cy="1737360"/>
+            <a:off x="8147304" y="2816352"/>
+            <a:ext cx="3419856" cy="960120"/>
           </a:xfrm>
           <a:prstGeom prst="rect">
             <a:avLst/>
@@ -4560,11 +6391,27 @@
           <a:p>
             <a:pPr algn="l">
               <a:spcAft>
-                <a:spcPts val="600"/>
+                <a:spcPts val="300"/>
               </a:spcAft>
             </a:pPr>
             <a:r>
-              <a:rPr sz="1500" b="1">
+              <a:rPr sz="850" b="1">
+                <a:solidFill>
+                  <a:srgbClr val="7E6A64"/>
+                </a:solidFill>
+                <a:latin typeface="Red Hat Mono"/>
+              </a:rPr>
+              <a:t>SYSTEMS</a:t>
+            </a:r>
+          </a:p>
+          <a:p>
+            <a:pPr algn="l">
+              <a:spcAft>
+                <a:spcPts val="300"/>
+              </a:spcAft>
+            </a:pPr>
+            <a:r>
+              <a:rPr sz="1300" b="1">
                 <a:solidFill>
                   <a:srgbClr val="1B1211"/>
                 </a:solidFill>
@@ -4580,27 +6427,27 @@
               </a:spcAft>
             </a:pPr>
             <a:r>
-              <a:rPr sz="1200" b="0">
+              <a:rPr sz="1000" b="0">
                 <a:solidFill>
                   <a:srgbClr val="54423E"/>
                 </a:solidFill>
                 <a:latin typeface="Red Hat Text"/>
               </a:rPr>
-              <a:t>Notice, eligibility and offset logic live in systems written decades ago. Rewriting them is a decade. Wrapping them is a quarter.</a:t>
-            </a:r>
-          </a:p>
-        </p:txBody>
-      </p:sp>
-      <p:sp>
-        <p:nvSpPr>
-          <p:cNvPr id="9" name="Rectangle 8"/>
+              <a:t>Rewriting the systems of record is a decade. Wrapping them is a quarter.</a:t>
+            </a:r>
+          </a:p>
+        </p:txBody>
+      </p:sp>
+      <p:sp>
+        <p:nvSpPr>
+          <p:cNvPr id="35" name="Rectangle 34"/>
           <p:cNvSpPr/>
           <p:nvPr/>
         </p:nvSpPr>
         <p:spPr>
           <a:xfrm>
-            <a:off x="8063788" y="2331720"/>
-            <a:ext cx="41148" cy="1737360"/>
+            <a:off x="8001000" y="3941063"/>
+            <a:ext cx="41148" cy="960120"/>
           </a:xfrm>
           <a:prstGeom prst="rect">
             <a:avLst/>
@@ -4637,14 +6484,14 @@
       </p:sp>
       <p:sp>
         <p:nvSpPr>
-          <p:cNvPr id="10" name="TextBox 9"/>
+          <p:cNvPr id="36" name="TextBox 35"/>
           <p:cNvSpPr txBox="1"/>
           <p:nvPr/>
         </p:nvSpPr>
         <p:spPr>
           <a:xfrm>
-            <a:off x="8228380" y="2331720"/>
-            <a:ext cx="3186074" cy="1737360"/>
+            <a:off x="8147304" y="3895343"/>
+            <a:ext cx="3419856" cy="960120"/>
           </a:xfrm>
           <a:prstGeom prst="rect">
             <a:avLst/>
@@ -4659,17 +6506,33 @@
           <a:p>
             <a:pPr algn="l">
               <a:spcAft>
-                <a:spcPts val="600"/>
+                <a:spcPts val="300"/>
               </a:spcAft>
             </a:pPr>
             <a:r>
-              <a:rPr sz="1500" b="1">
+              <a:rPr sz="850" b="1">
+                <a:solidFill>
+                  <a:srgbClr val="7E6A64"/>
+                </a:solidFill>
+                <a:latin typeface="Red Hat Mono"/>
+              </a:rPr>
+              <a:t>DATA</a:t>
+            </a:r>
+          </a:p>
+          <a:p>
+            <a:pPr algn="l">
+              <a:spcAft>
+                <a:spcPts val="300"/>
+              </a:spcAft>
+            </a:pPr>
+            <a:r>
+              <a:rPr sz="1300" b="1">
                 <a:solidFill>
                   <a:srgbClr val="1B1211"/>
                 </a:solidFill>
                 <a:latin typeface="Red Hat Display"/>
               </a:rPr>
-              <a:t>Answers are in the text</a:t>
+              <a:t>The answers are in the text</a:t>
             </a:r>
           </a:p>
           <a:p>
@@ -4679,27 +6542,71 @@
               </a:spcAft>
             </a:pPr>
             <a:r>
-              <a:rPr sz="1200" b="0">
+              <a:rPr sz="1000" b="0">
                 <a:solidFill>
                   <a:srgbClr val="54423E"/>
                 </a:solidFill>
                 <a:latin typeface="Red Hat Text"/>
               </a:rPr>
-              <a:t>Correspondence, transcripts and guidance are unstructured. Analytics never reached them; language models are built for them.</a:t>
-            </a:r>
-          </a:p>
-        </p:txBody>
-      </p:sp>
-      <p:sp>
-        <p:nvSpPr>
-          <p:cNvPr id="11" name="TextBox 10"/>
+              <a:t>Correspondence and case notes are unstructured — what language models are built for.</a:t>
+            </a:r>
+          </a:p>
+        </p:txBody>
+      </p:sp>
+      <p:sp>
+        <p:nvSpPr>
+          <p:cNvPr id="37" name="Rectangle 36"/>
+          <p:cNvSpPr/>
+          <p:nvPr/>
+        </p:nvSpPr>
+        <p:spPr>
+          <a:xfrm>
+            <a:off x="8001000" y="5020056"/>
+            <a:ext cx="41148" cy="1188720"/>
+          </a:xfrm>
+          <a:prstGeom prst="rect">
+            <a:avLst/>
+          </a:prstGeom>
+          <a:solidFill>
+            <a:srgbClr val="1E7A55"/>
+          </a:solidFill>
+          <a:ln>
+            <a:noFill/>
+          </a:ln>
+          <a:effectLst/>
+        </p:spPr>
+        <p:style>
+          <a:lnRef idx="1">
+            <a:schemeClr val="accent1"/>
+          </a:lnRef>
+          <a:fillRef idx="3">
+            <a:schemeClr val="accent1"/>
+          </a:fillRef>
+          <a:effectRef idx="2">
+            <a:schemeClr val="accent1"/>
+          </a:effectRef>
+          <a:fontRef idx="minor">
+            <a:schemeClr val="lt1"/>
+          </a:fontRef>
+        </p:style>
+        <p:txBody>
+          <a:bodyPr rtlCol="0" anchor="ctr"/>
+          <a:lstStyle/>
+          <a:p>
+            <a:pPr algn="ctr"/>
+          </a:p>
+        </p:txBody>
+      </p:sp>
+      <p:sp>
+        <p:nvSpPr>
+          <p:cNvPr id="38" name="TextBox 37"/>
           <p:cNvSpPr txBox="1"/>
           <p:nvPr/>
         </p:nvSpPr>
         <p:spPr>
           <a:xfrm>
-            <a:off x="777240" y="4572000"/>
-            <a:ext cx="10515600" cy="1280160"/>
+            <a:off x="8147304" y="4974336"/>
+            <a:ext cx="3419856" cy="1188720"/>
           </a:xfrm>
           <a:prstGeom prst="rect">
             <a:avLst/>
@@ -4714,17 +6621,33 @@
           <a:p>
             <a:pPr algn="l">
               <a:spcAft>
-                <a:spcPts val="800"/>
+                <a:spcPts val="300"/>
               </a:spcAft>
             </a:pPr>
             <a:r>
-              <a:rPr sz="1700" b="1">
+              <a:rPr sz="850" b="1">
+                <a:solidFill>
+                  <a:srgbClr val="7E6A64"/>
+                </a:solidFill>
+                <a:latin typeface="Red Hat Mono"/>
+              </a:rPr>
+              <a:t>THE CONSTRAINT</a:t>
+            </a:r>
+          </a:p>
+          <a:p>
+            <a:pPr algn="l">
+              <a:spcAft>
+                <a:spcPts val="300"/>
+              </a:spcAft>
+            </a:pPr>
+            <a:r>
+              <a:rPr sz="1300" b="1">
                 <a:solidFill>
                   <a:srgbClr val="1B1211"/>
                 </a:solidFill>
                 <a:latin typeface="Red Hat Display"/>
               </a:rPr>
-              <a:t>The constraint that decides the architecture</a:t>
+              <a:t>The data cannot leave</a:t>
             </a:r>
           </a:p>
           <a:p>
@@ -4734,13 +6657,13 @@
               </a:spcAft>
             </a:pPr>
             <a:r>
-              <a:rPr sz="1400" b="0">
+              <a:rPr sz="1000" b="0">
                 <a:solidFill>
                   <a:srgbClr val="54423E"/>
                 </a:solidFill>
                 <a:latin typeface="Red Hat Text"/>
               </a:rPr>
-              <a:t>Federal tax information carries handling rules that rule out sending prompts to a public endpoint. The model has to come to the data — on premises, in an accredited cloud region, or in an air-gapped enclave.</a:t>
+              <a:t>FTI rules rule out public endpoints. The model comes to the data — on premises, accredited cloud, or air-gapped enclave.</a:t>
             </a:r>
           </a:p>
         </p:txBody>
@@ -4823,7 +6746,7 @@
         </p:nvSpPr>
         <p:spPr>
           <a:xfrm>
-            <a:off x="777240" y="566928"/>
+            <a:off x="777240" y="502920"/>
             <a:ext cx="10637215" cy="310896"/>
           </a:xfrm>
           <a:prstGeom prst="rect">
@@ -4845,7 +6768,7 @@
             <a:r>
               <a:rPr sz="1100" b="1">
                 <a:solidFill>
-                  <a:srgbClr val="8A7671"/>
+                  <a:srgbClr val="7E6A64"/>
                 </a:solidFill>
                 <a:latin typeface="Red Hat Mono"/>
               </a:rPr>
@@ -4862,8 +6785,8 @@
         </p:nvSpPr>
         <p:spPr>
           <a:xfrm>
-            <a:off x="777240" y="932688"/>
-            <a:ext cx="10637215" cy="914400"/>
+            <a:off x="777240" y="868680"/>
+            <a:ext cx="10637215" cy="822960"/>
           </a:xfrm>
           <a:prstGeom prst="rect">
             <a:avLst/>
@@ -4901,8 +6824,8 @@
         </p:nvSpPr>
         <p:spPr>
           <a:xfrm>
-            <a:off x="777240" y="1874519"/>
-            <a:ext cx="8778240" cy="640080"/>
+            <a:off x="777240" y="1536192"/>
+            <a:ext cx="9692640" cy="457200"/>
           </a:xfrm>
           <a:prstGeom prst="rect">
             <a:avLst/>
@@ -4921,520 +6844,1145 @@
               </a:spcAft>
             </a:pPr>
             <a:r>
-              <a:rPr sz="1500" b="0">
+              <a:rPr sz="1400" b="0">
                 <a:solidFill>
                   <a:srgbClr val="54423E"/>
                 </a:solidFill>
                 <a:latin typeface="Red Hat Text"/>
               </a:rPr>
-              <a:t>Start where a human already reviews the output.</a:t>
-            </a:r>
-          </a:p>
-        </p:txBody>
-      </p:sp>
-      <p:graphicFrame>
-        <p:nvGraphicFramePr>
-          <p:cNvPr id="6" name="Table 5"/>
-          <p:cNvGraphicFramePr>
-            <a:graphicFrameLocks noGrp="1"/>
-          </p:cNvGraphicFramePr>
-          <p:nvPr/>
-        </p:nvGraphicFramePr>
-        <p:xfrm>
-          <a:off x="777240" y="2514600"/>
-          <a:ext cx="10607040" cy="2304288"/>
-        </p:xfrm>
-        <a:graphic>
-          <a:graphicData uri="http://schemas.openxmlformats.org/drawingml/2006/table">
-            <a:tbl>
-              <a:tblPr firstRow="1" bandRow="1">
-                <a:tableStyleId>{5C22544A-7EE6-4342-B048-85BDC9FD1C3A}</a:tableStyleId>
-              </a:tblPr>
-              <a:tblGrid>
-                <a:gridCol w="3017520"/>
-                <a:gridCol w="5120640"/>
-                <a:gridCol w="2468880"/>
-              </a:tblGrid>
-              <a:tr h="329184">
-                <a:tc>
-                  <a:txBody>
-                    <a:bodyPr wrap="square"/>
-                    <a:lstStyle/>
-                    <a:p>
-                      <a:r>
-                        <a:rPr sz="1050" b="1">
-                          <a:solidFill>
-                            <a:srgbClr val="8A7671"/>
-                          </a:solidFill>
-                          <a:latin typeface="Red Hat Mono"/>
-                        </a:rPr>
-                        <a:t>Stage</a:t>
-                      </a:r>
-                    </a:p>
-                  </a:txBody>
-                  <a:tcPr marL="109728" marR="109728" marT="45720" marB="45720">
-                    <a:solidFill>
-                      <a:srgbClr val="F4EFED"/>
-                    </a:solidFill>
-                  </a:tcPr>
-                </a:tc>
-                <a:tc>
-                  <a:txBody>
-                    <a:bodyPr wrap="square"/>
-                    <a:lstStyle/>
-                    <a:p>
-                      <a:r>
-                        <a:rPr sz="1050" b="1">
-                          <a:solidFill>
-                            <a:srgbClr val="8A7671"/>
-                          </a:solidFill>
-                          <a:latin typeface="Red Hat Mono"/>
-                        </a:rPr>
-                        <a:t>Work</a:t>
-                      </a:r>
-                    </a:p>
-                  </a:txBody>
-                  <a:tcPr marL="109728" marR="109728" marT="45720" marB="45720">
-                    <a:solidFill>
-                      <a:srgbClr val="F4EFED"/>
-                    </a:solidFill>
-                  </a:tcPr>
-                </a:tc>
-                <a:tc>
-                  <a:txBody>
-                    <a:bodyPr wrap="square"/>
-                    <a:lstStyle/>
-                    <a:p>
-                      <a:r>
-                        <a:rPr sz="1050" b="1">
-                          <a:solidFill>
-                            <a:srgbClr val="8A7671"/>
-                          </a:solidFill>
-                          <a:latin typeface="Red Hat Mono"/>
-                        </a:rPr>
-                        <a:t>Good first candidate?</a:t>
-                      </a:r>
-                    </a:p>
-                  </a:txBody>
-                  <a:tcPr marL="109728" marR="109728" marT="45720" marB="45720">
-                    <a:solidFill>
-                      <a:srgbClr val="F4EFED"/>
-                    </a:solidFill>
-                  </a:tcPr>
-                </a:tc>
-              </a:tr>
-              <a:tr h="329184">
-                <a:tc>
-                  <a:txBody>
-                    <a:bodyPr wrap="square"/>
-                    <a:lstStyle/>
-                    <a:p>
-                      <a:r>
-                        <a:rPr sz="1200" b="0">
-                          <a:solidFill>
-                            <a:srgbClr val="1B1211"/>
-                          </a:solidFill>
-                          <a:latin typeface="Red Hat Text"/>
-                        </a:rPr>
-                        <a:t>Intake and classification</a:t>
-                      </a:r>
-                    </a:p>
-                  </a:txBody>
-                  <a:tcPr marL="109728" marR="109728" marT="45720" marB="45720">
-                    <a:solidFill>
-                      <a:srgbClr val="FBF9F8"/>
-                    </a:solidFill>
-                  </a:tcPr>
-                </a:tc>
-                <a:tc>
-                  <a:txBody>
-                    <a:bodyPr wrap="square"/>
-                    <a:lstStyle/>
-                    <a:p>
-                      <a:r>
-                        <a:rPr sz="1200" b="0">
-                          <a:solidFill>
-                            <a:srgbClr val="1B1211"/>
-                          </a:solidFill>
-                          <a:latin typeface="Red Hat Text"/>
-                        </a:rPr>
-                        <a:t>Route contacts by intent, not keyword</a:t>
-                      </a:r>
-                    </a:p>
-                  </a:txBody>
-                  <a:tcPr marL="109728" marR="109728" marT="45720" marB="45720">
-                    <a:solidFill>
-                      <a:srgbClr val="FBF9F8"/>
-                    </a:solidFill>
-                  </a:tcPr>
-                </a:tc>
-                <a:tc>
-                  <a:txBody>
-                    <a:bodyPr wrap="square"/>
-                    <a:lstStyle/>
-                    <a:p>
-                      <a:r>
-                        <a:rPr sz="1200" b="0">
-                          <a:solidFill>
-                            <a:srgbClr val="1B1211"/>
-                          </a:solidFill>
-                          <a:latin typeface="Red Hat Mono"/>
-                        </a:rPr>
-                        <a:t>Yes</a:t>
-                      </a:r>
-                    </a:p>
-                  </a:txBody>
-                  <a:tcPr marL="109728" marR="109728" marT="45720" marB="45720">
-                    <a:solidFill>
-                      <a:srgbClr val="FBF9F8"/>
-                    </a:solidFill>
-                  </a:tcPr>
-                </a:tc>
-              </a:tr>
-              <a:tr h="329184">
-                <a:tc>
-                  <a:txBody>
-                    <a:bodyPr wrap="square"/>
-                    <a:lstStyle/>
-                    <a:p>
-                      <a:r>
-                        <a:rPr sz="1200" b="0">
-                          <a:solidFill>
-                            <a:srgbClr val="1B1211"/>
-                          </a:solidFill>
-                          <a:latin typeface="Red Hat Text"/>
-                        </a:rPr>
-                        <a:t>Validation</a:t>
-                      </a:r>
-                    </a:p>
-                  </a:txBody>
-                  <a:tcPr marL="109728" marR="109728" marT="45720" marB="45720">
-                    <a:solidFill>
-                      <a:srgbClr val="FBF9F8"/>
-                    </a:solidFill>
-                  </a:tcPr>
-                </a:tc>
-                <a:tc>
-                  <a:txBody>
-                    <a:bodyPr wrap="square"/>
-                    <a:lstStyle/>
-                    <a:p>
-                      <a:r>
-                        <a:rPr sz="1200" b="0">
-                          <a:solidFill>
-                            <a:srgbClr val="1B1211"/>
-                          </a:solidFill>
-                          <a:latin typeface="Red Hat Text"/>
-                        </a:rPr>
-                        <a:t>Flag gaps before a case is opened</a:t>
-                      </a:r>
-                    </a:p>
-                  </a:txBody>
-                  <a:tcPr marL="109728" marR="109728" marT="45720" marB="45720">
-                    <a:solidFill>
-                      <a:srgbClr val="FBF9F8"/>
-                    </a:solidFill>
-                  </a:tcPr>
-                </a:tc>
-                <a:tc>
-                  <a:txBody>
-                    <a:bodyPr wrap="square"/>
-                    <a:lstStyle/>
-                    <a:p>
-                      <a:r>
-                        <a:rPr sz="1200" b="0">
-                          <a:solidFill>
-                            <a:srgbClr val="1B1211"/>
-                          </a:solidFill>
-                          <a:latin typeface="Red Hat Mono"/>
-                        </a:rPr>
-                        <a:t>Yes</a:t>
-                      </a:r>
-                    </a:p>
-                  </a:txBody>
-                  <a:tcPr marL="109728" marR="109728" marT="45720" marB="45720">
-                    <a:solidFill>
-                      <a:srgbClr val="FBF9F8"/>
-                    </a:solidFill>
-                  </a:tcPr>
-                </a:tc>
-              </a:tr>
-              <a:tr h="329184">
-                <a:tc>
-                  <a:txBody>
-                    <a:bodyPr wrap="square"/>
-                    <a:lstStyle/>
-                    <a:p>
-                      <a:r>
-                        <a:rPr sz="1200" b="0">
-                          <a:solidFill>
-                            <a:srgbClr val="1B1211"/>
-                          </a:solidFill>
-                          <a:latin typeface="Red Hat Text"/>
-                        </a:rPr>
-                        <a:t>Correspondence</a:t>
-                      </a:r>
-                    </a:p>
-                  </a:txBody>
-                  <a:tcPr marL="109728" marR="109728" marT="45720" marB="45720">
-                    <a:solidFill>
-                      <a:srgbClr val="FBF9F8"/>
-                    </a:solidFill>
-                  </a:tcPr>
-                </a:tc>
-                <a:tc>
-                  <a:txBody>
-                    <a:bodyPr wrap="square"/>
-                    <a:lstStyle/>
-                    <a:p>
-                      <a:r>
-                        <a:rPr sz="1200" b="0">
-                          <a:solidFill>
-                            <a:srgbClr val="1B1211"/>
-                          </a:solidFill>
-                          <a:latin typeface="Red Hat Text"/>
-                        </a:rPr>
-                        <a:t>Draft notices for a reviewer to sign</a:t>
-                      </a:r>
-                    </a:p>
-                  </a:txBody>
-                  <a:tcPr marL="109728" marR="109728" marT="45720" marB="45720">
-                    <a:solidFill>
-                      <a:srgbClr val="FBF9F8"/>
-                    </a:solidFill>
-                  </a:tcPr>
-                </a:tc>
-                <a:tc>
-                  <a:txBody>
-                    <a:bodyPr wrap="square"/>
-                    <a:lstStyle/>
-                    <a:p>
-                      <a:r>
-                        <a:rPr sz="1200" b="0">
-                          <a:solidFill>
-                            <a:srgbClr val="1B1211"/>
-                          </a:solidFill>
-                          <a:latin typeface="Red Hat Mono"/>
-                        </a:rPr>
-                        <a:t>Yes</a:t>
-                      </a:r>
-                    </a:p>
-                  </a:txBody>
-                  <a:tcPr marL="109728" marR="109728" marT="45720" marB="45720">
-                    <a:solidFill>
-                      <a:srgbClr val="FBF9F8"/>
-                    </a:solidFill>
-                  </a:tcPr>
-                </a:tc>
-              </a:tr>
-              <a:tr h="329184">
-                <a:tc>
-                  <a:txBody>
-                    <a:bodyPr wrap="square"/>
-                    <a:lstStyle/>
-                    <a:p>
-                      <a:r>
-                        <a:rPr sz="1200" b="0">
-                          <a:solidFill>
-                            <a:srgbClr val="1B1211"/>
-                          </a:solidFill>
-                          <a:latin typeface="Red Hat Text"/>
-                        </a:rPr>
-                        <a:t>Exam selection</a:t>
-                      </a:r>
-                    </a:p>
-                  </a:txBody>
-                  <a:tcPr marL="109728" marR="109728" marT="45720" marB="45720">
-                    <a:solidFill>
-                      <a:srgbClr val="FBF9F8"/>
-                    </a:solidFill>
-                  </a:tcPr>
-                </a:tc>
-                <a:tc>
-                  <a:txBody>
-                    <a:bodyPr wrap="square"/>
-                    <a:lstStyle/>
-                    <a:p>
-                      <a:r>
-                        <a:rPr sz="1200" b="0">
-                          <a:solidFill>
-                            <a:srgbClr val="1B1211"/>
-                          </a:solidFill>
-                          <a:latin typeface="Red Hat Text"/>
-                        </a:rPr>
-                        <a:t>Determinations affecting a taxpayer</a:t>
-                      </a:r>
-                    </a:p>
-                  </a:txBody>
-                  <a:tcPr marL="109728" marR="109728" marT="45720" marB="45720">
-                    <a:solidFill>
-                      <a:srgbClr val="FBF9F8"/>
-                    </a:solidFill>
-                  </a:tcPr>
-                </a:tc>
-                <a:tc>
-                  <a:txBody>
-                    <a:bodyPr wrap="square"/>
-                    <a:lstStyle/>
-                    <a:p>
-                      <a:r>
-                        <a:rPr sz="1200" b="0">
-                          <a:solidFill>
-                            <a:srgbClr val="1B1211"/>
-                          </a:solidFill>
-                          <a:latin typeface="Red Hat Mono"/>
-                        </a:rPr>
-                        <a:t>No — governance first</a:t>
-                      </a:r>
-                    </a:p>
-                  </a:txBody>
-                  <a:tcPr marL="109728" marR="109728" marT="45720" marB="45720">
-                    <a:solidFill>
-                      <a:srgbClr val="FBF9F8"/>
-                    </a:solidFill>
-                  </a:tcPr>
-                </a:tc>
-              </a:tr>
-              <a:tr h="329184">
-                <a:tc>
-                  <a:txBody>
-                    <a:bodyPr wrap="square"/>
-                    <a:lstStyle/>
-                    <a:p>
-                      <a:r>
-                        <a:rPr sz="1200" b="0">
-                          <a:solidFill>
-                            <a:srgbClr val="1B1211"/>
-                          </a:solidFill>
-                          <a:latin typeface="Red Hat Text"/>
-                        </a:rPr>
-                        <a:t>Collections support</a:t>
-                      </a:r>
-                    </a:p>
-                  </a:txBody>
-                  <a:tcPr marL="109728" marR="109728" marT="45720" marB="45720">
-                    <a:solidFill>
-                      <a:srgbClr val="FBF9F8"/>
-                    </a:solidFill>
-                  </a:tcPr>
-                </a:tc>
-                <a:tc>
-                  <a:txBody>
-                    <a:bodyPr wrap="square"/>
-                    <a:lstStyle/>
-                    <a:p>
-                      <a:r>
-                        <a:rPr sz="1200" b="0">
-                          <a:solidFill>
-                            <a:srgbClr val="1B1211"/>
-                          </a:solidFill>
-                          <a:latin typeface="Red Hat Text"/>
-                        </a:rPr>
-                        <a:t>Summarize case history for an officer</a:t>
-                      </a:r>
-                    </a:p>
-                  </a:txBody>
-                  <a:tcPr marL="109728" marR="109728" marT="45720" marB="45720">
-                    <a:solidFill>
-                      <a:srgbClr val="FBF9F8"/>
-                    </a:solidFill>
-                  </a:tcPr>
-                </a:tc>
-                <a:tc>
-                  <a:txBody>
-                    <a:bodyPr wrap="square"/>
-                    <a:lstStyle/>
-                    <a:p>
-                      <a:r>
-                        <a:rPr sz="1200" b="0">
-                          <a:solidFill>
-                            <a:srgbClr val="1B1211"/>
-                          </a:solidFill>
-                          <a:latin typeface="Red Hat Mono"/>
-                        </a:rPr>
-                        <a:t>Yes</a:t>
-                      </a:r>
-                    </a:p>
-                  </a:txBody>
-                  <a:tcPr marL="109728" marR="109728" marT="45720" marB="45720">
-                    <a:solidFill>
-                      <a:srgbClr val="FBF9F8"/>
-                    </a:solidFill>
-                  </a:tcPr>
-                </a:tc>
-              </a:tr>
-              <a:tr h="329184">
-                <a:tc>
-                  <a:txBody>
-                    <a:bodyPr wrap="square"/>
-                    <a:lstStyle/>
-                    <a:p>
-                      <a:r>
-                        <a:rPr sz="1200" b="0">
-                          <a:solidFill>
-                            <a:srgbClr val="1B1211"/>
-                          </a:solidFill>
-                          <a:latin typeface="Red Hat Text"/>
-                        </a:rPr>
-                        <a:t>Taxpayer service</a:t>
-                      </a:r>
-                    </a:p>
-                  </a:txBody>
-                  <a:tcPr marL="109728" marR="109728" marT="45720" marB="45720">
-                    <a:solidFill>
-                      <a:srgbClr val="FBF9F8"/>
-                    </a:solidFill>
-                  </a:tcPr>
-                </a:tc>
-                <a:tc>
-                  <a:txBody>
-                    <a:bodyPr wrap="square"/>
-                    <a:lstStyle/>
-                    <a:p>
-                      <a:r>
-                        <a:rPr sz="1200" b="0">
-                          <a:solidFill>
-                            <a:srgbClr val="1B1211"/>
-                          </a:solidFill>
-                          <a:latin typeface="Red Hat Text"/>
-                        </a:rPr>
-                        <a:t>Answer from guidance, with the citation</a:t>
-                      </a:r>
-                    </a:p>
-                  </a:txBody>
-                  <a:tcPr marL="109728" marR="109728" marT="45720" marB="45720">
-                    <a:solidFill>
-                      <a:srgbClr val="FBF9F8"/>
-                    </a:solidFill>
-                  </a:tcPr>
-                </a:tc>
-                <a:tc>
-                  <a:txBody>
-                    <a:bodyPr wrap="square"/>
-                    <a:lstStyle/>
-                    <a:p>
-                      <a:r>
-                        <a:rPr sz="1200" b="0">
-                          <a:solidFill>
-                            <a:srgbClr val="1B1211"/>
-                          </a:solidFill>
-                          <a:latin typeface="Red Hat Mono"/>
-                        </a:rPr>
-                        <a:t>Yes</a:t>
-                      </a:r>
-                    </a:p>
-                  </a:txBody>
-                  <a:tcPr marL="109728" marR="109728" marT="45720" marB="45720">
-                    <a:solidFill>
-                      <a:srgbClr val="FBF9F8"/>
-                    </a:solidFill>
-                  </a:tcPr>
-                </a:tc>
-              </a:tr>
-            </a:tbl>
-          </a:graphicData>
-        </a:graphic>
-      </p:graphicFrame>
+              <a:t>Red stages ship with a human on the signature. The gray one waits for governance.</a:t>
+            </a:r>
+          </a:p>
+        </p:txBody>
+      </p:sp>
+      <p:sp>
+        <p:nvSpPr>
+          <p:cNvPr id="6" name="Chevron 5"/>
+          <p:cNvSpPr/>
+          <p:nvPr/>
+        </p:nvSpPr>
+        <p:spPr>
+          <a:xfrm>
+            <a:off x="777240" y="2148840"/>
+            <a:ext cx="1810512" cy="777240"/>
+          </a:xfrm>
+          <a:prstGeom prst="chevron">
+            <a:avLst/>
+          </a:prstGeom>
+          <a:solidFill>
+            <a:srgbClr val="CC0000"/>
+          </a:solidFill>
+          <a:ln>
+            <a:noFill/>
+          </a:ln>
+          <a:effectLst/>
+        </p:spPr>
+        <p:style>
+          <a:lnRef idx="1">
+            <a:schemeClr val="accent1"/>
+          </a:lnRef>
+          <a:fillRef idx="3">
+            <a:schemeClr val="accent1"/>
+          </a:fillRef>
+          <a:effectRef idx="2">
+            <a:schemeClr val="accent1"/>
+          </a:effectRef>
+          <a:fontRef idx="minor">
+            <a:schemeClr val="lt1"/>
+          </a:fontRef>
+        </p:style>
+        <p:txBody>
+          <a:bodyPr rtlCol="0" anchor="ctr" wrap="square"/>
+          <a:lstStyle/>
+          <a:p>
+            <a:pPr algn="ctr"/>
+            <a:r>
+              <a:rPr sz="1200" b="1">
+                <a:solidFill>
+                  <a:srgbClr val="FFFFFF"/>
+                </a:solidFill>
+                <a:latin typeface="Red Hat Display"/>
+              </a:rPr>
+              <a:t>Intake &amp;</a:t>
+            </a:r>
+          </a:p>
+          <a:p>
+            <a:pPr algn="ctr"/>
+            <a:r>
+              <a:rPr sz="1200" b="1">
+                <a:solidFill>
+                  <a:srgbClr val="FFFFFF"/>
+                </a:solidFill>
+                <a:latin typeface="Red Hat Display"/>
+              </a:rPr>
+              <a:t>classification</a:t>
+            </a:r>
+          </a:p>
+        </p:txBody>
+      </p:sp>
+      <p:sp>
+        <p:nvSpPr>
+          <p:cNvPr id="7" name="TextBox 6"/>
+          <p:cNvSpPr txBox="1"/>
+          <p:nvPr/>
+        </p:nvSpPr>
+        <p:spPr>
+          <a:xfrm>
+            <a:off x="886968" y="3063240"/>
+            <a:ext cx="1719072" cy="566928"/>
+          </a:xfrm>
+          <a:prstGeom prst="rect">
+            <a:avLst/>
+          </a:prstGeom>
+          <a:noFill/>
+        </p:spPr>
+        <p:txBody>
+          <a:bodyPr wrap="square">
+            <a:spAutoFit/>
+          </a:bodyPr>
+          <a:lstStyle/>
+          <a:p>
+            <a:pPr algn="ctr">
+              <a:spcAft>
+                <a:spcPts val="0"/>
+              </a:spcAft>
+            </a:pPr>
+            <a:r>
+              <a:rPr sz="1000" b="0">
+                <a:solidFill>
+                  <a:srgbClr val="54423E"/>
+                </a:solidFill>
+                <a:latin typeface="Red Hat Text"/>
+              </a:rPr>
+              <a:t>Route by intent, not keyword</a:t>
+            </a:r>
+          </a:p>
+        </p:txBody>
+      </p:sp>
+      <p:sp>
+        <p:nvSpPr>
+          <p:cNvPr id="8" name="Rounded Rectangle 7"/>
+          <p:cNvSpPr/>
+          <p:nvPr/>
+        </p:nvSpPr>
+        <p:spPr>
+          <a:xfrm>
+            <a:off x="978408" y="3685032"/>
+            <a:ext cx="1389888" cy="274320"/>
+          </a:xfrm>
+          <a:prstGeom prst="roundRect">
+            <a:avLst>
+              <a:gd name="adj" fmla="val 50000"/>
+            </a:avLst>
+          </a:prstGeom>
+          <a:solidFill>
+            <a:srgbClr val="FBEAE8"/>
+          </a:solidFill>
+          <a:ln>
+            <a:noFill/>
+          </a:ln>
+          <a:effectLst/>
+        </p:spPr>
+        <p:style>
+          <a:lnRef idx="1">
+            <a:schemeClr val="accent1"/>
+          </a:lnRef>
+          <a:fillRef idx="3">
+            <a:schemeClr val="accent1"/>
+          </a:fillRef>
+          <a:effectRef idx="2">
+            <a:schemeClr val="accent1"/>
+          </a:effectRef>
+          <a:fontRef idx="minor">
+            <a:schemeClr val="lt1"/>
+          </a:fontRef>
+        </p:style>
+        <p:txBody>
+          <a:bodyPr rtlCol="0" anchor="ctr" wrap="none"/>
+          <a:lstStyle/>
+          <a:p>
+            <a:pPr algn="ctr"/>
+            <a:r>
+              <a:rPr sz="850" b="1">
+                <a:solidFill>
+                  <a:srgbClr val="A30000"/>
+                </a:solidFill>
+                <a:latin typeface="Red Hat Mono"/>
+              </a:rPr>
+              <a:t>human in the loop</a:t>
+            </a:r>
+          </a:p>
+        </p:txBody>
+      </p:sp>
+      <p:sp>
+        <p:nvSpPr>
+          <p:cNvPr id="9" name="Chevron 8"/>
+          <p:cNvSpPr/>
+          <p:nvPr/>
+        </p:nvSpPr>
+        <p:spPr>
+          <a:xfrm>
+            <a:off x="2606040" y="2148840"/>
+            <a:ext cx="1810512" cy="777240"/>
+          </a:xfrm>
+          <a:prstGeom prst="chevron">
+            <a:avLst/>
+          </a:prstGeom>
+          <a:solidFill>
+            <a:srgbClr val="CC0000"/>
+          </a:solidFill>
+          <a:ln>
+            <a:noFill/>
+          </a:ln>
+          <a:effectLst/>
+        </p:spPr>
+        <p:style>
+          <a:lnRef idx="1">
+            <a:schemeClr val="accent1"/>
+          </a:lnRef>
+          <a:fillRef idx="3">
+            <a:schemeClr val="accent1"/>
+          </a:fillRef>
+          <a:effectRef idx="2">
+            <a:schemeClr val="accent1"/>
+          </a:effectRef>
+          <a:fontRef idx="minor">
+            <a:schemeClr val="lt1"/>
+          </a:fontRef>
+        </p:style>
+        <p:txBody>
+          <a:bodyPr rtlCol="0" anchor="ctr" wrap="square"/>
+          <a:lstStyle/>
+          <a:p>
+            <a:pPr algn="ctr"/>
+            <a:r>
+              <a:rPr sz="1200" b="1">
+                <a:solidFill>
+                  <a:srgbClr val="FFFFFF"/>
+                </a:solidFill>
+                <a:latin typeface="Red Hat Display"/>
+              </a:rPr>
+              <a:t>Validation</a:t>
+            </a:r>
+          </a:p>
+        </p:txBody>
+      </p:sp>
+      <p:sp>
+        <p:nvSpPr>
+          <p:cNvPr id="10" name="TextBox 9"/>
+          <p:cNvSpPr txBox="1"/>
+          <p:nvPr/>
+        </p:nvSpPr>
+        <p:spPr>
+          <a:xfrm>
+            <a:off x="2715768" y="3063240"/>
+            <a:ext cx="1719072" cy="566928"/>
+          </a:xfrm>
+          <a:prstGeom prst="rect">
+            <a:avLst/>
+          </a:prstGeom>
+          <a:noFill/>
+        </p:spPr>
+        <p:txBody>
+          <a:bodyPr wrap="square">
+            <a:spAutoFit/>
+          </a:bodyPr>
+          <a:lstStyle/>
+          <a:p>
+            <a:pPr algn="ctr">
+              <a:spcAft>
+                <a:spcPts val="0"/>
+              </a:spcAft>
+            </a:pPr>
+            <a:r>
+              <a:rPr sz="1000" b="0">
+                <a:solidFill>
+                  <a:srgbClr val="54423E"/>
+                </a:solidFill>
+                <a:latin typeface="Red Hat Text"/>
+              </a:rPr>
+              <a:t>Catch gaps before a case is opened</a:t>
+            </a:r>
+          </a:p>
+        </p:txBody>
+      </p:sp>
+      <p:sp>
+        <p:nvSpPr>
+          <p:cNvPr id="11" name="Rounded Rectangle 10"/>
+          <p:cNvSpPr/>
+          <p:nvPr/>
+        </p:nvSpPr>
+        <p:spPr>
+          <a:xfrm>
+            <a:off x="2807208" y="3685032"/>
+            <a:ext cx="1389888" cy="274320"/>
+          </a:xfrm>
+          <a:prstGeom prst="roundRect">
+            <a:avLst>
+              <a:gd name="adj" fmla="val 50000"/>
+            </a:avLst>
+          </a:prstGeom>
+          <a:solidFill>
+            <a:srgbClr val="FBEAE8"/>
+          </a:solidFill>
+          <a:ln>
+            <a:noFill/>
+          </a:ln>
+          <a:effectLst/>
+        </p:spPr>
+        <p:style>
+          <a:lnRef idx="1">
+            <a:schemeClr val="accent1"/>
+          </a:lnRef>
+          <a:fillRef idx="3">
+            <a:schemeClr val="accent1"/>
+          </a:fillRef>
+          <a:effectRef idx="2">
+            <a:schemeClr val="accent1"/>
+          </a:effectRef>
+          <a:fontRef idx="minor">
+            <a:schemeClr val="lt1"/>
+          </a:fontRef>
+        </p:style>
+        <p:txBody>
+          <a:bodyPr rtlCol="0" anchor="ctr" wrap="none"/>
+          <a:lstStyle/>
+          <a:p>
+            <a:pPr algn="ctr"/>
+            <a:r>
+              <a:rPr sz="850" b="1">
+                <a:solidFill>
+                  <a:srgbClr val="A30000"/>
+                </a:solidFill>
+                <a:latin typeface="Red Hat Mono"/>
+              </a:rPr>
+              <a:t>human in the loop</a:t>
+            </a:r>
+          </a:p>
+        </p:txBody>
+      </p:sp>
+      <p:sp>
+        <p:nvSpPr>
+          <p:cNvPr id="12" name="Chevron 11"/>
+          <p:cNvSpPr/>
+          <p:nvPr/>
+        </p:nvSpPr>
+        <p:spPr>
+          <a:xfrm>
+            <a:off x="4434840" y="2148840"/>
+            <a:ext cx="1810512" cy="777240"/>
+          </a:xfrm>
+          <a:prstGeom prst="chevron">
+            <a:avLst/>
+          </a:prstGeom>
+          <a:solidFill>
+            <a:srgbClr val="CC0000"/>
+          </a:solidFill>
+          <a:ln>
+            <a:noFill/>
+          </a:ln>
+          <a:effectLst/>
+        </p:spPr>
+        <p:style>
+          <a:lnRef idx="1">
+            <a:schemeClr val="accent1"/>
+          </a:lnRef>
+          <a:fillRef idx="3">
+            <a:schemeClr val="accent1"/>
+          </a:fillRef>
+          <a:effectRef idx="2">
+            <a:schemeClr val="accent1"/>
+          </a:effectRef>
+          <a:fontRef idx="minor">
+            <a:schemeClr val="lt1"/>
+          </a:fontRef>
+        </p:style>
+        <p:txBody>
+          <a:bodyPr rtlCol="0" anchor="ctr" wrap="square"/>
+          <a:lstStyle/>
+          <a:p>
+            <a:pPr algn="ctr"/>
+            <a:r>
+              <a:rPr sz="1200" b="1">
+                <a:solidFill>
+                  <a:srgbClr val="FFFFFF"/>
+                </a:solidFill>
+                <a:latin typeface="Red Hat Display"/>
+              </a:rPr>
+              <a:t>Correspondence</a:t>
+            </a:r>
+          </a:p>
+        </p:txBody>
+      </p:sp>
+      <p:sp>
+        <p:nvSpPr>
+          <p:cNvPr id="13" name="TextBox 12"/>
+          <p:cNvSpPr txBox="1"/>
+          <p:nvPr/>
+        </p:nvSpPr>
+        <p:spPr>
+          <a:xfrm>
+            <a:off x="4544568" y="3063240"/>
+            <a:ext cx="1719072" cy="566928"/>
+          </a:xfrm>
+          <a:prstGeom prst="rect">
+            <a:avLst/>
+          </a:prstGeom>
+          <a:noFill/>
+        </p:spPr>
+        <p:txBody>
+          <a:bodyPr wrap="square">
+            <a:spAutoFit/>
+          </a:bodyPr>
+          <a:lstStyle/>
+          <a:p>
+            <a:pPr algn="ctr">
+              <a:spcAft>
+                <a:spcPts val="0"/>
+              </a:spcAft>
+            </a:pPr>
+            <a:r>
+              <a:rPr sz="1000" b="0">
+                <a:solidFill>
+                  <a:srgbClr val="54423E"/>
+                </a:solidFill>
+                <a:latin typeface="Red Hat Text"/>
+              </a:rPr>
+              <a:t>Draft; a reviewer edits and signs</a:t>
+            </a:r>
+          </a:p>
+        </p:txBody>
+      </p:sp>
+      <p:sp>
+        <p:nvSpPr>
+          <p:cNvPr id="14" name="Rounded Rectangle 13"/>
+          <p:cNvSpPr/>
+          <p:nvPr/>
+        </p:nvSpPr>
+        <p:spPr>
+          <a:xfrm>
+            <a:off x="4636008" y="3685032"/>
+            <a:ext cx="1389888" cy="274320"/>
+          </a:xfrm>
+          <a:prstGeom prst="roundRect">
+            <a:avLst>
+              <a:gd name="adj" fmla="val 50000"/>
+            </a:avLst>
+          </a:prstGeom>
+          <a:solidFill>
+            <a:srgbClr val="FBEAE8"/>
+          </a:solidFill>
+          <a:ln>
+            <a:noFill/>
+          </a:ln>
+          <a:effectLst/>
+        </p:spPr>
+        <p:style>
+          <a:lnRef idx="1">
+            <a:schemeClr val="accent1"/>
+          </a:lnRef>
+          <a:fillRef idx="3">
+            <a:schemeClr val="accent1"/>
+          </a:fillRef>
+          <a:effectRef idx="2">
+            <a:schemeClr val="accent1"/>
+          </a:effectRef>
+          <a:fontRef idx="minor">
+            <a:schemeClr val="lt1"/>
+          </a:fontRef>
+        </p:style>
+        <p:txBody>
+          <a:bodyPr rtlCol="0" anchor="ctr" wrap="none"/>
+          <a:lstStyle/>
+          <a:p>
+            <a:pPr algn="ctr"/>
+            <a:r>
+              <a:rPr sz="850" b="1">
+                <a:solidFill>
+                  <a:srgbClr val="A30000"/>
+                </a:solidFill>
+                <a:latin typeface="Red Hat Mono"/>
+              </a:rPr>
+              <a:t>human in the loop</a:t>
+            </a:r>
+          </a:p>
+        </p:txBody>
+      </p:sp>
+      <p:sp>
+        <p:nvSpPr>
+          <p:cNvPr id="15" name="Chevron 14"/>
+          <p:cNvSpPr/>
+          <p:nvPr/>
+        </p:nvSpPr>
+        <p:spPr>
+          <a:xfrm>
+            <a:off x="6263640" y="2148840"/>
+            <a:ext cx="1810512" cy="777240"/>
+          </a:xfrm>
+          <a:prstGeom prst="chevron">
+            <a:avLst/>
+          </a:prstGeom>
+          <a:solidFill>
+            <a:srgbClr val="CFC2BE"/>
+          </a:solidFill>
+          <a:ln>
+            <a:noFill/>
+          </a:ln>
+          <a:effectLst/>
+        </p:spPr>
+        <p:style>
+          <a:lnRef idx="1">
+            <a:schemeClr val="accent1"/>
+          </a:lnRef>
+          <a:fillRef idx="3">
+            <a:schemeClr val="accent1"/>
+          </a:fillRef>
+          <a:effectRef idx="2">
+            <a:schemeClr val="accent1"/>
+          </a:effectRef>
+          <a:fontRef idx="minor">
+            <a:schemeClr val="lt1"/>
+          </a:fontRef>
+        </p:style>
+        <p:txBody>
+          <a:bodyPr rtlCol="0" anchor="ctr" wrap="square"/>
+          <a:lstStyle/>
+          <a:p>
+            <a:pPr algn="ctr"/>
+            <a:r>
+              <a:rPr sz="1200" b="1">
+                <a:solidFill>
+                  <a:srgbClr val="1B1211"/>
+                </a:solidFill>
+                <a:latin typeface="Red Hat Display"/>
+              </a:rPr>
+              <a:t>Exam</a:t>
+            </a:r>
+          </a:p>
+          <a:p>
+            <a:pPr algn="ctr"/>
+            <a:r>
+              <a:rPr sz="1200" b="1">
+                <a:solidFill>
+                  <a:srgbClr val="1B1211"/>
+                </a:solidFill>
+                <a:latin typeface="Red Hat Display"/>
+              </a:rPr>
+              <a:t>selection</a:t>
+            </a:r>
+          </a:p>
+        </p:txBody>
+      </p:sp>
+      <p:sp>
+        <p:nvSpPr>
+          <p:cNvPr id="16" name="TextBox 15"/>
+          <p:cNvSpPr txBox="1"/>
+          <p:nvPr/>
+        </p:nvSpPr>
+        <p:spPr>
+          <a:xfrm>
+            <a:off x="6373368" y="3063240"/>
+            <a:ext cx="1719072" cy="566928"/>
+          </a:xfrm>
+          <a:prstGeom prst="rect">
+            <a:avLst/>
+          </a:prstGeom>
+          <a:noFill/>
+        </p:spPr>
+        <p:txBody>
+          <a:bodyPr wrap="square">
+            <a:spAutoFit/>
+          </a:bodyPr>
+          <a:lstStyle/>
+          <a:p>
+            <a:pPr algn="ctr">
+              <a:spcAft>
+                <a:spcPts val="0"/>
+              </a:spcAft>
+            </a:pPr>
+            <a:r>
+              <a:rPr sz="1000" b="0">
+                <a:solidFill>
+                  <a:srgbClr val="54423E"/>
+                </a:solidFill>
+                <a:latin typeface="Red Hat Text"/>
+              </a:rPr>
+              <a:t>Taxpayer determinations</a:t>
+            </a:r>
+          </a:p>
+        </p:txBody>
+      </p:sp>
+      <p:sp>
+        <p:nvSpPr>
+          <p:cNvPr id="17" name="Rounded Rectangle 16"/>
+          <p:cNvSpPr/>
+          <p:nvPr/>
+        </p:nvSpPr>
+        <p:spPr>
+          <a:xfrm>
+            <a:off x="6464808" y="3685032"/>
+            <a:ext cx="1389888" cy="274320"/>
+          </a:xfrm>
+          <a:prstGeom prst="roundRect">
+            <a:avLst>
+              <a:gd name="adj" fmla="val 50000"/>
+            </a:avLst>
+          </a:prstGeom>
+          <a:solidFill>
+            <a:srgbClr val="F4EFED"/>
+          </a:solidFill>
+          <a:ln>
+            <a:noFill/>
+          </a:ln>
+          <a:effectLst/>
+        </p:spPr>
+        <p:style>
+          <a:lnRef idx="1">
+            <a:schemeClr val="accent1"/>
+          </a:lnRef>
+          <a:fillRef idx="3">
+            <a:schemeClr val="accent1"/>
+          </a:fillRef>
+          <a:effectRef idx="2">
+            <a:schemeClr val="accent1"/>
+          </a:effectRef>
+          <a:fontRef idx="minor">
+            <a:schemeClr val="lt1"/>
+          </a:fontRef>
+        </p:style>
+        <p:txBody>
+          <a:bodyPr rtlCol="0" anchor="ctr" wrap="none"/>
+          <a:lstStyle/>
+          <a:p>
+            <a:pPr algn="ctr"/>
+            <a:r>
+              <a:rPr sz="850" b="1">
+                <a:solidFill>
+                  <a:srgbClr val="7E6A64"/>
+                </a:solidFill>
+                <a:latin typeface="Red Hat Mono"/>
+              </a:rPr>
+              <a:t>governance first</a:t>
+            </a:r>
+          </a:p>
+        </p:txBody>
+      </p:sp>
+      <p:sp>
+        <p:nvSpPr>
+          <p:cNvPr id="18" name="Chevron 17"/>
+          <p:cNvSpPr/>
+          <p:nvPr/>
+        </p:nvSpPr>
+        <p:spPr>
+          <a:xfrm>
+            <a:off x="8092440" y="2148840"/>
+            <a:ext cx="1810512" cy="777240"/>
+          </a:xfrm>
+          <a:prstGeom prst="chevron">
+            <a:avLst/>
+          </a:prstGeom>
+          <a:solidFill>
+            <a:srgbClr val="CC0000"/>
+          </a:solidFill>
+          <a:ln>
+            <a:noFill/>
+          </a:ln>
+          <a:effectLst/>
+        </p:spPr>
+        <p:style>
+          <a:lnRef idx="1">
+            <a:schemeClr val="accent1"/>
+          </a:lnRef>
+          <a:fillRef idx="3">
+            <a:schemeClr val="accent1"/>
+          </a:fillRef>
+          <a:effectRef idx="2">
+            <a:schemeClr val="accent1"/>
+          </a:effectRef>
+          <a:fontRef idx="minor">
+            <a:schemeClr val="lt1"/>
+          </a:fontRef>
+        </p:style>
+        <p:txBody>
+          <a:bodyPr rtlCol="0" anchor="ctr" wrap="square"/>
+          <a:lstStyle/>
+          <a:p>
+            <a:pPr algn="ctr"/>
+            <a:r>
+              <a:rPr sz="1200" b="1">
+                <a:solidFill>
+                  <a:srgbClr val="FFFFFF"/>
+                </a:solidFill>
+                <a:latin typeface="Red Hat Display"/>
+              </a:rPr>
+              <a:t>Collections</a:t>
+            </a:r>
+          </a:p>
+          <a:p>
+            <a:pPr algn="ctr"/>
+            <a:r>
+              <a:rPr sz="1200" b="1">
+                <a:solidFill>
+                  <a:srgbClr val="FFFFFF"/>
+                </a:solidFill>
+                <a:latin typeface="Red Hat Display"/>
+              </a:rPr>
+              <a:t>support</a:t>
+            </a:r>
+          </a:p>
+        </p:txBody>
+      </p:sp>
+      <p:sp>
+        <p:nvSpPr>
+          <p:cNvPr id="19" name="TextBox 18"/>
+          <p:cNvSpPr txBox="1"/>
+          <p:nvPr/>
+        </p:nvSpPr>
+        <p:spPr>
+          <a:xfrm>
+            <a:off x="8202168" y="3063240"/>
+            <a:ext cx="1719072" cy="566928"/>
+          </a:xfrm>
+          <a:prstGeom prst="rect">
+            <a:avLst/>
+          </a:prstGeom>
+          <a:noFill/>
+        </p:spPr>
+        <p:txBody>
+          <a:bodyPr wrap="square">
+            <a:spAutoFit/>
+          </a:bodyPr>
+          <a:lstStyle/>
+          <a:p>
+            <a:pPr algn="ctr">
+              <a:spcAft>
+                <a:spcPts val="0"/>
+              </a:spcAft>
+            </a:pPr>
+            <a:r>
+              <a:rPr sz="1000" b="0">
+                <a:solidFill>
+                  <a:srgbClr val="54423E"/>
+                </a:solidFill>
+                <a:latin typeface="Red Hat Text"/>
+              </a:rPr>
+              <a:t>Brief the officer before the case</a:t>
+            </a:r>
+          </a:p>
+        </p:txBody>
+      </p:sp>
+      <p:sp>
+        <p:nvSpPr>
+          <p:cNvPr id="20" name="Rounded Rectangle 19"/>
+          <p:cNvSpPr/>
+          <p:nvPr/>
+        </p:nvSpPr>
+        <p:spPr>
+          <a:xfrm>
+            <a:off x="8293608" y="3685032"/>
+            <a:ext cx="1389888" cy="274320"/>
+          </a:xfrm>
+          <a:prstGeom prst="roundRect">
+            <a:avLst>
+              <a:gd name="adj" fmla="val 50000"/>
+            </a:avLst>
+          </a:prstGeom>
+          <a:solidFill>
+            <a:srgbClr val="FBEAE8"/>
+          </a:solidFill>
+          <a:ln>
+            <a:noFill/>
+          </a:ln>
+          <a:effectLst/>
+        </p:spPr>
+        <p:style>
+          <a:lnRef idx="1">
+            <a:schemeClr val="accent1"/>
+          </a:lnRef>
+          <a:fillRef idx="3">
+            <a:schemeClr val="accent1"/>
+          </a:fillRef>
+          <a:effectRef idx="2">
+            <a:schemeClr val="accent1"/>
+          </a:effectRef>
+          <a:fontRef idx="minor">
+            <a:schemeClr val="lt1"/>
+          </a:fontRef>
+        </p:style>
+        <p:txBody>
+          <a:bodyPr rtlCol="0" anchor="ctr" wrap="none"/>
+          <a:lstStyle/>
+          <a:p>
+            <a:pPr algn="ctr"/>
+            <a:r>
+              <a:rPr sz="850" b="1">
+                <a:solidFill>
+                  <a:srgbClr val="A30000"/>
+                </a:solidFill>
+                <a:latin typeface="Red Hat Mono"/>
+              </a:rPr>
+              <a:t>human in the loop</a:t>
+            </a:r>
+          </a:p>
+        </p:txBody>
+      </p:sp>
+      <p:sp>
+        <p:nvSpPr>
+          <p:cNvPr id="21" name="Chevron 20"/>
+          <p:cNvSpPr/>
+          <p:nvPr/>
+        </p:nvSpPr>
+        <p:spPr>
+          <a:xfrm>
+            <a:off x="9921240" y="2148840"/>
+            <a:ext cx="1810512" cy="777240"/>
+          </a:xfrm>
+          <a:prstGeom prst="chevron">
+            <a:avLst/>
+          </a:prstGeom>
+          <a:solidFill>
+            <a:srgbClr val="CC0000"/>
+          </a:solidFill>
+          <a:ln>
+            <a:noFill/>
+          </a:ln>
+          <a:effectLst/>
+        </p:spPr>
+        <p:style>
+          <a:lnRef idx="1">
+            <a:schemeClr val="accent1"/>
+          </a:lnRef>
+          <a:fillRef idx="3">
+            <a:schemeClr val="accent1"/>
+          </a:fillRef>
+          <a:effectRef idx="2">
+            <a:schemeClr val="accent1"/>
+          </a:effectRef>
+          <a:fontRef idx="minor">
+            <a:schemeClr val="lt1"/>
+          </a:fontRef>
+        </p:style>
+        <p:txBody>
+          <a:bodyPr rtlCol="0" anchor="ctr" wrap="square"/>
+          <a:lstStyle/>
+          <a:p>
+            <a:pPr algn="ctr"/>
+            <a:r>
+              <a:rPr sz="1200" b="1">
+                <a:solidFill>
+                  <a:srgbClr val="FFFFFF"/>
+                </a:solidFill>
+                <a:latin typeface="Red Hat Display"/>
+              </a:rPr>
+              <a:t>Taxpayer</a:t>
+            </a:r>
+          </a:p>
+          <a:p>
+            <a:pPr algn="ctr"/>
+            <a:r>
+              <a:rPr sz="1200" b="1">
+                <a:solidFill>
+                  <a:srgbClr val="FFFFFF"/>
+                </a:solidFill>
+                <a:latin typeface="Red Hat Display"/>
+              </a:rPr>
+              <a:t>service</a:t>
+            </a:r>
+          </a:p>
+        </p:txBody>
+      </p:sp>
+      <p:sp>
+        <p:nvSpPr>
+          <p:cNvPr id="22" name="TextBox 21"/>
+          <p:cNvSpPr txBox="1"/>
+          <p:nvPr/>
+        </p:nvSpPr>
+        <p:spPr>
+          <a:xfrm>
+            <a:off x="10030968" y="3063240"/>
+            <a:ext cx="1719072" cy="566928"/>
+          </a:xfrm>
+          <a:prstGeom prst="rect">
+            <a:avLst/>
+          </a:prstGeom>
+          <a:noFill/>
+        </p:spPr>
+        <p:txBody>
+          <a:bodyPr wrap="square">
+            <a:spAutoFit/>
+          </a:bodyPr>
+          <a:lstStyle/>
+          <a:p>
+            <a:pPr algn="ctr">
+              <a:spcAft>
+                <a:spcPts val="0"/>
+              </a:spcAft>
+            </a:pPr>
+            <a:r>
+              <a:rPr sz="1000" b="0">
+                <a:solidFill>
+                  <a:srgbClr val="54423E"/>
+                </a:solidFill>
+                <a:latin typeface="Red Hat Text"/>
+              </a:rPr>
+              <a:t>Answers carry their citation</a:t>
+            </a:r>
+          </a:p>
+        </p:txBody>
+      </p:sp>
+      <p:sp>
+        <p:nvSpPr>
+          <p:cNvPr id="23" name="Rounded Rectangle 22"/>
+          <p:cNvSpPr/>
+          <p:nvPr/>
+        </p:nvSpPr>
+        <p:spPr>
+          <a:xfrm>
+            <a:off x="10122408" y="3685032"/>
+            <a:ext cx="1389888" cy="274320"/>
+          </a:xfrm>
+          <a:prstGeom prst="roundRect">
+            <a:avLst>
+              <a:gd name="adj" fmla="val 50000"/>
+            </a:avLst>
+          </a:prstGeom>
+          <a:solidFill>
+            <a:srgbClr val="FBEAE8"/>
+          </a:solidFill>
+          <a:ln>
+            <a:noFill/>
+          </a:ln>
+          <a:effectLst/>
+        </p:spPr>
+        <p:style>
+          <a:lnRef idx="1">
+            <a:schemeClr val="accent1"/>
+          </a:lnRef>
+          <a:fillRef idx="3">
+            <a:schemeClr val="accent1"/>
+          </a:fillRef>
+          <a:effectRef idx="2">
+            <a:schemeClr val="accent1"/>
+          </a:effectRef>
+          <a:fontRef idx="minor">
+            <a:schemeClr val="lt1"/>
+          </a:fontRef>
+        </p:style>
+        <p:txBody>
+          <a:bodyPr rtlCol="0" anchor="ctr" wrap="none"/>
+          <a:lstStyle/>
+          <a:p>
+            <a:pPr algn="ctr"/>
+            <a:r>
+              <a:rPr sz="850" b="1">
+                <a:solidFill>
+                  <a:srgbClr val="A30000"/>
+                </a:solidFill>
+                <a:latin typeface="Red Hat Mono"/>
+              </a:rPr>
+              <a:t>human in the loop</a:t>
+            </a:r>
+          </a:p>
+        </p:txBody>
+      </p:sp>
+      <p:sp>
+        <p:nvSpPr>
+          <p:cNvPr id="24" name="Rectangle 23"/>
+          <p:cNvSpPr/>
+          <p:nvPr/>
+        </p:nvSpPr>
+        <p:spPr>
+          <a:xfrm>
+            <a:off x="777240" y="4617720"/>
+            <a:ext cx="41148" cy="1371600"/>
+          </a:xfrm>
+          <a:prstGeom prst="rect">
+            <a:avLst/>
+          </a:prstGeom>
+          <a:solidFill>
+            <a:srgbClr val="CC0000"/>
+          </a:solidFill>
+          <a:ln>
+            <a:noFill/>
+          </a:ln>
+          <a:effectLst/>
+        </p:spPr>
+        <p:style>
+          <a:lnRef idx="1">
+            <a:schemeClr val="accent1"/>
+          </a:lnRef>
+          <a:fillRef idx="3">
+            <a:schemeClr val="accent1"/>
+          </a:fillRef>
+          <a:effectRef idx="2">
+            <a:schemeClr val="accent1"/>
+          </a:effectRef>
+          <a:fontRef idx="minor">
+            <a:schemeClr val="lt1"/>
+          </a:fontRef>
+        </p:style>
+        <p:txBody>
+          <a:bodyPr rtlCol="0" anchor="ctr"/>
+          <a:lstStyle/>
+          <a:p>
+            <a:pPr algn="ctr"/>
+          </a:p>
+        </p:txBody>
+      </p:sp>
+      <p:sp>
+        <p:nvSpPr>
+          <p:cNvPr id="25" name="TextBox 24"/>
+          <p:cNvSpPr txBox="1"/>
+          <p:nvPr/>
+        </p:nvSpPr>
+        <p:spPr>
+          <a:xfrm>
+            <a:off x="941832" y="4617720"/>
+            <a:ext cx="5007711" cy="1371600"/>
+          </a:xfrm>
+          <a:prstGeom prst="rect">
+            <a:avLst/>
+          </a:prstGeom>
+          <a:noFill/>
+        </p:spPr>
+        <p:txBody>
+          <a:bodyPr wrap="square">
+            <a:spAutoFit/>
+          </a:bodyPr>
+          <a:lstStyle/>
+          <a:p>
+            <a:pPr algn="l">
+              <a:spcAft>
+                <a:spcPts val="600"/>
+              </a:spcAft>
+            </a:pPr>
+            <a:r>
+              <a:rPr sz="1500" b="1">
+                <a:solidFill>
+                  <a:srgbClr val="1B1211"/>
+                </a:solidFill>
+                <a:latin typeface="Red Hat Display"/>
+              </a:rPr>
+              <a:t>Start where a human already reviews the output</a:t>
+            </a:r>
+          </a:p>
+          <a:p>
+            <a:pPr algn="l">
+              <a:spcAft>
+                <a:spcPts val="0"/>
+              </a:spcAft>
+            </a:pPr>
+            <a:r>
+              <a:rPr sz="1200" b="0">
+                <a:solidFill>
+                  <a:srgbClr val="54423E"/>
+                </a:solidFill>
+                <a:latin typeface="Red Hat Text"/>
+              </a:rPr>
+              <a:t>If a person signs the letter today, a model that drafts it changes throughput without changing accountability.</a:t>
+            </a:r>
+          </a:p>
+        </p:txBody>
+      </p:sp>
+      <p:sp>
+        <p:nvSpPr>
+          <p:cNvPr id="26" name="Rectangle 25"/>
+          <p:cNvSpPr/>
+          <p:nvPr/>
+        </p:nvSpPr>
+        <p:spPr>
+          <a:xfrm>
+            <a:off x="6242151" y="4617720"/>
+            <a:ext cx="41148" cy="1371600"/>
+          </a:xfrm>
+          <a:prstGeom prst="rect">
+            <a:avLst/>
+          </a:prstGeom>
+          <a:solidFill>
+            <a:srgbClr val="CC0000"/>
+          </a:solidFill>
+          <a:ln>
+            <a:noFill/>
+          </a:ln>
+          <a:effectLst/>
+        </p:spPr>
+        <p:style>
+          <a:lnRef idx="1">
+            <a:schemeClr val="accent1"/>
+          </a:lnRef>
+          <a:fillRef idx="3">
+            <a:schemeClr val="accent1"/>
+          </a:fillRef>
+          <a:effectRef idx="2">
+            <a:schemeClr val="accent1"/>
+          </a:effectRef>
+          <a:fontRef idx="minor">
+            <a:schemeClr val="lt1"/>
+          </a:fontRef>
+        </p:style>
+        <p:txBody>
+          <a:bodyPr rtlCol="0" anchor="ctr"/>
+          <a:lstStyle/>
+          <a:p>
+            <a:pPr algn="ctr"/>
+          </a:p>
+        </p:txBody>
+      </p:sp>
+      <p:sp>
+        <p:nvSpPr>
+          <p:cNvPr id="27" name="TextBox 26"/>
+          <p:cNvSpPr txBox="1"/>
+          <p:nvPr/>
+        </p:nvSpPr>
+        <p:spPr>
+          <a:xfrm>
+            <a:off x="6406743" y="4617720"/>
+            <a:ext cx="5007711" cy="1371600"/>
+          </a:xfrm>
+          <a:prstGeom prst="rect">
+            <a:avLst/>
+          </a:prstGeom>
+          <a:noFill/>
+        </p:spPr>
+        <p:txBody>
+          <a:bodyPr wrap="square">
+            <a:spAutoFit/>
+          </a:bodyPr>
+          <a:lstStyle/>
+          <a:p>
+            <a:pPr algn="l">
+              <a:spcAft>
+                <a:spcPts val="600"/>
+              </a:spcAft>
+            </a:pPr>
+            <a:r>
+              <a:rPr sz="1500" b="1">
+                <a:solidFill>
+                  <a:srgbClr val="1B1211"/>
+                </a:solidFill>
+                <a:latin typeface="Red Hat Display"/>
+              </a:rPr>
+              <a:t>Automate the toil around the model, not just the model</a:t>
+            </a:r>
+          </a:p>
+          <a:p>
+            <a:pPr algn="l">
+              <a:spcAft>
+                <a:spcPts val="0"/>
+              </a:spcAft>
+            </a:pPr>
+            <a:r>
+              <a:rPr sz="1200" b="0">
+                <a:solidFill>
+                  <a:srgbClr val="54423E"/>
+                </a:solidFill>
+                <a:latin typeface="Red Hat Text"/>
+              </a:rPr>
+              <a:t>Provisioning, patching, scaling and evidence collection are most of the work — and that problem is already solved.</a:t>
+            </a:r>
+          </a:p>
+        </p:txBody>
+      </p:sp>
     </p:spTree>
   </p:cSld>
   <p:clrMapOvr>
@@ -5513,7 +8061,7 @@
         </p:nvSpPr>
         <p:spPr>
           <a:xfrm>
-            <a:off x="777240" y="566928"/>
+            <a:off x="777240" y="502920"/>
             <a:ext cx="10637215" cy="310896"/>
           </a:xfrm>
           <a:prstGeom prst="rect">
@@ -5535,7 +8083,7 @@
             <a:r>
               <a:rPr sz="1100" b="1">
                 <a:solidFill>
-                  <a:srgbClr val="8A7671"/>
+                  <a:srgbClr val="7E6A64"/>
                 </a:solidFill>
                 <a:latin typeface="Red Hat Mono"/>
               </a:rPr>
@@ -5552,8 +8100,8 @@
         </p:nvSpPr>
         <p:spPr>
           <a:xfrm>
-            <a:off x="777240" y="932688"/>
-            <a:ext cx="10637215" cy="914400"/>
+            <a:off x="777240" y="868680"/>
+            <a:ext cx="10637215" cy="822960"/>
           </a:xfrm>
           <a:prstGeom prst="rect">
             <a:avLst/>
@@ -5592,7 +8140,7 @@
           <p:nvPr/>
         </p:nvGraphicFramePr>
         <p:xfrm>
-          <a:off x="777240" y="2286000"/>
+          <a:off x="777240" y="2194560"/>
           <a:ext cx="10607040" cy="1975104"/>
         </p:xfrm>
         <a:graphic>
@@ -5615,7 +8163,7 @@
                       <a:r>
                         <a:rPr sz="1050" b="1">
                           <a:solidFill>
-                            <a:srgbClr val="8A7671"/>
+                            <a:srgbClr val="7E6A64"/>
                           </a:solidFill>
                           <a:latin typeface="Red Hat Mono"/>
                         </a:rPr>
@@ -5637,7 +8185,7 @@
                       <a:r>
                         <a:rPr sz="1050" b="1">
                           <a:solidFill>
-                            <a:srgbClr val="8A7671"/>
+                            <a:srgbClr val="7E6A64"/>
                           </a:solidFill>
                           <a:latin typeface="Red Hat Mono"/>
                         </a:rPr>
@@ -5659,7 +8207,7 @@
                       <a:r>
                         <a:rPr sz="1050" b="1">
                           <a:solidFill>
-                            <a:srgbClr val="8A7671"/>
+                            <a:srgbClr val="7E6A64"/>
                           </a:solidFill>
                           <a:latin typeface="Red Hat Mono"/>
                         </a:rPr>
@@ -6096,7 +8644,7 @@
         </p:nvSpPr>
         <p:spPr>
           <a:xfrm>
-            <a:off x="777240" y="566928"/>
+            <a:off x="777240" y="502920"/>
             <a:ext cx="10637215" cy="310896"/>
           </a:xfrm>
           <a:prstGeom prst="rect">
@@ -6118,7 +8666,7 @@
             <a:r>
               <a:rPr sz="1100" b="1">
                 <a:solidFill>
-                  <a:srgbClr val="8A7671"/>
+                  <a:srgbClr val="7E6A64"/>
                 </a:solidFill>
                 <a:latin typeface="Red Hat Mono"/>
               </a:rPr>
@@ -6135,8 +8683,8 @@
         </p:nvSpPr>
         <p:spPr>
           <a:xfrm>
-            <a:off x="777240" y="932688"/>
-            <a:ext cx="10637215" cy="914400"/>
+            <a:off x="777240" y="868680"/>
+            <a:ext cx="10637215" cy="822960"/>
           </a:xfrm>
           <a:prstGeom prst="rect">
             <a:avLst/>
@@ -6166,262 +8714,54 @@
           </a:p>
         </p:txBody>
       </p:sp>
-      <p:graphicFrame>
-        <p:nvGraphicFramePr>
-          <p:cNvPr id="5" name="Table 4"/>
-          <p:cNvGraphicFramePr>
-            <a:graphicFrameLocks noGrp="1"/>
-          </p:cNvGraphicFramePr>
-          <p:nvPr/>
-        </p:nvGraphicFramePr>
-        <p:xfrm>
-          <a:off x="777240" y="2286000"/>
-          <a:ext cx="10607040" cy="1645920"/>
-        </p:xfrm>
-        <a:graphic>
-          <a:graphicData uri="http://schemas.openxmlformats.org/drawingml/2006/table">
-            <a:tbl>
-              <a:tblPr firstRow="1" bandRow="1">
-                <a:tableStyleId>{5C22544A-7EE6-4342-B048-85BDC9FD1C3A}</a:tableStyleId>
-              </a:tblPr>
-              <a:tblGrid>
-                <a:gridCol w="3200400"/>
-                <a:gridCol w="7406640"/>
-              </a:tblGrid>
-              <a:tr h="329184">
-                <a:tc>
-                  <a:txBody>
-                    <a:bodyPr wrap="square"/>
-                    <a:lstStyle/>
-                    <a:p>
-                      <a:r>
-                        <a:rPr sz="1050" b="1">
-                          <a:solidFill>
-                            <a:srgbClr val="8A7671"/>
-                          </a:solidFill>
-                          <a:latin typeface="Red Hat Mono"/>
-                        </a:rPr>
-                        <a:t>Layer</a:t>
-                      </a:r>
-                    </a:p>
-                  </a:txBody>
-                  <a:tcPr marL="109728" marR="109728" marT="45720" marB="45720">
-                    <a:solidFill>
-                      <a:srgbClr val="F4EFED"/>
-                    </a:solidFill>
-                  </a:tcPr>
-                </a:tc>
-                <a:tc>
-                  <a:txBody>
-                    <a:bodyPr wrap="square"/>
-                    <a:lstStyle/>
-                    <a:p>
-                      <a:r>
-                        <a:rPr sz="1050" b="1">
-                          <a:solidFill>
-                            <a:srgbClr val="8A7671"/>
-                          </a:solidFill>
-                          <a:latin typeface="Red Hat Mono"/>
-                        </a:rPr>
-                        <a:t>What it provides</a:t>
-                      </a:r>
-                    </a:p>
-                  </a:txBody>
-                  <a:tcPr marL="109728" marR="109728" marT="45720" marB="45720">
-                    <a:solidFill>
-                      <a:srgbClr val="F4EFED"/>
-                    </a:solidFill>
-                  </a:tcPr>
-                </a:tc>
-              </a:tr>
-              <a:tr h="329184">
-                <a:tc>
-                  <a:txBody>
-                    <a:bodyPr wrap="square"/>
-                    <a:lstStyle/>
-                    <a:p>
-                      <a:r>
-                        <a:rPr sz="1200" b="0">
-                          <a:solidFill>
-                            <a:srgbClr val="1B1211"/>
-                          </a:solidFill>
-                          <a:latin typeface="Red Hat Text"/>
-                        </a:rPr>
-                        <a:t>Mission applications</a:t>
-                      </a:r>
-                    </a:p>
-                  </a:txBody>
-                  <a:tcPr marL="109728" marR="109728" marT="45720" marB="45720">
-                    <a:solidFill>
-                      <a:srgbClr val="FBF9F8"/>
-                    </a:solidFill>
-                  </a:tcPr>
-                </a:tc>
-                <a:tc>
-                  <a:txBody>
-                    <a:bodyPr wrap="square"/>
-                    <a:lstStyle/>
-                    <a:p>
-                      <a:r>
-                        <a:rPr sz="1200" b="0">
-                          <a:solidFill>
-                            <a:srgbClr val="1B1211"/>
-                          </a:solidFill>
-                          <a:latin typeface="Red Hat Text"/>
-                        </a:rPr>
-                        <a:t>Correspondence intake · notice drafting · case summarization · guidance assistant</a:t>
-                      </a:r>
-                    </a:p>
-                  </a:txBody>
-                  <a:tcPr marL="109728" marR="109728" marT="45720" marB="45720">
-                    <a:solidFill>
-                      <a:srgbClr val="FBF9F8"/>
-                    </a:solidFill>
-                  </a:tcPr>
-                </a:tc>
-              </a:tr>
-              <a:tr h="329184">
-                <a:tc>
-                  <a:txBody>
-                    <a:bodyPr wrap="square"/>
-                    <a:lstStyle/>
-                    <a:p>
-                      <a:r>
-                        <a:rPr sz="1200" b="0">
-                          <a:solidFill>
-                            <a:srgbClr val="1B1211"/>
-                          </a:solidFill>
-                          <a:latin typeface="Red Hat Text"/>
-                        </a:rPr>
-                        <a:t>Red Hat OpenShift AI</a:t>
-                      </a:r>
-                    </a:p>
-                  </a:txBody>
-                  <a:tcPr marL="109728" marR="109728" marT="45720" marB="45720">
-                    <a:solidFill>
-                      <a:srgbClr val="FBF9F8"/>
-                    </a:solidFill>
-                  </a:tcPr>
-                </a:tc>
-                <a:tc>
-                  <a:txBody>
-                    <a:bodyPr wrap="square"/>
-                    <a:lstStyle/>
-                    <a:p>
-                      <a:r>
-                        <a:rPr sz="1200" b="0">
-                          <a:solidFill>
-                            <a:srgbClr val="1B1211"/>
-                          </a:solidFill>
-                          <a:latin typeface="Red Hat Text"/>
-                        </a:rPr>
-                        <a:t>KServe + vLLM serving · tuning pipelines · model registry · retrieval</a:t>
-                      </a:r>
-                    </a:p>
-                  </a:txBody>
-                  <a:tcPr marL="109728" marR="109728" marT="45720" marB="45720">
-                    <a:solidFill>
-                      <a:srgbClr val="FBF9F8"/>
-                    </a:solidFill>
-                  </a:tcPr>
-                </a:tc>
-              </a:tr>
-              <a:tr h="329184">
-                <a:tc>
-                  <a:txBody>
-                    <a:bodyPr wrap="square"/>
-                    <a:lstStyle/>
-                    <a:p>
-                      <a:r>
-                        <a:rPr sz="1200" b="0">
-                          <a:solidFill>
-                            <a:srgbClr val="1B1211"/>
-                          </a:solidFill>
-                          <a:latin typeface="Red Hat Text"/>
-                        </a:rPr>
-                        <a:t>Red Hat OpenShift</a:t>
-                      </a:r>
-                    </a:p>
-                  </a:txBody>
-                  <a:tcPr marL="109728" marR="109728" marT="45720" marB="45720">
-                    <a:solidFill>
-                      <a:srgbClr val="FBF9F8"/>
-                    </a:solidFill>
-                  </a:tcPr>
-                </a:tc>
-                <a:tc>
-                  <a:txBody>
-                    <a:bodyPr wrap="square"/>
-                    <a:lstStyle/>
-                    <a:p>
-                      <a:r>
-                        <a:rPr sz="1200" b="0">
-                          <a:solidFill>
-                            <a:srgbClr val="1B1211"/>
-                          </a:solidFill>
-                          <a:latin typeface="Red Hat Text"/>
-                        </a:rPr>
-                        <a:t>Scheduling · GPU partitioning · network policy · GitOps delivery</a:t>
-                      </a:r>
-                    </a:p>
-                  </a:txBody>
-                  <a:tcPr marL="109728" marR="109728" marT="45720" marB="45720">
-                    <a:solidFill>
-                      <a:srgbClr val="FBF9F8"/>
-                    </a:solidFill>
-                  </a:tcPr>
-                </a:tc>
-              </a:tr>
-              <a:tr h="329184">
-                <a:tc>
-                  <a:txBody>
-                    <a:bodyPr wrap="square"/>
-                    <a:lstStyle/>
-                    <a:p>
-                      <a:r>
-                        <a:rPr sz="1200" b="0">
-                          <a:solidFill>
-                            <a:srgbClr val="1B1211"/>
-                          </a:solidFill>
-                          <a:latin typeface="Red Hat Text"/>
-                        </a:rPr>
-                        <a:t>RHEL / RHEL AI</a:t>
-                      </a:r>
-                    </a:p>
-                  </a:txBody>
-                  <a:tcPr marL="109728" marR="109728" marT="45720" marB="45720">
-                    <a:solidFill>
-                      <a:srgbClr val="FBF9F8"/>
-                    </a:solidFill>
-                  </a:tcPr>
-                </a:tc>
-                <a:tc>
-                  <a:txBody>
-                    <a:bodyPr wrap="square"/>
-                    <a:lstStyle/>
-                    <a:p>
-                      <a:r>
-                        <a:rPr sz="1200" b="0">
-                          <a:solidFill>
-                            <a:srgbClr val="1B1211"/>
-                          </a:solidFill>
-                          <a:latin typeface="Red Hat Text"/>
-                        </a:rPr>
-                        <a:t>Bare metal · virtualized · accredited cloud · classified enclave</a:t>
-                      </a:r>
-                    </a:p>
-                  </a:txBody>
-                  <a:tcPr marL="109728" marR="109728" marT="45720" marB="45720">
-                    <a:solidFill>
-                      <a:srgbClr val="FBF9F8"/>
-                    </a:solidFill>
-                  </a:tcPr>
-                </a:tc>
-              </a:tr>
-            </a:tbl>
-          </a:graphicData>
-        </a:graphic>
-      </p:graphicFrame>
+      <p:sp>
+        <p:nvSpPr>
+          <p:cNvPr id="5" name="Rounded Rectangle 4"/>
+          <p:cNvSpPr/>
+          <p:nvPr/>
+        </p:nvSpPr>
+        <p:spPr>
+          <a:xfrm>
+            <a:off x="777240" y="1828800"/>
+            <a:ext cx="1188720" cy="4617720"/>
+          </a:xfrm>
+          <a:prstGeom prst="roundRect">
+            <a:avLst>
+              <a:gd name="adj" fmla="val 8000"/>
+            </a:avLst>
+          </a:prstGeom>
+          <a:solidFill>
+            <a:srgbClr val="FBEAE8"/>
+          </a:solidFill>
+          <a:ln w="15875">
+            <a:solidFill>
+              <a:srgbClr val="CC0000"/>
+            </a:solidFill>
+          </a:ln>
+          <a:effectLst/>
+        </p:spPr>
+        <p:style>
+          <a:lnRef idx="1">
+            <a:schemeClr val="accent1"/>
+          </a:lnRef>
+          <a:fillRef idx="3">
+            <a:schemeClr val="accent1"/>
+          </a:fillRef>
+          <a:effectRef idx="2">
+            <a:schemeClr val="accent1"/>
+          </a:effectRef>
+          <a:fontRef idx="minor">
+            <a:schemeClr val="lt1"/>
+          </a:fontRef>
+        </p:style>
+        <p:txBody>
+          <a:bodyPr rtlCol="0" anchor="ctr"/>
+          <a:lstStyle/>
+          <a:p>
+            <a:pPr algn="ctr"/>
+          </a:p>
+        </p:txBody>
+      </p:sp>
       <p:sp>
         <p:nvSpPr>
           <p:cNvPr id="6" name="TextBox 5"/>
@@ -6430,8 +8770,8 @@
         </p:nvSpPr>
         <p:spPr>
           <a:xfrm>
-            <a:off x="777240" y="4709160"/>
-            <a:ext cx="10515600" cy="1188720"/>
+            <a:off x="777240" y="1938528"/>
+            <a:ext cx="1188720" cy="4434840"/>
           </a:xfrm>
           <a:prstGeom prst="rect">
             <a:avLst/>
@@ -6444,35 +8784,433 @@
           </a:bodyPr>
           <a:lstStyle/>
           <a:p>
-            <a:pPr algn="l">
+            <a:pPr algn="ctr">
               <a:spcAft>
                 <a:spcPts val="800"/>
               </a:spcAft>
             </a:pPr>
             <a:r>
-              <a:rPr sz="1600" b="1">
-                <a:solidFill>
-                  <a:srgbClr val="1B1211"/>
-                </a:solidFill>
-                <a:latin typeface="Red Hat Display"/>
-              </a:rPr>
-              <a:t>Running vertically through every layer</a:t>
-            </a:r>
-          </a:p>
-          <a:p>
-            <a:pPr algn="l">
+              <a:rPr sz="1100" b="1">
+                <a:solidFill>
+                  <a:srgbClr val="A30000"/>
+                </a:solidFill>
+                <a:latin typeface="Red Hat Mono"/>
+              </a:rPr>
+              <a:t>TRUST</a:t>
+            </a:r>
+          </a:p>
+          <a:p>
+            <a:pPr algn="ctr">
               <a:spcAft>
                 <a:spcPts val="400"/>
               </a:spcAft>
             </a:pPr>
             <a:r>
-              <a:rPr sz="1300" b="0">
+              <a:rPr sz="950" b="0">
                 <a:solidFill>
                   <a:srgbClr val="54423E"/>
                 </a:solidFill>
                 <a:latin typeface="Red Hat Text"/>
               </a:rPr>
-              <a:t>Automation — Ansible Automation Platform provisions, patches, remediates and collects evidence (Lab 05)</a:t>
+              <a:t>Signed models</a:t>
+            </a:r>
+          </a:p>
+          <a:p>
+            <a:pPr algn="ctr">
+              <a:spcAft>
+                <a:spcPts val="400"/>
+              </a:spcAft>
+            </a:pPr>
+            <a:r>
+              <a:rPr sz="950" b="0">
+                <a:solidFill>
+                  <a:srgbClr val="54423E"/>
+                </a:solidFill>
+                <a:latin typeface="Red Hat Text"/>
+              </a:rPr>
+              <a:t>FIPS crypto</a:t>
+            </a:r>
+          </a:p>
+          <a:p>
+            <a:pPr algn="ctr">
+              <a:spcAft>
+                <a:spcPts val="400"/>
+              </a:spcAft>
+            </a:pPr>
+            <a:r>
+              <a:rPr sz="950" b="0">
+                <a:solidFill>
+                  <a:srgbClr val="54423E"/>
+                </a:solidFill>
+                <a:latin typeface="Red Hat Text"/>
+              </a:rPr>
+              <a:t>SELinux</a:t>
+            </a:r>
+          </a:p>
+          <a:p>
+            <a:pPr algn="ctr">
+              <a:spcAft>
+                <a:spcPts val="400"/>
+              </a:spcAft>
+            </a:pPr>
+            <a:r>
+              <a:rPr sz="950" b="0">
+                <a:solidFill>
+                  <a:srgbClr val="54423E"/>
+                </a:solidFill>
+                <a:latin typeface="Red Hat Text"/>
+              </a:rPr>
+              <a:t>Compliance Operator</a:t>
+            </a:r>
+          </a:p>
+          <a:p>
+            <a:pPr algn="ctr">
+              <a:spcAft>
+                <a:spcPts val="400"/>
+              </a:spcAft>
+            </a:pPr>
+            <a:r>
+              <a:rPr sz="950" b="0">
+                <a:solidFill>
+                  <a:srgbClr val="54423E"/>
+                </a:solidFill>
+                <a:latin typeface="Red Hat Text"/>
+              </a:rPr>
+              <a:t>TrustyAI drift + bias</a:t>
+            </a:r>
+          </a:p>
+          <a:p>
+            <a:pPr algn="ctr">
+              <a:spcAft>
+                <a:spcPts val="400"/>
+              </a:spcAft>
+            </a:pPr>
+            <a:r>
+              <a:rPr sz="950" b="0">
+                <a:solidFill>
+                  <a:srgbClr val="54423E"/>
+                </a:solidFill>
+                <a:latin typeface="Red Hat Text"/>
+              </a:rPr>
+              <a:t>Audit trail</a:t>
+            </a:r>
+          </a:p>
+          <a:p>
+            <a:pPr algn="ctr">
+              <a:spcAft>
+                <a:spcPts val="800"/>
+              </a:spcAft>
+            </a:pPr>
+            <a:r>
+              <a:rPr sz="950" b="0">
+                <a:solidFill>
+                  <a:srgbClr val="54423E"/>
+                </a:solidFill>
+                <a:latin typeface="Red Hat Text"/>
+              </a:rPr>
+              <a:t>Air-gap mirroring</a:t>
+            </a:r>
+          </a:p>
+          <a:p>
+            <a:pPr algn="ctr">
+              <a:spcAft>
+                <a:spcPts val="0"/>
+              </a:spcAft>
+            </a:pPr>
+            <a:r>
+              <a:rPr sz="850" b="0">
+                <a:solidFill>
+                  <a:srgbClr val="7E6A64"/>
+                </a:solidFill>
+                <a:latin typeface="Red Hat Mono"/>
+              </a:rPr>
+              <a:t>Lab 06</a:t>
+            </a:r>
+          </a:p>
+        </p:txBody>
+      </p:sp>
+      <p:sp>
+        <p:nvSpPr>
+          <p:cNvPr id="7" name="Rounded Rectangle 6"/>
+          <p:cNvSpPr/>
+          <p:nvPr/>
+        </p:nvSpPr>
+        <p:spPr>
+          <a:xfrm>
+            <a:off x="10225735" y="1828800"/>
+            <a:ext cx="1188720" cy="4617720"/>
+          </a:xfrm>
+          <a:prstGeom prst="roundRect">
+            <a:avLst>
+              <a:gd name="adj" fmla="val 8000"/>
+            </a:avLst>
+          </a:prstGeom>
+          <a:solidFill>
+            <a:srgbClr val="E7F1F5"/>
+          </a:solidFill>
+          <a:ln w="15875">
+            <a:solidFill>
+              <a:srgbClr val="286C88"/>
+            </a:solidFill>
+          </a:ln>
+          <a:effectLst/>
+        </p:spPr>
+        <p:style>
+          <a:lnRef idx="1">
+            <a:schemeClr val="accent1"/>
+          </a:lnRef>
+          <a:fillRef idx="3">
+            <a:schemeClr val="accent1"/>
+          </a:fillRef>
+          <a:effectRef idx="2">
+            <a:schemeClr val="accent1"/>
+          </a:effectRef>
+          <a:fontRef idx="minor">
+            <a:schemeClr val="lt1"/>
+          </a:fontRef>
+        </p:style>
+        <p:txBody>
+          <a:bodyPr rtlCol="0" anchor="ctr"/>
+          <a:lstStyle/>
+          <a:p>
+            <a:pPr algn="ctr"/>
+          </a:p>
+        </p:txBody>
+      </p:sp>
+      <p:sp>
+        <p:nvSpPr>
+          <p:cNvPr id="8" name="TextBox 7"/>
+          <p:cNvSpPr txBox="1"/>
+          <p:nvPr/>
+        </p:nvSpPr>
+        <p:spPr>
+          <a:xfrm>
+            <a:off x="10225735" y="1938528"/>
+            <a:ext cx="1188720" cy="4434840"/>
+          </a:xfrm>
+          <a:prstGeom prst="rect">
+            <a:avLst/>
+          </a:prstGeom>
+          <a:noFill/>
+        </p:spPr>
+        <p:txBody>
+          <a:bodyPr wrap="square">
+            <a:spAutoFit/>
+          </a:bodyPr>
+          <a:lstStyle/>
+          <a:p>
+            <a:pPr algn="ctr">
+              <a:spcAft>
+                <a:spcPts val="800"/>
+              </a:spcAft>
+            </a:pPr>
+            <a:r>
+              <a:rPr sz="1100" b="1">
+                <a:solidFill>
+                  <a:srgbClr val="286C88"/>
+                </a:solidFill>
+                <a:latin typeface="Red Hat Mono"/>
+              </a:rPr>
+              <a:t>AUTOMATION</a:t>
+            </a:r>
+          </a:p>
+          <a:p>
+            <a:pPr algn="ctr">
+              <a:spcAft>
+                <a:spcPts val="400"/>
+              </a:spcAft>
+            </a:pPr>
+            <a:r>
+              <a:rPr sz="950" b="0">
+                <a:solidFill>
+                  <a:srgbClr val="54423E"/>
+                </a:solidFill>
+                <a:latin typeface="Red Hat Text"/>
+              </a:rPr>
+              <a:t>Ansible Automation Platform</a:t>
+            </a:r>
+          </a:p>
+          <a:p>
+            <a:pPr algn="ctr">
+              <a:spcAft>
+                <a:spcPts val="400"/>
+              </a:spcAft>
+            </a:pPr>
+            <a:r>
+              <a:rPr sz="950" b="0">
+                <a:solidFill>
+                  <a:srgbClr val="54423E"/>
+                </a:solidFill>
+                <a:latin typeface="Red Hat Text"/>
+              </a:rPr>
+              <a:t>Event-Driven Ansible</a:t>
+            </a:r>
+          </a:p>
+          <a:p>
+            <a:pPr algn="ctr">
+              <a:spcAft>
+                <a:spcPts val="400"/>
+              </a:spcAft>
+            </a:pPr>
+            <a:r>
+              <a:rPr sz="950" b="0">
+                <a:solidFill>
+                  <a:srgbClr val="54423E"/>
+                </a:solidFill>
+                <a:latin typeface="Red Hat Text"/>
+              </a:rPr>
+              <a:t>Provision</a:t>
+            </a:r>
+          </a:p>
+          <a:p>
+            <a:pPr algn="ctr">
+              <a:spcAft>
+                <a:spcPts val="400"/>
+              </a:spcAft>
+            </a:pPr>
+            <a:r>
+              <a:rPr sz="950" b="0">
+                <a:solidFill>
+                  <a:srgbClr val="54423E"/>
+                </a:solidFill>
+                <a:latin typeface="Red Hat Text"/>
+              </a:rPr>
+              <a:t>Patch</a:t>
+            </a:r>
+          </a:p>
+          <a:p>
+            <a:pPr algn="ctr">
+              <a:spcAft>
+                <a:spcPts val="400"/>
+              </a:spcAft>
+            </a:pPr>
+            <a:r>
+              <a:rPr sz="950" b="0">
+                <a:solidFill>
+                  <a:srgbClr val="54423E"/>
+                </a:solidFill>
+                <a:latin typeface="Red Hat Text"/>
+              </a:rPr>
+              <a:t>Remediate</a:t>
+            </a:r>
+          </a:p>
+          <a:p>
+            <a:pPr algn="ctr">
+              <a:spcAft>
+                <a:spcPts val="800"/>
+              </a:spcAft>
+            </a:pPr>
+            <a:r>
+              <a:rPr sz="950" b="0">
+                <a:solidFill>
+                  <a:srgbClr val="54423E"/>
+                </a:solidFill>
+                <a:latin typeface="Red Hat Text"/>
+              </a:rPr>
+              <a:t>Evidence collection</a:t>
+            </a:r>
+          </a:p>
+          <a:p>
+            <a:pPr algn="ctr">
+              <a:spcAft>
+                <a:spcPts val="0"/>
+              </a:spcAft>
+            </a:pPr>
+            <a:r>
+              <a:rPr sz="850" b="0">
+                <a:solidFill>
+                  <a:srgbClr val="7E6A64"/>
+                </a:solidFill>
+                <a:latin typeface="Red Hat Mono"/>
+              </a:rPr>
+              <a:t>Lab 05</a:t>
+            </a:r>
+          </a:p>
+        </p:txBody>
+      </p:sp>
+      <p:sp>
+        <p:nvSpPr>
+          <p:cNvPr id="9" name="Rounded Rectangle 8"/>
+          <p:cNvSpPr/>
+          <p:nvPr/>
+        </p:nvSpPr>
+        <p:spPr>
+          <a:xfrm>
+            <a:off x="2194560" y="1828800"/>
+            <a:ext cx="7802575" cy="914400"/>
+          </a:xfrm>
+          <a:prstGeom prst="roundRect">
+            <a:avLst>
+              <a:gd name="adj" fmla="val 10000"/>
+            </a:avLst>
+          </a:prstGeom>
+          <a:solidFill>
+            <a:srgbClr val="FFFFFF"/>
+          </a:solidFill>
+          <a:ln w="12700">
+            <a:solidFill>
+              <a:srgbClr val="CFC2BE"/>
+            </a:solidFill>
+          </a:ln>
+          <a:effectLst/>
+        </p:spPr>
+        <p:style>
+          <a:lnRef idx="1">
+            <a:schemeClr val="accent1"/>
+          </a:lnRef>
+          <a:fillRef idx="3">
+            <a:schemeClr val="accent1"/>
+          </a:fillRef>
+          <a:effectRef idx="2">
+            <a:schemeClr val="accent1"/>
+          </a:effectRef>
+          <a:fontRef idx="minor">
+            <a:schemeClr val="lt1"/>
+          </a:fontRef>
+        </p:style>
+        <p:txBody>
+          <a:bodyPr rtlCol="0" anchor="ctr"/>
+          <a:lstStyle/>
+          <a:p>
+            <a:pPr algn="ctr"/>
+          </a:p>
+        </p:txBody>
+      </p:sp>
+      <p:sp>
+        <p:nvSpPr>
+          <p:cNvPr id="10" name="TextBox 9"/>
+          <p:cNvSpPr txBox="1"/>
+          <p:nvPr/>
+        </p:nvSpPr>
+        <p:spPr>
+          <a:xfrm>
+            <a:off x="2395728" y="1874520"/>
+            <a:ext cx="6705295" cy="914400"/>
+          </a:xfrm>
+          <a:prstGeom prst="rect">
+            <a:avLst/>
+          </a:prstGeom>
+          <a:noFill/>
+        </p:spPr>
+        <p:txBody>
+          <a:bodyPr wrap="square">
+            <a:spAutoFit/>
+          </a:bodyPr>
+          <a:lstStyle/>
+          <a:p>
+            <a:pPr algn="l">
+              <a:spcAft>
+                <a:spcPts val="200"/>
+              </a:spcAft>
+            </a:pPr>
+            <a:r>
+              <a:rPr sz="1250" b="1">
+                <a:solidFill>
+                  <a:srgbClr val="1B1211"/>
+                </a:solidFill>
+                <a:latin typeface="Red Hat Display"/>
+              </a:rPr>
+              <a:t>Mission applications</a:t>
             </a:r>
           </a:p>
           <a:p>
@@ -6482,14 +9220,1231 @@
               </a:spcAft>
             </a:pPr>
             <a:r>
-              <a:rPr sz="1300" b="0">
+              <a:rPr sz="950" b="0">
                 <a:solidFill>
                   <a:srgbClr val="54423E"/>
                 </a:solidFill>
                 <a:latin typeface="Red Hat Text"/>
               </a:rPr>
-              <a:t>Trust — signed models, FIPS crypto, SELinux, Compliance Operator, TrustyAI, disconnected mirroring (Lab 06)</a:t>
-            </a:r>
+              <a:t>Correspondence intake · Notice drafting · Case summarization · Guidance assistant</a:t>
+            </a:r>
+          </a:p>
+        </p:txBody>
+      </p:sp>
+      <p:sp>
+        <p:nvSpPr>
+          <p:cNvPr id="11" name="Oval 10"/>
+          <p:cNvSpPr/>
+          <p:nvPr/>
+        </p:nvSpPr>
+        <p:spPr>
+          <a:xfrm>
+            <a:off x="2423160" y="2487168"/>
+            <a:ext cx="91440" cy="91440"/>
+          </a:xfrm>
+          <a:prstGeom prst="ellipse">
+            <a:avLst/>
+          </a:prstGeom>
+          <a:solidFill>
+            <a:srgbClr val="CC0000"/>
+          </a:solidFill>
+          <a:ln>
+            <a:noFill/>
+          </a:ln>
+          <a:effectLst/>
+        </p:spPr>
+        <p:style>
+          <a:lnRef idx="1">
+            <a:schemeClr val="accent1"/>
+          </a:lnRef>
+          <a:fillRef idx="3">
+            <a:schemeClr val="accent1"/>
+          </a:fillRef>
+          <a:effectRef idx="2">
+            <a:schemeClr val="accent1"/>
+          </a:effectRef>
+          <a:fontRef idx="minor">
+            <a:schemeClr val="lt1"/>
+          </a:fontRef>
+        </p:style>
+        <p:txBody>
+          <a:bodyPr rtlCol="0" anchor="ctr"/>
+          <a:lstStyle/>
+          <a:p>
+            <a:pPr algn="ctr"/>
+          </a:p>
+        </p:txBody>
+      </p:sp>
+      <p:sp>
+        <p:nvSpPr>
+          <p:cNvPr id="12" name="Oval 11"/>
+          <p:cNvSpPr/>
+          <p:nvPr/>
+        </p:nvSpPr>
+        <p:spPr>
+          <a:xfrm>
+            <a:off x="4572000" y="2487168"/>
+            <a:ext cx="91440" cy="91440"/>
+          </a:xfrm>
+          <a:prstGeom prst="ellipse">
+            <a:avLst/>
+          </a:prstGeom>
+          <a:solidFill>
+            <a:srgbClr val="286C88"/>
+          </a:solidFill>
+          <a:ln>
+            <a:noFill/>
+          </a:ln>
+          <a:effectLst/>
+        </p:spPr>
+        <p:style>
+          <a:lnRef idx="1">
+            <a:schemeClr val="accent1"/>
+          </a:lnRef>
+          <a:fillRef idx="3">
+            <a:schemeClr val="accent1"/>
+          </a:fillRef>
+          <a:effectRef idx="2">
+            <a:schemeClr val="accent1"/>
+          </a:effectRef>
+          <a:fontRef idx="minor">
+            <a:schemeClr val="lt1"/>
+          </a:fontRef>
+        </p:style>
+        <p:txBody>
+          <a:bodyPr rtlCol="0" anchor="ctr"/>
+          <a:lstStyle/>
+          <a:p>
+            <a:pPr algn="ctr"/>
+          </a:p>
+        </p:txBody>
+      </p:sp>
+      <p:sp>
+        <p:nvSpPr>
+          <p:cNvPr id="13" name="Oval 12"/>
+          <p:cNvSpPr/>
+          <p:nvPr/>
+        </p:nvSpPr>
+        <p:spPr>
+          <a:xfrm>
+            <a:off x="6720840" y="2487168"/>
+            <a:ext cx="91440" cy="91440"/>
+          </a:xfrm>
+          <a:prstGeom prst="ellipse">
+            <a:avLst/>
+          </a:prstGeom>
+          <a:solidFill>
+            <a:srgbClr val="96620A"/>
+          </a:solidFill>
+          <a:ln>
+            <a:noFill/>
+          </a:ln>
+          <a:effectLst/>
+        </p:spPr>
+        <p:style>
+          <a:lnRef idx="1">
+            <a:schemeClr val="accent1"/>
+          </a:lnRef>
+          <a:fillRef idx="3">
+            <a:schemeClr val="accent1"/>
+          </a:fillRef>
+          <a:effectRef idx="2">
+            <a:schemeClr val="accent1"/>
+          </a:effectRef>
+          <a:fontRef idx="minor">
+            <a:schemeClr val="lt1"/>
+          </a:fontRef>
+        </p:style>
+        <p:txBody>
+          <a:bodyPr rtlCol="0" anchor="ctr"/>
+          <a:lstStyle/>
+          <a:p>
+            <a:pPr algn="ctr"/>
+          </a:p>
+        </p:txBody>
+      </p:sp>
+      <p:sp>
+        <p:nvSpPr>
+          <p:cNvPr id="14" name="Oval 13"/>
+          <p:cNvSpPr/>
+          <p:nvPr/>
+        </p:nvSpPr>
+        <p:spPr>
+          <a:xfrm>
+            <a:off x="8869680" y="2487168"/>
+            <a:ext cx="91440" cy="91440"/>
+          </a:xfrm>
+          <a:prstGeom prst="ellipse">
+            <a:avLst/>
+          </a:prstGeom>
+          <a:solidFill>
+            <a:srgbClr val="1E7A55"/>
+          </a:solidFill>
+          <a:ln>
+            <a:noFill/>
+          </a:ln>
+          <a:effectLst/>
+        </p:spPr>
+        <p:style>
+          <a:lnRef idx="1">
+            <a:schemeClr val="accent1"/>
+          </a:lnRef>
+          <a:fillRef idx="3">
+            <a:schemeClr val="accent1"/>
+          </a:fillRef>
+          <a:effectRef idx="2">
+            <a:schemeClr val="accent1"/>
+          </a:effectRef>
+          <a:fontRef idx="minor">
+            <a:schemeClr val="lt1"/>
+          </a:fontRef>
+        </p:style>
+        <p:txBody>
+          <a:bodyPr rtlCol="0" anchor="ctr"/>
+          <a:lstStyle/>
+          <a:p>
+            <a:pPr algn="ctr"/>
+          </a:p>
+        </p:txBody>
+      </p:sp>
+      <p:sp>
+        <p:nvSpPr>
+          <p:cNvPr id="15" name="Rounded Rectangle 14"/>
+          <p:cNvSpPr/>
+          <p:nvPr/>
+        </p:nvSpPr>
+        <p:spPr>
+          <a:xfrm>
+            <a:off x="2194560" y="2907792"/>
+            <a:ext cx="7802575" cy="1207008"/>
+          </a:xfrm>
+          <a:prstGeom prst="roundRect">
+            <a:avLst>
+              <a:gd name="adj" fmla="val 10000"/>
+            </a:avLst>
+          </a:prstGeom>
+          <a:solidFill>
+            <a:srgbClr val="FBEAE8"/>
+          </a:solidFill>
+          <a:ln w="15875">
+            <a:solidFill>
+              <a:srgbClr val="CC0000"/>
+            </a:solidFill>
+          </a:ln>
+          <a:effectLst/>
+        </p:spPr>
+        <p:style>
+          <a:lnRef idx="1">
+            <a:schemeClr val="accent1"/>
+          </a:lnRef>
+          <a:fillRef idx="3">
+            <a:schemeClr val="accent1"/>
+          </a:fillRef>
+          <a:effectRef idx="2">
+            <a:schemeClr val="accent1"/>
+          </a:effectRef>
+          <a:fontRef idx="minor">
+            <a:schemeClr val="lt1"/>
+          </a:fontRef>
+        </p:style>
+        <p:txBody>
+          <a:bodyPr rtlCol="0" anchor="ctr"/>
+          <a:lstStyle/>
+          <a:p>
+            <a:pPr algn="ctr"/>
+          </a:p>
+        </p:txBody>
+      </p:sp>
+      <p:sp>
+        <p:nvSpPr>
+          <p:cNvPr id="16" name="TextBox 15"/>
+          <p:cNvSpPr txBox="1"/>
+          <p:nvPr/>
+        </p:nvSpPr>
+        <p:spPr>
+          <a:xfrm>
+            <a:off x="2395728" y="2953512"/>
+            <a:ext cx="6705295" cy="1207008"/>
+          </a:xfrm>
+          <a:prstGeom prst="rect">
+            <a:avLst/>
+          </a:prstGeom>
+          <a:noFill/>
+        </p:spPr>
+        <p:txBody>
+          <a:bodyPr wrap="square">
+            <a:spAutoFit/>
+          </a:bodyPr>
+          <a:lstStyle/>
+          <a:p>
+            <a:pPr algn="l">
+              <a:spcAft>
+                <a:spcPts val="200"/>
+              </a:spcAft>
+            </a:pPr>
+            <a:r>
+              <a:rPr sz="1250" b="1">
+                <a:solidFill>
+                  <a:srgbClr val="1B1211"/>
+                </a:solidFill>
+                <a:latin typeface="Red Hat Display"/>
+              </a:rPr>
+              <a:t>Red Hat OpenShift AI</a:t>
+            </a:r>
+          </a:p>
+          <a:p>
+            <a:pPr algn="l">
+              <a:spcAft>
+                <a:spcPts val="0"/>
+              </a:spcAft>
+            </a:pPr>
+            <a:r>
+              <a:rPr sz="950" b="0">
+                <a:solidFill>
+                  <a:srgbClr val="54423E"/>
+                </a:solidFill>
+                <a:latin typeface="Red Hat Text"/>
+              </a:rPr>
+              <a:t/>
+            </a:r>
+          </a:p>
+        </p:txBody>
+      </p:sp>
+      <p:sp>
+        <p:nvSpPr>
+          <p:cNvPr id="17" name="TextBox 16"/>
+          <p:cNvSpPr txBox="1"/>
+          <p:nvPr/>
+        </p:nvSpPr>
+        <p:spPr>
+          <a:xfrm>
+            <a:off x="8762695" y="2962656"/>
+            <a:ext cx="1143000" cy="228600"/>
+          </a:xfrm>
+          <a:prstGeom prst="rect">
+            <a:avLst/>
+          </a:prstGeom>
+          <a:noFill/>
+        </p:spPr>
+        <p:txBody>
+          <a:bodyPr wrap="square">
+            <a:spAutoFit/>
+          </a:bodyPr>
+          <a:lstStyle/>
+          <a:p>
+            <a:pPr algn="r">
+              <a:spcAft>
+                <a:spcPts val="0"/>
+              </a:spcAft>
+            </a:pPr>
+            <a:r>
+              <a:rPr sz="850" b="0">
+                <a:solidFill>
+                  <a:srgbClr val="7E6A64"/>
+                </a:solidFill>
+                <a:latin typeface="Red Hat Mono"/>
+              </a:rPr>
+              <a:t>Labs 02 · 03 · 04</a:t>
+            </a:r>
+          </a:p>
+        </p:txBody>
+      </p:sp>
+      <p:sp>
+        <p:nvSpPr>
+          <p:cNvPr id="18" name="Rounded Rectangle 17"/>
+          <p:cNvSpPr/>
+          <p:nvPr/>
+        </p:nvSpPr>
+        <p:spPr>
+          <a:xfrm>
+            <a:off x="2395728" y="3364992"/>
+            <a:ext cx="1790623" cy="566928"/>
+          </a:xfrm>
+          <a:prstGeom prst="roundRect">
+            <a:avLst>
+              <a:gd name="adj" fmla="val 14000"/>
+            </a:avLst>
+          </a:prstGeom>
+          <a:solidFill>
+            <a:srgbClr val="FFFFFF"/>
+          </a:solidFill>
+          <a:ln w="9525">
+            <a:solidFill>
+              <a:srgbClr val="CFC2BE"/>
+            </a:solidFill>
+          </a:ln>
+          <a:effectLst/>
+        </p:spPr>
+        <p:style>
+          <a:lnRef idx="1">
+            <a:schemeClr val="accent1"/>
+          </a:lnRef>
+          <a:fillRef idx="3">
+            <a:schemeClr val="accent1"/>
+          </a:fillRef>
+          <a:effectRef idx="2">
+            <a:schemeClr val="accent1"/>
+          </a:effectRef>
+          <a:fontRef idx="minor">
+            <a:schemeClr val="lt1"/>
+          </a:fontRef>
+        </p:style>
+        <p:txBody>
+          <a:bodyPr rtlCol="0" anchor="ctr"/>
+          <a:lstStyle/>
+          <a:p>
+            <a:pPr algn="ctr"/>
+          </a:p>
+        </p:txBody>
+      </p:sp>
+      <p:sp>
+        <p:nvSpPr>
+          <p:cNvPr id="19" name="TextBox 18"/>
+          <p:cNvSpPr txBox="1"/>
+          <p:nvPr/>
+        </p:nvSpPr>
+        <p:spPr>
+          <a:xfrm>
+            <a:off x="2468880" y="3383280"/>
+            <a:ext cx="1680895" cy="530352"/>
+          </a:xfrm>
+          <a:prstGeom prst="rect">
+            <a:avLst/>
+          </a:prstGeom>
+          <a:noFill/>
+        </p:spPr>
+        <p:txBody>
+          <a:bodyPr wrap="square">
+            <a:spAutoFit/>
+          </a:bodyPr>
+          <a:lstStyle/>
+          <a:p>
+            <a:pPr algn="l">
+              <a:spcAft>
+                <a:spcPts val="100"/>
+              </a:spcAft>
+            </a:pPr>
+            <a:r>
+              <a:rPr sz="1000" b="1">
+                <a:solidFill>
+                  <a:srgbClr val="1B1211"/>
+                </a:solidFill>
+                <a:latin typeface="Red Hat Display"/>
+              </a:rPr>
+              <a:t>Model serving</a:t>
+            </a:r>
+          </a:p>
+          <a:p>
+            <a:pPr algn="l">
+              <a:spcAft>
+                <a:spcPts val="0"/>
+              </a:spcAft>
+            </a:pPr>
+            <a:r>
+              <a:rPr sz="850" b="0">
+                <a:solidFill>
+                  <a:srgbClr val="7E6A64"/>
+                </a:solidFill>
+                <a:latin typeface="Red Hat Text"/>
+              </a:rPr>
+              <a:t>KServe + vLLM</a:t>
+            </a:r>
+          </a:p>
+        </p:txBody>
+      </p:sp>
+      <p:sp>
+        <p:nvSpPr>
+          <p:cNvPr id="20" name="Rounded Rectangle 19"/>
+          <p:cNvSpPr/>
+          <p:nvPr/>
+        </p:nvSpPr>
+        <p:spPr>
+          <a:xfrm>
+            <a:off x="4268647" y="3364992"/>
+            <a:ext cx="1790623" cy="566928"/>
+          </a:xfrm>
+          <a:prstGeom prst="roundRect">
+            <a:avLst>
+              <a:gd name="adj" fmla="val 14000"/>
+            </a:avLst>
+          </a:prstGeom>
+          <a:solidFill>
+            <a:srgbClr val="FFFFFF"/>
+          </a:solidFill>
+          <a:ln w="9525">
+            <a:solidFill>
+              <a:srgbClr val="CFC2BE"/>
+            </a:solidFill>
+          </a:ln>
+          <a:effectLst/>
+        </p:spPr>
+        <p:style>
+          <a:lnRef idx="1">
+            <a:schemeClr val="accent1"/>
+          </a:lnRef>
+          <a:fillRef idx="3">
+            <a:schemeClr val="accent1"/>
+          </a:fillRef>
+          <a:effectRef idx="2">
+            <a:schemeClr val="accent1"/>
+          </a:effectRef>
+          <a:fontRef idx="minor">
+            <a:schemeClr val="lt1"/>
+          </a:fontRef>
+        </p:style>
+        <p:txBody>
+          <a:bodyPr rtlCol="0" anchor="ctr"/>
+          <a:lstStyle/>
+          <a:p>
+            <a:pPr algn="ctr"/>
+          </a:p>
+        </p:txBody>
+      </p:sp>
+      <p:sp>
+        <p:nvSpPr>
+          <p:cNvPr id="21" name="TextBox 20"/>
+          <p:cNvSpPr txBox="1"/>
+          <p:nvPr/>
+        </p:nvSpPr>
+        <p:spPr>
+          <a:xfrm>
+            <a:off x="4341799" y="3383280"/>
+            <a:ext cx="1680895" cy="530352"/>
+          </a:xfrm>
+          <a:prstGeom prst="rect">
+            <a:avLst/>
+          </a:prstGeom>
+          <a:noFill/>
+        </p:spPr>
+        <p:txBody>
+          <a:bodyPr wrap="square">
+            <a:spAutoFit/>
+          </a:bodyPr>
+          <a:lstStyle/>
+          <a:p>
+            <a:pPr algn="l">
+              <a:spcAft>
+                <a:spcPts val="100"/>
+              </a:spcAft>
+            </a:pPr>
+            <a:r>
+              <a:rPr sz="1000" b="1">
+                <a:solidFill>
+                  <a:srgbClr val="1B1211"/>
+                </a:solidFill>
+                <a:latin typeface="Red Hat Display"/>
+              </a:rPr>
+              <a:t>Pipelines</a:t>
+            </a:r>
+          </a:p>
+          <a:p>
+            <a:pPr algn="l">
+              <a:spcAft>
+                <a:spcPts val="0"/>
+              </a:spcAft>
+            </a:pPr>
+            <a:r>
+              <a:rPr sz="850" b="0">
+                <a:solidFill>
+                  <a:srgbClr val="7E6A64"/>
+                </a:solidFill>
+                <a:latin typeface="Red Hat Text"/>
+              </a:rPr>
+              <a:t>tune · eval · promote</a:t>
+            </a:r>
+          </a:p>
+        </p:txBody>
+      </p:sp>
+      <p:sp>
+        <p:nvSpPr>
+          <p:cNvPr id="22" name="Rounded Rectangle 21"/>
+          <p:cNvSpPr/>
+          <p:nvPr/>
+        </p:nvSpPr>
+        <p:spPr>
+          <a:xfrm>
+            <a:off x="6141567" y="3364992"/>
+            <a:ext cx="1790623" cy="566928"/>
+          </a:xfrm>
+          <a:prstGeom prst="roundRect">
+            <a:avLst>
+              <a:gd name="adj" fmla="val 14000"/>
+            </a:avLst>
+          </a:prstGeom>
+          <a:solidFill>
+            <a:srgbClr val="FFFFFF"/>
+          </a:solidFill>
+          <a:ln w="9525">
+            <a:solidFill>
+              <a:srgbClr val="CFC2BE"/>
+            </a:solidFill>
+          </a:ln>
+          <a:effectLst/>
+        </p:spPr>
+        <p:style>
+          <a:lnRef idx="1">
+            <a:schemeClr val="accent1"/>
+          </a:lnRef>
+          <a:fillRef idx="3">
+            <a:schemeClr val="accent1"/>
+          </a:fillRef>
+          <a:effectRef idx="2">
+            <a:schemeClr val="accent1"/>
+          </a:effectRef>
+          <a:fontRef idx="minor">
+            <a:schemeClr val="lt1"/>
+          </a:fontRef>
+        </p:style>
+        <p:txBody>
+          <a:bodyPr rtlCol="0" anchor="ctr"/>
+          <a:lstStyle/>
+          <a:p>
+            <a:pPr algn="ctr"/>
+          </a:p>
+        </p:txBody>
+      </p:sp>
+      <p:sp>
+        <p:nvSpPr>
+          <p:cNvPr id="23" name="TextBox 22"/>
+          <p:cNvSpPr txBox="1"/>
+          <p:nvPr/>
+        </p:nvSpPr>
+        <p:spPr>
+          <a:xfrm>
+            <a:off x="6214719" y="3383280"/>
+            <a:ext cx="1680895" cy="530352"/>
+          </a:xfrm>
+          <a:prstGeom prst="rect">
+            <a:avLst/>
+          </a:prstGeom>
+          <a:noFill/>
+        </p:spPr>
+        <p:txBody>
+          <a:bodyPr wrap="square">
+            <a:spAutoFit/>
+          </a:bodyPr>
+          <a:lstStyle/>
+          <a:p>
+            <a:pPr algn="l">
+              <a:spcAft>
+                <a:spcPts val="100"/>
+              </a:spcAft>
+            </a:pPr>
+            <a:r>
+              <a:rPr sz="1000" b="1">
+                <a:solidFill>
+                  <a:srgbClr val="1B1211"/>
+                </a:solidFill>
+                <a:latin typeface="Red Hat Display"/>
+              </a:rPr>
+              <a:t>Model registry</a:t>
+            </a:r>
+          </a:p>
+          <a:p>
+            <a:pPr algn="l">
+              <a:spcAft>
+                <a:spcPts val="0"/>
+              </a:spcAft>
+            </a:pPr>
+            <a:r>
+              <a:rPr sz="850" b="0">
+                <a:solidFill>
+                  <a:srgbClr val="7E6A64"/>
+                </a:solidFill>
+                <a:latin typeface="Red Hat Text"/>
+              </a:rPr>
+              <a:t>versions · approvals</a:t>
+            </a:r>
+          </a:p>
+        </p:txBody>
+      </p:sp>
+      <p:sp>
+        <p:nvSpPr>
+          <p:cNvPr id="24" name="Rounded Rectangle 23"/>
+          <p:cNvSpPr/>
+          <p:nvPr/>
+        </p:nvSpPr>
+        <p:spPr>
+          <a:xfrm>
+            <a:off x="8014487" y="3364992"/>
+            <a:ext cx="1790623" cy="566928"/>
+          </a:xfrm>
+          <a:prstGeom prst="roundRect">
+            <a:avLst>
+              <a:gd name="adj" fmla="val 14000"/>
+            </a:avLst>
+          </a:prstGeom>
+          <a:solidFill>
+            <a:srgbClr val="FFFFFF"/>
+          </a:solidFill>
+          <a:ln w="9525">
+            <a:solidFill>
+              <a:srgbClr val="CFC2BE"/>
+            </a:solidFill>
+          </a:ln>
+          <a:effectLst/>
+        </p:spPr>
+        <p:style>
+          <a:lnRef idx="1">
+            <a:schemeClr val="accent1"/>
+          </a:lnRef>
+          <a:fillRef idx="3">
+            <a:schemeClr val="accent1"/>
+          </a:fillRef>
+          <a:effectRef idx="2">
+            <a:schemeClr val="accent1"/>
+          </a:effectRef>
+          <a:fontRef idx="minor">
+            <a:schemeClr val="lt1"/>
+          </a:fontRef>
+        </p:style>
+        <p:txBody>
+          <a:bodyPr rtlCol="0" anchor="ctr"/>
+          <a:lstStyle/>
+          <a:p>
+            <a:pPr algn="ctr"/>
+          </a:p>
+        </p:txBody>
+      </p:sp>
+      <p:sp>
+        <p:nvSpPr>
+          <p:cNvPr id="25" name="TextBox 24"/>
+          <p:cNvSpPr txBox="1"/>
+          <p:nvPr/>
+        </p:nvSpPr>
+        <p:spPr>
+          <a:xfrm>
+            <a:off x="8087639" y="3383280"/>
+            <a:ext cx="1680895" cy="530352"/>
+          </a:xfrm>
+          <a:prstGeom prst="rect">
+            <a:avLst/>
+          </a:prstGeom>
+          <a:noFill/>
+        </p:spPr>
+        <p:txBody>
+          <a:bodyPr wrap="square">
+            <a:spAutoFit/>
+          </a:bodyPr>
+          <a:lstStyle/>
+          <a:p>
+            <a:pPr algn="l">
+              <a:spcAft>
+                <a:spcPts val="100"/>
+              </a:spcAft>
+            </a:pPr>
+            <a:r>
+              <a:rPr sz="1000" b="1">
+                <a:solidFill>
+                  <a:srgbClr val="1B1211"/>
+                </a:solidFill>
+                <a:latin typeface="Red Hat Display"/>
+              </a:rPr>
+              <a:t>Retrieval</a:t>
+            </a:r>
+          </a:p>
+          <a:p>
+            <a:pPr algn="l">
+              <a:spcAft>
+                <a:spcPts val="0"/>
+              </a:spcAft>
+            </a:pPr>
+            <a:r>
+              <a:rPr sz="850" b="0">
+                <a:solidFill>
+                  <a:srgbClr val="7E6A64"/>
+                </a:solidFill>
+                <a:latin typeface="Red Hat Text"/>
+              </a:rPr>
+              <a:t>vector store · citations</a:t>
+            </a:r>
+          </a:p>
+        </p:txBody>
+      </p:sp>
+      <p:sp>
+        <p:nvSpPr>
+          <p:cNvPr id="26" name="Rounded Rectangle 25"/>
+          <p:cNvSpPr/>
+          <p:nvPr/>
+        </p:nvSpPr>
+        <p:spPr>
+          <a:xfrm>
+            <a:off x="2194560" y="4279392"/>
+            <a:ext cx="7802575" cy="777240"/>
+          </a:xfrm>
+          <a:prstGeom prst="roundRect">
+            <a:avLst>
+              <a:gd name="adj" fmla="val 10000"/>
+            </a:avLst>
+          </a:prstGeom>
+          <a:solidFill>
+            <a:srgbClr val="FFFFFF"/>
+          </a:solidFill>
+          <a:ln w="12700">
+            <a:solidFill>
+              <a:srgbClr val="CFC2BE"/>
+            </a:solidFill>
+          </a:ln>
+          <a:effectLst/>
+        </p:spPr>
+        <p:style>
+          <a:lnRef idx="1">
+            <a:schemeClr val="accent1"/>
+          </a:lnRef>
+          <a:fillRef idx="3">
+            <a:schemeClr val="accent1"/>
+          </a:fillRef>
+          <a:effectRef idx="2">
+            <a:schemeClr val="accent1"/>
+          </a:effectRef>
+          <a:fontRef idx="minor">
+            <a:schemeClr val="lt1"/>
+          </a:fontRef>
+        </p:style>
+        <p:txBody>
+          <a:bodyPr rtlCol="0" anchor="ctr"/>
+          <a:lstStyle/>
+          <a:p>
+            <a:pPr algn="ctr"/>
+          </a:p>
+        </p:txBody>
+      </p:sp>
+      <p:sp>
+        <p:nvSpPr>
+          <p:cNvPr id="27" name="TextBox 26"/>
+          <p:cNvSpPr txBox="1"/>
+          <p:nvPr/>
+        </p:nvSpPr>
+        <p:spPr>
+          <a:xfrm>
+            <a:off x="2395728" y="4325112"/>
+            <a:ext cx="6705295" cy="777240"/>
+          </a:xfrm>
+          <a:prstGeom prst="rect">
+            <a:avLst/>
+          </a:prstGeom>
+          <a:noFill/>
+        </p:spPr>
+        <p:txBody>
+          <a:bodyPr wrap="square">
+            <a:spAutoFit/>
+          </a:bodyPr>
+          <a:lstStyle/>
+          <a:p>
+            <a:pPr algn="l">
+              <a:spcAft>
+                <a:spcPts val="200"/>
+              </a:spcAft>
+            </a:pPr>
+            <a:r>
+              <a:rPr sz="1250" b="1">
+                <a:solidFill>
+                  <a:srgbClr val="1B1211"/>
+                </a:solidFill>
+                <a:latin typeface="Red Hat Display"/>
+              </a:rPr>
+              <a:t>Red Hat OpenShift</a:t>
+            </a:r>
+          </a:p>
+          <a:p>
+            <a:pPr algn="l">
+              <a:spcAft>
+                <a:spcPts val="0"/>
+              </a:spcAft>
+            </a:pPr>
+            <a:r>
+              <a:rPr sz="950" b="0">
+                <a:solidFill>
+                  <a:srgbClr val="54423E"/>
+                </a:solidFill>
+                <a:latin typeface="Red Hat Text"/>
+              </a:rPr>
+              <a:t>Scheduling · GPU partitioning · network policy · multi-site placement · GitOps delivery</a:t>
+            </a:r>
+          </a:p>
+        </p:txBody>
+      </p:sp>
+      <p:sp>
+        <p:nvSpPr>
+          <p:cNvPr id="28" name="Rounded Rectangle 27"/>
+          <p:cNvSpPr/>
+          <p:nvPr/>
+        </p:nvSpPr>
+        <p:spPr>
+          <a:xfrm>
+            <a:off x="2194560" y="5221224"/>
+            <a:ext cx="7802575" cy="914400"/>
+          </a:xfrm>
+          <a:prstGeom prst="roundRect">
+            <a:avLst>
+              <a:gd name="adj" fmla="val 10000"/>
+            </a:avLst>
+          </a:prstGeom>
+          <a:solidFill>
+            <a:srgbClr val="FFFFFF"/>
+          </a:solidFill>
+          <a:ln w="12700">
+            <a:solidFill>
+              <a:srgbClr val="CFC2BE"/>
+            </a:solidFill>
+          </a:ln>
+          <a:effectLst/>
+        </p:spPr>
+        <p:style>
+          <a:lnRef idx="1">
+            <a:schemeClr val="accent1"/>
+          </a:lnRef>
+          <a:fillRef idx="3">
+            <a:schemeClr val="accent1"/>
+          </a:fillRef>
+          <a:effectRef idx="2">
+            <a:schemeClr val="accent1"/>
+          </a:effectRef>
+          <a:fontRef idx="minor">
+            <a:schemeClr val="lt1"/>
+          </a:fontRef>
+        </p:style>
+        <p:txBody>
+          <a:bodyPr rtlCol="0" anchor="ctr"/>
+          <a:lstStyle/>
+          <a:p>
+            <a:pPr algn="ctr"/>
+          </a:p>
+        </p:txBody>
+      </p:sp>
+      <p:sp>
+        <p:nvSpPr>
+          <p:cNvPr id="29" name="TextBox 28"/>
+          <p:cNvSpPr txBox="1"/>
+          <p:nvPr/>
+        </p:nvSpPr>
+        <p:spPr>
+          <a:xfrm>
+            <a:off x="2395728" y="5266944"/>
+            <a:ext cx="6705295" cy="914400"/>
+          </a:xfrm>
+          <a:prstGeom prst="rect">
+            <a:avLst/>
+          </a:prstGeom>
+          <a:noFill/>
+        </p:spPr>
+        <p:txBody>
+          <a:bodyPr wrap="square">
+            <a:spAutoFit/>
+          </a:bodyPr>
+          <a:lstStyle/>
+          <a:p>
+            <a:pPr algn="l">
+              <a:spcAft>
+                <a:spcPts val="200"/>
+              </a:spcAft>
+            </a:pPr>
+            <a:r>
+              <a:rPr sz="1250" b="1">
+                <a:solidFill>
+                  <a:srgbClr val="1B1211"/>
+                </a:solidFill>
+                <a:latin typeface="Red Hat Display"/>
+              </a:rPr>
+              <a:t>Red Hat Enterprise Linux · RHEL AI</a:t>
+            </a:r>
+          </a:p>
+          <a:p>
+            <a:pPr algn="l">
+              <a:spcAft>
+                <a:spcPts val="0"/>
+              </a:spcAft>
+            </a:pPr>
+            <a:r>
+              <a:rPr sz="950" b="0">
+                <a:solidFill>
+                  <a:srgbClr val="54423E"/>
+                </a:solidFill>
+                <a:latin typeface="Red Hat Text"/>
+              </a:rPr>
+              <a:t>Bare metal GPU nodes · virtualized datacenter · accredited cloud · classified enclave</a:t>
+            </a:r>
+          </a:p>
+        </p:txBody>
+      </p:sp>
+      <p:sp>
+        <p:nvSpPr>
+          <p:cNvPr id="30" name="TextBox 29"/>
+          <p:cNvSpPr txBox="1"/>
+          <p:nvPr/>
+        </p:nvSpPr>
+        <p:spPr>
+          <a:xfrm>
+            <a:off x="8762695" y="5276088"/>
+            <a:ext cx="1143000" cy="228600"/>
+          </a:xfrm>
+          <a:prstGeom prst="rect">
+            <a:avLst/>
+          </a:prstGeom>
+          <a:noFill/>
+        </p:spPr>
+        <p:txBody>
+          <a:bodyPr wrap="square">
+            <a:spAutoFit/>
+          </a:bodyPr>
+          <a:lstStyle/>
+          <a:p>
+            <a:pPr algn="r">
+              <a:spcAft>
+                <a:spcPts val="0"/>
+              </a:spcAft>
+            </a:pPr>
+            <a:r>
+              <a:rPr sz="850" b="0">
+                <a:solidFill>
+                  <a:srgbClr val="7E6A64"/>
+                </a:solidFill>
+                <a:latin typeface="Red Hat Mono"/>
+              </a:rPr>
+              <a:t>Lab 01</a:t>
+            </a:r>
+          </a:p>
+        </p:txBody>
+      </p:sp>
+      <p:sp>
+        <p:nvSpPr>
+          <p:cNvPr id="31" name="Rounded Rectangle 30"/>
+          <p:cNvSpPr/>
+          <p:nvPr/>
+        </p:nvSpPr>
+        <p:spPr>
+          <a:xfrm>
+            <a:off x="8579815" y="5678424"/>
+            <a:ext cx="548640" cy="329184"/>
+          </a:xfrm>
+          <a:prstGeom prst="roundRect">
+            <a:avLst>
+              <a:gd name="adj" fmla="val 15000"/>
+            </a:avLst>
+          </a:prstGeom>
+          <a:solidFill>
+            <a:srgbClr val="54423E"/>
+          </a:solidFill>
+          <a:ln>
+            <a:noFill/>
+          </a:ln>
+          <a:effectLst/>
+        </p:spPr>
+        <p:style>
+          <a:lnRef idx="1">
+            <a:schemeClr val="accent1"/>
+          </a:lnRef>
+          <a:fillRef idx="3">
+            <a:schemeClr val="accent1"/>
+          </a:fillRef>
+          <a:effectRef idx="2">
+            <a:schemeClr val="accent1"/>
+          </a:effectRef>
+          <a:fontRef idx="minor">
+            <a:schemeClr val="lt1"/>
+          </a:fontRef>
+        </p:style>
+        <p:txBody>
+          <a:bodyPr rtlCol="0" anchor="ctr"/>
+          <a:lstStyle/>
+          <a:p>
+            <a:pPr algn="ctr"/>
+            <a:r>
+              <a:rPr sz="850" b="1">
+                <a:solidFill>
+                  <a:srgbClr val="FFFFFF"/>
+                </a:solidFill>
+                <a:latin typeface="Red Hat Mono"/>
+              </a:rPr>
+              <a:t>GPU</a:t>
+            </a:r>
+          </a:p>
+        </p:txBody>
+      </p:sp>
+      <p:sp>
+        <p:nvSpPr>
+          <p:cNvPr id="32" name="Rounded Rectangle 31"/>
+          <p:cNvSpPr/>
+          <p:nvPr/>
+        </p:nvSpPr>
+        <p:spPr>
+          <a:xfrm>
+            <a:off x="9238183" y="5678424"/>
+            <a:ext cx="548640" cy="329184"/>
+          </a:xfrm>
+          <a:prstGeom prst="roundRect">
+            <a:avLst>
+              <a:gd name="adj" fmla="val 15000"/>
+            </a:avLst>
+          </a:prstGeom>
+          <a:solidFill>
+            <a:srgbClr val="54423E"/>
+          </a:solidFill>
+          <a:ln>
+            <a:noFill/>
+          </a:ln>
+          <a:effectLst/>
+        </p:spPr>
+        <p:style>
+          <a:lnRef idx="1">
+            <a:schemeClr val="accent1"/>
+          </a:lnRef>
+          <a:fillRef idx="3">
+            <a:schemeClr val="accent1"/>
+          </a:fillRef>
+          <a:effectRef idx="2">
+            <a:schemeClr val="accent1"/>
+          </a:effectRef>
+          <a:fontRef idx="minor">
+            <a:schemeClr val="lt1"/>
+          </a:fontRef>
+        </p:style>
+        <p:txBody>
+          <a:bodyPr rtlCol="0" anchor="ctr"/>
+          <a:lstStyle/>
+          <a:p>
+            <a:pPr algn="ctr"/>
+            <a:r>
+              <a:rPr sz="850" b="1">
+                <a:solidFill>
+                  <a:srgbClr val="FFFFFF"/>
+                </a:solidFill>
+                <a:latin typeface="Red Hat Mono"/>
+              </a:rPr>
+              <a:t>GPU</a:t>
+            </a:r>
+          </a:p>
+        </p:txBody>
+      </p:sp>
+      <p:sp>
+        <p:nvSpPr>
+          <p:cNvPr id="33" name="Up Arrow 32"/>
+          <p:cNvSpPr/>
+          <p:nvPr/>
+        </p:nvSpPr>
+        <p:spPr>
+          <a:xfrm>
+            <a:off x="6013551" y="2761488"/>
+            <a:ext cx="164592" cy="128016"/>
+          </a:xfrm>
+          <a:prstGeom prst="upArrow">
+            <a:avLst/>
+          </a:prstGeom>
+          <a:solidFill>
+            <a:srgbClr val="CFC2BE"/>
+          </a:solidFill>
+          <a:ln>
+            <a:noFill/>
+          </a:ln>
+          <a:effectLst/>
+        </p:spPr>
+        <p:style>
+          <a:lnRef idx="1">
+            <a:schemeClr val="accent1"/>
+          </a:lnRef>
+          <a:fillRef idx="3">
+            <a:schemeClr val="accent1"/>
+          </a:fillRef>
+          <a:effectRef idx="2">
+            <a:schemeClr val="accent1"/>
+          </a:effectRef>
+          <a:fontRef idx="minor">
+            <a:schemeClr val="lt1"/>
+          </a:fontRef>
+        </p:style>
+        <p:txBody>
+          <a:bodyPr rtlCol="0" anchor="ctr"/>
+          <a:lstStyle/>
+          <a:p>
+            <a:pPr algn="ctr"/>
+          </a:p>
+        </p:txBody>
+      </p:sp>
+      <p:sp>
+        <p:nvSpPr>
+          <p:cNvPr id="34" name="Up Arrow 33"/>
+          <p:cNvSpPr/>
+          <p:nvPr/>
+        </p:nvSpPr>
+        <p:spPr>
+          <a:xfrm>
+            <a:off x="6013551" y="4133088"/>
+            <a:ext cx="164592" cy="128016"/>
+          </a:xfrm>
+          <a:prstGeom prst="upArrow">
+            <a:avLst/>
+          </a:prstGeom>
+          <a:solidFill>
+            <a:srgbClr val="CFC2BE"/>
+          </a:solidFill>
+          <a:ln>
+            <a:noFill/>
+          </a:ln>
+          <a:effectLst/>
+        </p:spPr>
+        <p:style>
+          <a:lnRef idx="1">
+            <a:schemeClr val="accent1"/>
+          </a:lnRef>
+          <a:fillRef idx="3">
+            <a:schemeClr val="accent1"/>
+          </a:fillRef>
+          <a:effectRef idx="2">
+            <a:schemeClr val="accent1"/>
+          </a:effectRef>
+          <a:fontRef idx="minor">
+            <a:schemeClr val="lt1"/>
+          </a:fontRef>
+        </p:style>
+        <p:txBody>
+          <a:bodyPr rtlCol="0" anchor="ctr"/>
+          <a:lstStyle/>
+          <a:p>
+            <a:pPr algn="ctr"/>
+          </a:p>
+        </p:txBody>
+      </p:sp>
+      <p:sp>
+        <p:nvSpPr>
+          <p:cNvPr id="35" name="Up Arrow 34"/>
+          <p:cNvSpPr/>
+          <p:nvPr/>
+        </p:nvSpPr>
+        <p:spPr>
+          <a:xfrm>
+            <a:off x="6013551" y="5074920"/>
+            <a:ext cx="164592" cy="128016"/>
+          </a:xfrm>
+          <a:prstGeom prst="upArrow">
+            <a:avLst/>
+          </a:prstGeom>
+          <a:solidFill>
+            <a:srgbClr val="CFC2BE"/>
+          </a:solidFill>
+          <a:ln>
+            <a:noFill/>
+          </a:ln>
+          <a:effectLst/>
+        </p:spPr>
+        <p:style>
+          <a:lnRef idx="1">
+            <a:schemeClr val="accent1"/>
+          </a:lnRef>
+          <a:fillRef idx="3">
+            <a:schemeClr val="accent1"/>
+          </a:fillRef>
+          <a:effectRef idx="2">
+            <a:schemeClr val="accent1"/>
+          </a:effectRef>
+          <a:fontRef idx="minor">
+            <a:schemeClr val="lt1"/>
+          </a:fontRef>
+        </p:style>
+        <p:txBody>
+          <a:bodyPr rtlCol="0" anchor="ctr"/>
+          <a:lstStyle/>
+          <a:p>
+            <a:pPr algn="ctr"/>
           </a:p>
         </p:txBody>
       </p:sp>
@@ -6571,7 +10526,7 @@
         </p:nvSpPr>
         <p:spPr>
           <a:xfrm>
-            <a:off x="777240" y="566928"/>
+            <a:off x="777240" y="502920"/>
             <a:ext cx="10637215" cy="310896"/>
           </a:xfrm>
           <a:prstGeom prst="rect">
@@ -6593,7 +10548,7 @@
             <a:r>
               <a:rPr sz="1100" b="1">
                 <a:solidFill>
-                  <a:srgbClr val="8A7671"/>
+                  <a:srgbClr val="7E6A64"/>
                 </a:solidFill>
                 <a:latin typeface="Red Hat Mono"/>
               </a:rPr>
@@ -6610,8 +10565,8 @@
         </p:nvSpPr>
         <p:spPr>
           <a:xfrm>
-            <a:off x="777240" y="932688"/>
-            <a:ext cx="10637215" cy="914400"/>
+            <a:off x="777240" y="868680"/>
+            <a:ext cx="10637215" cy="822960"/>
           </a:xfrm>
           <a:prstGeom prst="rect">
             <a:avLst/>
@@ -6650,7 +10605,7 @@
           <p:nvPr/>
         </p:nvGraphicFramePr>
         <p:xfrm>
-          <a:off x="777240" y="2286000"/>
+          <a:off x="777240" y="2103120"/>
           <a:ext cx="10607040" cy="2633472"/>
         </p:xfrm>
         <a:graphic>
@@ -6673,7 +10628,7 @@
                       <a:r>
                         <a:rPr sz="1050" b="1">
                           <a:solidFill>
-                            <a:srgbClr val="8A7671"/>
+                            <a:srgbClr val="7E6A64"/>
                           </a:solidFill>
                           <a:latin typeface="Red Hat Mono"/>
                         </a:rPr>
@@ -6695,7 +10650,7 @@
                       <a:r>
                         <a:rPr sz="1050" b="1">
                           <a:solidFill>
-                            <a:srgbClr val="8A7671"/>
+                            <a:srgbClr val="7E6A64"/>
                           </a:solidFill>
                           <a:latin typeface="Red Hat Mono"/>
                         </a:rPr>
@@ -6717,7 +10672,7 @@
                       <a:r>
                         <a:rPr sz="1050" b="1">
                           <a:solidFill>
-                            <a:srgbClr val="8A7671"/>
+                            <a:srgbClr val="7E6A64"/>
                           </a:solidFill>
                           <a:latin typeface="Red Hat Mono"/>
                         </a:rPr>
@@ -7290,7 +11245,7 @@
         </p:nvSpPr>
         <p:spPr>
           <a:xfrm>
-            <a:off x="777240" y="566928"/>
+            <a:off x="777240" y="502920"/>
             <a:ext cx="10637215" cy="310896"/>
           </a:xfrm>
           <a:prstGeom prst="rect">
@@ -7312,7 +11267,7 @@
             <a:r>
               <a:rPr sz="1100" b="1">
                 <a:solidFill>
-                  <a:srgbClr val="8A7671"/>
+                  <a:srgbClr val="7E6A64"/>
                 </a:solidFill>
                 <a:latin typeface="Red Hat Mono"/>
               </a:rPr>
@@ -7329,8 +11284,8 @@
         </p:nvSpPr>
         <p:spPr>
           <a:xfrm>
-            <a:off x="777240" y="932688"/>
-            <a:ext cx="10637215" cy="914400"/>
+            <a:off x="777240" y="868680"/>
+            <a:ext cx="10637215" cy="822960"/>
           </a:xfrm>
           <a:prstGeom prst="rect">
             <a:avLst/>
@@ -7368,8 +11323,8 @@
         </p:nvSpPr>
         <p:spPr>
           <a:xfrm>
-            <a:off x="777240" y="1874519"/>
-            <a:ext cx="8778240" cy="640080"/>
+            <a:off x="777240" y="1536192"/>
+            <a:ext cx="9692640" cy="457200"/>
           </a:xfrm>
           <a:prstGeom prst="rect">
             <a:avLst/>
@@ -7388,7 +11343,7 @@
               </a:spcAft>
             </a:pPr>
             <a:r>
-              <a:rPr sz="1500" b="0">
+              <a:rPr sz="1400" b="0">
                 <a:solidFill>
                   <a:srgbClr val="54423E"/>
                 </a:solidFill>
@@ -7399,441 +11354,1201 @@
           </a:p>
         </p:txBody>
       </p:sp>
-      <p:graphicFrame>
-        <p:nvGraphicFramePr>
-          <p:cNvPr id="6" name="Table 5"/>
-          <p:cNvGraphicFramePr>
-            <a:graphicFrameLocks noGrp="1"/>
-          </p:cNvGraphicFramePr>
-          <p:nvPr/>
-        </p:nvGraphicFramePr>
-        <p:xfrm>
-          <a:off x="777240" y="2514600"/>
-          <a:ext cx="10616184" cy="1975104"/>
-        </p:xfrm>
-        <a:graphic>
-          <a:graphicData uri="http://schemas.openxmlformats.org/drawingml/2006/table">
-            <a:tbl>
-              <a:tblPr firstRow="1" bandRow="1">
-                <a:tableStyleId>{5C22544A-7EE6-4342-B048-85BDC9FD1C3A}</a:tableStyleId>
-              </a:tblPr>
-              <a:tblGrid>
-                <a:gridCol w="3538728"/>
-                <a:gridCol w="3538728"/>
-                <a:gridCol w="3538728"/>
-              </a:tblGrid>
-              <a:tr h="329184">
-                <a:tc>
-                  <a:txBody>
-                    <a:bodyPr wrap="square"/>
-                    <a:lstStyle/>
-                    <a:p>
-                      <a:r>
-                        <a:rPr sz="1050" b="1">
-                          <a:solidFill>
-                            <a:srgbClr val="8A7671"/>
-                          </a:solidFill>
-                          <a:latin typeface="Red Hat Mono"/>
-                        </a:rPr>
-                        <a:t>Prove — days 0–90</a:t>
-                      </a:r>
-                    </a:p>
-                  </a:txBody>
-                  <a:tcPr marL="109728" marR="109728" marT="45720" marB="45720">
-                    <a:solidFill>
-                      <a:srgbClr val="F4EFED"/>
-                    </a:solidFill>
-                  </a:tcPr>
-                </a:tc>
-                <a:tc>
-                  <a:txBody>
-                    <a:bodyPr wrap="square"/>
-                    <a:lstStyle/>
-                    <a:p>
-                      <a:r>
-                        <a:rPr sz="1050" b="1">
-                          <a:solidFill>
-                            <a:srgbClr val="8A7671"/>
-                          </a:solidFill>
-                          <a:latin typeface="Red Hat Mono"/>
-                        </a:rPr>
-                        <a:t>Ground — days 90–180</a:t>
-                      </a:r>
-                    </a:p>
-                  </a:txBody>
-                  <a:tcPr marL="109728" marR="109728" marT="45720" marB="45720">
-                    <a:solidFill>
-                      <a:srgbClr val="F4EFED"/>
-                    </a:solidFill>
-                  </a:tcPr>
-                </a:tc>
-                <a:tc>
-                  <a:txBody>
-                    <a:bodyPr wrap="square"/>
-                    <a:lstStyle/>
-                    <a:p>
-                      <a:r>
-                        <a:rPr sz="1050" b="1">
-                          <a:solidFill>
-                            <a:srgbClr val="8A7671"/>
-                          </a:solidFill>
-                          <a:latin typeface="Red Hat Mono"/>
-                        </a:rPr>
-                        <a:t>Scale — days 180+</a:t>
-                      </a:r>
-                    </a:p>
-                  </a:txBody>
-                  <a:tcPr marL="109728" marR="109728" marT="45720" marB="45720">
-                    <a:solidFill>
-                      <a:srgbClr val="F4EFED"/>
-                    </a:solidFill>
-                  </a:tcPr>
-                </a:tc>
-              </a:tr>
-              <a:tr h="329184">
-                <a:tc>
-                  <a:txBody>
-                    <a:bodyPr wrap="square"/>
-                    <a:lstStyle/>
-                    <a:p>
-                      <a:r>
-                        <a:rPr sz="1200" b="0">
-                          <a:solidFill>
-                            <a:srgbClr val="1B1211"/>
-                          </a:solidFill>
-                          <a:latin typeface="Red Hat Text"/>
-                        </a:rPr>
-                        <a:t>One endpoint on RHEL AI</a:t>
-                      </a:r>
-                    </a:p>
-                  </a:txBody>
-                  <a:tcPr marL="109728" marR="109728" marT="45720" marB="45720">
-                    <a:solidFill>
-                      <a:srgbClr val="FBF9F8"/>
-                    </a:solidFill>
-                  </a:tcPr>
-                </a:tc>
-                <a:tc>
-                  <a:txBody>
-                    <a:bodyPr wrap="square"/>
-                    <a:lstStyle/>
-                    <a:p>
-                      <a:r>
-                        <a:rPr sz="1200" b="0">
-                          <a:solidFill>
-                            <a:srgbClr val="1B1211"/>
-                          </a:solidFill>
-                          <a:latin typeface="Red Hat Text"/>
-                        </a:rPr>
-                        <a:t>Serving on OpenShift AI</a:t>
-                      </a:r>
-                    </a:p>
-                  </a:txBody>
-                  <a:tcPr marL="109728" marR="109728" marT="45720" marB="45720">
-                    <a:solidFill>
-                      <a:srgbClr val="FBF9F8"/>
-                    </a:solidFill>
-                  </a:tcPr>
-                </a:tc>
-                <a:tc>
-                  <a:txBody>
-                    <a:bodyPr wrap="square"/>
-                    <a:lstStyle/>
-                    <a:p>
-                      <a:r>
-                        <a:rPr sz="1200" b="0">
-                          <a:solidFill>
-                            <a:srgbClr val="1B1211"/>
-                          </a:solidFill>
-                          <a:latin typeface="Red Hat Text"/>
-                        </a:rPr>
-                        <a:t>Registry with real approvals</a:t>
-                      </a:r>
-                    </a:p>
-                  </a:txBody>
-                  <a:tcPr marL="109728" marR="109728" marT="45720" marB="45720">
-                    <a:solidFill>
-                      <a:srgbClr val="FBF9F8"/>
-                    </a:solidFill>
-                  </a:tcPr>
-                </a:tc>
-              </a:tr>
-              <a:tr h="329184">
-                <a:tc>
-                  <a:txBody>
-                    <a:bodyPr wrap="square"/>
-                    <a:lstStyle/>
-                    <a:p>
-                      <a:r>
-                        <a:rPr sz="1200" b="0">
-                          <a:solidFill>
-                            <a:srgbClr val="1B1211"/>
-                          </a:solidFill>
-                          <a:latin typeface="Red Hat Text"/>
-                        </a:rPr>
-                        <a:t>Accelerator capacity plan</a:t>
-                      </a:r>
-                    </a:p>
-                  </a:txBody>
-                  <a:tcPr marL="109728" marR="109728" marT="45720" marB="45720">
-                    <a:solidFill>
-                      <a:srgbClr val="FBF9F8"/>
-                    </a:solidFill>
-                  </a:tcPr>
-                </a:tc>
-                <a:tc>
-                  <a:txBody>
-                    <a:bodyPr wrap="square"/>
-                    <a:lstStyle/>
-                    <a:p>
-                      <a:r>
-                        <a:rPr sz="1200" b="0">
-                          <a:solidFill>
-                            <a:srgbClr val="1B1211"/>
-                          </a:solidFill>
-                          <a:latin typeface="Red Hat Text"/>
-                        </a:rPr>
-                        <a:t>Retrieval over your guidance</a:t>
-                      </a:r>
-                    </a:p>
-                  </a:txBody>
-                  <a:tcPr marL="109728" marR="109728" marT="45720" marB="45720">
-                    <a:solidFill>
-                      <a:srgbClr val="FBF9F8"/>
-                    </a:solidFill>
-                  </a:tcPr>
-                </a:tc>
-                <a:tc>
-                  <a:txBody>
-                    <a:bodyPr wrap="square"/>
-                    <a:lstStyle/>
-                    <a:p>
-                      <a:r>
-                        <a:rPr sz="1200" b="0">
-                          <a:solidFill>
-                            <a:srgbClr val="1B1211"/>
-                          </a:solidFill>
-                          <a:latin typeface="Red Hat Text"/>
-                        </a:rPr>
-                        <a:t>Workflows two to five</a:t>
-                      </a:r>
-                    </a:p>
-                  </a:txBody>
-                  <a:tcPr marL="109728" marR="109728" marT="45720" marB="45720">
-                    <a:solidFill>
-                      <a:srgbClr val="FBF9F8"/>
-                    </a:solidFill>
-                  </a:tcPr>
-                </a:tc>
-              </a:tr>
-              <a:tr h="329184">
-                <a:tc>
-                  <a:txBody>
-                    <a:bodyPr wrap="square"/>
-                    <a:lstStyle/>
-                    <a:p>
-                      <a:r>
-                        <a:rPr sz="1200" b="0">
-                          <a:solidFill>
-                            <a:srgbClr val="1B1211"/>
-                          </a:solidFill>
-                          <a:latin typeface="Red Hat Text"/>
-                        </a:rPr>
-                        <a:t>Data classes agreed in writing</a:t>
-                      </a:r>
-                    </a:p>
-                  </a:txBody>
-                  <a:tcPr marL="109728" marR="109728" marT="45720" marB="45720">
-                    <a:solidFill>
-                      <a:srgbClr val="FBF9F8"/>
-                    </a:solidFill>
-                  </a:tcPr>
-                </a:tc>
-                <a:tc>
-                  <a:txBody>
-                    <a:bodyPr wrap="square"/>
-                    <a:lstStyle/>
-                    <a:p>
-                      <a:r>
-                        <a:rPr sz="1200" b="0">
-                          <a:solidFill>
-                            <a:srgbClr val="1B1211"/>
-                          </a:solidFill>
-                          <a:latin typeface="Red Hat Text"/>
-                        </a:rPr>
-                        <a:t>Tune on agency vocabulary</a:t>
-                      </a:r>
-                    </a:p>
-                  </a:txBody>
-                  <a:tcPr marL="109728" marR="109728" marT="45720" marB="45720">
-                    <a:solidFill>
-                      <a:srgbClr val="FBF9F8"/>
-                    </a:solidFill>
-                  </a:tcPr>
-                </a:tc>
-                <a:tc>
-                  <a:txBody>
-                    <a:bodyPr wrap="square"/>
-                    <a:lstStyle/>
-                    <a:p>
-                      <a:r>
-                        <a:rPr sz="1200" b="0">
-                          <a:solidFill>
-                            <a:srgbClr val="1B1211"/>
-                          </a:solidFill>
-                          <a:latin typeface="Red Hat Text"/>
-                        </a:rPr>
-                        <a:t>Filing-season rehearsal</a:t>
-                      </a:r>
-                    </a:p>
-                  </a:txBody>
-                  <a:tcPr marL="109728" marR="109728" marT="45720" marB="45720">
-                    <a:solidFill>
-                      <a:srgbClr val="FBF9F8"/>
-                    </a:solidFill>
-                  </a:tcPr>
-                </a:tc>
-              </a:tr>
-              <a:tr h="329184">
-                <a:tc>
-                  <a:txBody>
-                    <a:bodyPr wrap="square"/>
-                    <a:lstStyle/>
-                    <a:p>
-                      <a:r>
-                        <a:rPr sz="1200" b="0">
-                          <a:solidFill>
-                            <a:srgbClr val="1B1211"/>
-                          </a:solidFill>
-                          <a:latin typeface="Red Hat Text"/>
-                        </a:rPr>
-                        <a:t>One workflow with a reviewer</a:t>
-                      </a:r>
-                    </a:p>
-                  </a:txBody>
-                  <a:tcPr marL="109728" marR="109728" marT="45720" marB="45720">
-                    <a:solidFill>
-                      <a:srgbClr val="FBF9F8"/>
-                    </a:solidFill>
-                  </a:tcPr>
-                </a:tc>
-                <a:tc>
-                  <a:txBody>
-                    <a:bodyPr wrap="square"/>
-                    <a:lstStyle/>
-                    <a:p>
-                      <a:r>
-                        <a:rPr sz="1200" b="0">
-                          <a:solidFill>
-                            <a:srgbClr val="1B1211"/>
-                          </a:solidFill>
-                          <a:latin typeface="Red Hat Text"/>
-                        </a:rPr>
-                        <a:t>Drift and compliance wired</a:t>
-                      </a:r>
-                    </a:p>
-                  </a:txBody>
-                  <a:tcPr marL="109728" marR="109728" marT="45720" marB="45720">
-                    <a:solidFill>
-                      <a:srgbClr val="FBF9F8"/>
-                    </a:solidFill>
-                  </a:tcPr>
-                </a:tc>
-                <a:tc>
-                  <a:txBody>
-                    <a:bodyPr wrap="square"/>
-                    <a:lstStyle/>
-                    <a:p>
-                      <a:r>
-                        <a:rPr sz="1200" b="0">
-                          <a:solidFill>
-                            <a:srgbClr val="1B1211"/>
-                          </a:solidFill>
-                          <a:latin typeface="Red Hat Text"/>
-                        </a:rPr>
-                        <a:t>Extend to the enclave</a:t>
-                      </a:r>
-                    </a:p>
-                  </a:txBody>
-                  <a:tcPr marL="109728" marR="109728" marT="45720" marB="45720">
-                    <a:solidFill>
-                      <a:srgbClr val="FBF9F8"/>
-                    </a:solidFill>
-                  </a:tcPr>
-                </a:tc>
-              </a:tr>
-              <a:tr h="329184">
-                <a:tc>
-                  <a:txBody>
-                    <a:bodyPr wrap="square"/>
-                    <a:lstStyle/>
-                    <a:p>
-                      <a:r>
-                        <a:rPr sz="1200" b="0">
-                          <a:solidFill>
-                            <a:srgbClr val="1B1211"/>
-                          </a:solidFill>
-                          <a:latin typeface="Red Hat Text"/>
-                        </a:rPr>
-                        <a:t>Baseline measured first</a:t>
-                      </a:r>
-                    </a:p>
-                  </a:txBody>
-                  <a:tcPr marL="109728" marR="109728" marT="45720" marB="45720">
-                    <a:solidFill>
-                      <a:srgbClr val="FBF9F8"/>
-                    </a:solidFill>
-                  </a:tcPr>
-                </a:tc>
-                <a:tc>
-                  <a:txBody>
-                    <a:bodyPr wrap="square"/>
-                    <a:lstStyle/>
-                    <a:p>
-                      <a:r>
-                        <a:rPr sz="1200" b="0">
-                          <a:solidFill>
-                            <a:srgbClr val="1B1211"/>
-                          </a:solidFill>
-                          <a:latin typeface="Red Hat Text"/>
-                        </a:rPr>
-                        <a:t>Provisioning automated</a:t>
-                      </a:r>
-                    </a:p>
-                  </a:txBody>
-                  <a:tcPr marL="109728" marR="109728" marT="45720" marB="45720">
-                    <a:solidFill>
-                      <a:srgbClr val="FBF9F8"/>
-                    </a:solidFill>
-                  </a:tcPr>
-                </a:tc>
-                <a:tc>
-                  <a:txBody>
-                    <a:bodyPr wrap="square"/>
-                    <a:lstStyle/>
-                    <a:p>
-                      <a:r>
-                        <a:rPr sz="1200" b="0">
-                          <a:solidFill>
-                            <a:srgbClr val="1B1211"/>
-                          </a:solidFill>
-                          <a:latin typeface="Red Hat Text"/>
-                        </a:rPr>
-                        <a:t>Report in mission terms</a:t>
-                      </a:r>
-                    </a:p>
-                  </a:txBody>
-                  <a:tcPr marL="109728" marR="109728" marT="45720" marB="45720">
-                    <a:solidFill>
-                      <a:srgbClr val="FBF9F8"/>
-                    </a:solidFill>
-                  </a:tcPr>
-                </a:tc>
-              </a:tr>
-            </a:tbl>
-          </a:graphicData>
-        </a:graphic>
-      </p:graphicFrame>
+      <p:cxnSp>
+        <p:nvCxnSpPr>
+          <p:cNvPr id="6" name="Connector 5"/>
+          <p:cNvCxnSpPr/>
+          <p:nvPr/>
+        </p:nvCxnSpPr>
+        <p:spPr>
+          <a:xfrm>
+            <a:off x="914400" y="2423160"/>
+            <a:ext cx="10515600" cy="0"/>
+          </a:xfrm>
+          <a:prstGeom prst="line">
+            <a:avLst/>
+          </a:prstGeom>
+          <a:ln w="25400">
+            <a:solidFill>
+              <a:srgbClr val="CFC2BE"/>
+            </a:solidFill>
+          </a:ln>
+          <a:effectLst/>
+        </p:spPr>
+        <p:style>
+          <a:lnRef idx="2">
+            <a:schemeClr val="accent1"/>
+          </a:lnRef>
+          <a:fillRef idx="0">
+            <a:schemeClr val="accent1"/>
+          </a:fillRef>
+          <a:effectRef idx="1">
+            <a:schemeClr val="accent1"/>
+          </a:effectRef>
+          <a:fontRef idx="minor">
+            <a:schemeClr val="tx1"/>
+          </a:fontRef>
+        </p:style>
+      </p:cxnSp>
+      <p:sp>
+        <p:nvSpPr>
+          <p:cNvPr id="7" name="Rounded Rectangle 6"/>
+          <p:cNvSpPr/>
+          <p:nvPr/>
+        </p:nvSpPr>
+        <p:spPr>
+          <a:xfrm>
+            <a:off x="1051560" y="2359152"/>
+            <a:ext cx="3310128" cy="128016"/>
+          </a:xfrm>
+          <a:prstGeom prst="roundRect">
+            <a:avLst>
+              <a:gd name="adj" fmla="val 50000"/>
+            </a:avLst>
+          </a:prstGeom>
+          <a:solidFill>
+            <a:srgbClr val="286C88"/>
+          </a:solidFill>
+          <a:ln>
+            <a:noFill/>
+          </a:ln>
+          <a:effectLst/>
+        </p:spPr>
+        <p:style>
+          <a:lnRef idx="1">
+            <a:schemeClr val="accent1"/>
+          </a:lnRef>
+          <a:fillRef idx="3">
+            <a:schemeClr val="accent1"/>
+          </a:fillRef>
+          <a:effectRef idx="2">
+            <a:schemeClr val="accent1"/>
+          </a:effectRef>
+          <a:fontRef idx="minor">
+            <a:schemeClr val="lt1"/>
+          </a:fontRef>
+        </p:style>
+        <p:txBody>
+          <a:bodyPr rtlCol="0" anchor="ctr"/>
+          <a:lstStyle/>
+          <a:p>
+            <a:pPr algn="ctr"/>
+          </a:p>
+        </p:txBody>
+      </p:sp>
+      <p:sp>
+        <p:nvSpPr>
+          <p:cNvPr id="8" name="TextBox 7"/>
+          <p:cNvSpPr txBox="1"/>
+          <p:nvPr/>
+        </p:nvSpPr>
+        <p:spPr>
+          <a:xfrm>
+            <a:off x="1051560" y="1965960"/>
+            <a:ext cx="3310128" cy="274320"/>
+          </a:xfrm>
+          <a:prstGeom prst="rect">
+            <a:avLst/>
+          </a:prstGeom>
+          <a:noFill/>
+        </p:spPr>
+        <p:txBody>
+          <a:bodyPr wrap="square">
+            <a:spAutoFit/>
+          </a:bodyPr>
+          <a:lstStyle/>
+          <a:p>
+            <a:pPr algn="ctr">
+              <a:spcAft>
+                <a:spcPts val="0"/>
+              </a:spcAft>
+            </a:pPr>
+            <a:r>
+              <a:rPr sz="1200" b="1">
+                <a:solidFill>
+                  <a:srgbClr val="286C88"/>
+                </a:solidFill>
+                <a:latin typeface="Red Hat Mono"/>
+              </a:rPr>
+              <a:t>PROVE</a:t>
+            </a:r>
+          </a:p>
+        </p:txBody>
+      </p:sp>
+      <p:sp>
+        <p:nvSpPr>
+          <p:cNvPr id="9" name="Rounded Rectangle 8"/>
+          <p:cNvSpPr/>
+          <p:nvPr/>
+        </p:nvSpPr>
+        <p:spPr>
+          <a:xfrm>
+            <a:off x="4498848" y="2359152"/>
+            <a:ext cx="3310128" cy="128016"/>
+          </a:xfrm>
+          <a:prstGeom prst="roundRect">
+            <a:avLst>
+              <a:gd name="adj" fmla="val 50000"/>
+            </a:avLst>
+          </a:prstGeom>
+          <a:solidFill>
+            <a:srgbClr val="96620A"/>
+          </a:solidFill>
+          <a:ln>
+            <a:noFill/>
+          </a:ln>
+          <a:effectLst/>
+        </p:spPr>
+        <p:style>
+          <a:lnRef idx="1">
+            <a:schemeClr val="accent1"/>
+          </a:lnRef>
+          <a:fillRef idx="3">
+            <a:schemeClr val="accent1"/>
+          </a:fillRef>
+          <a:effectRef idx="2">
+            <a:schemeClr val="accent1"/>
+          </a:effectRef>
+          <a:fontRef idx="minor">
+            <a:schemeClr val="lt1"/>
+          </a:fontRef>
+        </p:style>
+        <p:txBody>
+          <a:bodyPr rtlCol="0" anchor="ctr"/>
+          <a:lstStyle/>
+          <a:p>
+            <a:pPr algn="ctr"/>
+          </a:p>
+        </p:txBody>
+      </p:sp>
+      <p:sp>
+        <p:nvSpPr>
+          <p:cNvPr id="10" name="TextBox 9"/>
+          <p:cNvSpPr txBox="1"/>
+          <p:nvPr/>
+        </p:nvSpPr>
+        <p:spPr>
+          <a:xfrm>
+            <a:off x="4498848" y="1965960"/>
+            <a:ext cx="3310128" cy="274320"/>
+          </a:xfrm>
+          <a:prstGeom prst="rect">
+            <a:avLst/>
+          </a:prstGeom>
+          <a:noFill/>
+        </p:spPr>
+        <p:txBody>
+          <a:bodyPr wrap="square">
+            <a:spAutoFit/>
+          </a:bodyPr>
+          <a:lstStyle/>
+          <a:p>
+            <a:pPr algn="ctr">
+              <a:spcAft>
+                <a:spcPts val="0"/>
+              </a:spcAft>
+            </a:pPr>
+            <a:r>
+              <a:rPr sz="1200" b="1">
+                <a:solidFill>
+                  <a:srgbClr val="96620A"/>
+                </a:solidFill>
+                <a:latin typeface="Red Hat Mono"/>
+              </a:rPr>
+              <a:t>GROUND</a:t>
+            </a:r>
+          </a:p>
+        </p:txBody>
+      </p:sp>
+      <p:sp>
+        <p:nvSpPr>
+          <p:cNvPr id="11" name="Rounded Rectangle 10"/>
+          <p:cNvSpPr/>
+          <p:nvPr/>
+        </p:nvSpPr>
+        <p:spPr>
+          <a:xfrm>
+            <a:off x="7946136" y="2359152"/>
+            <a:ext cx="3310128" cy="128016"/>
+          </a:xfrm>
+          <a:prstGeom prst="roundRect">
+            <a:avLst>
+              <a:gd name="adj" fmla="val 50000"/>
+            </a:avLst>
+          </a:prstGeom>
+          <a:solidFill>
+            <a:srgbClr val="CC0000"/>
+          </a:solidFill>
+          <a:ln>
+            <a:noFill/>
+          </a:ln>
+          <a:effectLst/>
+        </p:spPr>
+        <p:style>
+          <a:lnRef idx="1">
+            <a:schemeClr val="accent1"/>
+          </a:lnRef>
+          <a:fillRef idx="3">
+            <a:schemeClr val="accent1"/>
+          </a:fillRef>
+          <a:effectRef idx="2">
+            <a:schemeClr val="accent1"/>
+          </a:effectRef>
+          <a:fontRef idx="minor">
+            <a:schemeClr val="lt1"/>
+          </a:fontRef>
+        </p:style>
+        <p:txBody>
+          <a:bodyPr rtlCol="0" anchor="ctr"/>
+          <a:lstStyle/>
+          <a:p>
+            <a:pPr algn="ctr"/>
+          </a:p>
+        </p:txBody>
+      </p:sp>
+      <p:sp>
+        <p:nvSpPr>
+          <p:cNvPr id="12" name="TextBox 11"/>
+          <p:cNvSpPr txBox="1"/>
+          <p:nvPr/>
+        </p:nvSpPr>
+        <p:spPr>
+          <a:xfrm>
+            <a:off x="7946136" y="1965960"/>
+            <a:ext cx="3310128" cy="274320"/>
+          </a:xfrm>
+          <a:prstGeom prst="rect">
+            <a:avLst/>
+          </a:prstGeom>
+          <a:noFill/>
+        </p:spPr>
+        <p:txBody>
+          <a:bodyPr wrap="square">
+            <a:spAutoFit/>
+          </a:bodyPr>
+          <a:lstStyle/>
+          <a:p>
+            <a:pPr algn="ctr">
+              <a:spcAft>
+                <a:spcPts val="0"/>
+              </a:spcAft>
+            </a:pPr>
+            <a:r>
+              <a:rPr sz="1200" b="1">
+                <a:solidFill>
+                  <a:srgbClr val="CC0000"/>
+                </a:solidFill>
+                <a:latin typeface="Red Hat Mono"/>
+              </a:rPr>
+              <a:t>SCALE</a:t>
+            </a:r>
+          </a:p>
+        </p:txBody>
+      </p:sp>
+      <p:sp>
+        <p:nvSpPr>
+          <p:cNvPr id="13" name="Oval 12"/>
+          <p:cNvSpPr/>
+          <p:nvPr/>
+        </p:nvSpPr>
+        <p:spPr>
+          <a:xfrm>
+            <a:off x="987552" y="2359152"/>
+            <a:ext cx="128016" cy="128016"/>
+          </a:xfrm>
+          <a:prstGeom prst="ellipse">
+            <a:avLst/>
+          </a:prstGeom>
+          <a:solidFill>
+            <a:srgbClr val="FFFFFF"/>
+          </a:solidFill>
+          <a:ln w="19050">
+            <a:solidFill>
+              <a:srgbClr val="54423E"/>
+            </a:solidFill>
+          </a:ln>
+          <a:effectLst/>
+        </p:spPr>
+        <p:style>
+          <a:lnRef idx="1">
+            <a:schemeClr val="accent1"/>
+          </a:lnRef>
+          <a:fillRef idx="3">
+            <a:schemeClr val="accent1"/>
+          </a:fillRef>
+          <a:effectRef idx="2">
+            <a:schemeClr val="accent1"/>
+          </a:effectRef>
+          <a:fontRef idx="minor">
+            <a:schemeClr val="lt1"/>
+          </a:fontRef>
+        </p:style>
+        <p:txBody>
+          <a:bodyPr rtlCol="0" anchor="ctr"/>
+          <a:lstStyle/>
+          <a:p>
+            <a:pPr algn="ctr"/>
+          </a:p>
+        </p:txBody>
+      </p:sp>
+      <p:sp>
+        <p:nvSpPr>
+          <p:cNvPr id="14" name="TextBox 13"/>
+          <p:cNvSpPr txBox="1"/>
+          <p:nvPr/>
+        </p:nvSpPr>
+        <p:spPr>
+          <a:xfrm>
+            <a:off x="548640" y="2551176"/>
+            <a:ext cx="1005840" cy="219456"/>
+          </a:xfrm>
+          <a:prstGeom prst="rect">
+            <a:avLst/>
+          </a:prstGeom>
+          <a:noFill/>
+        </p:spPr>
+        <p:txBody>
+          <a:bodyPr wrap="square">
+            <a:spAutoFit/>
+          </a:bodyPr>
+          <a:lstStyle/>
+          <a:p>
+            <a:pPr algn="ctr">
+              <a:spcAft>
+                <a:spcPts val="0"/>
+              </a:spcAft>
+            </a:pPr>
+            <a:r>
+              <a:rPr sz="900" b="0">
+                <a:solidFill>
+                  <a:srgbClr val="7E6A64"/>
+                </a:solidFill>
+                <a:latin typeface="Red Hat Mono"/>
+              </a:rPr>
+              <a:t>day 0</a:t>
+            </a:r>
+          </a:p>
+        </p:txBody>
+      </p:sp>
+      <p:sp>
+        <p:nvSpPr>
+          <p:cNvPr id="15" name="Oval 14"/>
+          <p:cNvSpPr/>
+          <p:nvPr/>
+        </p:nvSpPr>
+        <p:spPr>
+          <a:xfrm>
+            <a:off x="4434840" y="2359152"/>
+            <a:ext cx="128016" cy="128016"/>
+          </a:xfrm>
+          <a:prstGeom prst="ellipse">
+            <a:avLst/>
+          </a:prstGeom>
+          <a:solidFill>
+            <a:srgbClr val="FFFFFF"/>
+          </a:solidFill>
+          <a:ln w="19050">
+            <a:solidFill>
+              <a:srgbClr val="54423E"/>
+            </a:solidFill>
+          </a:ln>
+          <a:effectLst/>
+        </p:spPr>
+        <p:style>
+          <a:lnRef idx="1">
+            <a:schemeClr val="accent1"/>
+          </a:lnRef>
+          <a:fillRef idx="3">
+            <a:schemeClr val="accent1"/>
+          </a:fillRef>
+          <a:effectRef idx="2">
+            <a:schemeClr val="accent1"/>
+          </a:effectRef>
+          <a:fontRef idx="minor">
+            <a:schemeClr val="lt1"/>
+          </a:fontRef>
+        </p:style>
+        <p:txBody>
+          <a:bodyPr rtlCol="0" anchor="ctr"/>
+          <a:lstStyle/>
+          <a:p>
+            <a:pPr algn="ctr"/>
+          </a:p>
+        </p:txBody>
+      </p:sp>
+      <p:sp>
+        <p:nvSpPr>
+          <p:cNvPr id="16" name="TextBox 15"/>
+          <p:cNvSpPr txBox="1"/>
+          <p:nvPr/>
+        </p:nvSpPr>
+        <p:spPr>
+          <a:xfrm>
+            <a:off x="3995928" y="2551176"/>
+            <a:ext cx="1005840" cy="219456"/>
+          </a:xfrm>
+          <a:prstGeom prst="rect">
+            <a:avLst/>
+          </a:prstGeom>
+          <a:noFill/>
+        </p:spPr>
+        <p:txBody>
+          <a:bodyPr wrap="square">
+            <a:spAutoFit/>
+          </a:bodyPr>
+          <a:lstStyle/>
+          <a:p>
+            <a:pPr algn="ctr">
+              <a:spcAft>
+                <a:spcPts val="0"/>
+              </a:spcAft>
+            </a:pPr>
+            <a:r>
+              <a:rPr sz="900" b="0">
+                <a:solidFill>
+                  <a:srgbClr val="7E6A64"/>
+                </a:solidFill>
+                <a:latin typeface="Red Hat Mono"/>
+              </a:rPr>
+              <a:t>day 90</a:t>
+            </a:r>
+          </a:p>
+        </p:txBody>
+      </p:sp>
+      <p:sp>
+        <p:nvSpPr>
+          <p:cNvPr id="17" name="Oval 16"/>
+          <p:cNvSpPr/>
+          <p:nvPr/>
+        </p:nvSpPr>
+        <p:spPr>
+          <a:xfrm>
+            <a:off x="7882128" y="2359152"/>
+            <a:ext cx="128016" cy="128016"/>
+          </a:xfrm>
+          <a:prstGeom prst="ellipse">
+            <a:avLst/>
+          </a:prstGeom>
+          <a:solidFill>
+            <a:srgbClr val="FFFFFF"/>
+          </a:solidFill>
+          <a:ln w="19050">
+            <a:solidFill>
+              <a:srgbClr val="54423E"/>
+            </a:solidFill>
+          </a:ln>
+          <a:effectLst/>
+        </p:spPr>
+        <p:style>
+          <a:lnRef idx="1">
+            <a:schemeClr val="accent1"/>
+          </a:lnRef>
+          <a:fillRef idx="3">
+            <a:schemeClr val="accent1"/>
+          </a:fillRef>
+          <a:effectRef idx="2">
+            <a:schemeClr val="accent1"/>
+          </a:effectRef>
+          <a:fontRef idx="minor">
+            <a:schemeClr val="lt1"/>
+          </a:fontRef>
+        </p:style>
+        <p:txBody>
+          <a:bodyPr rtlCol="0" anchor="ctr"/>
+          <a:lstStyle/>
+          <a:p>
+            <a:pPr algn="ctr"/>
+          </a:p>
+        </p:txBody>
+      </p:sp>
+      <p:sp>
+        <p:nvSpPr>
+          <p:cNvPr id="18" name="TextBox 17"/>
+          <p:cNvSpPr txBox="1"/>
+          <p:nvPr/>
+        </p:nvSpPr>
+        <p:spPr>
+          <a:xfrm>
+            <a:off x="7443216" y="2551176"/>
+            <a:ext cx="1005840" cy="219456"/>
+          </a:xfrm>
+          <a:prstGeom prst="rect">
+            <a:avLst/>
+          </a:prstGeom>
+          <a:noFill/>
+        </p:spPr>
+        <p:txBody>
+          <a:bodyPr wrap="square">
+            <a:spAutoFit/>
+          </a:bodyPr>
+          <a:lstStyle/>
+          <a:p>
+            <a:pPr algn="ctr">
+              <a:spcAft>
+                <a:spcPts val="0"/>
+              </a:spcAft>
+            </a:pPr>
+            <a:r>
+              <a:rPr sz="900" b="0">
+                <a:solidFill>
+                  <a:srgbClr val="7E6A64"/>
+                </a:solidFill>
+                <a:latin typeface="Red Hat Mono"/>
+              </a:rPr>
+              <a:t>day 180</a:t>
+            </a:r>
+          </a:p>
+        </p:txBody>
+      </p:sp>
+      <p:sp>
+        <p:nvSpPr>
+          <p:cNvPr id="19" name="Oval 18"/>
+          <p:cNvSpPr/>
+          <p:nvPr/>
+        </p:nvSpPr>
+        <p:spPr>
+          <a:xfrm>
+            <a:off x="11192256" y="2359152"/>
+            <a:ext cx="128016" cy="128016"/>
+          </a:xfrm>
+          <a:prstGeom prst="ellipse">
+            <a:avLst/>
+          </a:prstGeom>
+          <a:solidFill>
+            <a:srgbClr val="FFFFFF"/>
+          </a:solidFill>
+          <a:ln w="19050">
+            <a:solidFill>
+              <a:srgbClr val="54423E"/>
+            </a:solidFill>
+          </a:ln>
+          <a:effectLst/>
+        </p:spPr>
+        <p:style>
+          <a:lnRef idx="1">
+            <a:schemeClr val="accent1"/>
+          </a:lnRef>
+          <a:fillRef idx="3">
+            <a:schemeClr val="accent1"/>
+          </a:fillRef>
+          <a:effectRef idx="2">
+            <a:schemeClr val="accent1"/>
+          </a:effectRef>
+          <a:fontRef idx="minor">
+            <a:schemeClr val="lt1"/>
+          </a:fontRef>
+        </p:style>
+        <p:txBody>
+          <a:bodyPr rtlCol="0" anchor="ctr"/>
+          <a:lstStyle/>
+          <a:p>
+            <a:pPr algn="ctr"/>
+          </a:p>
+        </p:txBody>
+      </p:sp>
+      <p:sp>
+        <p:nvSpPr>
+          <p:cNvPr id="20" name="TextBox 19"/>
+          <p:cNvSpPr txBox="1"/>
+          <p:nvPr/>
+        </p:nvSpPr>
+        <p:spPr>
+          <a:xfrm>
+            <a:off x="10753344" y="2551176"/>
+            <a:ext cx="1005840" cy="219456"/>
+          </a:xfrm>
+          <a:prstGeom prst="rect">
+            <a:avLst/>
+          </a:prstGeom>
+          <a:noFill/>
+        </p:spPr>
+        <p:txBody>
+          <a:bodyPr wrap="square">
+            <a:spAutoFit/>
+          </a:bodyPr>
+          <a:lstStyle/>
+          <a:p>
+            <a:pPr algn="ctr">
+              <a:spcAft>
+                <a:spcPts val="0"/>
+              </a:spcAft>
+            </a:pPr>
+            <a:r>
+              <a:rPr sz="900" b="0">
+                <a:solidFill>
+                  <a:srgbClr val="7E6A64"/>
+                </a:solidFill>
+                <a:latin typeface="Red Hat Mono"/>
+              </a:rPr>
+              <a:t>day 270+</a:t>
+            </a:r>
+          </a:p>
+        </p:txBody>
+      </p:sp>
+      <p:sp>
+        <p:nvSpPr>
+          <p:cNvPr id="21" name="Rounded Rectangle 20"/>
+          <p:cNvSpPr/>
+          <p:nvPr/>
+        </p:nvSpPr>
+        <p:spPr>
+          <a:xfrm>
+            <a:off x="777240" y="3154680"/>
+            <a:ext cx="3447288" cy="384048"/>
+          </a:xfrm>
+          <a:prstGeom prst="roundRect">
+            <a:avLst>
+              <a:gd name="adj" fmla="val 18000"/>
+            </a:avLst>
+          </a:prstGeom>
+          <a:solidFill>
+            <a:srgbClr val="E7F1F5"/>
+          </a:solidFill>
+          <a:ln>
+            <a:noFill/>
+          </a:ln>
+          <a:effectLst/>
+        </p:spPr>
+        <p:style>
+          <a:lnRef idx="1">
+            <a:schemeClr val="accent1"/>
+          </a:lnRef>
+          <a:fillRef idx="3">
+            <a:schemeClr val="accent1"/>
+          </a:fillRef>
+          <a:effectRef idx="2">
+            <a:schemeClr val="accent1"/>
+          </a:effectRef>
+          <a:fontRef idx="minor">
+            <a:schemeClr val="lt1"/>
+          </a:fontRef>
+        </p:style>
+        <p:txBody>
+          <a:bodyPr rtlCol="0" anchor="ctr"/>
+          <a:lstStyle/>
+          <a:p>
+            <a:pPr algn="ctr"/>
+          </a:p>
+        </p:txBody>
+      </p:sp>
+      <p:sp>
+        <p:nvSpPr>
+          <p:cNvPr id="22" name="TextBox 21"/>
+          <p:cNvSpPr txBox="1"/>
+          <p:nvPr/>
+        </p:nvSpPr>
+        <p:spPr>
+          <a:xfrm>
+            <a:off x="923544" y="3191256"/>
+            <a:ext cx="3172968" cy="310896"/>
+          </a:xfrm>
+          <a:prstGeom prst="rect">
+            <a:avLst/>
+          </a:prstGeom>
+          <a:noFill/>
+        </p:spPr>
+        <p:txBody>
+          <a:bodyPr wrap="square">
+            <a:spAutoFit/>
+          </a:bodyPr>
+          <a:lstStyle/>
+          <a:p>
+            <a:pPr algn="l">
+              <a:spcAft>
+                <a:spcPts val="0"/>
+              </a:spcAft>
+            </a:pPr>
+            <a:r>
+              <a:rPr sz="1250" b="1">
+                <a:solidFill>
+                  <a:srgbClr val="286C88"/>
+                </a:solidFill>
+                <a:latin typeface="Red Hat Display"/>
+              </a:rPr>
+              <a:t>Prove — days 0–90</a:t>
+            </a:r>
+          </a:p>
+        </p:txBody>
+      </p:sp>
+      <p:sp>
+        <p:nvSpPr>
+          <p:cNvPr id="23" name="TextBox 22"/>
+          <p:cNvSpPr txBox="1"/>
+          <p:nvPr/>
+        </p:nvSpPr>
+        <p:spPr>
+          <a:xfrm>
+            <a:off x="923544" y="3630168"/>
+            <a:ext cx="3172968" cy="2377440"/>
+          </a:xfrm>
+          <a:prstGeom prst="rect">
+            <a:avLst/>
+          </a:prstGeom>
+          <a:noFill/>
+        </p:spPr>
+        <p:txBody>
+          <a:bodyPr wrap="square">
+            <a:spAutoFit/>
+          </a:bodyPr>
+          <a:lstStyle/>
+          <a:p>
+            <a:pPr algn="l">
+              <a:spcAft>
+                <a:spcPts val="500"/>
+              </a:spcAft>
+            </a:pPr>
+            <a:r>
+              <a:rPr sz="1100" b="0">
+                <a:solidFill>
+                  <a:srgbClr val="54423E"/>
+                </a:solidFill>
+                <a:latin typeface="Red Hat Text"/>
+              </a:rPr>
+              <a:t>•  One endpoint on RHEL AI</a:t>
+            </a:r>
+          </a:p>
+          <a:p>
+            <a:pPr algn="l">
+              <a:spcAft>
+                <a:spcPts val="500"/>
+              </a:spcAft>
+            </a:pPr>
+            <a:r>
+              <a:rPr sz="1100" b="0">
+                <a:solidFill>
+                  <a:srgbClr val="54423E"/>
+                </a:solidFill>
+                <a:latin typeface="Red Hat Text"/>
+              </a:rPr>
+              <a:t>•  Accelerator capacity plan</a:t>
+            </a:r>
+          </a:p>
+          <a:p>
+            <a:pPr algn="l">
+              <a:spcAft>
+                <a:spcPts val="500"/>
+              </a:spcAft>
+            </a:pPr>
+            <a:r>
+              <a:rPr sz="1100" b="0">
+                <a:solidFill>
+                  <a:srgbClr val="54423E"/>
+                </a:solidFill>
+                <a:latin typeface="Red Hat Text"/>
+              </a:rPr>
+              <a:t>•  Data classes agreed in writing</a:t>
+            </a:r>
+          </a:p>
+          <a:p>
+            <a:pPr algn="l">
+              <a:spcAft>
+                <a:spcPts val="500"/>
+              </a:spcAft>
+            </a:pPr>
+            <a:r>
+              <a:rPr sz="1100" b="0">
+                <a:solidFill>
+                  <a:srgbClr val="54423E"/>
+                </a:solidFill>
+                <a:latin typeface="Red Hat Text"/>
+              </a:rPr>
+              <a:t>•  One workflow with a reviewer</a:t>
+            </a:r>
+          </a:p>
+          <a:p>
+            <a:pPr algn="l">
+              <a:spcAft>
+                <a:spcPts val="500"/>
+              </a:spcAft>
+            </a:pPr>
+            <a:r>
+              <a:rPr sz="1100" b="0">
+                <a:solidFill>
+                  <a:srgbClr val="54423E"/>
+                </a:solidFill>
+                <a:latin typeface="Red Hat Text"/>
+              </a:rPr>
+              <a:t>•  Baseline measured first</a:t>
+            </a:r>
+          </a:p>
+        </p:txBody>
+      </p:sp>
+      <p:sp>
+        <p:nvSpPr>
+          <p:cNvPr id="24" name="Rounded Rectangle 23"/>
+          <p:cNvSpPr/>
+          <p:nvPr/>
+        </p:nvSpPr>
+        <p:spPr>
+          <a:xfrm>
+            <a:off x="4370832" y="3154680"/>
+            <a:ext cx="3447288" cy="384048"/>
+          </a:xfrm>
+          <a:prstGeom prst="roundRect">
+            <a:avLst>
+              <a:gd name="adj" fmla="val 18000"/>
+            </a:avLst>
+          </a:prstGeom>
+          <a:solidFill>
+            <a:srgbClr val="F8EFDC"/>
+          </a:solidFill>
+          <a:ln>
+            <a:noFill/>
+          </a:ln>
+          <a:effectLst/>
+        </p:spPr>
+        <p:style>
+          <a:lnRef idx="1">
+            <a:schemeClr val="accent1"/>
+          </a:lnRef>
+          <a:fillRef idx="3">
+            <a:schemeClr val="accent1"/>
+          </a:fillRef>
+          <a:effectRef idx="2">
+            <a:schemeClr val="accent1"/>
+          </a:effectRef>
+          <a:fontRef idx="minor">
+            <a:schemeClr val="lt1"/>
+          </a:fontRef>
+        </p:style>
+        <p:txBody>
+          <a:bodyPr rtlCol="0" anchor="ctr"/>
+          <a:lstStyle/>
+          <a:p>
+            <a:pPr algn="ctr"/>
+          </a:p>
+        </p:txBody>
+      </p:sp>
+      <p:sp>
+        <p:nvSpPr>
+          <p:cNvPr id="25" name="TextBox 24"/>
+          <p:cNvSpPr txBox="1"/>
+          <p:nvPr/>
+        </p:nvSpPr>
+        <p:spPr>
+          <a:xfrm>
+            <a:off x="4517136" y="3191256"/>
+            <a:ext cx="3172968" cy="310896"/>
+          </a:xfrm>
+          <a:prstGeom prst="rect">
+            <a:avLst/>
+          </a:prstGeom>
+          <a:noFill/>
+        </p:spPr>
+        <p:txBody>
+          <a:bodyPr wrap="square">
+            <a:spAutoFit/>
+          </a:bodyPr>
+          <a:lstStyle/>
+          <a:p>
+            <a:pPr algn="l">
+              <a:spcAft>
+                <a:spcPts val="0"/>
+              </a:spcAft>
+            </a:pPr>
+            <a:r>
+              <a:rPr sz="1250" b="1">
+                <a:solidFill>
+                  <a:srgbClr val="96620A"/>
+                </a:solidFill>
+                <a:latin typeface="Red Hat Display"/>
+              </a:rPr>
+              <a:t>Ground — days 90–180</a:t>
+            </a:r>
+          </a:p>
+        </p:txBody>
+      </p:sp>
+      <p:sp>
+        <p:nvSpPr>
+          <p:cNvPr id="26" name="TextBox 25"/>
+          <p:cNvSpPr txBox="1"/>
+          <p:nvPr/>
+        </p:nvSpPr>
+        <p:spPr>
+          <a:xfrm>
+            <a:off x="4517136" y="3630168"/>
+            <a:ext cx="3172968" cy="2377440"/>
+          </a:xfrm>
+          <a:prstGeom prst="rect">
+            <a:avLst/>
+          </a:prstGeom>
+          <a:noFill/>
+        </p:spPr>
+        <p:txBody>
+          <a:bodyPr wrap="square">
+            <a:spAutoFit/>
+          </a:bodyPr>
+          <a:lstStyle/>
+          <a:p>
+            <a:pPr algn="l">
+              <a:spcAft>
+                <a:spcPts val="500"/>
+              </a:spcAft>
+            </a:pPr>
+            <a:r>
+              <a:rPr sz="1100" b="0">
+                <a:solidFill>
+                  <a:srgbClr val="54423E"/>
+                </a:solidFill>
+                <a:latin typeface="Red Hat Text"/>
+              </a:rPr>
+              <a:t>•  Serving on OpenShift AI</a:t>
+            </a:r>
+          </a:p>
+          <a:p>
+            <a:pPr algn="l">
+              <a:spcAft>
+                <a:spcPts val="500"/>
+              </a:spcAft>
+            </a:pPr>
+            <a:r>
+              <a:rPr sz="1100" b="0">
+                <a:solidFill>
+                  <a:srgbClr val="54423E"/>
+                </a:solidFill>
+                <a:latin typeface="Red Hat Text"/>
+              </a:rPr>
+              <a:t>•  Retrieval over your guidance</a:t>
+            </a:r>
+          </a:p>
+          <a:p>
+            <a:pPr algn="l">
+              <a:spcAft>
+                <a:spcPts val="500"/>
+              </a:spcAft>
+            </a:pPr>
+            <a:r>
+              <a:rPr sz="1100" b="0">
+                <a:solidFill>
+                  <a:srgbClr val="54423E"/>
+                </a:solidFill>
+                <a:latin typeface="Red Hat Text"/>
+              </a:rPr>
+              <a:t>•  Tune on agency vocabulary</a:t>
+            </a:r>
+          </a:p>
+          <a:p>
+            <a:pPr algn="l">
+              <a:spcAft>
+                <a:spcPts val="500"/>
+              </a:spcAft>
+            </a:pPr>
+            <a:r>
+              <a:rPr sz="1100" b="0">
+                <a:solidFill>
+                  <a:srgbClr val="54423E"/>
+                </a:solidFill>
+                <a:latin typeface="Red Hat Text"/>
+              </a:rPr>
+              <a:t>•  Drift and compliance wired</a:t>
+            </a:r>
+          </a:p>
+          <a:p>
+            <a:pPr algn="l">
+              <a:spcAft>
+                <a:spcPts val="500"/>
+              </a:spcAft>
+            </a:pPr>
+            <a:r>
+              <a:rPr sz="1100" b="0">
+                <a:solidFill>
+                  <a:srgbClr val="54423E"/>
+                </a:solidFill>
+                <a:latin typeface="Red Hat Text"/>
+              </a:rPr>
+              <a:t>•  Provisioning automated</a:t>
+            </a:r>
+          </a:p>
+        </p:txBody>
+      </p:sp>
+      <p:sp>
+        <p:nvSpPr>
+          <p:cNvPr id="27" name="Rounded Rectangle 26"/>
+          <p:cNvSpPr/>
+          <p:nvPr/>
+        </p:nvSpPr>
+        <p:spPr>
+          <a:xfrm>
+            <a:off x="7964424" y="3154680"/>
+            <a:ext cx="3447288" cy="384048"/>
+          </a:xfrm>
+          <a:prstGeom prst="roundRect">
+            <a:avLst>
+              <a:gd name="adj" fmla="val 18000"/>
+            </a:avLst>
+          </a:prstGeom>
+          <a:solidFill>
+            <a:srgbClr val="FBEAE8"/>
+          </a:solidFill>
+          <a:ln>
+            <a:noFill/>
+          </a:ln>
+          <a:effectLst/>
+        </p:spPr>
+        <p:style>
+          <a:lnRef idx="1">
+            <a:schemeClr val="accent1"/>
+          </a:lnRef>
+          <a:fillRef idx="3">
+            <a:schemeClr val="accent1"/>
+          </a:fillRef>
+          <a:effectRef idx="2">
+            <a:schemeClr val="accent1"/>
+          </a:effectRef>
+          <a:fontRef idx="minor">
+            <a:schemeClr val="lt1"/>
+          </a:fontRef>
+        </p:style>
+        <p:txBody>
+          <a:bodyPr rtlCol="0" anchor="ctr"/>
+          <a:lstStyle/>
+          <a:p>
+            <a:pPr algn="ctr"/>
+          </a:p>
+        </p:txBody>
+      </p:sp>
+      <p:sp>
+        <p:nvSpPr>
+          <p:cNvPr id="28" name="TextBox 27"/>
+          <p:cNvSpPr txBox="1"/>
+          <p:nvPr/>
+        </p:nvSpPr>
+        <p:spPr>
+          <a:xfrm>
+            <a:off x="8110728" y="3191256"/>
+            <a:ext cx="3172968" cy="310896"/>
+          </a:xfrm>
+          <a:prstGeom prst="rect">
+            <a:avLst/>
+          </a:prstGeom>
+          <a:noFill/>
+        </p:spPr>
+        <p:txBody>
+          <a:bodyPr wrap="square">
+            <a:spAutoFit/>
+          </a:bodyPr>
+          <a:lstStyle/>
+          <a:p>
+            <a:pPr algn="l">
+              <a:spcAft>
+                <a:spcPts val="0"/>
+              </a:spcAft>
+            </a:pPr>
+            <a:r>
+              <a:rPr sz="1250" b="1">
+                <a:solidFill>
+                  <a:srgbClr val="A30000"/>
+                </a:solidFill>
+                <a:latin typeface="Red Hat Display"/>
+              </a:rPr>
+              <a:t>Scale — days 180+</a:t>
+            </a:r>
+          </a:p>
+        </p:txBody>
+      </p:sp>
+      <p:sp>
+        <p:nvSpPr>
+          <p:cNvPr id="29" name="TextBox 28"/>
+          <p:cNvSpPr txBox="1"/>
+          <p:nvPr/>
+        </p:nvSpPr>
+        <p:spPr>
+          <a:xfrm>
+            <a:off x="8110728" y="3630168"/>
+            <a:ext cx="3172968" cy="2377440"/>
+          </a:xfrm>
+          <a:prstGeom prst="rect">
+            <a:avLst/>
+          </a:prstGeom>
+          <a:noFill/>
+        </p:spPr>
+        <p:txBody>
+          <a:bodyPr wrap="square">
+            <a:spAutoFit/>
+          </a:bodyPr>
+          <a:lstStyle/>
+          <a:p>
+            <a:pPr algn="l">
+              <a:spcAft>
+                <a:spcPts val="500"/>
+              </a:spcAft>
+            </a:pPr>
+            <a:r>
+              <a:rPr sz="1100" b="0">
+                <a:solidFill>
+                  <a:srgbClr val="54423E"/>
+                </a:solidFill>
+                <a:latin typeface="Red Hat Text"/>
+              </a:rPr>
+              <a:t>•  Registry with real approvals</a:t>
+            </a:r>
+          </a:p>
+          <a:p>
+            <a:pPr algn="l">
+              <a:spcAft>
+                <a:spcPts val="500"/>
+              </a:spcAft>
+            </a:pPr>
+            <a:r>
+              <a:rPr sz="1100" b="0">
+                <a:solidFill>
+                  <a:srgbClr val="54423E"/>
+                </a:solidFill>
+                <a:latin typeface="Red Hat Text"/>
+              </a:rPr>
+              <a:t>•  Workflows two to five</a:t>
+            </a:r>
+          </a:p>
+          <a:p>
+            <a:pPr algn="l">
+              <a:spcAft>
+                <a:spcPts val="500"/>
+              </a:spcAft>
+            </a:pPr>
+            <a:r>
+              <a:rPr sz="1100" b="0">
+                <a:solidFill>
+                  <a:srgbClr val="54423E"/>
+                </a:solidFill>
+                <a:latin typeface="Red Hat Text"/>
+              </a:rPr>
+              <a:t>•  Filing-season rehearsal</a:t>
+            </a:r>
+          </a:p>
+          <a:p>
+            <a:pPr algn="l">
+              <a:spcAft>
+                <a:spcPts val="500"/>
+              </a:spcAft>
+            </a:pPr>
+            <a:r>
+              <a:rPr sz="1100" b="0">
+                <a:solidFill>
+                  <a:srgbClr val="54423E"/>
+                </a:solidFill>
+                <a:latin typeface="Red Hat Text"/>
+              </a:rPr>
+              <a:t>•  Extend to the enclave</a:t>
+            </a:r>
+          </a:p>
+          <a:p>
+            <a:pPr algn="l">
+              <a:spcAft>
+                <a:spcPts val="500"/>
+              </a:spcAft>
+            </a:pPr>
+            <a:r>
+              <a:rPr sz="1100" b="0">
+                <a:solidFill>
+                  <a:srgbClr val="54423E"/>
+                </a:solidFill>
+                <a:latin typeface="Red Hat Text"/>
+              </a:rPr>
+              <a:t>•  Report in mission terms</a:t>
+            </a:r>
+          </a:p>
+        </p:txBody>
+      </p:sp>
     </p:spTree>
   </p:cSld>
   <p:clrMapOvr>
@@ -7912,7 +12627,7 @@
         </p:nvSpPr>
         <p:spPr>
           <a:xfrm>
-            <a:off x="777240" y="566928"/>
+            <a:off x="777240" y="502920"/>
             <a:ext cx="10637215" cy="310896"/>
           </a:xfrm>
           <a:prstGeom prst="rect">
@@ -7934,7 +12649,7 @@
             <a:r>
               <a:rPr sz="1100" b="1">
                 <a:solidFill>
-                  <a:srgbClr val="8A7671"/>
+                  <a:srgbClr val="7E6A64"/>
                 </a:solidFill>
                 <a:latin typeface="Red Hat Mono"/>
               </a:rPr>
@@ -7951,8 +12666,8 @@
         </p:nvSpPr>
         <p:spPr>
           <a:xfrm>
-            <a:off x="777240" y="932688"/>
-            <a:ext cx="10637215" cy="914400"/>
+            <a:off x="777240" y="868680"/>
+            <a:ext cx="10637215" cy="822960"/>
           </a:xfrm>
           <a:prstGeom prst="rect">
             <a:avLst/>
@@ -7990,8 +12705,8 @@
         </p:nvSpPr>
         <p:spPr>
           <a:xfrm>
-            <a:off x="777240" y="1874519"/>
-            <a:ext cx="8778240" cy="640080"/>
+            <a:off x="777240" y="1536192"/>
+            <a:ext cx="9692640" cy="457200"/>
           </a:xfrm>
           <a:prstGeom prst="rect">
             <a:avLst/>
@@ -8010,13 +12725,13 @@
               </a:spcAft>
             </a:pPr>
             <a:r>
-              <a:rPr sz="1500" b="0">
+              <a:rPr sz="1400" b="0">
                 <a:solidFill>
                   <a:srgbClr val="54423E"/>
                 </a:solidFill>
                 <a:latin typeface="Red Hat Text"/>
               </a:rPr>
-              <a:t>Simulate mode needs no cluster, no GPU and no credentials.</a:t>
+              <a:t>Simulate mode needs no cluster, no GPU and no credentials. The Demo view plays them hands-free.</a:t>
             </a:r>
           </a:p>
         </p:txBody>
@@ -8030,7 +12745,7 @@
           <p:nvPr/>
         </p:nvGraphicFramePr>
         <p:xfrm>
-          <a:off x="777240" y="2514600"/>
+          <a:off x="777240" y="2194560"/>
           <a:ext cx="10607040" cy="2304288"/>
         </p:xfrm>
         <a:graphic>
@@ -8053,7 +12768,7 @@
                       <a:r>
                         <a:rPr sz="1050" b="1">
                           <a:solidFill>
-                            <a:srgbClr val="8A7671"/>
+                            <a:srgbClr val="7E6A64"/>
                           </a:solidFill>
                           <a:latin typeface="Red Hat Mono"/>
                         </a:rPr>
@@ -8075,7 +12790,7 @@
                       <a:r>
                         <a:rPr sz="1050" b="1">
                           <a:solidFill>
-                            <a:srgbClr val="8A7671"/>
+                            <a:srgbClr val="7E6A64"/>
                           </a:solidFill>
                           <a:latin typeface="Red Hat Mono"/>
                         </a:rPr>
@@ -8097,7 +12812,7 @@
                       <a:r>
                         <a:rPr sz="1050" b="1">
                           <a:solidFill>
-                            <a:srgbClr val="8A7671"/>
+                            <a:srgbClr val="7E6A64"/>
                           </a:solidFill>
                           <a:latin typeface="Red Hat Mono"/>
                         </a:rPr>
@@ -8602,7 +13317,7 @@
         </p:nvSpPr>
         <p:spPr>
           <a:xfrm>
-            <a:off x="777240" y="566928"/>
+            <a:off x="777240" y="502920"/>
             <a:ext cx="10637215" cy="310896"/>
           </a:xfrm>
           <a:prstGeom prst="rect">
@@ -8624,7 +13339,7 @@
             <a:r>
               <a:rPr sz="1100" b="1">
                 <a:solidFill>
-                  <a:srgbClr val="8A7671"/>
+                  <a:srgbClr val="7E6A64"/>
                 </a:solidFill>
                 <a:latin typeface="Red Hat Mono"/>
               </a:rPr>
@@ -8641,8 +13356,8 @@
         </p:nvSpPr>
         <p:spPr>
           <a:xfrm>
-            <a:off x="777240" y="932688"/>
-            <a:ext cx="10637215" cy="914400"/>
+            <a:off x="777240" y="868680"/>
+            <a:ext cx="10637215" cy="822960"/>
           </a:xfrm>
           <a:prstGeom prst="rect">
             <a:avLst/>
@@ -8680,7 +13395,7 @@
         </p:nvSpPr>
         <p:spPr>
           <a:xfrm>
-            <a:off x="777240" y="2377440"/>
+            <a:off x="777240" y="2240280"/>
             <a:ext cx="41148" cy="1737360"/>
           </a:xfrm>
           <a:prstGeom prst="rect">
@@ -8724,7 +13439,7 @@
         </p:nvSpPr>
         <p:spPr>
           <a:xfrm>
-            <a:off x="941832" y="2377440"/>
+            <a:off x="941832" y="2240280"/>
             <a:ext cx="3186074" cy="1737360"/>
           </a:xfrm>
           <a:prstGeom prst="rect">
@@ -8779,7 +13494,7 @@
         </p:nvSpPr>
         <p:spPr>
           <a:xfrm>
-            <a:off x="4420514" y="2377440"/>
+            <a:off x="4420514" y="2240280"/>
             <a:ext cx="41148" cy="1737360"/>
           </a:xfrm>
           <a:prstGeom prst="rect">
@@ -8823,7 +13538,7 @@
         </p:nvSpPr>
         <p:spPr>
           <a:xfrm>
-            <a:off x="4585106" y="2377440"/>
+            <a:off x="4585106" y="2240280"/>
             <a:ext cx="3186074" cy="1737360"/>
           </a:xfrm>
           <a:prstGeom prst="rect">
@@ -8878,7 +13593,7 @@
         </p:nvSpPr>
         <p:spPr>
           <a:xfrm>
-            <a:off x="8063788" y="2377440"/>
+            <a:off x="8063788" y="2240280"/>
             <a:ext cx="41148" cy="1737360"/>
           </a:xfrm>
           <a:prstGeom prst="rect">
@@ -8922,7 +13637,7 @@
         </p:nvSpPr>
         <p:spPr>
           <a:xfrm>
-            <a:off x="8228380" y="2377440"/>
+            <a:off x="8228380" y="2240280"/>
             <a:ext cx="3186074" cy="1737360"/>
           </a:xfrm>
           <a:prstGeom prst="rect">
@@ -8977,7 +13692,7 @@
         </p:nvSpPr>
         <p:spPr>
           <a:xfrm>
-            <a:off x="777240" y="4754880"/>
+            <a:off x="777240" y="4663440"/>
             <a:ext cx="10515600" cy="1188720"/>
           </a:xfrm>
           <a:prstGeom prst="rect">

--- a/slides/exports/redhat-ai-tax-administration.pptx
+++ b/slides/exports/redhat-ai-tax-administration.pptx
@@ -510,7 +510,7 @@
           <a:lstStyle/>
           <a:p>
             <a:r>
-              <a:t>Open by naming the room: Red Hat, Four Inc. and Carahsoft. Frame the hour - 25 minutes of story, 30 minutes of live terminal, 5 for questions. The promise: every claim we make today, we run in a shell before you leave.</a:t>
+              <a:t>Jon Keam and Brad Scalio present. Open by naming the room: Red Hat, Four Inc. and Carahsoft. Frame the hour - foundations, then the platform story, then live terminal, 5 for questions. The promise: every claim we make today, we run in a shell before you leave.</a:t>
             </a:r>
           </a:p>
         </p:txBody>
@@ -860,7 +860,7 @@
           <a:lstStyle/>
           <a:p>
             <a:r>
-              <a:t>This is the slide that unblocks the deal. Every row is a control the platform provides, mapped to the question an authorizing official actually asks. Expect interruptions here - let them happen, this is the conversation you want. Offer to take the table offline with their ISSO.</a:t>
+              <a:t>Be honest about sequencing. Most agencies stall on rows 2 and 3 of the Prove phase - no accelerator capacity plan, and no written agreement on which data may be used. Neither is technical. Ask the room directly which phase they are in.</a:t>
             </a:r>
           </a:p>
         </p:txBody>
@@ -930,7 +930,7 @@
           <a:lstStyle/>
           <a:p>
             <a:r>
-              <a:t>Be honest about sequencing. Most agencies stall on rows 2 and 3 of the Prove phase - no accelerator capacity plan, and no written agreement on which data may be used. Neither is technical. Ask the room directly which phase they are in.</a:t>
+              <a:t>Close with a specific ask, not a thank-you. The architecture workshop is the natural next step. Then hand off to Four Inc. and Carahsoft for the contract vehicle conversation.</a:t>
             </a:r>
           </a:p>
         </p:txBody>
@@ -1070,7 +1070,7 @@
           <a:lstStyle/>
           <a:p>
             <a:r>
-              <a:t>Close with a specific ask, not a thank-you. The architecture workshop is the natural next step. Then hand off to Four Inc. and Carahsoft for the contract vehicle conversation.</a:t>
+              <a:t>This is the slide that unblocks the deal. Every row is a control the platform provides, mapped to the question an authorizing official actually asks. Expect interruptions here - let them happen, this is the conversation you want. Offer to take the table offline with their ISSO.</a:t>
             </a:r>
           </a:p>
         </p:txBody>
@@ -4201,7 +4201,7 @@
                 </a:solidFill>
                 <a:latin typeface="Red Hat Display"/>
               </a:rPr>
-              <a:t>Turning AI strategy into tax administration outcomes</a:t>
+              <a:t>AI foundations for intelligent tax administration</a:t>
             </a:r>
           </a:p>
         </p:txBody>
@@ -4240,7 +4240,46 @@
                 </a:solidFill>
                 <a:latin typeface="Red Hat Text"/>
               </a:rPr>
-              <a:t>A secure, flexible foundation that connects automation, hybrid cloud and intelligent workflows — then six labs where you run it yourself.</a:t>
+              <a:t>What predictive AI, generative AI and LLMs actually do — then how Red Hat turns models, agency knowledge and automation into an operable mission capability, proven in seven labs you run yourself.</a:t>
+            </a:r>
+          </a:p>
+        </p:txBody>
+      </p:sp>
+      <p:sp>
+        <p:nvSpPr>
+          <p:cNvPr id="6" name="TextBox 5"/>
+          <p:cNvSpPr txBox="1"/>
+          <p:nvPr/>
+        </p:nvSpPr>
+        <p:spPr>
+          <a:xfrm>
+            <a:off x="777240" y="5349240"/>
+            <a:ext cx="8595360" cy="365760"/>
+          </a:xfrm>
+          <a:prstGeom prst="rect">
+            <a:avLst/>
+          </a:prstGeom>
+          <a:noFill/>
+        </p:spPr>
+        <p:txBody>
+          <a:bodyPr wrap="square">
+            <a:spAutoFit/>
+          </a:bodyPr>
+          <a:lstStyle/>
+          <a:p>
+            <a:pPr algn="l">
+              <a:spcAft>
+                <a:spcPts val="0"/>
+              </a:spcAft>
+            </a:pPr>
+            <a:r>
+              <a:rPr sz="1400" b="1">
+                <a:solidFill>
+                  <a:srgbClr val="54423E"/>
+                </a:solidFill>
+                <a:latin typeface="Red Hat Text"/>
+              </a:rPr>
+              <a:t>Presented by Jon Keam and Brad Scalio</a:t>
             </a:r>
           </a:p>
         </p:txBody>
@@ -8325,7 +8364,7 @@
                           </a:solidFill>
                           <a:latin typeface="Red Hat Text"/>
                         </a:rPr>
-                        <a:t>Red Hat Enterprise Linux AI, InstructLab</a:t>
+                        <a:t>Red Hat AI Inference Server, SDG Hub + Training Hub</a:t>
                       </a:r>
                     </a:p>
                   </a:txBody>
@@ -10146,7 +10185,7 @@
                 </a:solidFill>
                 <a:latin typeface="Red Hat Display"/>
               </a:rPr>
-              <a:t>Red Hat Enterprise Linux · RHEL AI</a:t>
+              <a:t>Red Hat Enterprise Linux · AI Inference Server</a:t>
             </a:r>
           </a:p>
           <a:p>
@@ -10552,7 +10591,2647 @@
                 </a:solidFill>
                 <a:latin typeface="Red Hat Mono"/>
               </a:rPr>
-              <a:t>TRUSTED, ENTERPRISE-READY AI</a:t>
+              <a:t>ADOPTION PATH</a:t>
+            </a:r>
+          </a:p>
+        </p:txBody>
+      </p:sp>
+      <p:sp>
+        <p:nvSpPr>
+          <p:cNvPr id="4" name="TextBox 3"/>
+          <p:cNvSpPr txBox="1"/>
+          <p:nvPr/>
+        </p:nvSpPr>
+        <p:spPr>
+          <a:xfrm>
+            <a:off x="777240" y="868680"/>
+            <a:ext cx="10637215" cy="822960"/>
+          </a:xfrm>
+          <a:prstGeom prst="rect">
+            <a:avLst/>
+          </a:prstGeom>
+          <a:noFill/>
+        </p:spPr>
+        <p:txBody>
+          <a:bodyPr wrap="square">
+            <a:spAutoFit/>
+          </a:bodyPr>
+          <a:lstStyle/>
+          <a:p>
+            <a:pPr algn="l">
+              <a:spcAft>
+                <a:spcPts val="0"/>
+              </a:spcAft>
+            </a:pPr>
+            <a:r>
+              <a:rPr sz="3400" b="1">
+                <a:solidFill>
+                  <a:srgbClr val="1B1211"/>
+                </a:solidFill>
+                <a:latin typeface="Red Hat Display"/>
+              </a:rPr>
+              <a:t>Ninety days, then ninety more</a:t>
+            </a:r>
+          </a:p>
+        </p:txBody>
+      </p:sp>
+      <p:sp>
+        <p:nvSpPr>
+          <p:cNvPr id="5" name="TextBox 4"/>
+          <p:cNvSpPr txBox="1"/>
+          <p:nvPr/>
+        </p:nvSpPr>
+        <p:spPr>
+          <a:xfrm>
+            <a:off x="777240" y="1536192"/>
+            <a:ext cx="9692640" cy="457200"/>
+          </a:xfrm>
+          <a:prstGeom prst="rect">
+            <a:avLst/>
+          </a:prstGeom>
+          <a:noFill/>
+        </p:spPr>
+        <p:txBody>
+          <a:bodyPr wrap="square">
+            <a:spAutoFit/>
+          </a:bodyPr>
+          <a:lstStyle/>
+          <a:p>
+            <a:pPr algn="l">
+              <a:spcAft>
+                <a:spcPts val="0"/>
+              </a:spcAft>
+            </a:pPr>
+            <a:r>
+              <a:rPr sz="1400" b="0">
+                <a:solidFill>
+                  <a:srgbClr val="54423E"/>
+                </a:solidFill>
+                <a:latin typeface="Red Hat Text"/>
+              </a:rPr>
+              <a:t>Nothing here requires a rewrite of a system of record.</a:t>
+            </a:r>
+          </a:p>
+        </p:txBody>
+      </p:sp>
+      <p:cxnSp>
+        <p:nvCxnSpPr>
+          <p:cNvPr id="6" name="Connector 5"/>
+          <p:cNvCxnSpPr/>
+          <p:nvPr/>
+        </p:nvCxnSpPr>
+        <p:spPr>
+          <a:xfrm>
+            <a:off x="914400" y="2423160"/>
+            <a:ext cx="10515600" cy="0"/>
+          </a:xfrm>
+          <a:prstGeom prst="line">
+            <a:avLst/>
+          </a:prstGeom>
+          <a:ln w="25400">
+            <a:solidFill>
+              <a:srgbClr val="CFC2BE"/>
+            </a:solidFill>
+          </a:ln>
+          <a:effectLst/>
+        </p:spPr>
+        <p:style>
+          <a:lnRef idx="2">
+            <a:schemeClr val="accent1"/>
+          </a:lnRef>
+          <a:fillRef idx="0">
+            <a:schemeClr val="accent1"/>
+          </a:fillRef>
+          <a:effectRef idx="1">
+            <a:schemeClr val="accent1"/>
+          </a:effectRef>
+          <a:fontRef idx="minor">
+            <a:schemeClr val="tx1"/>
+          </a:fontRef>
+        </p:style>
+      </p:cxnSp>
+      <p:sp>
+        <p:nvSpPr>
+          <p:cNvPr id="7" name="Rounded Rectangle 6"/>
+          <p:cNvSpPr/>
+          <p:nvPr/>
+        </p:nvSpPr>
+        <p:spPr>
+          <a:xfrm>
+            <a:off x="1051560" y="2359152"/>
+            <a:ext cx="3310128" cy="128016"/>
+          </a:xfrm>
+          <a:prstGeom prst="roundRect">
+            <a:avLst>
+              <a:gd name="adj" fmla="val 50000"/>
+            </a:avLst>
+          </a:prstGeom>
+          <a:solidFill>
+            <a:srgbClr val="286C88"/>
+          </a:solidFill>
+          <a:ln>
+            <a:noFill/>
+          </a:ln>
+          <a:effectLst/>
+        </p:spPr>
+        <p:style>
+          <a:lnRef idx="1">
+            <a:schemeClr val="accent1"/>
+          </a:lnRef>
+          <a:fillRef idx="3">
+            <a:schemeClr val="accent1"/>
+          </a:fillRef>
+          <a:effectRef idx="2">
+            <a:schemeClr val="accent1"/>
+          </a:effectRef>
+          <a:fontRef idx="minor">
+            <a:schemeClr val="lt1"/>
+          </a:fontRef>
+        </p:style>
+        <p:txBody>
+          <a:bodyPr rtlCol="0" anchor="ctr"/>
+          <a:lstStyle/>
+          <a:p>
+            <a:pPr algn="ctr"/>
+          </a:p>
+        </p:txBody>
+      </p:sp>
+      <p:sp>
+        <p:nvSpPr>
+          <p:cNvPr id="8" name="TextBox 7"/>
+          <p:cNvSpPr txBox="1"/>
+          <p:nvPr/>
+        </p:nvSpPr>
+        <p:spPr>
+          <a:xfrm>
+            <a:off x="1051560" y="1965960"/>
+            <a:ext cx="3310128" cy="274320"/>
+          </a:xfrm>
+          <a:prstGeom prst="rect">
+            <a:avLst/>
+          </a:prstGeom>
+          <a:noFill/>
+        </p:spPr>
+        <p:txBody>
+          <a:bodyPr wrap="square">
+            <a:spAutoFit/>
+          </a:bodyPr>
+          <a:lstStyle/>
+          <a:p>
+            <a:pPr algn="ctr">
+              <a:spcAft>
+                <a:spcPts val="0"/>
+              </a:spcAft>
+            </a:pPr>
+            <a:r>
+              <a:rPr sz="1200" b="1">
+                <a:solidFill>
+                  <a:srgbClr val="286C88"/>
+                </a:solidFill>
+                <a:latin typeface="Red Hat Mono"/>
+              </a:rPr>
+              <a:t>PROVE</a:t>
+            </a:r>
+          </a:p>
+        </p:txBody>
+      </p:sp>
+      <p:sp>
+        <p:nvSpPr>
+          <p:cNvPr id="9" name="Rounded Rectangle 8"/>
+          <p:cNvSpPr/>
+          <p:nvPr/>
+        </p:nvSpPr>
+        <p:spPr>
+          <a:xfrm>
+            <a:off x="4498848" y="2359152"/>
+            <a:ext cx="3310128" cy="128016"/>
+          </a:xfrm>
+          <a:prstGeom prst="roundRect">
+            <a:avLst>
+              <a:gd name="adj" fmla="val 50000"/>
+            </a:avLst>
+          </a:prstGeom>
+          <a:solidFill>
+            <a:srgbClr val="96620A"/>
+          </a:solidFill>
+          <a:ln>
+            <a:noFill/>
+          </a:ln>
+          <a:effectLst/>
+        </p:spPr>
+        <p:style>
+          <a:lnRef idx="1">
+            <a:schemeClr val="accent1"/>
+          </a:lnRef>
+          <a:fillRef idx="3">
+            <a:schemeClr val="accent1"/>
+          </a:fillRef>
+          <a:effectRef idx="2">
+            <a:schemeClr val="accent1"/>
+          </a:effectRef>
+          <a:fontRef idx="minor">
+            <a:schemeClr val="lt1"/>
+          </a:fontRef>
+        </p:style>
+        <p:txBody>
+          <a:bodyPr rtlCol="0" anchor="ctr"/>
+          <a:lstStyle/>
+          <a:p>
+            <a:pPr algn="ctr"/>
+          </a:p>
+        </p:txBody>
+      </p:sp>
+      <p:sp>
+        <p:nvSpPr>
+          <p:cNvPr id="10" name="TextBox 9"/>
+          <p:cNvSpPr txBox="1"/>
+          <p:nvPr/>
+        </p:nvSpPr>
+        <p:spPr>
+          <a:xfrm>
+            <a:off x="4498848" y="1965960"/>
+            <a:ext cx="3310128" cy="274320"/>
+          </a:xfrm>
+          <a:prstGeom prst="rect">
+            <a:avLst/>
+          </a:prstGeom>
+          <a:noFill/>
+        </p:spPr>
+        <p:txBody>
+          <a:bodyPr wrap="square">
+            <a:spAutoFit/>
+          </a:bodyPr>
+          <a:lstStyle/>
+          <a:p>
+            <a:pPr algn="ctr">
+              <a:spcAft>
+                <a:spcPts val="0"/>
+              </a:spcAft>
+            </a:pPr>
+            <a:r>
+              <a:rPr sz="1200" b="1">
+                <a:solidFill>
+                  <a:srgbClr val="96620A"/>
+                </a:solidFill>
+                <a:latin typeface="Red Hat Mono"/>
+              </a:rPr>
+              <a:t>GROUND</a:t>
+            </a:r>
+          </a:p>
+        </p:txBody>
+      </p:sp>
+      <p:sp>
+        <p:nvSpPr>
+          <p:cNvPr id="11" name="Rounded Rectangle 10"/>
+          <p:cNvSpPr/>
+          <p:nvPr/>
+        </p:nvSpPr>
+        <p:spPr>
+          <a:xfrm>
+            <a:off x="7946136" y="2359152"/>
+            <a:ext cx="3310128" cy="128016"/>
+          </a:xfrm>
+          <a:prstGeom prst="roundRect">
+            <a:avLst>
+              <a:gd name="adj" fmla="val 50000"/>
+            </a:avLst>
+          </a:prstGeom>
+          <a:solidFill>
+            <a:srgbClr val="CC0000"/>
+          </a:solidFill>
+          <a:ln>
+            <a:noFill/>
+          </a:ln>
+          <a:effectLst/>
+        </p:spPr>
+        <p:style>
+          <a:lnRef idx="1">
+            <a:schemeClr val="accent1"/>
+          </a:lnRef>
+          <a:fillRef idx="3">
+            <a:schemeClr val="accent1"/>
+          </a:fillRef>
+          <a:effectRef idx="2">
+            <a:schemeClr val="accent1"/>
+          </a:effectRef>
+          <a:fontRef idx="minor">
+            <a:schemeClr val="lt1"/>
+          </a:fontRef>
+        </p:style>
+        <p:txBody>
+          <a:bodyPr rtlCol="0" anchor="ctr"/>
+          <a:lstStyle/>
+          <a:p>
+            <a:pPr algn="ctr"/>
+          </a:p>
+        </p:txBody>
+      </p:sp>
+      <p:sp>
+        <p:nvSpPr>
+          <p:cNvPr id="12" name="TextBox 11"/>
+          <p:cNvSpPr txBox="1"/>
+          <p:nvPr/>
+        </p:nvSpPr>
+        <p:spPr>
+          <a:xfrm>
+            <a:off x="7946136" y="1965960"/>
+            <a:ext cx="3310128" cy="274320"/>
+          </a:xfrm>
+          <a:prstGeom prst="rect">
+            <a:avLst/>
+          </a:prstGeom>
+          <a:noFill/>
+        </p:spPr>
+        <p:txBody>
+          <a:bodyPr wrap="square">
+            <a:spAutoFit/>
+          </a:bodyPr>
+          <a:lstStyle/>
+          <a:p>
+            <a:pPr algn="ctr">
+              <a:spcAft>
+                <a:spcPts val="0"/>
+              </a:spcAft>
+            </a:pPr>
+            <a:r>
+              <a:rPr sz="1200" b="1">
+                <a:solidFill>
+                  <a:srgbClr val="CC0000"/>
+                </a:solidFill>
+                <a:latin typeface="Red Hat Mono"/>
+              </a:rPr>
+              <a:t>SCALE</a:t>
+            </a:r>
+          </a:p>
+        </p:txBody>
+      </p:sp>
+      <p:sp>
+        <p:nvSpPr>
+          <p:cNvPr id="13" name="Oval 12"/>
+          <p:cNvSpPr/>
+          <p:nvPr/>
+        </p:nvSpPr>
+        <p:spPr>
+          <a:xfrm>
+            <a:off x="987552" y="2359152"/>
+            <a:ext cx="128016" cy="128016"/>
+          </a:xfrm>
+          <a:prstGeom prst="ellipse">
+            <a:avLst/>
+          </a:prstGeom>
+          <a:solidFill>
+            <a:srgbClr val="FFFFFF"/>
+          </a:solidFill>
+          <a:ln w="19050">
+            <a:solidFill>
+              <a:srgbClr val="54423E"/>
+            </a:solidFill>
+          </a:ln>
+          <a:effectLst/>
+        </p:spPr>
+        <p:style>
+          <a:lnRef idx="1">
+            <a:schemeClr val="accent1"/>
+          </a:lnRef>
+          <a:fillRef idx="3">
+            <a:schemeClr val="accent1"/>
+          </a:fillRef>
+          <a:effectRef idx="2">
+            <a:schemeClr val="accent1"/>
+          </a:effectRef>
+          <a:fontRef idx="minor">
+            <a:schemeClr val="lt1"/>
+          </a:fontRef>
+        </p:style>
+        <p:txBody>
+          <a:bodyPr rtlCol="0" anchor="ctr"/>
+          <a:lstStyle/>
+          <a:p>
+            <a:pPr algn="ctr"/>
+          </a:p>
+        </p:txBody>
+      </p:sp>
+      <p:sp>
+        <p:nvSpPr>
+          <p:cNvPr id="14" name="TextBox 13"/>
+          <p:cNvSpPr txBox="1"/>
+          <p:nvPr/>
+        </p:nvSpPr>
+        <p:spPr>
+          <a:xfrm>
+            <a:off x="548640" y="2551176"/>
+            <a:ext cx="1005840" cy="219456"/>
+          </a:xfrm>
+          <a:prstGeom prst="rect">
+            <a:avLst/>
+          </a:prstGeom>
+          <a:noFill/>
+        </p:spPr>
+        <p:txBody>
+          <a:bodyPr wrap="square">
+            <a:spAutoFit/>
+          </a:bodyPr>
+          <a:lstStyle/>
+          <a:p>
+            <a:pPr algn="ctr">
+              <a:spcAft>
+                <a:spcPts val="0"/>
+              </a:spcAft>
+            </a:pPr>
+            <a:r>
+              <a:rPr sz="900" b="0">
+                <a:solidFill>
+                  <a:srgbClr val="7E6A64"/>
+                </a:solidFill>
+                <a:latin typeface="Red Hat Mono"/>
+              </a:rPr>
+              <a:t>day 0</a:t>
+            </a:r>
+          </a:p>
+        </p:txBody>
+      </p:sp>
+      <p:sp>
+        <p:nvSpPr>
+          <p:cNvPr id="15" name="Oval 14"/>
+          <p:cNvSpPr/>
+          <p:nvPr/>
+        </p:nvSpPr>
+        <p:spPr>
+          <a:xfrm>
+            <a:off x="4434840" y="2359152"/>
+            <a:ext cx="128016" cy="128016"/>
+          </a:xfrm>
+          <a:prstGeom prst="ellipse">
+            <a:avLst/>
+          </a:prstGeom>
+          <a:solidFill>
+            <a:srgbClr val="FFFFFF"/>
+          </a:solidFill>
+          <a:ln w="19050">
+            <a:solidFill>
+              <a:srgbClr val="54423E"/>
+            </a:solidFill>
+          </a:ln>
+          <a:effectLst/>
+        </p:spPr>
+        <p:style>
+          <a:lnRef idx="1">
+            <a:schemeClr val="accent1"/>
+          </a:lnRef>
+          <a:fillRef idx="3">
+            <a:schemeClr val="accent1"/>
+          </a:fillRef>
+          <a:effectRef idx="2">
+            <a:schemeClr val="accent1"/>
+          </a:effectRef>
+          <a:fontRef idx="minor">
+            <a:schemeClr val="lt1"/>
+          </a:fontRef>
+        </p:style>
+        <p:txBody>
+          <a:bodyPr rtlCol="0" anchor="ctr"/>
+          <a:lstStyle/>
+          <a:p>
+            <a:pPr algn="ctr"/>
+          </a:p>
+        </p:txBody>
+      </p:sp>
+      <p:sp>
+        <p:nvSpPr>
+          <p:cNvPr id="16" name="TextBox 15"/>
+          <p:cNvSpPr txBox="1"/>
+          <p:nvPr/>
+        </p:nvSpPr>
+        <p:spPr>
+          <a:xfrm>
+            <a:off x="3995928" y="2551176"/>
+            <a:ext cx="1005840" cy="219456"/>
+          </a:xfrm>
+          <a:prstGeom prst="rect">
+            <a:avLst/>
+          </a:prstGeom>
+          <a:noFill/>
+        </p:spPr>
+        <p:txBody>
+          <a:bodyPr wrap="square">
+            <a:spAutoFit/>
+          </a:bodyPr>
+          <a:lstStyle/>
+          <a:p>
+            <a:pPr algn="ctr">
+              <a:spcAft>
+                <a:spcPts val="0"/>
+              </a:spcAft>
+            </a:pPr>
+            <a:r>
+              <a:rPr sz="900" b="0">
+                <a:solidFill>
+                  <a:srgbClr val="7E6A64"/>
+                </a:solidFill>
+                <a:latin typeface="Red Hat Mono"/>
+              </a:rPr>
+              <a:t>day 90</a:t>
+            </a:r>
+          </a:p>
+        </p:txBody>
+      </p:sp>
+      <p:sp>
+        <p:nvSpPr>
+          <p:cNvPr id="17" name="Oval 16"/>
+          <p:cNvSpPr/>
+          <p:nvPr/>
+        </p:nvSpPr>
+        <p:spPr>
+          <a:xfrm>
+            <a:off x="7882128" y="2359152"/>
+            <a:ext cx="128016" cy="128016"/>
+          </a:xfrm>
+          <a:prstGeom prst="ellipse">
+            <a:avLst/>
+          </a:prstGeom>
+          <a:solidFill>
+            <a:srgbClr val="FFFFFF"/>
+          </a:solidFill>
+          <a:ln w="19050">
+            <a:solidFill>
+              <a:srgbClr val="54423E"/>
+            </a:solidFill>
+          </a:ln>
+          <a:effectLst/>
+        </p:spPr>
+        <p:style>
+          <a:lnRef idx="1">
+            <a:schemeClr val="accent1"/>
+          </a:lnRef>
+          <a:fillRef idx="3">
+            <a:schemeClr val="accent1"/>
+          </a:fillRef>
+          <a:effectRef idx="2">
+            <a:schemeClr val="accent1"/>
+          </a:effectRef>
+          <a:fontRef idx="minor">
+            <a:schemeClr val="lt1"/>
+          </a:fontRef>
+        </p:style>
+        <p:txBody>
+          <a:bodyPr rtlCol="0" anchor="ctr"/>
+          <a:lstStyle/>
+          <a:p>
+            <a:pPr algn="ctr"/>
+          </a:p>
+        </p:txBody>
+      </p:sp>
+      <p:sp>
+        <p:nvSpPr>
+          <p:cNvPr id="18" name="TextBox 17"/>
+          <p:cNvSpPr txBox="1"/>
+          <p:nvPr/>
+        </p:nvSpPr>
+        <p:spPr>
+          <a:xfrm>
+            <a:off x="7443216" y="2551176"/>
+            <a:ext cx="1005840" cy="219456"/>
+          </a:xfrm>
+          <a:prstGeom prst="rect">
+            <a:avLst/>
+          </a:prstGeom>
+          <a:noFill/>
+        </p:spPr>
+        <p:txBody>
+          <a:bodyPr wrap="square">
+            <a:spAutoFit/>
+          </a:bodyPr>
+          <a:lstStyle/>
+          <a:p>
+            <a:pPr algn="ctr">
+              <a:spcAft>
+                <a:spcPts val="0"/>
+              </a:spcAft>
+            </a:pPr>
+            <a:r>
+              <a:rPr sz="900" b="0">
+                <a:solidFill>
+                  <a:srgbClr val="7E6A64"/>
+                </a:solidFill>
+                <a:latin typeface="Red Hat Mono"/>
+              </a:rPr>
+              <a:t>day 180</a:t>
+            </a:r>
+          </a:p>
+        </p:txBody>
+      </p:sp>
+      <p:sp>
+        <p:nvSpPr>
+          <p:cNvPr id="19" name="Oval 18"/>
+          <p:cNvSpPr/>
+          <p:nvPr/>
+        </p:nvSpPr>
+        <p:spPr>
+          <a:xfrm>
+            <a:off x="11192256" y="2359152"/>
+            <a:ext cx="128016" cy="128016"/>
+          </a:xfrm>
+          <a:prstGeom prst="ellipse">
+            <a:avLst/>
+          </a:prstGeom>
+          <a:solidFill>
+            <a:srgbClr val="FFFFFF"/>
+          </a:solidFill>
+          <a:ln w="19050">
+            <a:solidFill>
+              <a:srgbClr val="54423E"/>
+            </a:solidFill>
+          </a:ln>
+          <a:effectLst/>
+        </p:spPr>
+        <p:style>
+          <a:lnRef idx="1">
+            <a:schemeClr val="accent1"/>
+          </a:lnRef>
+          <a:fillRef idx="3">
+            <a:schemeClr val="accent1"/>
+          </a:fillRef>
+          <a:effectRef idx="2">
+            <a:schemeClr val="accent1"/>
+          </a:effectRef>
+          <a:fontRef idx="minor">
+            <a:schemeClr val="lt1"/>
+          </a:fontRef>
+        </p:style>
+        <p:txBody>
+          <a:bodyPr rtlCol="0" anchor="ctr"/>
+          <a:lstStyle/>
+          <a:p>
+            <a:pPr algn="ctr"/>
+          </a:p>
+        </p:txBody>
+      </p:sp>
+      <p:sp>
+        <p:nvSpPr>
+          <p:cNvPr id="20" name="TextBox 19"/>
+          <p:cNvSpPr txBox="1"/>
+          <p:nvPr/>
+        </p:nvSpPr>
+        <p:spPr>
+          <a:xfrm>
+            <a:off x="10753344" y="2551176"/>
+            <a:ext cx="1005840" cy="219456"/>
+          </a:xfrm>
+          <a:prstGeom prst="rect">
+            <a:avLst/>
+          </a:prstGeom>
+          <a:noFill/>
+        </p:spPr>
+        <p:txBody>
+          <a:bodyPr wrap="square">
+            <a:spAutoFit/>
+          </a:bodyPr>
+          <a:lstStyle/>
+          <a:p>
+            <a:pPr algn="ctr">
+              <a:spcAft>
+                <a:spcPts val="0"/>
+              </a:spcAft>
+            </a:pPr>
+            <a:r>
+              <a:rPr sz="900" b="0">
+                <a:solidFill>
+                  <a:srgbClr val="7E6A64"/>
+                </a:solidFill>
+                <a:latin typeface="Red Hat Mono"/>
+              </a:rPr>
+              <a:t>day 270+</a:t>
+            </a:r>
+          </a:p>
+        </p:txBody>
+      </p:sp>
+      <p:sp>
+        <p:nvSpPr>
+          <p:cNvPr id="21" name="Rounded Rectangle 20"/>
+          <p:cNvSpPr/>
+          <p:nvPr/>
+        </p:nvSpPr>
+        <p:spPr>
+          <a:xfrm>
+            <a:off x="777240" y="3154680"/>
+            <a:ext cx="3447288" cy="384048"/>
+          </a:xfrm>
+          <a:prstGeom prst="roundRect">
+            <a:avLst>
+              <a:gd name="adj" fmla="val 18000"/>
+            </a:avLst>
+          </a:prstGeom>
+          <a:solidFill>
+            <a:srgbClr val="E7F1F5"/>
+          </a:solidFill>
+          <a:ln>
+            <a:noFill/>
+          </a:ln>
+          <a:effectLst/>
+        </p:spPr>
+        <p:style>
+          <a:lnRef idx="1">
+            <a:schemeClr val="accent1"/>
+          </a:lnRef>
+          <a:fillRef idx="3">
+            <a:schemeClr val="accent1"/>
+          </a:fillRef>
+          <a:effectRef idx="2">
+            <a:schemeClr val="accent1"/>
+          </a:effectRef>
+          <a:fontRef idx="minor">
+            <a:schemeClr val="lt1"/>
+          </a:fontRef>
+        </p:style>
+        <p:txBody>
+          <a:bodyPr rtlCol="0" anchor="ctr"/>
+          <a:lstStyle/>
+          <a:p>
+            <a:pPr algn="ctr"/>
+          </a:p>
+        </p:txBody>
+      </p:sp>
+      <p:sp>
+        <p:nvSpPr>
+          <p:cNvPr id="22" name="TextBox 21"/>
+          <p:cNvSpPr txBox="1"/>
+          <p:nvPr/>
+        </p:nvSpPr>
+        <p:spPr>
+          <a:xfrm>
+            <a:off x="923544" y="3191256"/>
+            <a:ext cx="3172968" cy="310896"/>
+          </a:xfrm>
+          <a:prstGeom prst="rect">
+            <a:avLst/>
+          </a:prstGeom>
+          <a:noFill/>
+        </p:spPr>
+        <p:txBody>
+          <a:bodyPr wrap="square">
+            <a:spAutoFit/>
+          </a:bodyPr>
+          <a:lstStyle/>
+          <a:p>
+            <a:pPr algn="l">
+              <a:spcAft>
+                <a:spcPts val="0"/>
+              </a:spcAft>
+            </a:pPr>
+            <a:r>
+              <a:rPr sz="1250" b="1">
+                <a:solidFill>
+                  <a:srgbClr val="286C88"/>
+                </a:solidFill>
+                <a:latin typeface="Red Hat Display"/>
+              </a:rPr>
+              <a:t>Prove — days 0–90</a:t>
+            </a:r>
+          </a:p>
+        </p:txBody>
+      </p:sp>
+      <p:sp>
+        <p:nvSpPr>
+          <p:cNvPr id="23" name="TextBox 22"/>
+          <p:cNvSpPr txBox="1"/>
+          <p:nvPr/>
+        </p:nvSpPr>
+        <p:spPr>
+          <a:xfrm>
+            <a:off x="923544" y="3630168"/>
+            <a:ext cx="3172968" cy="2377440"/>
+          </a:xfrm>
+          <a:prstGeom prst="rect">
+            <a:avLst/>
+          </a:prstGeom>
+          <a:noFill/>
+        </p:spPr>
+        <p:txBody>
+          <a:bodyPr wrap="square">
+            <a:spAutoFit/>
+          </a:bodyPr>
+          <a:lstStyle/>
+          <a:p>
+            <a:pPr algn="l">
+              <a:spcAft>
+                <a:spcPts val="500"/>
+              </a:spcAft>
+            </a:pPr>
+            <a:r>
+              <a:rPr sz="1100" b="0">
+                <a:solidFill>
+                  <a:srgbClr val="54423E"/>
+                </a:solidFill>
+                <a:latin typeface="Red Hat Text"/>
+              </a:rPr>
+              <a:t>•  One endpoint on AI Inference Server</a:t>
+            </a:r>
+          </a:p>
+          <a:p>
+            <a:pPr algn="l">
+              <a:spcAft>
+                <a:spcPts val="500"/>
+              </a:spcAft>
+            </a:pPr>
+            <a:r>
+              <a:rPr sz="1100" b="0">
+                <a:solidFill>
+                  <a:srgbClr val="54423E"/>
+                </a:solidFill>
+                <a:latin typeface="Red Hat Text"/>
+              </a:rPr>
+              <a:t>•  Accelerator capacity plan</a:t>
+            </a:r>
+          </a:p>
+          <a:p>
+            <a:pPr algn="l">
+              <a:spcAft>
+                <a:spcPts val="500"/>
+              </a:spcAft>
+            </a:pPr>
+            <a:r>
+              <a:rPr sz="1100" b="0">
+                <a:solidFill>
+                  <a:srgbClr val="54423E"/>
+                </a:solidFill>
+                <a:latin typeface="Red Hat Text"/>
+              </a:rPr>
+              <a:t>•  Data classes agreed in writing</a:t>
+            </a:r>
+          </a:p>
+          <a:p>
+            <a:pPr algn="l">
+              <a:spcAft>
+                <a:spcPts val="500"/>
+              </a:spcAft>
+            </a:pPr>
+            <a:r>
+              <a:rPr sz="1100" b="0">
+                <a:solidFill>
+                  <a:srgbClr val="54423E"/>
+                </a:solidFill>
+                <a:latin typeface="Red Hat Text"/>
+              </a:rPr>
+              <a:t>•  One workflow with a reviewer</a:t>
+            </a:r>
+          </a:p>
+          <a:p>
+            <a:pPr algn="l">
+              <a:spcAft>
+                <a:spcPts val="500"/>
+              </a:spcAft>
+            </a:pPr>
+            <a:r>
+              <a:rPr sz="1100" b="0">
+                <a:solidFill>
+                  <a:srgbClr val="54423E"/>
+                </a:solidFill>
+                <a:latin typeface="Red Hat Text"/>
+              </a:rPr>
+              <a:t>•  Baseline measured first</a:t>
+            </a:r>
+          </a:p>
+        </p:txBody>
+      </p:sp>
+      <p:sp>
+        <p:nvSpPr>
+          <p:cNvPr id="24" name="Rounded Rectangle 23"/>
+          <p:cNvSpPr/>
+          <p:nvPr/>
+        </p:nvSpPr>
+        <p:spPr>
+          <a:xfrm>
+            <a:off x="4370832" y="3154680"/>
+            <a:ext cx="3447288" cy="384048"/>
+          </a:xfrm>
+          <a:prstGeom prst="roundRect">
+            <a:avLst>
+              <a:gd name="adj" fmla="val 18000"/>
+            </a:avLst>
+          </a:prstGeom>
+          <a:solidFill>
+            <a:srgbClr val="F8EFDC"/>
+          </a:solidFill>
+          <a:ln>
+            <a:noFill/>
+          </a:ln>
+          <a:effectLst/>
+        </p:spPr>
+        <p:style>
+          <a:lnRef idx="1">
+            <a:schemeClr val="accent1"/>
+          </a:lnRef>
+          <a:fillRef idx="3">
+            <a:schemeClr val="accent1"/>
+          </a:fillRef>
+          <a:effectRef idx="2">
+            <a:schemeClr val="accent1"/>
+          </a:effectRef>
+          <a:fontRef idx="minor">
+            <a:schemeClr val="lt1"/>
+          </a:fontRef>
+        </p:style>
+        <p:txBody>
+          <a:bodyPr rtlCol="0" anchor="ctr"/>
+          <a:lstStyle/>
+          <a:p>
+            <a:pPr algn="ctr"/>
+          </a:p>
+        </p:txBody>
+      </p:sp>
+      <p:sp>
+        <p:nvSpPr>
+          <p:cNvPr id="25" name="TextBox 24"/>
+          <p:cNvSpPr txBox="1"/>
+          <p:nvPr/>
+        </p:nvSpPr>
+        <p:spPr>
+          <a:xfrm>
+            <a:off x="4517136" y="3191256"/>
+            <a:ext cx="3172968" cy="310896"/>
+          </a:xfrm>
+          <a:prstGeom prst="rect">
+            <a:avLst/>
+          </a:prstGeom>
+          <a:noFill/>
+        </p:spPr>
+        <p:txBody>
+          <a:bodyPr wrap="square">
+            <a:spAutoFit/>
+          </a:bodyPr>
+          <a:lstStyle/>
+          <a:p>
+            <a:pPr algn="l">
+              <a:spcAft>
+                <a:spcPts val="0"/>
+              </a:spcAft>
+            </a:pPr>
+            <a:r>
+              <a:rPr sz="1250" b="1">
+                <a:solidFill>
+                  <a:srgbClr val="96620A"/>
+                </a:solidFill>
+                <a:latin typeface="Red Hat Display"/>
+              </a:rPr>
+              <a:t>Ground — days 90–180</a:t>
+            </a:r>
+          </a:p>
+        </p:txBody>
+      </p:sp>
+      <p:sp>
+        <p:nvSpPr>
+          <p:cNvPr id="26" name="TextBox 25"/>
+          <p:cNvSpPr txBox="1"/>
+          <p:nvPr/>
+        </p:nvSpPr>
+        <p:spPr>
+          <a:xfrm>
+            <a:off x="4517136" y="3630168"/>
+            <a:ext cx="3172968" cy="2377440"/>
+          </a:xfrm>
+          <a:prstGeom prst="rect">
+            <a:avLst/>
+          </a:prstGeom>
+          <a:noFill/>
+        </p:spPr>
+        <p:txBody>
+          <a:bodyPr wrap="square">
+            <a:spAutoFit/>
+          </a:bodyPr>
+          <a:lstStyle/>
+          <a:p>
+            <a:pPr algn="l">
+              <a:spcAft>
+                <a:spcPts val="500"/>
+              </a:spcAft>
+            </a:pPr>
+            <a:r>
+              <a:rPr sz="1100" b="0">
+                <a:solidFill>
+                  <a:srgbClr val="54423E"/>
+                </a:solidFill>
+                <a:latin typeface="Red Hat Text"/>
+              </a:rPr>
+              <a:t>•  Serving on OpenShift AI</a:t>
+            </a:r>
+          </a:p>
+          <a:p>
+            <a:pPr algn="l">
+              <a:spcAft>
+                <a:spcPts val="500"/>
+              </a:spcAft>
+            </a:pPr>
+            <a:r>
+              <a:rPr sz="1100" b="0">
+                <a:solidFill>
+                  <a:srgbClr val="54423E"/>
+                </a:solidFill>
+                <a:latin typeface="Red Hat Text"/>
+              </a:rPr>
+              <a:t>•  Retrieval over your guidance</a:t>
+            </a:r>
+          </a:p>
+          <a:p>
+            <a:pPr algn="l">
+              <a:spcAft>
+                <a:spcPts val="500"/>
+              </a:spcAft>
+            </a:pPr>
+            <a:r>
+              <a:rPr sz="1100" b="0">
+                <a:solidFill>
+                  <a:srgbClr val="54423E"/>
+                </a:solidFill>
+                <a:latin typeface="Red Hat Text"/>
+              </a:rPr>
+              <a:t>•  Tune on agency vocabulary</a:t>
+            </a:r>
+          </a:p>
+          <a:p>
+            <a:pPr algn="l">
+              <a:spcAft>
+                <a:spcPts val="500"/>
+              </a:spcAft>
+            </a:pPr>
+            <a:r>
+              <a:rPr sz="1100" b="0">
+                <a:solidFill>
+                  <a:srgbClr val="54423E"/>
+                </a:solidFill>
+                <a:latin typeface="Red Hat Text"/>
+              </a:rPr>
+              <a:t>•  Drift and compliance wired</a:t>
+            </a:r>
+          </a:p>
+          <a:p>
+            <a:pPr algn="l">
+              <a:spcAft>
+                <a:spcPts val="500"/>
+              </a:spcAft>
+            </a:pPr>
+            <a:r>
+              <a:rPr sz="1100" b="0">
+                <a:solidFill>
+                  <a:srgbClr val="54423E"/>
+                </a:solidFill>
+                <a:latin typeface="Red Hat Text"/>
+              </a:rPr>
+              <a:t>•  Provisioning automated</a:t>
+            </a:r>
+          </a:p>
+        </p:txBody>
+      </p:sp>
+      <p:sp>
+        <p:nvSpPr>
+          <p:cNvPr id="27" name="Rounded Rectangle 26"/>
+          <p:cNvSpPr/>
+          <p:nvPr/>
+        </p:nvSpPr>
+        <p:spPr>
+          <a:xfrm>
+            <a:off x="7964424" y="3154680"/>
+            <a:ext cx="3447288" cy="384048"/>
+          </a:xfrm>
+          <a:prstGeom prst="roundRect">
+            <a:avLst>
+              <a:gd name="adj" fmla="val 18000"/>
+            </a:avLst>
+          </a:prstGeom>
+          <a:solidFill>
+            <a:srgbClr val="FBEAE8"/>
+          </a:solidFill>
+          <a:ln>
+            <a:noFill/>
+          </a:ln>
+          <a:effectLst/>
+        </p:spPr>
+        <p:style>
+          <a:lnRef idx="1">
+            <a:schemeClr val="accent1"/>
+          </a:lnRef>
+          <a:fillRef idx="3">
+            <a:schemeClr val="accent1"/>
+          </a:fillRef>
+          <a:effectRef idx="2">
+            <a:schemeClr val="accent1"/>
+          </a:effectRef>
+          <a:fontRef idx="minor">
+            <a:schemeClr val="lt1"/>
+          </a:fontRef>
+        </p:style>
+        <p:txBody>
+          <a:bodyPr rtlCol="0" anchor="ctr"/>
+          <a:lstStyle/>
+          <a:p>
+            <a:pPr algn="ctr"/>
+          </a:p>
+        </p:txBody>
+      </p:sp>
+      <p:sp>
+        <p:nvSpPr>
+          <p:cNvPr id="28" name="TextBox 27"/>
+          <p:cNvSpPr txBox="1"/>
+          <p:nvPr/>
+        </p:nvSpPr>
+        <p:spPr>
+          <a:xfrm>
+            <a:off x="8110728" y="3191256"/>
+            <a:ext cx="3172968" cy="310896"/>
+          </a:xfrm>
+          <a:prstGeom prst="rect">
+            <a:avLst/>
+          </a:prstGeom>
+          <a:noFill/>
+        </p:spPr>
+        <p:txBody>
+          <a:bodyPr wrap="square">
+            <a:spAutoFit/>
+          </a:bodyPr>
+          <a:lstStyle/>
+          <a:p>
+            <a:pPr algn="l">
+              <a:spcAft>
+                <a:spcPts val="0"/>
+              </a:spcAft>
+            </a:pPr>
+            <a:r>
+              <a:rPr sz="1250" b="1">
+                <a:solidFill>
+                  <a:srgbClr val="A30000"/>
+                </a:solidFill>
+                <a:latin typeface="Red Hat Display"/>
+              </a:rPr>
+              <a:t>Scale — days 180+</a:t>
+            </a:r>
+          </a:p>
+        </p:txBody>
+      </p:sp>
+      <p:sp>
+        <p:nvSpPr>
+          <p:cNvPr id="29" name="TextBox 28"/>
+          <p:cNvSpPr txBox="1"/>
+          <p:nvPr/>
+        </p:nvSpPr>
+        <p:spPr>
+          <a:xfrm>
+            <a:off x="8110728" y="3630168"/>
+            <a:ext cx="3172968" cy="2377440"/>
+          </a:xfrm>
+          <a:prstGeom prst="rect">
+            <a:avLst/>
+          </a:prstGeom>
+          <a:noFill/>
+        </p:spPr>
+        <p:txBody>
+          <a:bodyPr wrap="square">
+            <a:spAutoFit/>
+          </a:bodyPr>
+          <a:lstStyle/>
+          <a:p>
+            <a:pPr algn="l">
+              <a:spcAft>
+                <a:spcPts val="500"/>
+              </a:spcAft>
+            </a:pPr>
+            <a:r>
+              <a:rPr sz="1100" b="0">
+                <a:solidFill>
+                  <a:srgbClr val="54423E"/>
+                </a:solidFill>
+                <a:latin typeface="Red Hat Text"/>
+              </a:rPr>
+              <a:t>•  Registry with real approvals</a:t>
+            </a:r>
+          </a:p>
+          <a:p>
+            <a:pPr algn="l">
+              <a:spcAft>
+                <a:spcPts val="500"/>
+              </a:spcAft>
+            </a:pPr>
+            <a:r>
+              <a:rPr sz="1100" b="0">
+                <a:solidFill>
+                  <a:srgbClr val="54423E"/>
+                </a:solidFill>
+                <a:latin typeface="Red Hat Text"/>
+              </a:rPr>
+              <a:t>•  Workflows two to five</a:t>
+            </a:r>
+          </a:p>
+          <a:p>
+            <a:pPr algn="l">
+              <a:spcAft>
+                <a:spcPts val="500"/>
+              </a:spcAft>
+            </a:pPr>
+            <a:r>
+              <a:rPr sz="1100" b="0">
+                <a:solidFill>
+                  <a:srgbClr val="54423E"/>
+                </a:solidFill>
+                <a:latin typeface="Red Hat Text"/>
+              </a:rPr>
+              <a:t>•  Filing-season rehearsal</a:t>
+            </a:r>
+          </a:p>
+          <a:p>
+            <a:pPr algn="l">
+              <a:spcAft>
+                <a:spcPts val="500"/>
+              </a:spcAft>
+            </a:pPr>
+            <a:r>
+              <a:rPr sz="1100" b="0">
+                <a:solidFill>
+                  <a:srgbClr val="54423E"/>
+                </a:solidFill>
+                <a:latin typeface="Red Hat Text"/>
+              </a:rPr>
+              <a:t>•  Extend to the enclave</a:t>
+            </a:r>
+          </a:p>
+          <a:p>
+            <a:pPr algn="l">
+              <a:spcAft>
+                <a:spcPts val="500"/>
+              </a:spcAft>
+            </a:pPr>
+            <a:r>
+              <a:rPr sz="1100" b="0">
+                <a:solidFill>
+                  <a:srgbClr val="54423E"/>
+                </a:solidFill>
+                <a:latin typeface="Red Hat Text"/>
+              </a:rPr>
+              <a:t>•  Report in mission terms</a:t>
+            </a:r>
+          </a:p>
+        </p:txBody>
+      </p:sp>
+    </p:spTree>
+  </p:cSld>
+  <p:clrMapOvr>
+    <a:masterClrMapping/>
+  </p:clrMapOvr>
+</p:sld>
+</file>
+
+<file path=ppt/slides/slide7.xml><?xml version="1.0" encoding="utf-8"?>
+<p:sld xmlns:a="http://schemas.openxmlformats.org/drawingml/2006/main" xmlns:p="http://schemas.openxmlformats.org/presentationml/2006/main" xmlns:r="http://schemas.openxmlformats.org/officeDocument/2006/relationships">
+  <p:cSld>
+    <p:bg>
+      <p:bgPr>
+        <a:solidFill>
+          <a:srgbClr val="FBF9F8"/>
+        </a:solidFill>
+        <a:effectLst/>
+      </p:bgPr>
+    </p:bg>
+    <p:spTree>
+      <p:nvGrpSpPr>
+        <p:cNvPr id="1" name=""/>
+        <p:cNvGrpSpPr/>
+        <p:nvPr/>
+      </p:nvGrpSpPr>
+      <p:grpSpPr/>
+      <p:sp>
+        <p:nvSpPr>
+          <p:cNvPr id="2" name="Rectangle 1"/>
+          <p:cNvSpPr/>
+          <p:nvPr/>
+        </p:nvSpPr>
+        <p:spPr>
+          <a:xfrm>
+            <a:off x="0" y="0"/>
+            <a:ext cx="12191695" cy="45720"/>
+          </a:xfrm>
+          <a:prstGeom prst="rect">
+            <a:avLst/>
+          </a:prstGeom>
+          <a:solidFill>
+            <a:srgbClr val="CC0000"/>
+          </a:solidFill>
+          <a:ln>
+            <a:noFill/>
+          </a:ln>
+          <a:effectLst/>
+        </p:spPr>
+        <p:style>
+          <a:lnRef idx="1">
+            <a:schemeClr val="accent1"/>
+          </a:lnRef>
+          <a:fillRef idx="3">
+            <a:schemeClr val="accent1"/>
+          </a:fillRef>
+          <a:effectRef idx="2">
+            <a:schemeClr val="accent1"/>
+          </a:effectRef>
+          <a:fontRef idx="minor">
+            <a:schemeClr val="lt1"/>
+          </a:fontRef>
+        </p:style>
+        <p:txBody>
+          <a:bodyPr rtlCol="0" anchor="ctr"/>
+          <a:lstStyle/>
+          <a:p>
+            <a:pPr algn="ctr"/>
+          </a:p>
+        </p:txBody>
+      </p:sp>
+      <p:sp>
+        <p:nvSpPr>
+          <p:cNvPr id="3" name="TextBox 2"/>
+          <p:cNvSpPr txBox="1"/>
+          <p:nvPr/>
+        </p:nvSpPr>
+        <p:spPr>
+          <a:xfrm>
+            <a:off x="777240" y="502920"/>
+            <a:ext cx="10637215" cy="310896"/>
+          </a:xfrm>
+          <a:prstGeom prst="rect">
+            <a:avLst/>
+          </a:prstGeom>
+          <a:noFill/>
+        </p:spPr>
+        <p:txBody>
+          <a:bodyPr wrap="square">
+            <a:spAutoFit/>
+          </a:bodyPr>
+          <a:lstStyle/>
+          <a:p>
+            <a:pPr algn="l">
+              <a:spcAft>
+                <a:spcPts val="0"/>
+              </a:spcAft>
+            </a:pPr>
+            <a:r>
+              <a:rPr sz="1100" b="1">
+                <a:solidFill>
+                  <a:srgbClr val="7E6A64"/>
+                </a:solidFill>
+                <a:latin typeface="Red Hat Mono"/>
+              </a:rPr>
+              <a:t>NEXT STEPS</a:t>
+            </a:r>
+          </a:p>
+        </p:txBody>
+      </p:sp>
+      <p:sp>
+        <p:nvSpPr>
+          <p:cNvPr id="4" name="TextBox 3"/>
+          <p:cNvSpPr txBox="1"/>
+          <p:nvPr/>
+        </p:nvSpPr>
+        <p:spPr>
+          <a:xfrm>
+            <a:off x="777240" y="868680"/>
+            <a:ext cx="10637215" cy="822960"/>
+          </a:xfrm>
+          <a:prstGeom prst="rect">
+            <a:avLst/>
+          </a:prstGeom>
+          <a:noFill/>
+        </p:spPr>
+        <p:txBody>
+          <a:bodyPr wrap="square">
+            <a:spAutoFit/>
+          </a:bodyPr>
+          <a:lstStyle/>
+          <a:p>
+            <a:pPr algn="l">
+              <a:spcAft>
+                <a:spcPts val="0"/>
+              </a:spcAft>
+            </a:pPr>
+            <a:r>
+              <a:rPr sz="3400" b="1">
+                <a:solidFill>
+                  <a:srgbClr val="1B1211"/>
+                </a:solidFill>
+                <a:latin typeface="Red Hat Display"/>
+              </a:rPr>
+              <a:t>What happens after this hour</a:t>
+            </a:r>
+          </a:p>
+        </p:txBody>
+      </p:sp>
+      <p:sp>
+        <p:nvSpPr>
+          <p:cNvPr id="5" name="Rectangle 4"/>
+          <p:cNvSpPr/>
+          <p:nvPr/>
+        </p:nvSpPr>
+        <p:spPr>
+          <a:xfrm>
+            <a:off x="777240" y="2240280"/>
+            <a:ext cx="41148" cy="1737360"/>
+          </a:xfrm>
+          <a:prstGeom prst="rect">
+            <a:avLst/>
+          </a:prstGeom>
+          <a:solidFill>
+            <a:srgbClr val="CC0000"/>
+          </a:solidFill>
+          <a:ln>
+            <a:noFill/>
+          </a:ln>
+          <a:effectLst/>
+        </p:spPr>
+        <p:style>
+          <a:lnRef idx="1">
+            <a:schemeClr val="accent1"/>
+          </a:lnRef>
+          <a:fillRef idx="3">
+            <a:schemeClr val="accent1"/>
+          </a:fillRef>
+          <a:effectRef idx="2">
+            <a:schemeClr val="accent1"/>
+          </a:effectRef>
+          <a:fontRef idx="minor">
+            <a:schemeClr val="lt1"/>
+          </a:fontRef>
+        </p:style>
+        <p:txBody>
+          <a:bodyPr rtlCol="0" anchor="ctr"/>
+          <a:lstStyle/>
+          <a:p>
+            <a:pPr algn="ctr"/>
+          </a:p>
+        </p:txBody>
+      </p:sp>
+      <p:sp>
+        <p:nvSpPr>
+          <p:cNvPr id="6" name="TextBox 5"/>
+          <p:cNvSpPr txBox="1"/>
+          <p:nvPr/>
+        </p:nvSpPr>
+        <p:spPr>
+          <a:xfrm>
+            <a:off x="941832" y="2240280"/>
+            <a:ext cx="3186074" cy="1737360"/>
+          </a:xfrm>
+          <a:prstGeom prst="rect">
+            <a:avLst/>
+          </a:prstGeom>
+          <a:noFill/>
+        </p:spPr>
+        <p:txBody>
+          <a:bodyPr wrap="square">
+            <a:spAutoFit/>
+          </a:bodyPr>
+          <a:lstStyle/>
+          <a:p>
+            <a:pPr algn="l">
+              <a:spcAft>
+                <a:spcPts val="600"/>
+              </a:spcAft>
+            </a:pPr>
+            <a:r>
+              <a:rPr sz="1500" b="1">
+                <a:solidFill>
+                  <a:srgbClr val="1B1211"/>
+                </a:solidFill>
+                <a:latin typeface="Red Hat Display"/>
+              </a:rPr>
+              <a:t>Architecture workshop</a:t>
+            </a:r>
+          </a:p>
+          <a:p>
+            <a:pPr algn="l">
+              <a:spcAft>
+                <a:spcPts val="0"/>
+              </a:spcAft>
+            </a:pPr>
+            <a:r>
+              <a:rPr sz="1200" b="0">
+                <a:solidFill>
+                  <a:srgbClr val="54423E"/>
+                </a:solidFill>
+                <a:latin typeface="Red Hat Text"/>
+              </a:rPr>
+              <a:t>Half a day with your platform and security teams to size accelerators, place the first workload and name the data classes in scope.</a:t>
+            </a:r>
+          </a:p>
+        </p:txBody>
+      </p:sp>
+      <p:sp>
+        <p:nvSpPr>
+          <p:cNvPr id="7" name="Rectangle 6"/>
+          <p:cNvSpPr/>
+          <p:nvPr/>
+        </p:nvSpPr>
+        <p:spPr>
+          <a:xfrm>
+            <a:off x="4420514" y="2240280"/>
+            <a:ext cx="41148" cy="1737360"/>
+          </a:xfrm>
+          <a:prstGeom prst="rect">
+            <a:avLst/>
+          </a:prstGeom>
+          <a:solidFill>
+            <a:srgbClr val="CC0000"/>
+          </a:solidFill>
+          <a:ln>
+            <a:noFill/>
+          </a:ln>
+          <a:effectLst/>
+        </p:spPr>
+        <p:style>
+          <a:lnRef idx="1">
+            <a:schemeClr val="accent1"/>
+          </a:lnRef>
+          <a:fillRef idx="3">
+            <a:schemeClr val="accent1"/>
+          </a:fillRef>
+          <a:effectRef idx="2">
+            <a:schemeClr val="accent1"/>
+          </a:effectRef>
+          <a:fontRef idx="minor">
+            <a:schemeClr val="lt1"/>
+          </a:fontRef>
+        </p:style>
+        <p:txBody>
+          <a:bodyPr rtlCol="0" anchor="ctr"/>
+          <a:lstStyle/>
+          <a:p>
+            <a:pPr algn="ctr"/>
+          </a:p>
+        </p:txBody>
+      </p:sp>
+      <p:sp>
+        <p:nvSpPr>
+          <p:cNvPr id="8" name="TextBox 7"/>
+          <p:cNvSpPr txBox="1"/>
+          <p:nvPr/>
+        </p:nvSpPr>
+        <p:spPr>
+          <a:xfrm>
+            <a:off x="4585106" y="2240280"/>
+            <a:ext cx="3186074" cy="1737360"/>
+          </a:xfrm>
+          <a:prstGeom prst="rect">
+            <a:avLst/>
+          </a:prstGeom>
+          <a:noFill/>
+        </p:spPr>
+        <p:txBody>
+          <a:bodyPr wrap="square">
+            <a:spAutoFit/>
+          </a:bodyPr>
+          <a:lstStyle/>
+          <a:p>
+            <a:pPr algn="l">
+              <a:spcAft>
+                <a:spcPts val="600"/>
+              </a:spcAft>
+            </a:pPr>
+            <a:r>
+              <a:rPr sz="1500" b="1">
+                <a:solidFill>
+                  <a:srgbClr val="1B1211"/>
+                </a:solidFill>
+                <a:latin typeface="Red Hat Display"/>
+              </a:rPr>
+              <a:t>Guided pilot</a:t>
+            </a:r>
+          </a:p>
+          <a:p>
+            <a:pPr algn="l">
+              <a:spcAft>
+                <a:spcPts val="0"/>
+              </a:spcAft>
+            </a:pPr>
+            <a:r>
+              <a:rPr sz="1200" b="0">
+                <a:solidFill>
+                  <a:srgbClr val="54423E"/>
+                </a:solidFill>
+                <a:latin typeface="Red Hat Text"/>
+              </a:rPr>
+              <a:t>One workflow, on your infrastructure, with a measured baseline and an agreed definition of success before we start.</a:t>
+            </a:r>
+          </a:p>
+        </p:txBody>
+      </p:sp>
+      <p:sp>
+        <p:nvSpPr>
+          <p:cNvPr id="9" name="Rectangle 8"/>
+          <p:cNvSpPr/>
+          <p:nvPr/>
+        </p:nvSpPr>
+        <p:spPr>
+          <a:xfrm>
+            <a:off x="8063788" y="2240280"/>
+            <a:ext cx="41148" cy="1737360"/>
+          </a:xfrm>
+          <a:prstGeom prst="rect">
+            <a:avLst/>
+          </a:prstGeom>
+          <a:solidFill>
+            <a:srgbClr val="CC0000"/>
+          </a:solidFill>
+          <a:ln>
+            <a:noFill/>
+          </a:ln>
+          <a:effectLst/>
+        </p:spPr>
+        <p:style>
+          <a:lnRef idx="1">
+            <a:schemeClr val="accent1"/>
+          </a:lnRef>
+          <a:fillRef idx="3">
+            <a:schemeClr val="accent1"/>
+          </a:fillRef>
+          <a:effectRef idx="2">
+            <a:schemeClr val="accent1"/>
+          </a:effectRef>
+          <a:fontRef idx="minor">
+            <a:schemeClr val="lt1"/>
+          </a:fontRef>
+        </p:style>
+        <p:txBody>
+          <a:bodyPr rtlCol="0" anchor="ctr"/>
+          <a:lstStyle/>
+          <a:p>
+            <a:pPr algn="ctr"/>
+          </a:p>
+        </p:txBody>
+      </p:sp>
+      <p:sp>
+        <p:nvSpPr>
+          <p:cNvPr id="10" name="TextBox 9"/>
+          <p:cNvSpPr txBox="1"/>
+          <p:nvPr/>
+        </p:nvSpPr>
+        <p:spPr>
+          <a:xfrm>
+            <a:off x="8228380" y="2240280"/>
+            <a:ext cx="3186074" cy="1737360"/>
+          </a:xfrm>
+          <a:prstGeom prst="rect">
+            <a:avLst/>
+          </a:prstGeom>
+          <a:noFill/>
+        </p:spPr>
+        <p:txBody>
+          <a:bodyPr wrap="square">
+            <a:spAutoFit/>
+          </a:bodyPr>
+          <a:lstStyle/>
+          <a:p>
+            <a:pPr algn="l">
+              <a:spcAft>
+                <a:spcPts val="600"/>
+              </a:spcAft>
+            </a:pPr>
+            <a:r>
+              <a:rPr sz="1500" b="1">
+                <a:solidFill>
+                  <a:srgbClr val="1B1211"/>
+                </a:solidFill>
+                <a:latin typeface="Red Hat Display"/>
+              </a:rPr>
+              <a:t>Acquisition path</a:t>
+            </a:r>
+          </a:p>
+          <a:p>
+            <a:pPr algn="l">
+              <a:spcAft>
+                <a:spcPts val="0"/>
+              </a:spcAft>
+            </a:pPr>
+            <a:r>
+              <a:rPr sz="1200" b="0">
+                <a:solidFill>
+                  <a:srgbClr val="54423E"/>
+                </a:solidFill>
+                <a:latin typeface="Red Hat Text"/>
+              </a:rPr>
+              <a:t>Four Inc. and Carahsoft carry the vehicles and pricing. Bring them into the conversation early, not at the end.</a:t>
+            </a:r>
+          </a:p>
+        </p:txBody>
+      </p:sp>
+      <p:sp>
+        <p:nvSpPr>
+          <p:cNvPr id="11" name="TextBox 10"/>
+          <p:cNvSpPr txBox="1"/>
+          <p:nvPr/>
+        </p:nvSpPr>
+        <p:spPr>
+          <a:xfrm>
+            <a:off x="777240" y="4663440"/>
+            <a:ext cx="10515600" cy="1188720"/>
+          </a:xfrm>
+          <a:prstGeom prst="rect">
+            <a:avLst/>
+          </a:prstGeom>
+          <a:noFill/>
+        </p:spPr>
+        <p:txBody>
+          <a:bodyPr wrap="square">
+            <a:spAutoFit/>
+          </a:bodyPr>
+          <a:lstStyle/>
+          <a:p>
+            <a:pPr algn="l">
+              <a:spcAft>
+                <a:spcPts val="800"/>
+              </a:spcAft>
+            </a:pPr>
+            <a:r>
+              <a:rPr sz="1700" b="1">
+                <a:solidFill>
+                  <a:srgbClr val="1B1211"/>
+                </a:solidFill>
+                <a:latin typeface="Red Hat Display"/>
+              </a:rPr>
+              <a:t>One thing to remember</a:t>
+            </a:r>
+          </a:p>
+          <a:p>
+            <a:pPr algn="l">
+              <a:spcAft>
+                <a:spcPts val="0"/>
+              </a:spcAft>
+            </a:pPr>
+            <a:r>
+              <a:rPr sz="1400" b="0">
+                <a:solidFill>
+                  <a:srgbClr val="54423E"/>
+                </a:solidFill>
+                <a:latin typeface="Red Hat Text"/>
+              </a:rPr>
+              <a:t>Nothing in these seven labs required a public model endpoint, an internet connection at inference time, or a rewrite of a system of record. That is the whole argument.</a:t>
+            </a:r>
+          </a:p>
+        </p:txBody>
+      </p:sp>
+    </p:spTree>
+  </p:cSld>
+  <p:clrMapOvr>
+    <a:masterClrMapping/>
+  </p:clrMapOvr>
+</p:sld>
+</file>
+
+<file path=ppt/slides/slide8.xml><?xml version="1.0" encoding="utf-8"?>
+<p:sld xmlns:a="http://schemas.openxmlformats.org/drawingml/2006/main" xmlns:p="http://schemas.openxmlformats.org/presentationml/2006/main" xmlns:r="http://schemas.openxmlformats.org/officeDocument/2006/relationships">
+  <p:cSld>
+    <p:bg>
+      <p:bgPr>
+        <a:solidFill>
+          <a:srgbClr val="FBF9F8"/>
+        </a:solidFill>
+        <a:effectLst/>
+      </p:bgPr>
+    </p:bg>
+    <p:spTree>
+      <p:nvGrpSpPr>
+        <p:cNvPr id="1" name=""/>
+        <p:cNvGrpSpPr/>
+        <p:nvPr/>
+      </p:nvGrpSpPr>
+      <p:grpSpPr/>
+      <p:sp>
+        <p:nvSpPr>
+          <p:cNvPr id="2" name="Rectangle 1"/>
+          <p:cNvSpPr/>
+          <p:nvPr/>
+        </p:nvSpPr>
+        <p:spPr>
+          <a:xfrm>
+            <a:off x="0" y="0"/>
+            <a:ext cx="12191695" cy="45720"/>
+          </a:xfrm>
+          <a:prstGeom prst="rect">
+            <a:avLst/>
+          </a:prstGeom>
+          <a:solidFill>
+            <a:srgbClr val="CC0000"/>
+          </a:solidFill>
+          <a:ln>
+            <a:noFill/>
+          </a:ln>
+          <a:effectLst/>
+        </p:spPr>
+        <p:style>
+          <a:lnRef idx="1">
+            <a:schemeClr val="accent1"/>
+          </a:lnRef>
+          <a:fillRef idx="3">
+            <a:schemeClr val="accent1"/>
+          </a:fillRef>
+          <a:effectRef idx="2">
+            <a:schemeClr val="accent1"/>
+          </a:effectRef>
+          <a:fontRef idx="minor">
+            <a:schemeClr val="lt1"/>
+          </a:fontRef>
+        </p:style>
+        <p:txBody>
+          <a:bodyPr rtlCol="0" anchor="ctr"/>
+          <a:lstStyle/>
+          <a:p>
+            <a:pPr algn="ctr"/>
+          </a:p>
+        </p:txBody>
+      </p:sp>
+      <p:sp>
+        <p:nvSpPr>
+          <p:cNvPr id="3" name="TextBox 2"/>
+          <p:cNvSpPr txBox="1"/>
+          <p:nvPr/>
+        </p:nvSpPr>
+        <p:spPr>
+          <a:xfrm>
+            <a:off x="777240" y="502920"/>
+            <a:ext cx="10637215" cy="310896"/>
+          </a:xfrm>
+          <a:prstGeom prst="rect">
+            <a:avLst/>
+          </a:prstGeom>
+          <a:noFill/>
+        </p:spPr>
+        <p:txBody>
+          <a:bodyPr wrap="square">
+            <a:spAutoFit/>
+          </a:bodyPr>
+          <a:lstStyle/>
+          <a:p>
+            <a:pPr algn="l">
+              <a:spcAft>
+                <a:spcPts val="0"/>
+              </a:spcAft>
+            </a:pPr>
+            <a:r>
+              <a:rPr sz="1100" b="1">
+                <a:solidFill>
+                  <a:srgbClr val="7E6A64"/>
+                </a:solidFill>
+                <a:latin typeface="Red Hat Mono"/>
+              </a:rPr>
+              <a:t>HANDS ON</a:t>
+            </a:r>
+          </a:p>
+        </p:txBody>
+      </p:sp>
+      <p:sp>
+        <p:nvSpPr>
+          <p:cNvPr id="4" name="TextBox 3"/>
+          <p:cNvSpPr txBox="1"/>
+          <p:nvPr/>
+        </p:nvSpPr>
+        <p:spPr>
+          <a:xfrm>
+            <a:off x="777240" y="868680"/>
+            <a:ext cx="10637215" cy="822960"/>
+          </a:xfrm>
+          <a:prstGeom prst="rect">
+            <a:avLst/>
+          </a:prstGeom>
+          <a:noFill/>
+        </p:spPr>
+        <p:txBody>
+          <a:bodyPr wrap="square">
+            <a:spAutoFit/>
+          </a:bodyPr>
+          <a:lstStyle/>
+          <a:p>
+            <a:pPr algn="l">
+              <a:spcAft>
+                <a:spcPts val="0"/>
+              </a:spcAft>
+            </a:pPr>
+            <a:r>
+              <a:rPr sz="3400" b="1">
+                <a:solidFill>
+                  <a:srgbClr val="1B1211"/>
+                </a:solidFill>
+                <a:latin typeface="Red Hat Display"/>
+              </a:rPr>
+              <a:t>Seven labs — real commands, run them yourself</a:t>
+            </a:r>
+          </a:p>
+        </p:txBody>
+      </p:sp>
+      <p:sp>
+        <p:nvSpPr>
+          <p:cNvPr id="5" name="TextBox 4"/>
+          <p:cNvSpPr txBox="1"/>
+          <p:nvPr/>
+        </p:nvSpPr>
+        <p:spPr>
+          <a:xfrm>
+            <a:off x="777240" y="1536192"/>
+            <a:ext cx="9692640" cy="457200"/>
+          </a:xfrm>
+          <a:prstGeom prst="rect">
+            <a:avLst/>
+          </a:prstGeom>
+          <a:noFill/>
+        </p:spPr>
+        <p:txBody>
+          <a:bodyPr wrap="square">
+            <a:spAutoFit/>
+          </a:bodyPr>
+          <a:lstStyle/>
+          <a:p>
+            <a:pPr algn="l">
+              <a:spcAft>
+                <a:spcPts val="0"/>
+              </a:spcAft>
+            </a:pPr>
+            <a:r>
+              <a:rPr sz="1400" b="0">
+                <a:solidFill>
+                  <a:srgbClr val="54423E"/>
+                </a:solidFill>
+                <a:latin typeface="Red Hat Text"/>
+              </a:rPr>
+              <a:t>Simulate mode needs no cluster, no GPU and no credentials. The Demo view plays them hands-free.</a:t>
+            </a:r>
+          </a:p>
+        </p:txBody>
+      </p:sp>
+      <p:graphicFrame>
+        <p:nvGraphicFramePr>
+          <p:cNvPr id="6" name="Table 5"/>
+          <p:cNvGraphicFramePr>
+            <a:graphicFrameLocks noGrp="1"/>
+          </p:cNvGraphicFramePr>
+          <p:nvPr/>
+        </p:nvGraphicFramePr>
+        <p:xfrm>
+          <a:off x="777240" y="2194560"/>
+          <a:ext cx="10607040" cy="2633472"/>
+        </p:xfrm>
+        <a:graphic>
+          <a:graphicData uri="http://schemas.openxmlformats.org/drawingml/2006/table">
+            <a:tbl>
+              <a:tblPr firstRow="1" bandRow="1">
+                <a:tableStyleId>{5C22544A-7EE6-4342-B048-85BDC9FD1C3A}</a:tableStyleId>
+              </a:tblPr>
+              <a:tblGrid>
+                <a:gridCol w="914400"/>
+                <a:gridCol w="6035040"/>
+                <a:gridCol w="3657600"/>
+              </a:tblGrid>
+              <a:tr h="329184">
+                <a:tc>
+                  <a:txBody>
+                    <a:bodyPr wrap="square"/>
+                    <a:lstStyle/>
+                    <a:p>
+                      <a:r>
+                        <a:rPr sz="1050" b="1">
+                          <a:solidFill>
+                            <a:srgbClr val="7E6A64"/>
+                          </a:solidFill>
+                          <a:latin typeface="Red Hat Mono"/>
+                        </a:rPr>
+                        <a:t>Lab</a:t>
+                      </a:r>
+                    </a:p>
+                  </a:txBody>
+                  <a:tcPr marL="109728" marR="109728" marT="45720" marB="45720">
+                    <a:solidFill>
+                      <a:srgbClr val="F4EFED"/>
+                    </a:solidFill>
+                  </a:tcPr>
+                </a:tc>
+                <a:tc>
+                  <a:txBody>
+                    <a:bodyPr wrap="square"/>
+                    <a:lstStyle/>
+                    <a:p>
+                      <a:r>
+                        <a:rPr sz="1050" b="1">
+                          <a:solidFill>
+                            <a:srgbClr val="7E6A64"/>
+                          </a:solidFill>
+                          <a:latin typeface="Red Hat Mono"/>
+                        </a:rPr>
+                        <a:t>What you do</a:t>
+                      </a:r>
+                    </a:p>
+                  </a:txBody>
+                  <a:tcPr marL="109728" marR="109728" marT="45720" marB="45720">
+                    <a:solidFill>
+                      <a:srgbClr val="F4EFED"/>
+                    </a:solidFill>
+                  </a:tcPr>
+                </a:tc>
+                <a:tc>
+                  <a:txBody>
+                    <a:bodyPr wrap="square"/>
+                    <a:lstStyle/>
+                    <a:p>
+                      <a:r>
+                        <a:rPr sz="1050" b="1">
+                          <a:solidFill>
+                            <a:srgbClr val="7E6A64"/>
+                          </a:solidFill>
+                          <a:latin typeface="Red Hat Mono"/>
+                        </a:rPr>
+                        <a:t>Product</a:t>
+                      </a:r>
+                    </a:p>
+                  </a:txBody>
+                  <a:tcPr marL="109728" marR="109728" marT="45720" marB="45720">
+                    <a:solidFill>
+                      <a:srgbClr val="F4EFED"/>
+                    </a:solidFill>
+                  </a:tcPr>
+                </a:tc>
+              </a:tr>
+              <a:tr h="329184">
+                <a:tc>
+                  <a:txBody>
+                    <a:bodyPr wrap="square"/>
+                    <a:lstStyle/>
+                    <a:p>
+                      <a:r>
+                        <a:rPr sz="1200" b="0">
+                          <a:solidFill>
+                            <a:srgbClr val="1B1211"/>
+                          </a:solidFill>
+                          <a:latin typeface="Red Hat Mono"/>
+                        </a:rPr>
+                        <a:t>01</a:t>
+                      </a:r>
+                    </a:p>
+                  </a:txBody>
+                  <a:tcPr marL="109728" marR="109728" marT="45720" marB="45720">
+                    <a:solidFill>
+                      <a:srgbClr val="FBF9F8"/>
+                    </a:solidFill>
+                  </a:tcPr>
+                </a:tc>
+                <a:tc>
+                  <a:txBody>
+                    <a:bodyPr wrap="square"/>
+                    <a:lstStyle/>
+                    <a:p>
+                      <a:r>
+                        <a:rPr sz="1200" b="0">
+                          <a:solidFill>
+                            <a:srgbClr val="1B1211"/>
+                          </a:solidFill>
+                          <a:latin typeface="Red Hat Text"/>
+                        </a:rPr>
+                        <a:t>Serve a model inside your boundary</a:t>
+                      </a:r>
+                    </a:p>
+                  </a:txBody>
+                  <a:tcPr marL="109728" marR="109728" marT="45720" marB="45720">
+                    <a:solidFill>
+                      <a:srgbClr val="FBF9F8"/>
+                    </a:solidFill>
+                  </a:tcPr>
+                </a:tc>
+                <a:tc>
+                  <a:txBody>
+                    <a:bodyPr wrap="square"/>
+                    <a:lstStyle/>
+                    <a:p>
+                      <a:r>
+                        <a:rPr sz="1200" b="0">
+                          <a:solidFill>
+                            <a:srgbClr val="1B1211"/>
+                          </a:solidFill>
+                          <a:latin typeface="Red Hat Mono"/>
+                        </a:rPr>
+                        <a:t>AI Inference Server</a:t>
+                      </a:r>
+                    </a:p>
+                  </a:txBody>
+                  <a:tcPr marL="109728" marR="109728" marT="45720" marB="45720">
+                    <a:solidFill>
+                      <a:srgbClr val="FBF9F8"/>
+                    </a:solidFill>
+                  </a:tcPr>
+                </a:tc>
+              </a:tr>
+              <a:tr h="329184">
+                <a:tc>
+                  <a:txBody>
+                    <a:bodyPr wrap="square"/>
+                    <a:lstStyle/>
+                    <a:p>
+                      <a:r>
+                        <a:rPr sz="1200" b="0">
+                          <a:solidFill>
+                            <a:srgbClr val="1B1211"/>
+                          </a:solidFill>
+                          <a:latin typeface="Red Hat Mono"/>
+                        </a:rPr>
+                        <a:t>02</a:t>
+                      </a:r>
+                    </a:p>
+                  </a:txBody>
+                  <a:tcPr marL="109728" marR="109728" marT="45720" marB="45720">
+                    <a:solidFill>
+                      <a:srgbClr val="FBF9F8"/>
+                    </a:solidFill>
+                  </a:tcPr>
+                </a:tc>
+                <a:tc>
+                  <a:txBody>
+                    <a:bodyPr wrap="square"/>
+                    <a:lstStyle/>
+                    <a:p>
+                      <a:r>
+                        <a:rPr sz="1200" b="0">
+                          <a:solidFill>
+                            <a:srgbClr val="1B1211"/>
+                          </a:solidFill>
+                          <a:latin typeface="Red Hat Text"/>
+                        </a:rPr>
+                        <a:t>Teach it your notice taxonomy</a:t>
+                      </a:r>
+                    </a:p>
+                  </a:txBody>
+                  <a:tcPr marL="109728" marR="109728" marT="45720" marB="45720">
+                    <a:solidFill>
+                      <a:srgbClr val="FBF9F8"/>
+                    </a:solidFill>
+                  </a:tcPr>
+                </a:tc>
+                <a:tc>
+                  <a:txBody>
+                    <a:bodyPr wrap="square"/>
+                    <a:lstStyle/>
+                    <a:p>
+                      <a:r>
+                        <a:rPr sz="1200" b="0">
+                          <a:solidFill>
+                            <a:srgbClr val="1B1211"/>
+                          </a:solidFill>
+                          <a:latin typeface="Red Hat Mono"/>
+                        </a:rPr>
+                        <a:t>SDG + Training Hub</a:t>
+                      </a:r>
+                    </a:p>
+                  </a:txBody>
+                  <a:tcPr marL="109728" marR="109728" marT="45720" marB="45720">
+                    <a:solidFill>
+                      <a:srgbClr val="FBF9F8"/>
+                    </a:solidFill>
+                  </a:tcPr>
+                </a:tc>
+              </a:tr>
+              <a:tr h="329184">
+                <a:tc>
+                  <a:txBody>
+                    <a:bodyPr wrap="square"/>
+                    <a:lstStyle/>
+                    <a:p>
+                      <a:r>
+                        <a:rPr sz="1200" b="0">
+                          <a:solidFill>
+                            <a:srgbClr val="1B1211"/>
+                          </a:solidFill>
+                          <a:latin typeface="Red Hat Mono"/>
+                        </a:rPr>
+                        <a:t>03</a:t>
+                      </a:r>
+                    </a:p>
+                  </a:txBody>
+                  <a:tcPr marL="109728" marR="109728" marT="45720" marB="45720">
+                    <a:solidFill>
+                      <a:srgbClr val="FBF9F8"/>
+                    </a:solidFill>
+                  </a:tcPr>
+                </a:tc>
+                <a:tc>
+                  <a:txBody>
+                    <a:bodyPr wrap="square"/>
+                    <a:lstStyle/>
+                    <a:p>
+                      <a:r>
+                        <a:rPr sz="1200" b="0">
+                          <a:solidFill>
+                            <a:srgbClr val="1B1211"/>
+                          </a:solidFill>
+                          <a:latin typeface="Red Hat Text"/>
+                        </a:rPr>
+                        <a:t>Survive filing season</a:t>
+                      </a:r>
+                    </a:p>
+                  </a:txBody>
+                  <a:tcPr marL="109728" marR="109728" marT="45720" marB="45720">
+                    <a:solidFill>
+                      <a:srgbClr val="FBF9F8"/>
+                    </a:solidFill>
+                  </a:tcPr>
+                </a:tc>
+                <a:tc>
+                  <a:txBody>
+                    <a:bodyPr wrap="square"/>
+                    <a:lstStyle/>
+                    <a:p>
+                      <a:r>
+                        <a:rPr sz="1200" b="0">
+                          <a:solidFill>
+                            <a:srgbClr val="1B1211"/>
+                          </a:solidFill>
+                          <a:latin typeface="Red Hat Mono"/>
+                        </a:rPr>
+                        <a:t>OpenShift AI</a:t>
+                      </a:r>
+                    </a:p>
+                  </a:txBody>
+                  <a:tcPr marL="109728" marR="109728" marT="45720" marB="45720">
+                    <a:solidFill>
+                      <a:srgbClr val="FBF9F8"/>
+                    </a:solidFill>
+                  </a:tcPr>
+                </a:tc>
+              </a:tr>
+              <a:tr h="329184">
+                <a:tc>
+                  <a:txBody>
+                    <a:bodyPr wrap="square"/>
+                    <a:lstStyle/>
+                    <a:p>
+                      <a:r>
+                        <a:rPr sz="1200" b="0">
+                          <a:solidFill>
+                            <a:srgbClr val="1B1211"/>
+                          </a:solidFill>
+                          <a:latin typeface="Red Hat Mono"/>
+                        </a:rPr>
+                        <a:t>04</a:t>
+                      </a:r>
+                    </a:p>
+                  </a:txBody>
+                  <a:tcPr marL="109728" marR="109728" marT="45720" marB="45720">
+                    <a:solidFill>
+                      <a:srgbClr val="FBF9F8"/>
+                    </a:solidFill>
+                  </a:tcPr>
+                </a:tc>
+                <a:tc>
+                  <a:txBody>
+                    <a:bodyPr wrap="square"/>
+                    <a:lstStyle/>
+                    <a:p>
+                      <a:r>
+                        <a:rPr sz="1200" b="0">
+                          <a:solidFill>
+                            <a:srgbClr val="1B1211"/>
+                          </a:solidFill>
+                          <a:latin typeface="Red Hat Text"/>
+                        </a:rPr>
+                        <a:t>Ground answers in your guidance</a:t>
+                      </a:r>
+                    </a:p>
+                  </a:txBody>
+                  <a:tcPr marL="109728" marR="109728" marT="45720" marB="45720">
+                    <a:solidFill>
+                      <a:srgbClr val="FBF9F8"/>
+                    </a:solidFill>
+                  </a:tcPr>
+                </a:tc>
+                <a:tc>
+                  <a:txBody>
+                    <a:bodyPr wrap="square"/>
+                    <a:lstStyle/>
+                    <a:p>
+                      <a:r>
+                        <a:rPr sz="1200" b="0">
+                          <a:solidFill>
+                            <a:srgbClr val="1B1211"/>
+                          </a:solidFill>
+                          <a:latin typeface="Red Hat Mono"/>
+                        </a:rPr>
+                        <a:t>Retrieval</a:t>
+                      </a:r>
+                    </a:p>
+                  </a:txBody>
+                  <a:tcPr marL="109728" marR="109728" marT="45720" marB="45720">
+                    <a:solidFill>
+                      <a:srgbClr val="FBF9F8"/>
+                    </a:solidFill>
+                  </a:tcPr>
+                </a:tc>
+              </a:tr>
+              <a:tr h="329184">
+                <a:tc>
+                  <a:txBody>
+                    <a:bodyPr wrap="square"/>
+                    <a:lstStyle/>
+                    <a:p>
+                      <a:r>
+                        <a:rPr sz="1200" b="0">
+                          <a:solidFill>
+                            <a:srgbClr val="1B1211"/>
+                          </a:solidFill>
+                          <a:latin typeface="Red Hat Mono"/>
+                        </a:rPr>
+                        <a:t>05</a:t>
+                      </a:r>
+                    </a:p>
+                  </a:txBody>
+                  <a:tcPr marL="109728" marR="109728" marT="45720" marB="45720">
+                    <a:solidFill>
+                      <a:srgbClr val="FBF9F8"/>
+                    </a:solidFill>
+                  </a:tcPr>
+                </a:tc>
+                <a:tc>
+                  <a:txBody>
+                    <a:bodyPr wrap="square"/>
+                    <a:lstStyle/>
+                    <a:p>
+                      <a:r>
+                        <a:rPr sz="1200" b="0">
+                          <a:solidFill>
+                            <a:srgbClr val="1B1211"/>
+                          </a:solidFill>
+                          <a:latin typeface="Red Hat Text"/>
+                        </a:rPr>
+                        <a:t>Automate the toil around the model</a:t>
+                      </a:r>
+                    </a:p>
+                  </a:txBody>
+                  <a:tcPr marL="109728" marR="109728" marT="45720" marB="45720">
+                    <a:solidFill>
+                      <a:srgbClr val="FBF9F8"/>
+                    </a:solidFill>
+                  </a:tcPr>
+                </a:tc>
+                <a:tc>
+                  <a:txBody>
+                    <a:bodyPr wrap="square"/>
+                    <a:lstStyle/>
+                    <a:p>
+                      <a:r>
+                        <a:rPr sz="1200" b="0">
+                          <a:solidFill>
+                            <a:srgbClr val="1B1211"/>
+                          </a:solidFill>
+                          <a:latin typeface="Red Hat Mono"/>
+                        </a:rPr>
+                        <a:t>Ansible</a:t>
+                      </a:r>
+                    </a:p>
+                  </a:txBody>
+                  <a:tcPr marL="109728" marR="109728" marT="45720" marB="45720">
+                    <a:solidFill>
+                      <a:srgbClr val="FBF9F8"/>
+                    </a:solidFill>
+                  </a:tcPr>
+                </a:tc>
+              </a:tr>
+              <a:tr h="329184">
+                <a:tc>
+                  <a:txBody>
+                    <a:bodyPr wrap="square"/>
+                    <a:lstStyle/>
+                    <a:p>
+                      <a:r>
+                        <a:rPr sz="1200" b="0">
+                          <a:solidFill>
+                            <a:srgbClr val="1B1211"/>
+                          </a:solidFill>
+                          <a:latin typeface="Red Hat Mono"/>
+                        </a:rPr>
+                        <a:t>06</a:t>
+                      </a:r>
+                    </a:p>
+                  </a:txBody>
+                  <a:tcPr marL="109728" marR="109728" marT="45720" marB="45720">
+                    <a:solidFill>
+                      <a:srgbClr val="FBF9F8"/>
+                    </a:solidFill>
+                  </a:tcPr>
+                </a:tc>
+                <a:tc>
+                  <a:txBody>
+                    <a:bodyPr wrap="square"/>
+                    <a:lstStyle/>
+                    <a:p>
+                      <a:r>
+                        <a:rPr sz="1200" b="0">
+                          <a:solidFill>
+                            <a:srgbClr val="1B1211"/>
+                          </a:solidFill>
+                          <a:latin typeface="Red Hat Text"/>
+                        </a:rPr>
+                        <a:t>Prove it to your ISSO</a:t>
+                      </a:r>
+                    </a:p>
+                  </a:txBody>
+                  <a:tcPr marL="109728" marR="109728" marT="45720" marB="45720">
+                    <a:solidFill>
+                      <a:srgbClr val="FBF9F8"/>
+                    </a:solidFill>
+                  </a:tcPr>
+                </a:tc>
+                <a:tc>
+                  <a:txBody>
+                    <a:bodyPr wrap="square"/>
+                    <a:lstStyle/>
+                    <a:p>
+                      <a:r>
+                        <a:rPr sz="1200" b="0">
+                          <a:solidFill>
+                            <a:srgbClr val="1B1211"/>
+                          </a:solidFill>
+                          <a:latin typeface="Red Hat Mono"/>
+                        </a:rPr>
+                        <a:t>Compliance, TrustyAI</a:t>
+                      </a:r>
+                    </a:p>
+                  </a:txBody>
+                  <a:tcPr marL="109728" marR="109728" marT="45720" marB="45720">
+                    <a:solidFill>
+                      <a:srgbClr val="FBF9F8"/>
+                    </a:solidFill>
+                  </a:tcPr>
+                </a:tc>
+              </a:tr>
+              <a:tr h="329184">
+                <a:tc>
+                  <a:txBody>
+                    <a:bodyPr wrap="square"/>
+                    <a:lstStyle/>
+                    <a:p>
+                      <a:r>
+                        <a:rPr sz="1200" b="0">
+                          <a:solidFill>
+                            <a:srgbClr val="1B1211"/>
+                          </a:solidFill>
+                          <a:latin typeface="Red Hat Mono"/>
+                        </a:rPr>
+                        <a:t>07</a:t>
+                      </a:r>
+                    </a:p>
+                  </a:txBody>
+                  <a:tcPr marL="109728" marR="109728" marT="45720" marB="45720">
+                    <a:solidFill>
+                      <a:srgbClr val="FBF9F8"/>
+                    </a:solidFill>
+                  </a:tcPr>
+                </a:tc>
+                <a:tc>
+                  <a:txBody>
+                    <a:bodyPr wrap="square"/>
+                    <a:lstStyle/>
+                    <a:p>
+                      <a:r>
+                        <a:rPr sz="1200" b="0">
+                          <a:solidFill>
+                            <a:srgbClr val="1B1211"/>
+                          </a:solidFill>
+                          <a:latin typeface="Red Hat Text"/>
+                        </a:rPr>
+                        <a:t>Ask your own logs</a:t>
+                      </a:r>
+                    </a:p>
+                  </a:txBody>
+                  <a:tcPr marL="109728" marR="109728" marT="45720" marB="45720">
+                    <a:solidFill>
+                      <a:srgbClr val="FBF9F8"/>
+                    </a:solidFill>
+                  </a:tcPr>
+                </a:tc>
+                <a:tc>
+                  <a:txBody>
+                    <a:bodyPr wrap="square"/>
+                    <a:lstStyle/>
+                    <a:p>
+                      <a:r>
+                        <a:rPr sz="1200" b="0">
+                          <a:solidFill>
+                            <a:srgbClr val="1B1211"/>
+                          </a:solidFill>
+                          <a:latin typeface="Red Hat Mono"/>
+                        </a:rPr>
+                        <a:t>Ops notebook</a:t>
+                      </a:r>
+                    </a:p>
+                  </a:txBody>
+                  <a:tcPr marL="109728" marR="109728" marT="45720" marB="45720">
+                    <a:solidFill>
+                      <a:srgbClr val="FBF9F8"/>
+                    </a:solidFill>
+                  </a:tcPr>
+                </a:tc>
+              </a:tr>
+            </a:tbl>
+          </a:graphicData>
+        </a:graphic>
+      </p:graphicFrame>
+    </p:spTree>
+  </p:cSld>
+  <p:clrMapOvr>
+    <a:masterClrMapping/>
+  </p:clrMapOvr>
+</p:sld>
+</file>
+
+<file path=ppt/slides/slide9.xml><?xml version="1.0" encoding="utf-8"?>
+<p:sld xmlns:a="http://schemas.openxmlformats.org/drawingml/2006/main" xmlns:p="http://schemas.openxmlformats.org/presentationml/2006/main" xmlns:r="http://schemas.openxmlformats.org/officeDocument/2006/relationships">
+  <p:cSld>
+    <p:bg>
+      <p:bgPr>
+        <a:solidFill>
+          <a:srgbClr val="FBF9F8"/>
+        </a:solidFill>
+        <a:effectLst/>
+      </p:bgPr>
+    </p:bg>
+    <p:spTree>
+      <p:nvGrpSpPr>
+        <p:cNvPr id="1" name=""/>
+        <p:cNvGrpSpPr/>
+        <p:nvPr/>
+      </p:nvGrpSpPr>
+      <p:grpSpPr/>
+      <p:sp>
+        <p:nvSpPr>
+          <p:cNvPr id="2" name="Rectangle 1"/>
+          <p:cNvSpPr/>
+          <p:nvPr/>
+        </p:nvSpPr>
+        <p:spPr>
+          <a:xfrm>
+            <a:off x="0" y="0"/>
+            <a:ext cx="12191695" cy="45720"/>
+          </a:xfrm>
+          <a:prstGeom prst="rect">
+            <a:avLst/>
+          </a:prstGeom>
+          <a:solidFill>
+            <a:srgbClr val="CC0000"/>
+          </a:solidFill>
+          <a:ln>
+            <a:noFill/>
+          </a:ln>
+          <a:effectLst/>
+        </p:spPr>
+        <p:style>
+          <a:lnRef idx="1">
+            <a:schemeClr val="accent1"/>
+          </a:lnRef>
+          <a:fillRef idx="3">
+            <a:schemeClr val="accent1"/>
+          </a:fillRef>
+          <a:effectRef idx="2">
+            <a:schemeClr val="accent1"/>
+          </a:effectRef>
+          <a:fontRef idx="minor">
+            <a:schemeClr val="lt1"/>
+          </a:fontRef>
+        </p:style>
+        <p:txBody>
+          <a:bodyPr rtlCol="0" anchor="ctr"/>
+          <a:lstStyle/>
+          <a:p>
+            <a:pPr algn="ctr"/>
+          </a:p>
+        </p:txBody>
+      </p:sp>
+      <p:sp>
+        <p:nvSpPr>
+          <p:cNvPr id="3" name="TextBox 2"/>
+          <p:cNvSpPr txBox="1"/>
+          <p:nvPr/>
+        </p:nvSpPr>
+        <p:spPr>
+          <a:xfrm>
+            <a:off x="777240" y="502920"/>
+            <a:ext cx="10637215" cy="310896"/>
+          </a:xfrm>
+          <a:prstGeom prst="rect">
+            <a:avLst/>
+          </a:prstGeom>
+          <a:noFill/>
+        </p:spPr>
+        <p:txBody>
+          <a:bodyPr wrap="square">
+            <a:spAutoFit/>
+          </a:bodyPr>
+          <a:lstStyle/>
+          <a:p>
+            <a:pPr algn="l">
+              <a:spcAft>
+                <a:spcPts val="0"/>
+              </a:spcAft>
+            </a:pPr>
+            <a:r>
+              <a:rPr sz="1100" b="1">
+                <a:solidFill>
+                  <a:srgbClr val="7E6A64"/>
+                </a:solidFill>
+                <a:latin typeface="Red Hat Mono"/>
+              </a:rPr>
+              <a:t>APPENDIX · TRUSTED, ENTERPRISE-READY AI</a:t>
             </a:r>
           </a:p>
         </p:txBody>
@@ -10744,7 +13423,7 @@
                           </a:solidFill>
                           <a:latin typeface="Red Hat Mono"/>
                         </a:rPr>
-                        <a:t>RHEL AI</a:t>
+                        <a:t>AI Inference</a:t>
                       </a:r>
                     </a:p>
                   </a:txBody>
@@ -11167,2578 +13846,6 @@
           </a:graphicData>
         </a:graphic>
       </p:graphicFrame>
-    </p:spTree>
-  </p:cSld>
-  <p:clrMapOvr>
-    <a:masterClrMapping/>
-  </p:clrMapOvr>
-</p:sld>
-</file>
-
-<file path=ppt/slides/slide7.xml><?xml version="1.0" encoding="utf-8"?>
-<p:sld xmlns:a="http://schemas.openxmlformats.org/drawingml/2006/main" xmlns:p="http://schemas.openxmlformats.org/presentationml/2006/main" xmlns:r="http://schemas.openxmlformats.org/officeDocument/2006/relationships">
-  <p:cSld>
-    <p:bg>
-      <p:bgPr>
-        <a:solidFill>
-          <a:srgbClr val="FBF9F8"/>
-        </a:solidFill>
-        <a:effectLst/>
-      </p:bgPr>
-    </p:bg>
-    <p:spTree>
-      <p:nvGrpSpPr>
-        <p:cNvPr id="1" name=""/>
-        <p:cNvGrpSpPr/>
-        <p:nvPr/>
-      </p:nvGrpSpPr>
-      <p:grpSpPr/>
-      <p:sp>
-        <p:nvSpPr>
-          <p:cNvPr id="2" name="Rectangle 1"/>
-          <p:cNvSpPr/>
-          <p:nvPr/>
-        </p:nvSpPr>
-        <p:spPr>
-          <a:xfrm>
-            <a:off x="0" y="0"/>
-            <a:ext cx="12191695" cy="45720"/>
-          </a:xfrm>
-          <a:prstGeom prst="rect">
-            <a:avLst/>
-          </a:prstGeom>
-          <a:solidFill>
-            <a:srgbClr val="CC0000"/>
-          </a:solidFill>
-          <a:ln>
-            <a:noFill/>
-          </a:ln>
-          <a:effectLst/>
-        </p:spPr>
-        <p:style>
-          <a:lnRef idx="1">
-            <a:schemeClr val="accent1"/>
-          </a:lnRef>
-          <a:fillRef idx="3">
-            <a:schemeClr val="accent1"/>
-          </a:fillRef>
-          <a:effectRef idx="2">
-            <a:schemeClr val="accent1"/>
-          </a:effectRef>
-          <a:fontRef idx="minor">
-            <a:schemeClr val="lt1"/>
-          </a:fontRef>
-        </p:style>
-        <p:txBody>
-          <a:bodyPr rtlCol="0" anchor="ctr"/>
-          <a:lstStyle/>
-          <a:p>
-            <a:pPr algn="ctr"/>
-          </a:p>
-        </p:txBody>
-      </p:sp>
-      <p:sp>
-        <p:nvSpPr>
-          <p:cNvPr id="3" name="TextBox 2"/>
-          <p:cNvSpPr txBox="1"/>
-          <p:nvPr/>
-        </p:nvSpPr>
-        <p:spPr>
-          <a:xfrm>
-            <a:off x="777240" y="502920"/>
-            <a:ext cx="10637215" cy="310896"/>
-          </a:xfrm>
-          <a:prstGeom prst="rect">
-            <a:avLst/>
-          </a:prstGeom>
-          <a:noFill/>
-        </p:spPr>
-        <p:txBody>
-          <a:bodyPr wrap="square">
-            <a:spAutoFit/>
-          </a:bodyPr>
-          <a:lstStyle/>
-          <a:p>
-            <a:pPr algn="l">
-              <a:spcAft>
-                <a:spcPts val="0"/>
-              </a:spcAft>
-            </a:pPr>
-            <a:r>
-              <a:rPr sz="1100" b="1">
-                <a:solidFill>
-                  <a:srgbClr val="7E6A64"/>
-                </a:solidFill>
-                <a:latin typeface="Red Hat Mono"/>
-              </a:rPr>
-              <a:t>ADOPTION PATH</a:t>
-            </a:r>
-          </a:p>
-        </p:txBody>
-      </p:sp>
-      <p:sp>
-        <p:nvSpPr>
-          <p:cNvPr id="4" name="TextBox 3"/>
-          <p:cNvSpPr txBox="1"/>
-          <p:nvPr/>
-        </p:nvSpPr>
-        <p:spPr>
-          <a:xfrm>
-            <a:off x="777240" y="868680"/>
-            <a:ext cx="10637215" cy="822960"/>
-          </a:xfrm>
-          <a:prstGeom prst="rect">
-            <a:avLst/>
-          </a:prstGeom>
-          <a:noFill/>
-        </p:spPr>
-        <p:txBody>
-          <a:bodyPr wrap="square">
-            <a:spAutoFit/>
-          </a:bodyPr>
-          <a:lstStyle/>
-          <a:p>
-            <a:pPr algn="l">
-              <a:spcAft>
-                <a:spcPts val="0"/>
-              </a:spcAft>
-            </a:pPr>
-            <a:r>
-              <a:rPr sz="3400" b="1">
-                <a:solidFill>
-                  <a:srgbClr val="1B1211"/>
-                </a:solidFill>
-                <a:latin typeface="Red Hat Display"/>
-              </a:rPr>
-              <a:t>Ninety days, then ninety more</a:t>
-            </a:r>
-          </a:p>
-        </p:txBody>
-      </p:sp>
-      <p:sp>
-        <p:nvSpPr>
-          <p:cNvPr id="5" name="TextBox 4"/>
-          <p:cNvSpPr txBox="1"/>
-          <p:nvPr/>
-        </p:nvSpPr>
-        <p:spPr>
-          <a:xfrm>
-            <a:off x="777240" y="1536192"/>
-            <a:ext cx="9692640" cy="457200"/>
-          </a:xfrm>
-          <a:prstGeom prst="rect">
-            <a:avLst/>
-          </a:prstGeom>
-          <a:noFill/>
-        </p:spPr>
-        <p:txBody>
-          <a:bodyPr wrap="square">
-            <a:spAutoFit/>
-          </a:bodyPr>
-          <a:lstStyle/>
-          <a:p>
-            <a:pPr algn="l">
-              <a:spcAft>
-                <a:spcPts val="0"/>
-              </a:spcAft>
-            </a:pPr>
-            <a:r>
-              <a:rPr sz="1400" b="0">
-                <a:solidFill>
-                  <a:srgbClr val="54423E"/>
-                </a:solidFill>
-                <a:latin typeface="Red Hat Text"/>
-              </a:rPr>
-              <a:t>Nothing here requires a rewrite of a system of record.</a:t>
-            </a:r>
-          </a:p>
-        </p:txBody>
-      </p:sp>
-      <p:cxnSp>
-        <p:nvCxnSpPr>
-          <p:cNvPr id="6" name="Connector 5"/>
-          <p:cNvCxnSpPr/>
-          <p:nvPr/>
-        </p:nvCxnSpPr>
-        <p:spPr>
-          <a:xfrm>
-            <a:off x="914400" y="2423160"/>
-            <a:ext cx="10515600" cy="0"/>
-          </a:xfrm>
-          <a:prstGeom prst="line">
-            <a:avLst/>
-          </a:prstGeom>
-          <a:ln w="25400">
-            <a:solidFill>
-              <a:srgbClr val="CFC2BE"/>
-            </a:solidFill>
-          </a:ln>
-          <a:effectLst/>
-        </p:spPr>
-        <p:style>
-          <a:lnRef idx="2">
-            <a:schemeClr val="accent1"/>
-          </a:lnRef>
-          <a:fillRef idx="0">
-            <a:schemeClr val="accent1"/>
-          </a:fillRef>
-          <a:effectRef idx="1">
-            <a:schemeClr val="accent1"/>
-          </a:effectRef>
-          <a:fontRef idx="minor">
-            <a:schemeClr val="tx1"/>
-          </a:fontRef>
-        </p:style>
-      </p:cxnSp>
-      <p:sp>
-        <p:nvSpPr>
-          <p:cNvPr id="7" name="Rounded Rectangle 6"/>
-          <p:cNvSpPr/>
-          <p:nvPr/>
-        </p:nvSpPr>
-        <p:spPr>
-          <a:xfrm>
-            <a:off x="1051560" y="2359152"/>
-            <a:ext cx="3310128" cy="128016"/>
-          </a:xfrm>
-          <a:prstGeom prst="roundRect">
-            <a:avLst>
-              <a:gd name="adj" fmla="val 50000"/>
-            </a:avLst>
-          </a:prstGeom>
-          <a:solidFill>
-            <a:srgbClr val="286C88"/>
-          </a:solidFill>
-          <a:ln>
-            <a:noFill/>
-          </a:ln>
-          <a:effectLst/>
-        </p:spPr>
-        <p:style>
-          <a:lnRef idx="1">
-            <a:schemeClr val="accent1"/>
-          </a:lnRef>
-          <a:fillRef idx="3">
-            <a:schemeClr val="accent1"/>
-          </a:fillRef>
-          <a:effectRef idx="2">
-            <a:schemeClr val="accent1"/>
-          </a:effectRef>
-          <a:fontRef idx="minor">
-            <a:schemeClr val="lt1"/>
-          </a:fontRef>
-        </p:style>
-        <p:txBody>
-          <a:bodyPr rtlCol="0" anchor="ctr"/>
-          <a:lstStyle/>
-          <a:p>
-            <a:pPr algn="ctr"/>
-          </a:p>
-        </p:txBody>
-      </p:sp>
-      <p:sp>
-        <p:nvSpPr>
-          <p:cNvPr id="8" name="TextBox 7"/>
-          <p:cNvSpPr txBox="1"/>
-          <p:nvPr/>
-        </p:nvSpPr>
-        <p:spPr>
-          <a:xfrm>
-            <a:off x="1051560" y="1965960"/>
-            <a:ext cx="3310128" cy="274320"/>
-          </a:xfrm>
-          <a:prstGeom prst="rect">
-            <a:avLst/>
-          </a:prstGeom>
-          <a:noFill/>
-        </p:spPr>
-        <p:txBody>
-          <a:bodyPr wrap="square">
-            <a:spAutoFit/>
-          </a:bodyPr>
-          <a:lstStyle/>
-          <a:p>
-            <a:pPr algn="ctr">
-              <a:spcAft>
-                <a:spcPts val="0"/>
-              </a:spcAft>
-            </a:pPr>
-            <a:r>
-              <a:rPr sz="1200" b="1">
-                <a:solidFill>
-                  <a:srgbClr val="286C88"/>
-                </a:solidFill>
-                <a:latin typeface="Red Hat Mono"/>
-              </a:rPr>
-              <a:t>PROVE</a:t>
-            </a:r>
-          </a:p>
-        </p:txBody>
-      </p:sp>
-      <p:sp>
-        <p:nvSpPr>
-          <p:cNvPr id="9" name="Rounded Rectangle 8"/>
-          <p:cNvSpPr/>
-          <p:nvPr/>
-        </p:nvSpPr>
-        <p:spPr>
-          <a:xfrm>
-            <a:off x="4498848" y="2359152"/>
-            <a:ext cx="3310128" cy="128016"/>
-          </a:xfrm>
-          <a:prstGeom prst="roundRect">
-            <a:avLst>
-              <a:gd name="adj" fmla="val 50000"/>
-            </a:avLst>
-          </a:prstGeom>
-          <a:solidFill>
-            <a:srgbClr val="96620A"/>
-          </a:solidFill>
-          <a:ln>
-            <a:noFill/>
-          </a:ln>
-          <a:effectLst/>
-        </p:spPr>
-        <p:style>
-          <a:lnRef idx="1">
-            <a:schemeClr val="accent1"/>
-          </a:lnRef>
-          <a:fillRef idx="3">
-            <a:schemeClr val="accent1"/>
-          </a:fillRef>
-          <a:effectRef idx="2">
-            <a:schemeClr val="accent1"/>
-          </a:effectRef>
-          <a:fontRef idx="minor">
-            <a:schemeClr val="lt1"/>
-          </a:fontRef>
-        </p:style>
-        <p:txBody>
-          <a:bodyPr rtlCol="0" anchor="ctr"/>
-          <a:lstStyle/>
-          <a:p>
-            <a:pPr algn="ctr"/>
-          </a:p>
-        </p:txBody>
-      </p:sp>
-      <p:sp>
-        <p:nvSpPr>
-          <p:cNvPr id="10" name="TextBox 9"/>
-          <p:cNvSpPr txBox="1"/>
-          <p:nvPr/>
-        </p:nvSpPr>
-        <p:spPr>
-          <a:xfrm>
-            <a:off x="4498848" y="1965960"/>
-            <a:ext cx="3310128" cy="274320"/>
-          </a:xfrm>
-          <a:prstGeom prst="rect">
-            <a:avLst/>
-          </a:prstGeom>
-          <a:noFill/>
-        </p:spPr>
-        <p:txBody>
-          <a:bodyPr wrap="square">
-            <a:spAutoFit/>
-          </a:bodyPr>
-          <a:lstStyle/>
-          <a:p>
-            <a:pPr algn="ctr">
-              <a:spcAft>
-                <a:spcPts val="0"/>
-              </a:spcAft>
-            </a:pPr>
-            <a:r>
-              <a:rPr sz="1200" b="1">
-                <a:solidFill>
-                  <a:srgbClr val="96620A"/>
-                </a:solidFill>
-                <a:latin typeface="Red Hat Mono"/>
-              </a:rPr>
-              <a:t>GROUND</a:t>
-            </a:r>
-          </a:p>
-        </p:txBody>
-      </p:sp>
-      <p:sp>
-        <p:nvSpPr>
-          <p:cNvPr id="11" name="Rounded Rectangle 10"/>
-          <p:cNvSpPr/>
-          <p:nvPr/>
-        </p:nvSpPr>
-        <p:spPr>
-          <a:xfrm>
-            <a:off x="7946136" y="2359152"/>
-            <a:ext cx="3310128" cy="128016"/>
-          </a:xfrm>
-          <a:prstGeom prst="roundRect">
-            <a:avLst>
-              <a:gd name="adj" fmla="val 50000"/>
-            </a:avLst>
-          </a:prstGeom>
-          <a:solidFill>
-            <a:srgbClr val="CC0000"/>
-          </a:solidFill>
-          <a:ln>
-            <a:noFill/>
-          </a:ln>
-          <a:effectLst/>
-        </p:spPr>
-        <p:style>
-          <a:lnRef idx="1">
-            <a:schemeClr val="accent1"/>
-          </a:lnRef>
-          <a:fillRef idx="3">
-            <a:schemeClr val="accent1"/>
-          </a:fillRef>
-          <a:effectRef idx="2">
-            <a:schemeClr val="accent1"/>
-          </a:effectRef>
-          <a:fontRef idx="minor">
-            <a:schemeClr val="lt1"/>
-          </a:fontRef>
-        </p:style>
-        <p:txBody>
-          <a:bodyPr rtlCol="0" anchor="ctr"/>
-          <a:lstStyle/>
-          <a:p>
-            <a:pPr algn="ctr"/>
-          </a:p>
-        </p:txBody>
-      </p:sp>
-      <p:sp>
-        <p:nvSpPr>
-          <p:cNvPr id="12" name="TextBox 11"/>
-          <p:cNvSpPr txBox="1"/>
-          <p:nvPr/>
-        </p:nvSpPr>
-        <p:spPr>
-          <a:xfrm>
-            <a:off x="7946136" y="1965960"/>
-            <a:ext cx="3310128" cy="274320"/>
-          </a:xfrm>
-          <a:prstGeom prst="rect">
-            <a:avLst/>
-          </a:prstGeom>
-          <a:noFill/>
-        </p:spPr>
-        <p:txBody>
-          <a:bodyPr wrap="square">
-            <a:spAutoFit/>
-          </a:bodyPr>
-          <a:lstStyle/>
-          <a:p>
-            <a:pPr algn="ctr">
-              <a:spcAft>
-                <a:spcPts val="0"/>
-              </a:spcAft>
-            </a:pPr>
-            <a:r>
-              <a:rPr sz="1200" b="1">
-                <a:solidFill>
-                  <a:srgbClr val="CC0000"/>
-                </a:solidFill>
-                <a:latin typeface="Red Hat Mono"/>
-              </a:rPr>
-              <a:t>SCALE</a:t>
-            </a:r>
-          </a:p>
-        </p:txBody>
-      </p:sp>
-      <p:sp>
-        <p:nvSpPr>
-          <p:cNvPr id="13" name="Oval 12"/>
-          <p:cNvSpPr/>
-          <p:nvPr/>
-        </p:nvSpPr>
-        <p:spPr>
-          <a:xfrm>
-            <a:off x="987552" y="2359152"/>
-            <a:ext cx="128016" cy="128016"/>
-          </a:xfrm>
-          <a:prstGeom prst="ellipse">
-            <a:avLst/>
-          </a:prstGeom>
-          <a:solidFill>
-            <a:srgbClr val="FFFFFF"/>
-          </a:solidFill>
-          <a:ln w="19050">
-            <a:solidFill>
-              <a:srgbClr val="54423E"/>
-            </a:solidFill>
-          </a:ln>
-          <a:effectLst/>
-        </p:spPr>
-        <p:style>
-          <a:lnRef idx="1">
-            <a:schemeClr val="accent1"/>
-          </a:lnRef>
-          <a:fillRef idx="3">
-            <a:schemeClr val="accent1"/>
-          </a:fillRef>
-          <a:effectRef idx="2">
-            <a:schemeClr val="accent1"/>
-          </a:effectRef>
-          <a:fontRef idx="minor">
-            <a:schemeClr val="lt1"/>
-          </a:fontRef>
-        </p:style>
-        <p:txBody>
-          <a:bodyPr rtlCol="0" anchor="ctr"/>
-          <a:lstStyle/>
-          <a:p>
-            <a:pPr algn="ctr"/>
-          </a:p>
-        </p:txBody>
-      </p:sp>
-      <p:sp>
-        <p:nvSpPr>
-          <p:cNvPr id="14" name="TextBox 13"/>
-          <p:cNvSpPr txBox="1"/>
-          <p:nvPr/>
-        </p:nvSpPr>
-        <p:spPr>
-          <a:xfrm>
-            <a:off x="548640" y="2551176"/>
-            <a:ext cx="1005840" cy="219456"/>
-          </a:xfrm>
-          <a:prstGeom prst="rect">
-            <a:avLst/>
-          </a:prstGeom>
-          <a:noFill/>
-        </p:spPr>
-        <p:txBody>
-          <a:bodyPr wrap="square">
-            <a:spAutoFit/>
-          </a:bodyPr>
-          <a:lstStyle/>
-          <a:p>
-            <a:pPr algn="ctr">
-              <a:spcAft>
-                <a:spcPts val="0"/>
-              </a:spcAft>
-            </a:pPr>
-            <a:r>
-              <a:rPr sz="900" b="0">
-                <a:solidFill>
-                  <a:srgbClr val="7E6A64"/>
-                </a:solidFill>
-                <a:latin typeface="Red Hat Mono"/>
-              </a:rPr>
-              <a:t>day 0</a:t>
-            </a:r>
-          </a:p>
-        </p:txBody>
-      </p:sp>
-      <p:sp>
-        <p:nvSpPr>
-          <p:cNvPr id="15" name="Oval 14"/>
-          <p:cNvSpPr/>
-          <p:nvPr/>
-        </p:nvSpPr>
-        <p:spPr>
-          <a:xfrm>
-            <a:off x="4434840" y="2359152"/>
-            <a:ext cx="128016" cy="128016"/>
-          </a:xfrm>
-          <a:prstGeom prst="ellipse">
-            <a:avLst/>
-          </a:prstGeom>
-          <a:solidFill>
-            <a:srgbClr val="FFFFFF"/>
-          </a:solidFill>
-          <a:ln w="19050">
-            <a:solidFill>
-              <a:srgbClr val="54423E"/>
-            </a:solidFill>
-          </a:ln>
-          <a:effectLst/>
-        </p:spPr>
-        <p:style>
-          <a:lnRef idx="1">
-            <a:schemeClr val="accent1"/>
-          </a:lnRef>
-          <a:fillRef idx="3">
-            <a:schemeClr val="accent1"/>
-          </a:fillRef>
-          <a:effectRef idx="2">
-            <a:schemeClr val="accent1"/>
-          </a:effectRef>
-          <a:fontRef idx="minor">
-            <a:schemeClr val="lt1"/>
-          </a:fontRef>
-        </p:style>
-        <p:txBody>
-          <a:bodyPr rtlCol="0" anchor="ctr"/>
-          <a:lstStyle/>
-          <a:p>
-            <a:pPr algn="ctr"/>
-          </a:p>
-        </p:txBody>
-      </p:sp>
-      <p:sp>
-        <p:nvSpPr>
-          <p:cNvPr id="16" name="TextBox 15"/>
-          <p:cNvSpPr txBox="1"/>
-          <p:nvPr/>
-        </p:nvSpPr>
-        <p:spPr>
-          <a:xfrm>
-            <a:off x="3995928" y="2551176"/>
-            <a:ext cx="1005840" cy="219456"/>
-          </a:xfrm>
-          <a:prstGeom prst="rect">
-            <a:avLst/>
-          </a:prstGeom>
-          <a:noFill/>
-        </p:spPr>
-        <p:txBody>
-          <a:bodyPr wrap="square">
-            <a:spAutoFit/>
-          </a:bodyPr>
-          <a:lstStyle/>
-          <a:p>
-            <a:pPr algn="ctr">
-              <a:spcAft>
-                <a:spcPts val="0"/>
-              </a:spcAft>
-            </a:pPr>
-            <a:r>
-              <a:rPr sz="900" b="0">
-                <a:solidFill>
-                  <a:srgbClr val="7E6A64"/>
-                </a:solidFill>
-                <a:latin typeface="Red Hat Mono"/>
-              </a:rPr>
-              <a:t>day 90</a:t>
-            </a:r>
-          </a:p>
-        </p:txBody>
-      </p:sp>
-      <p:sp>
-        <p:nvSpPr>
-          <p:cNvPr id="17" name="Oval 16"/>
-          <p:cNvSpPr/>
-          <p:nvPr/>
-        </p:nvSpPr>
-        <p:spPr>
-          <a:xfrm>
-            <a:off x="7882128" y="2359152"/>
-            <a:ext cx="128016" cy="128016"/>
-          </a:xfrm>
-          <a:prstGeom prst="ellipse">
-            <a:avLst/>
-          </a:prstGeom>
-          <a:solidFill>
-            <a:srgbClr val="FFFFFF"/>
-          </a:solidFill>
-          <a:ln w="19050">
-            <a:solidFill>
-              <a:srgbClr val="54423E"/>
-            </a:solidFill>
-          </a:ln>
-          <a:effectLst/>
-        </p:spPr>
-        <p:style>
-          <a:lnRef idx="1">
-            <a:schemeClr val="accent1"/>
-          </a:lnRef>
-          <a:fillRef idx="3">
-            <a:schemeClr val="accent1"/>
-          </a:fillRef>
-          <a:effectRef idx="2">
-            <a:schemeClr val="accent1"/>
-          </a:effectRef>
-          <a:fontRef idx="minor">
-            <a:schemeClr val="lt1"/>
-          </a:fontRef>
-        </p:style>
-        <p:txBody>
-          <a:bodyPr rtlCol="0" anchor="ctr"/>
-          <a:lstStyle/>
-          <a:p>
-            <a:pPr algn="ctr"/>
-          </a:p>
-        </p:txBody>
-      </p:sp>
-      <p:sp>
-        <p:nvSpPr>
-          <p:cNvPr id="18" name="TextBox 17"/>
-          <p:cNvSpPr txBox="1"/>
-          <p:nvPr/>
-        </p:nvSpPr>
-        <p:spPr>
-          <a:xfrm>
-            <a:off x="7443216" y="2551176"/>
-            <a:ext cx="1005840" cy="219456"/>
-          </a:xfrm>
-          <a:prstGeom prst="rect">
-            <a:avLst/>
-          </a:prstGeom>
-          <a:noFill/>
-        </p:spPr>
-        <p:txBody>
-          <a:bodyPr wrap="square">
-            <a:spAutoFit/>
-          </a:bodyPr>
-          <a:lstStyle/>
-          <a:p>
-            <a:pPr algn="ctr">
-              <a:spcAft>
-                <a:spcPts val="0"/>
-              </a:spcAft>
-            </a:pPr>
-            <a:r>
-              <a:rPr sz="900" b="0">
-                <a:solidFill>
-                  <a:srgbClr val="7E6A64"/>
-                </a:solidFill>
-                <a:latin typeface="Red Hat Mono"/>
-              </a:rPr>
-              <a:t>day 180</a:t>
-            </a:r>
-          </a:p>
-        </p:txBody>
-      </p:sp>
-      <p:sp>
-        <p:nvSpPr>
-          <p:cNvPr id="19" name="Oval 18"/>
-          <p:cNvSpPr/>
-          <p:nvPr/>
-        </p:nvSpPr>
-        <p:spPr>
-          <a:xfrm>
-            <a:off x="11192256" y="2359152"/>
-            <a:ext cx="128016" cy="128016"/>
-          </a:xfrm>
-          <a:prstGeom prst="ellipse">
-            <a:avLst/>
-          </a:prstGeom>
-          <a:solidFill>
-            <a:srgbClr val="FFFFFF"/>
-          </a:solidFill>
-          <a:ln w="19050">
-            <a:solidFill>
-              <a:srgbClr val="54423E"/>
-            </a:solidFill>
-          </a:ln>
-          <a:effectLst/>
-        </p:spPr>
-        <p:style>
-          <a:lnRef idx="1">
-            <a:schemeClr val="accent1"/>
-          </a:lnRef>
-          <a:fillRef idx="3">
-            <a:schemeClr val="accent1"/>
-          </a:fillRef>
-          <a:effectRef idx="2">
-            <a:schemeClr val="accent1"/>
-          </a:effectRef>
-          <a:fontRef idx="minor">
-            <a:schemeClr val="lt1"/>
-          </a:fontRef>
-        </p:style>
-        <p:txBody>
-          <a:bodyPr rtlCol="0" anchor="ctr"/>
-          <a:lstStyle/>
-          <a:p>
-            <a:pPr algn="ctr"/>
-          </a:p>
-        </p:txBody>
-      </p:sp>
-      <p:sp>
-        <p:nvSpPr>
-          <p:cNvPr id="20" name="TextBox 19"/>
-          <p:cNvSpPr txBox="1"/>
-          <p:nvPr/>
-        </p:nvSpPr>
-        <p:spPr>
-          <a:xfrm>
-            <a:off x="10753344" y="2551176"/>
-            <a:ext cx="1005840" cy="219456"/>
-          </a:xfrm>
-          <a:prstGeom prst="rect">
-            <a:avLst/>
-          </a:prstGeom>
-          <a:noFill/>
-        </p:spPr>
-        <p:txBody>
-          <a:bodyPr wrap="square">
-            <a:spAutoFit/>
-          </a:bodyPr>
-          <a:lstStyle/>
-          <a:p>
-            <a:pPr algn="ctr">
-              <a:spcAft>
-                <a:spcPts val="0"/>
-              </a:spcAft>
-            </a:pPr>
-            <a:r>
-              <a:rPr sz="900" b="0">
-                <a:solidFill>
-                  <a:srgbClr val="7E6A64"/>
-                </a:solidFill>
-                <a:latin typeface="Red Hat Mono"/>
-              </a:rPr>
-              <a:t>day 270+</a:t>
-            </a:r>
-          </a:p>
-        </p:txBody>
-      </p:sp>
-      <p:sp>
-        <p:nvSpPr>
-          <p:cNvPr id="21" name="Rounded Rectangle 20"/>
-          <p:cNvSpPr/>
-          <p:nvPr/>
-        </p:nvSpPr>
-        <p:spPr>
-          <a:xfrm>
-            <a:off x="777240" y="3154680"/>
-            <a:ext cx="3447288" cy="384048"/>
-          </a:xfrm>
-          <a:prstGeom prst="roundRect">
-            <a:avLst>
-              <a:gd name="adj" fmla="val 18000"/>
-            </a:avLst>
-          </a:prstGeom>
-          <a:solidFill>
-            <a:srgbClr val="E7F1F5"/>
-          </a:solidFill>
-          <a:ln>
-            <a:noFill/>
-          </a:ln>
-          <a:effectLst/>
-        </p:spPr>
-        <p:style>
-          <a:lnRef idx="1">
-            <a:schemeClr val="accent1"/>
-          </a:lnRef>
-          <a:fillRef idx="3">
-            <a:schemeClr val="accent1"/>
-          </a:fillRef>
-          <a:effectRef idx="2">
-            <a:schemeClr val="accent1"/>
-          </a:effectRef>
-          <a:fontRef idx="minor">
-            <a:schemeClr val="lt1"/>
-          </a:fontRef>
-        </p:style>
-        <p:txBody>
-          <a:bodyPr rtlCol="0" anchor="ctr"/>
-          <a:lstStyle/>
-          <a:p>
-            <a:pPr algn="ctr"/>
-          </a:p>
-        </p:txBody>
-      </p:sp>
-      <p:sp>
-        <p:nvSpPr>
-          <p:cNvPr id="22" name="TextBox 21"/>
-          <p:cNvSpPr txBox="1"/>
-          <p:nvPr/>
-        </p:nvSpPr>
-        <p:spPr>
-          <a:xfrm>
-            <a:off x="923544" y="3191256"/>
-            <a:ext cx="3172968" cy="310896"/>
-          </a:xfrm>
-          <a:prstGeom prst="rect">
-            <a:avLst/>
-          </a:prstGeom>
-          <a:noFill/>
-        </p:spPr>
-        <p:txBody>
-          <a:bodyPr wrap="square">
-            <a:spAutoFit/>
-          </a:bodyPr>
-          <a:lstStyle/>
-          <a:p>
-            <a:pPr algn="l">
-              <a:spcAft>
-                <a:spcPts val="0"/>
-              </a:spcAft>
-            </a:pPr>
-            <a:r>
-              <a:rPr sz="1250" b="1">
-                <a:solidFill>
-                  <a:srgbClr val="286C88"/>
-                </a:solidFill>
-                <a:latin typeface="Red Hat Display"/>
-              </a:rPr>
-              <a:t>Prove — days 0–90</a:t>
-            </a:r>
-          </a:p>
-        </p:txBody>
-      </p:sp>
-      <p:sp>
-        <p:nvSpPr>
-          <p:cNvPr id="23" name="TextBox 22"/>
-          <p:cNvSpPr txBox="1"/>
-          <p:nvPr/>
-        </p:nvSpPr>
-        <p:spPr>
-          <a:xfrm>
-            <a:off x="923544" y="3630168"/>
-            <a:ext cx="3172968" cy="2377440"/>
-          </a:xfrm>
-          <a:prstGeom prst="rect">
-            <a:avLst/>
-          </a:prstGeom>
-          <a:noFill/>
-        </p:spPr>
-        <p:txBody>
-          <a:bodyPr wrap="square">
-            <a:spAutoFit/>
-          </a:bodyPr>
-          <a:lstStyle/>
-          <a:p>
-            <a:pPr algn="l">
-              <a:spcAft>
-                <a:spcPts val="500"/>
-              </a:spcAft>
-            </a:pPr>
-            <a:r>
-              <a:rPr sz="1100" b="0">
-                <a:solidFill>
-                  <a:srgbClr val="54423E"/>
-                </a:solidFill>
-                <a:latin typeface="Red Hat Text"/>
-              </a:rPr>
-              <a:t>•  One endpoint on RHEL AI</a:t>
-            </a:r>
-          </a:p>
-          <a:p>
-            <a:pPr algn="l">
-              <a:spcAft>
-                <a:spcPts val="500"/>
-              </a:spcAft>
-            </a:pPr>
-            <a:r>
-              <a:rPr sz="1100" b="0">
-                <a:solidFill>
-                  <a:srgbClr val="54423E"/>
-                </a:solidFill>
-                <a:latin typeface="Red Hat Text"/>
-              </a:rPr>
-              <a:t>•  Accelerator capacity plan</a:t>
-            </a:r>
-          </a:p>
-          <a:p>
-            <a:pPr algn="l">
-              <a:spcAft>
-                <a:spcPts val="500"/>
-              </a:spcAft>
-            </a:pPr>
-            <a:r>
-              <a:rPr sz="1100" b="0">
-                <a:solidFill>
-                  <a:srgbClr val="54423E"/>
-                </a:solidFill>
-                <a:latin typeface="Red Hat Text"/>
-              </a:rPr>
-              <a:t>•  Data classes agreed in writing</a:t>
-            </a:r>
-          </a:p>
-          <a:p>
-            <a:pPr algn="l">
-              <a:spcAft>
-                <a:spcPts val="500"/>
-              </a:spcAft>
-            </a:pPr>
-            <a:r>
-              <a:rPr sz="1100" b="0">
-                <a:solidFill>
-                  <a:srgbClr val="54423E"/>
-                </a:solidFill>
-                <a:latin typeface="Red Hat Text"/>
-              </a:rPr>
-              <a:t>•  One workflow with a reviewer</a:t>
-            </a:r>
-          </a:p>
-          <a:p>
-            <a:pPr algn="l">
-              <a:spcAft>
-                <a:spcPts val="500"/>
-              </a:spcAft>
-            </a:pPr>
-            <a:r>
-              <a:rPr sz="1100" b="0">
-                <a:solidFill>
-                  <a:srgbClr val="54423E"/>
-                </a:solidFill>
-                <a:latin typeface="Red Hat Text"/>
-              </a:rPr>
-              <a:t>•  Baseline measured first</a:t>
-            </a:r>
-          </a:p>
-        </p:txBody>
-      </p:sp>
-      <p:sp>
-        <p:nvSpPr>
-          <p:cNvPr id="24" name="Rounded Rectangle 23"/>
-          <p:cNvSpPr/>
-          <p:nvPr/>
-        </p:nvSpPr>
-        <p:spPr>
-          <a:xfrm>
-            <a:off x="4370832" y="3154680"/>
-            <a:ext cx="3447288" cy="384048"/>
-          </a:xfrm>
-          <a:prstGeom prst="roundRect">
-            <a:avLst>
-              <a:gd name="adj" fmla="val 18000"/>
-            </a:avLst>
-          </a:prstGeom>
-          <a:solidFill>
-            <a:srgbClr val="F8EFDC"/>
-          </a:solidFill>
-          <a:ln>
-            <a:noFill/>
-          </a:ln>
-          <a:effectLst/>
-        </p:spPr>
-        <p:style>
-          <a:lnRef idx="1">
-            <a:schemeClr val="accent1"/>
-          </a:lnRef>
-          <a:fillRef idx="3">
-            <a:schemeClr val="accent1"/>
-          </a:fillRef>
-          <a:effectRef idx="2">
-            <a:schemeClr val="accent1"/>
-          </a:effectRef>
-          <a:fontRef idx="minor">
-            <a:schemeClr val="lt1"/>
-          </a:fontRef>
-        </p:style>
-        <p:txBody>
-          <a:bodyPr rtlCol="0" anchor="ctr"/>
-          <a:lstStyle/>
-          <a:p>
-            <a:pPr algn="ctr"/>
-          </a:p>
-        </p:txBody>
-      </p:sp>
-      <p:sp>
-        <p:nvSpPr>
-          <p:cNvPr id="25" name="TextBox 24"/>
-          <p:cNvSpPr txBox="1"/>
-          <p:nvPr/>
-        </p:nvSpPr>
-        <p:spPr>
-          <a:xfrm>
-            <a:off x="4517136" y="3191256"/>
-            <a:ext cx="3172968" cy="310896"/>
-          </a:xfrm>
-          <a:prstGeom prst="rect">
-            <a:avLst/>
-          </a:prstGeom>
-          <a:noFill/>
-        </p:spPr>
-        <p:txBody>
-          <a:bodyPr wrap="square">
-            <a:spAutoFit/>
-          </a:bodyPr>
-          <a:lstStyle/>
-          <a:p>
-            <a:pPr algn="l">
-              <a:spcAft>
-                <a:spcPts val="0"/>
-              </a:spcAft>
-            </a:pPr>
-            <a:r>
-              <a:rPr sz="1250" b="1">
-                <a:solidFill>
-                  <a:srgbClr val="96620A"/>
-                </a:solidFill>
-                <a:latin typeface="Red Hat Display"/>
-              </a:rPr>
-              <a:t>Ground — days 90–180</a:t>
-            </a:r>
-          </a:p>
-        </p:txBody>
-      </p:sp>
-      <p:sp>
-        <p:nvSpPr>
-          <p:cNvPr id="26" name="TextBox 25"/>
-          <p:cNvSpPr txBox="1"/>
-          <p:nvPr/>
-        </p:nvSpPr>
-        <p:spPr>
-          <a:xfrm>
-            <a:off x="4517136" y="3630168"/>
-            <a:ext cx="3172968" cy="2377440"/>
-          </a:xfrm>
-          <a:prstGeom prst="rect">
-            <a:avLst/>
-          </a:prstGeom>
-          <a:noFill/>
-        </p:spPr>
-        <p:txBody>
-          <a:bodyPr wrap="square">
-            <a:spAutoFit/>
-          </a:bodyPr>
-          <a:lstStyle/>
-          <a:p>
-            <a:pPr algn="l">
-              <a:spcAft>
-                <a:spcPts val="500"/>
-              </a:spcAft>
-            </a:pPr>
-            <a:r>
-              <a:rPr sz="1100" b="0">
-                <a:solidFill>
-                  <a:srgbClr val="54423E"/>
-                </a:solidFill>
-                <a:latin typeface="Red Hat Text"/>
-              </a:rPr>
-              <a:t>•  Serving on OpenShift AI</a:t>
-            </a:r>
-          </a:p>
-          <a:p>
-            <a:pPr algn="l">
-              <a:spcAft>
-                <a:spcPts val="500"/>
-              </a:spcAft>
-            </a:pPr>
-            <a:r>
-              <a:rPr sz="1100" b="0">
-                <a:solidFill>
-                  <a:srgbClr val="54423E"/>
-                </a:solidFill>
-                <a:latin typeface="Red Hat Text"/>
-              </a:rPr>
-              <a:t>•  Retrieval over your guidance</a:t>
-            </a:r>
-          </a:p>
-          <a:p>
-            <a:pPr algn="l">
-              <a:spcAft>
-                <a:spcPts val="500"/>
-              </a:spcAft>
-            </a:pPr>
-            <a:r>
-              <a:rPr sz="1100" b="0">
-                <a:solidFill>
-                  <a:srgbClr val="54423E"/>
-                </a:solidFill>
-                <a:latin typeface="Red Hat Text"/>
-              </a:rPr>
-              <a:t>•  Tune on agency vocabulary</a:t>
-            </a:r>
-          </a:p>
-          <a:p>
-            <a:pPr algn="l">
-              <a:spcAft>
-                <a:spcPts val="500"/>
-              </a:spcAft>
-            </a:pPr>
-            <a:r>
-              <a:rPr sz="1100" b="0">
-                <a:solidFill>
-                  <a:srgbClr val="54423E"/>
-                </a:solidFill>
-                <a:latin typeface="Red Hat Text"/>
-              </a:rPr>
-              <a:t>•  Drift and compliance wired</a:t>
-            </a:r>
-          </a:p>
-          <a:p>
-            <a:pPr algn="l">
-              <a:spcAft>
-                <a:spcPts val="500"/>
-              </a:spcAft>
-            </a:pPr>
-            <a:r>
-              <a:rPr sz="1100" b="0">
-                <a:solidFill>
-                  <a:srgbClr val="54423E"/>
-                </a:solidFill>
-                <a:latin typeface="Red Hat Text"/>
-              </a:rPr>
-              <a:t>•  Provisioning automated</a:t>
-            </a:r>
-          </a:p>
-        </p:txBody>
-      </p:sp>
-      <p:sp>
-        <p:nvSpPr>
-          <p:cNvPr id="27" name="Rounded Rectangle 26"/>
-          <p:cNvSpPr/>
-          <p:nvPr/>
-        </p:nvSpPr>
-        <p:spPr>
-          <a:xfrm>
-            <a:off x="7964424" y="3154680"/>
-            <a:ext cx="3447288" cy="384048"/>
-          </a:xfrm>
-          <a:prstGeom prst="roundRect">
-            <a:avLst>
-              <a:gd name="adj" fmla="val 18000"/>
-            </a:avLst>
-          </a:prstGeom>
-          <a:solidFill>
-            <a:srgbClr val="FBEAE8"/>
-          </a:solidFill>
-          <a:ln>
-            <a:noFill/>
-          </a:ln>
-          <a:effectLst/>
-        </p:spPr>
-        <p:style>
-          <a:lnRef idx="1">
-            <a:schemeClr val="accent1"/>
-          </a:lnRef>
-          <a:fillRef idx="3">
-            <a:schemeClr val="accent1"/>
-          </a:fillRef>
-          <a:effectRef idx="2">
-            <a:schemeClr val="accent1"/>
-          </a:effectRef>
-          <a:fontRef idx="minor">
-            <a:schemeClr val="lt1"/>
-          </a:fontRef>
-        </p:style>
-        <p:txBody>
-          <a:bodyPr rtlCol="0" anchor="ctr"/>
-          <a:lstStyle/>
-          <a:p>
-            <a:pPr algn="ctr"/>
-          </a:p>
-        </p:txBody>
-      </p:sp>
-      <p:sp>
-        <p:nvSpPr>
-          <p:cNvPr id="28" name="TextBox 27"/>
-          <p:cNvSpPr txBox="1"/>
-          <p:nvPr/>
-        </p:nvSpPr>
-        <p:spPr>
-          <a:xfrm>
-            <a:off x="8110728" y="3191256"/>
-            <a:ext cx="3172968" cy="310896"/>
-          </a:xfrm>
-          <a:prstGeom prst="rect">
-            <a:avLst/>
-          </a:prstGeom>
-          <a:noFill/>
-        </p:spPr>
-        <p:txBody>
-          <a:bodyPr wrap="square">
-            <a:spAutoFit/>
-          </a:bodyPr>
-          <a:lstStyle/>
-          <a:p>
-            <a:pPr algn="l">
-              <a:spcAft>
-                <a:spcPts val="0"/>
-              </a:spcAft>
-            </a:pPr>
-            <a:r>
-              <a:rPr sz="1250" b="1">
-                <a:solidFill>
-                  <a:srgbClr val="A30000"/>
-                </a:solidFill>
-                <a:latin typeface="Red Hat Display"/>
-              </a:rPr>
-              <a:t>Scale — days 180+</a:t>
-            </a:r>
-          </a:p>
-        </p:txBody>
-      </p:sp>
-      <p:sp>
-        <p:nvSpPr>
-          <p:cNvPr id="29" name="TextBox 28"/>
-          <p:cNvSpPr txBox="1"/>
-          <p:nvPr/>
-        </p:nvSpPr>
-        <p:spPr>
-          <a:xfrm>
-            <a:off x="8110728" y="3630168"/>
-            <a:ext cx="3172968" cy="2377440"/>
-          </a:xfrm>
-          <a:prstGeom prst="rect">
-            <a:avLst/>
-          </a:prstGeom>
-          <a:noFill/>
-        </p:spPr>
-        <p:txBody>
-          <a:bodyPr wrap="square">
-            <a:spAutoFit/>
-          </a:bodyPr>
-          <a:lstStyle/>
-          <a:p>
-            <a:pPr algn="l">
-              <a:spcAft>
-                <a:spcPts val="500"/>
-              </a:spcAft>
-            </a:pPr>
-            <a:r>
-              <a:rPr sz="1100" b="0">
-                <a:solidFill>
-                  <a:srgbClr val="54423E"/>
-                </a:solidFill>
-                <a:latin typeface="Red Hat Text"/>
-              </a:rPr>
-              <a:t>•  Registry with real approvals</a:t>
-            </a:r>
-          </a:p>
-          <a:p>
-            <a:pPr algn="l">
-              <a:spcAft>
-                <a:spcPts val="500"/>
-              </a:spcAft>
-            </a:pPr>
-            <a:r>
-              <a:rPr sz="1100" b="0">
-                <a:solidFill>
-                  <a:srgbClr val="54423E"/>
-                </a:solidFill>
-                <a:latin typeface="Red Hat Text"/>
-              </a:rPr>
-              <a:t>•  Workflows two to five</a:t>
-            </a:r>
-          </a:p>
-          <a:p>
-            <a:pPr algn="l">
-              <a:spcAft>
-                <a:spcPts val="500"/>
-              </a:spcAft>
-            </a:pPr>
-            <a:r>
-              <a:rPr sz="1100" b="0">
-                <a:solidFill>
-                  <a:srgbClr val="54423E"/>
-                </a:solidFill>
-                <a:latin typeface="Red Hat Text"/>
-              </a:rPr>
-              <a:t>•  Filing-season rehearsal</a:t>
-            </a:r>
-          </a:p>
-          <a:p>
-            <a:pPr algn="l">
-              <a:spcAft>
-                <a:spcPts val="500"/>
-              </a:spcAft>
-            </a:pPr>
-            <a:r>
-              <a:rPr sz="1100" b="0">
-                <a:solidFill>
-                  <a:srgbClr val="54423E"/>
-                </a:solidFill>
-                <a:latin typeface="Red Hat Text"/>
-              </a:rPr>
-              <a:t>•  Extend to the enclave</a:t>
-            </a:r>
-          </a:p>
-          <a:p>
-            <a:pPr algn="l">
-              <a:spcAft>
-                <a:spcPts val="500"/>
-              </a:spcAft>
-            </a:pPr>
-            <a:r>
-              <a:rPr sz="1100" b="0">
-                <a:solidFill>
-                  <a:srgbClr val="54423E"/>
-                </a:solidFill>
-                <a:latin typeface="Red Hat Text"/>
-              </a:rPr>
-              <a:t>•  Report in mission terms</a:t>
-            </a:r>
-          </a:p>
-        </p:txBody>
-      </p:sp>
-    </p:spTree>
-  </p:cSld>
-  <p:clrMapOvr>
-    <a:masterClrMapping/>
-  </p:clrMapOvr>
-</p:sld>
-</file>
-
-<file path=ppt/slides/slide8.xml><?xml version="1.0" encoding="utf-8"?>
-<p:sld xmlns:a="http://schemas.openxmlformats.org/drawingml/2006/main" xmlns:p="http://schemas.openxmlformats.org/presentationml/2006/main" xmlns:r="http://schemas.openxmlformats.org/officeDocument/2006/relationships">
-  <p:cSld>
-    <p:bg>
-      <p:bgPr>
-        <a:solidFill>
-          <a:srgbClr val="FBF9F8"/>
-        </a:solidFill>
-        <a:effectLst/>
-      </p:bgPr>
-    </p:bg>
-    <p:spTree>
-      <p:nvGrpSpPr>
-        <p:cNvPr id="1" name=""/>
-        <p:cNvGrpSpPr/>
-        <p:nvPr/>
-      </p:nvGrpSpPr>
-      <p:grpSpPr/>
-      <p:sp>
-        <p:nvSpPr>
-          <p:cNvPr id="2" name="Rectangle 1"/>
-          <p:cNvSpPr/>
-          <p:nvPr/>
-        </p:nvSpPr>
-        <p:spPr>
-          <a:xfrm>
-            <a:off x="0" y="0"/>
-            <a:ext cx="12191695" cy="45720"/>
-          </a:xfrm>
-          <a:prstGeom prst="rect">
-            <a:avLst/>
-          </a:prstGeom>
-          <a:solidFill>
-            <a:srgbClr val="CC0000"/>
-          </a:solidFill>
-          <a:ln>
-            <a:noFill/>
-          </a:ln>
-          <a:effectLst/>
-        </p:spPr>
-        <p:style>
-          <a:lnRef idx="1">
-            <a:schemeClr val="accent1"/>
-          </a:lnRef>
-          <a:fillRef idx="3">
-            <a:schemeClr val="accent1"/>
-          </a:fillRef>
-          <a:effectRef idx="2">
-            <a:schemeClr val="accent1"/>
-          </a:effectRef>
-          <a:fontRef idx="minor">
-            <a:schemeClr val="lt1"/>
-          </a:fontRef>
-        </p:style>
-        <p:txBody>
-          <a:bodyPr rtlCol="0" anchor="ctr"/>
-          <a:lstStyle/>
-          <a:p>
-            <a:pPr algn="ctr"/>
-          </a:p>
-        </p:txBody>
-      </p:sp>
-      <p:sp>
-        <p:nvSpPr>
-          <p:cNvPr id="3" name="TextBox 2"/>
-          <p:cNvSpPr txBox="1"/>
-          <p:nvPr/>
-        </p:nvSpPr>
-        <p:spPr>
-          <a:xfrm>
-            <a:off x="777240" y="502920"/>
-            <a:ext cx="10637215" cy="310896"/>
-          </a:xfrm>
-          <a:prstGeom prst="rect">
-            <a:avLst/>
-          </a:prstGeom>
-          <a:noFill/>
-        </p:spPr>
-        <p:txBody>
-          <a:bodyPr wrap="square">
-            <a:spAutoFit/>
-          </a:bodyPr>
-          <a:lstStyle/>
-          <a:p>
-            <a:pPr algn="l">
-              <a:spcAft>
-                <a:spcPts val="0"/>
-              </a:spcAft>
-            </a:pPr>
-            <a:r>
-              <a:rPr sz="1100" b="1">
-                <a:solidFill>
-                  <a:srgbClr val="7E6A64"/>
-                </a:solidFill>
-                <a:latin typeface="Red Hat Mono"/>
-              </a:rPr>
-              <a:t>HANDS ON</a:t>
-            </a:r>
-          </a:p>
-        </p:txBody>
-      </p:sp>
-      <p:sp>
-        <p:nvSpPr>
-          <p:cNvPr id="4" name="TextBox 3"/>
-          <p:cNvSpPr txBox="1"/>
-          <p:nvPr/>
-        </p:nvSpPr>
-        <p:spPr>
-          <a:xfrm>
-            <a:off x="777240" y="868680"/>
-            <a:ext cx="10637215" cy="822960"/>
-          </a:xfrm>
-          <a:prstGeom prst="rect">
-            <a:avLst/>
-          </a:prstGeom>
-          <a:noFill/>
-        </p:spPr>
-        <p:txBody>
-          <a:bodyPr wrap="square">
-            <a:spAutoFit/>
-          </a:bodyPr>
-          <a:lstStyle/>
-          <a:p>
-            <a:pPr algn="l">
-              <a:spcAft>
-                <a:spcPts val="0"/>
-              </a:spcAft>
-            </a:pPr>
-            <a:r>
-              <a:rPr sz="3400" b="1">
-                <a:solidFill>
-                  <a:srgbClr val="1B1211"/>
-                </a:solidFill>
-                <a:latin typeface="Red Hat Display"/>
-              </a:rPr>
-              <a:t>Six labs — real commands, run them yourself</a:t>
-            </a:r>
-          </a:p>
-        </p:txBody>
-      </p:sp>
-      <p:sp>
-        <p:nvSpPr>
-          <p:cNvPr id="5" name="TextBox 4"/>
-          <p:cNvSpPr txBox="1"/>
-          <p:nvPr/>
-        </p:nvSpPr>
-        <p:spPr>
-          <a:xfrm>
-            <a:off x="777240" y="1536192"/>
-            <a:ext cx="9692640" cy="457200"/>
-          </a:xfrm>
-          <a:prstGeom prst="rect">
-            <a:avLst/>
-          </a:prstGeom>
-          <a:noFill/>
-        </p:spPr>
-        <p:txBody>
-          <a:bodyPr wrap="square">
-            <a:spAutoFit/>
-          </a:bodyPr>
-          <a:lstStyle/>
-          <a:p>
-            <a:pPr algn="l">
-              <a:spcAft>
-                <a:spcPts val="0"/>
-              </a:spcAft>
-            </a:pPr>
-            <a:r>
-              <a:rPr sz="1400" b="0">
-                <a:solidFill>
-                  <a:srgbClr val="54423E"/>
-                </a:solidFill>
-                <a:latin typeface="Red Hat Text"/>
-              </a:rPr>
-              <a:t>Simulate mode needs no cluster, no GPU and no credentials. The Demo view plays them hands-free.</a:t>
-            </a:r>
-          </a:p>
-        </p:txBody>
-      </p:sp>
-      <p:graphicFrame>
-        <p:nvGraphicFramePr>
-          <p:cNvPr id="6" name="Table 5"/>
-          <p:cNvGraphicFramePr>
-            <a:graphicFrameLocks noGrp="1"/>
-          </p:cNvGraphicFramePr>
-          <p:nvPr/>
-        </p:nvGraphicFramePr>
-        <p:xfrm>
-          <a:off x="777240" y="2194560"/>
-          <a:ext cx="10607040" cy="2304288"/>
-        </p:xfrm>
-        <a:graphic>
-          <a:graphicData uri="http://schemas.openxmlformats.org/drawingml/2006/table">
-            <a:tbl>
-              <a:tblPr firstRow="1" bandRow="1">
-                <a:tableStyleId>{5C22544A-7EE6-4342-B048-85BDC9FD1C3A}</a:tableStyleId>
-              </a:tblPr>
-              <a:tblGrid>
-                <a:gridCol w="914400"/>
-                <a:gridCol w="6035040"/>
-                <a:gridCol w="3657600"/>
-              </a:tblGrid>
-              <a:tr h="329184">
-                <a:tc>
-                  <a:txBody>
-                    <a:bodyPr wrap="square"/>
-                    <a:lstStyle/>
-                    <a:p>
-                      <a:r>
-                        <a:rPr sz="1050" b="1">
-                          <a:solidFill>
-                            <a:srgbClr val="7E6A64"/>
-                          </a:solidFill>
-                          <a:latin typeface="Red Hat Mono"/>
-                        </a:rPr>
-                        <a:t>Lab</a:t>
-                      </a:r>
-                    </a:p>
-                  </a:txBody>
-                  <a:tcPr marL="109728" marR="109728" marT="45720" marB="45720">
-                    <a:solidFill>
-                      <a:srgbClr val="F4EFED"/>
-                    </a:solidFill>
-                  </a:tcPr>
-                </a:tc>
-                <a:tc>
-                  <a:txBody>
-                    <a:bodyPr wrap="square"/>
-                    <a:lstStyle/>
-                    <a:p>
-                      <a:r>
-                        <a:rPr sz="1050" b="1">
-                          <a:solidFill>
-                            <a:srgbClr val="7E6A64"/>
-                          </a:solidFill>
-                          <a:latin typeface="Red Hat Mono"/>
-                        </a:rPr>
-                        <a:t>What you do</a:t>
-                      </a:r>
-                    </a:p>
-                  </a:txBody>
-                  <a:tcPr marL="109728" marR="109728" marT="45720" marB="45720">
-                    <a:solidFill>
-                      <a:srgbClr val="F4EFED"/>
-                    </a:solidFill>
-                  </a:tcPr>
-                </a:tc>
-                <a:tc>
-                  <a:txBody>
-                    <a:bodyPr wrap="square"/>
-                    <a:lstStyle/>
-                    <a:p>
-                      <a:r>
-                        <a:rPr sz="1050" b="1">
-                          <a:solidFill>
-                            <a:srgbClr val="7E6A64"/>
-                          </a:solidFill>
-                          <a:latin typeface="Red Hat Mono"/>
-                        </a:rPr>
-                        <a:t>Product</a:t>
-                      </a:r>
-                    </a:p>
-                  </a:txBody>
-                  <a:tcPr marL="109728" marR="109728" marT="45720" marB="45720">
-                    <a:solidFill>
-                      <a:srgbClr val="F4EFED"/>
-                    </a:solidFill>
-                  </a:tcPr>
-                </a:tc>
-              </a:tr>
-              <a:tr h="329184">
-                <a:tc>
-                  <a:txBody>
-                    <a:bodyPr wrap="square"/>
-                    <a:lstStyle/>
-                    <a:p>
-                      <a:r>
-                        <a:rPr sz="1200" b="0">
-                          <a:solidFill>
-                            <a:srgbClr val="1B1211"/>
-                          </a:solidFill>
-                          <a:latin typeface="Red Hat Mono"/>
-                        </a:rPr>
-                        <a:t>01</a:t>
-                      </a:r>
-                    </a:p>
-                  </a:txBody>
-                  <a:tcPr marL="109728" marR="109728" marT="45720" marB="45720">
-                    <a:solidFill>
-                      <a:srgbClr val="FBF9F8"/>
-                    </a:solidFill>
-                  </a:tcPr>
-                </a:tc>
-                <a:tc>
-                  <a:txBody>
-                    <a:bodyPr wrap="square"/>
-                    <a:lstStyle/>
-                    <a:p>
-                      <a:r>
-                        <a:rPr sz="1200" b="0">
-                          <a:solidFill>
-                            <a:srgbClr val="1B1211"/>
-                          </a:solidFill>
-                          <a:latin typeface="Red Hat Text"/>
-                        </a:rPr>
-                        <a:t>Serve a model inside your boundary</a:t>
-                      </a:r>
-                    </a:p>
-                  </a:txBody>
-                  <a:tcPr marL="109728" marR="109728" marT="45720" marB="45720">
-                    <a:solidFill>
-                      <a:srgbClr val="FBF9F8"/>
-                    </a:solidFill>
-                  </a:tcPr>
-                </a:tc>
-                <a:tc>
-                  <a:txBody>
-                    <a:bodyPr wrap="square"/>
-                    <a:lstStyle/>
-                    <a:p>
-                      <a:r>
-                        <a:rPr sz="1200" b="0">
-                          <a:solidFill>
-                            <a:srgbClr val="1B1211"/>
-                          </a:solidFill>
-                          <a:latin typeface="Red Hat Mono"/>
-                        </a:rPr>
-                        <a:t>RHEL AI</a:t>
-                      </a:r>
-                    </a:p>
-                  </a:txBody>
-                  <a:tcPr marL="109728" marR="109728" marT="45720" marB="45720">
-                    <a:solidFill>
-                      <a:srgbClr val="FBF9F8"/>
-                    </a:solidFill>
-                  </a:tcPr>
-                </a:tc>
-              </a:tr>
-              <a:tr h="329184">
-                <a:tc>
-                  <a:txBody>
-                    <a:bodyPr wrap="square"/>
-                    <a:lstStyle/>
-                    <a:p>
-                      <a:r>
-                        <a:rPr sz="1200" b="0">
-                          <a:solidFill>
-                            <a:srgbClr val="1B1211"/>
-                          </a:solidFill>
-                          <a:latin typeface="Red Hat Mono"/>
-                        </a:rPr>
-                        <a:t>02</a:t>
-                      </a:r>
-                    </a:p>
-                  </a:txBody>
-                  <a:tcPr marL="109728" marR="109728" marT="45720" marB="45720">
-                    <a:solidFill>
-                      <a:srgbClr val="FBF9F8"/>
-                    </a:solidFill>
-                  </a:tcPr>
-                </a:tc>
-                <a:tc>
-                  <a:txBody>
-                    <a:bodyPr wrap="square"/>
-                    <a:lstStyle/>
-                    <a:p>
-                      <a:r>
-                        <a:rPr sz="1200" b="0">
-                          <a:solidFill>
-                            <a:srgbClr val="1B1211"/>
-                          </a:solidFill>
-                          <a:latin typeface="Red Hat Text"/>
-                        </a:rPr>
-                        <a:t>Teach it your notice taxonomy</a:t>
-                      </a:r>
-                    </a:p>
-                  </a:txBody>
-                  <a:tcPr marL="109728" marR="109728" marT="45720" marB="45720">
-                    <a:solidFill>
-                      <a:srgbClr val="FBF9F8"/>
-                    </a:solidFill>
-                  </a:tcPr>
-                </a:tc>
-                <a:tc>
-                  <a:txBody>
-                    <a:bodyPr wrap="square"/>
-                    <a:lstStyle/>
-                    <a:p>
-                      <a:r>
-                        <a:rPr sz="1200" b="0">
-                          <a:solidFill>
-                            <a:srgbClr val="1B1211"/>
-                          </a:solidFill>
-                          <a:latin typeface="Red Hat Mono"/>
-                        </a:rPr>
-                        <a:t>InstructLab</a:t>
-                      </a:r>
-                    </a:p>
-                  </a:txBody>
-                  <a:tcPr marL="109728" marR="109728" marT="45720" marB="45720">
-                    <a:solidFill>
-                      <a:srgbClr val="FBF9F8"/>
-                    </a:solidFill>
-                  </a:tcPr>
-                </a:tc>
-              </a:tr>
-              <a:tr h="329184">
-                <a:tc>
-                  <a:txBody>
-                    <a:bodyPr wrap="square"/>
-                    <a:lstStyle/>
-                    <a:p>
-                      <a:r>
-                        <a:rPr sz="1200" b="0">
-                          <a:solidFill>
-                            <a:srgbClr val="1B1211"/>
-                          </a:solidFill>
-                          <a:latin typeface="Red Hat Mono"/>
-                        </a:rPr>
-                        <a:t>03</a:t>
-                      </a:r>
-                    </a:p>
-                  </a:txBody>
-                  <a:tcPr marL="109728" marR="109728" marT="45720" marB="45720">
-                    <a:solidFill>
-                      <a:srgbClr val="FBF9F8"/>
-                    </a:solidFill>
-                  </a:tcPr>
-                </a:tc>
-                <a:tc>
-                  <a:txBody>
-                    <a:bodyPr wrap="square"/>
-                    <a:lstStyle/>
-                    <a:p>
-                      <a:r>
-                        <a:rPr sz="1200" b="0">
-                          <a:solidFill>
-                            <a:srgbClr val="1B1211"/>
-                          </a:solidFill>
-                          <a:latin typeface="Red Hat Text"/>
-                        </a:rPr>
-                        <a:t>Survive filing season</a:t>
-                      </a:r>
-                    </a:p>
-                  </a:txBody>
-                  <a:tcPr marL="109728" marR="109728" marT="45720" marB="45720">
-                    <a:solidFill>
-                      <a:srgbClr val="FBF9F8"/>
-                    </a:solidFill>
-                  </a:tcPr>
-                </a:tc>
-                <a:tc>
-                  <a:txBody>
-                    <a:bodyPr wrap="square"/>
-                    <a:lstStyle/>
-                    <a:p>
-                      <a:r>
-                        <a:rPr sz="1200" b="0">
-                          <a:solidFill>
-                            <a:srgbClr val="1B1211"/>
-                          </a:solidFill>
-                          <a:latin typeface="Red Hat Mono"/>
-                        </a:rPr>
-                        <a:t>OpenShift AI</a:t>
-                      </a:r>
-                    </a:p>
-                  </a:txBody>
-                  <a:tcPr marL="109728" marR="109728" marT="45720" marB="45720">
-                    <a:solidFill>
-                      <a:srgbClr val="FBF9F8"/>
-                    </a:solidFill>
-                  </a:tcPr>
-                </a:tc>
-              </a:tr>
-              <a:tr h="329184">
-                <a:tc>
-                  <a:txBody>
-                    <a:bodyPr wrap="square"/>
-                    <a:lstStyle/>
-                    <a:p>
-                      <a:r>
-                        <a:rPr sz="1200" b="0">
-                          <a:solidFill>
-                            <a:srgbClr val="1B1211"/>
-                          </a:solidFill>
-                          <a:latin typeface="Red Hat Mono"/>
-                        </a:rPr>
-                        <a:t>04</a:t>
-                      </a:r>
-                    </a:p>
-                  </a:txBody>
-                  <a:tcPr marL="109728" marR="109728" marT="45720" marB="45720">
-                    <a:solidFill>
-                      <a:srgbClr val="FBF9F8"/>
-                    </a:solidFill>
-                  </a:tcPr>
-                </a:tc>
-                <a:tc>
-                  <a:txBody>
-                    <a:bodyPr wrap="square"/>
-                    <a:lstStyle/>
-                    <a:p>
-                      <a:r>
-                        <a:rPr sz="1200" b="0">
-                          <a:solidFill>
-                            <a:srgbClr val="1B1211"/>
-                          </a:solidFill>
-                          <a:latin typeface="Red Hat Text"/>
-                        </a:rPr>
-                        <a:t>Ground answers in your guidance</a:t>
-                      </a:r>
-                    </a:p>
-                  </a:txBody>
-                  <a:tcPr marL="109728" marR="109728" marT="45720" marB="45720">
-                    <a:solidFill>
-                      <a:srgbClr val="FBF9F8"/>
-                    </a:solidFill>
-                  </a:tcPr>
-                </a:tc>
-                <a:tc>
-                  <a:txBody>
-                    <a:bodyPr wrap="square"/>
-                    <a:lstStyle/>
-                    <a:p>
-                      <a:r>
-                        <a:rPr sz="1200" b="0">
-                          <a:solidFill>
-                            <a:srgbClr val="1B1211"/>
-                          </a:solidFill>
-                          <a:latin typeface="Red Hat Mono"/>
-                        </a:rPr>
-                        <a:t>Retrieval</a:t>
-                      </a:r>
-                    </a:p>
-                  </a:txBody>
-                  <a:tcPr marL="109728" marR="109728" marT="45720" marB="45720">
-                    <a:solidFill>
-                      <a:srgbClr val="FBF9F8"/>
-                    </a:solidFill>
-                  </a:tcPr>
-                </a:tc>
-              </a:tr>
-              <a:tr h="329184">
-                <a:tc>
-                  <a:txBody>
-                    <a:bodyPr wrap="square"/>
-                    <a:lstStyle/>
-                    <a:p>
-                      <a:r>
-                        <a:rPr sz="1200" b="0">
-                          <a:solidFill>
-                            <a:srgbClr val="1B1211"/>
-                          </a:solidFill>
-                          <a:latin typeface="Red Hat Mono"/>
-                        </a:rPr>
-                        <a:t>05</a:t>
-                      </a:r>
-                    </a:p>
-                  </a:txBody>
-                  <a:tcPr marL="109728" marR="109728" marT="45720" marB="45720">
-                    <a:solidFill>
-                      <a:srgbClr val="FBF9F8"/>
-                    </a:solidFill>
-                  </a:tcPr>
-                </a:tc>
-                <a:tc>
-                  <a:txBody>
-                    <a:bodyPr wrap="square"/>
-                    <a:lstStyle/>
-                    <a:p>
-                      <a:r>
-                        <a:rPr sz="1200" b="0">
-                          <a:solidFill>
-                            <a:srgbClr val="1B1211"/>
-                          </a:solidFill>
-                          <a:latin typeface="Red Hat Text"/>
-                        </a:rPr>
-                        <a:t>Automate the toil around the model</a:t>
-                      </a:r>
-                    </a:p>
-                  </a:txBody>
-                  <a:tcPr marL="109728" marR="109728" marT="45720" marB="45720">
-                    <a:solidFill>
-                      <a:srgbClr val="FBF9F8"/>
-                    </a:solidFill>
-                  </a:tcPr>
-                </a:tc>
-                <a:tc>
-                  <a:txBody>
-                    <a:bodyPr wrap="square"/>
-                    <a:lstStyle/>
-                    <a:p>
-                      <a:r>
-                        <a:rPr sz="1200" b="0">
-                          <a:solidFill>
-                            <a:srgbClr val="1B1211"/>
-                          </a:solidFill>
-                          <a:latin typeface="Red Hat Mono"/>
-                        </a:rPr>
-                        <a:t>Ansible</a:t>
-                      </a:r>
-                    </a:p>
-                  </a:txBody>
-                  <a:tcPr marL="109728" marR="109728" marT="45720" marB="45720">
-                    <a:solidFill>
-                      <a:srgbClr val="FBF9F8"/>
-                    </a:solidFill>
-                  </a:tcPr>
-                </a:tc>
-              </a:tr>
-              <a:tr h="329184">
-                <a:tc>
-                  <a:txBody>
-                    <a:bodyPr wrap="square"/>
-                    <a:lstStyle/>
-                    <a:p>
-                      <a:r>
-                        <a:rPr sz="1200" b="0">
-                          <a:solidFill>
-                            <a:srgbClr val="1B1211"/>
-                          </a:solidFill>
-                          <a:latin typeface="Red Hat Mono"/>
-                        </a:rPr>
-                        <a:t>06</a:t>
-                      </a:r>
-                    </a:p>
-                  </a:txBody>
-                  <a:tcPr marL="109728" marR="109728" marT="45720" marB="45720">
-                    <a:solidFill>
-                      <a:srgbClr val="FBF9F8"/>
-                    </a:solidFill>
-                  </a:tcPr>
-                </a:tc>
-                <a:tc>
-                  <a:txBody>
-                    <a:bodyPr wrap="square"/>
-                    <a:lstStyle/>
-                    <a:p>
-                      <a:r>
-                        <a:rPr sz="1200" b="0">
-                          <a:solidFill>
-                            <a:srgbClr val="1B1211"/>
-                          </a:solidFill>
-                          <a:latin typeface="Red Hat Text"/>
-                        </a:rPr>
-                        <a:t>Prove it to your ISSO</a:t>
-                      </a:r>
-                    </a:p>
-                  </a:txBody>
-                  <a:tcPr marL="109728" marR="109728" marT="45720" marB="45720">
-                    <a:solidFill>
-                      <a:srgbClr val="FBF9F8"/>
-                    </a:solidFill>
-                  </a:tcPr>
-                </a:tc>
-                <a:tc>
-                  <a:txBody>
-                    <a:bodyPr wrap="square"/>
-                    <a:lstStyle/>
-                    <a:p>
-                      <a:r>
-                        <a:rPr sz="1200" b="0">
-                          <a:solidFill>
-                            <a:srgbClr val="1B1211"/>
-                          </a:solidFill>
-                          <a:latin typeface="Red Hat Mono"/>
-                        </a:rPr>
-                        <a:t>Compliance, TrustyAI</a:t>
-                      </a:r>
-                    </a:p>
-                  </a:txBody>
-                  <a:tcPr marL="109728" marR="109728" marT="45720" marB="45720">
-                    <a:solidFill>
-                      <a:srgbClr val="FBF9F8"/>
-                    </a:solidFill>
-                  </a:tcPr>
-                </a:tc>
-              </a:tr>
-            </a:tbl>
-          </a:graphicData>
-        </a:graphic>
-      </p:graphicFrame>
-    </p:spTree>
-  </p:cSld>
-  <p:clrMapOvr>
-    <a:masterClrMapping/>
-  </p:clrMapOvr>
-</p:sld>
-</file>
-
-<file path=ppt/slides/slide9.xml><?xml version="1.0" encoding="utf-8"?>
-<p:sld xmlns:a="http://schemas.openxmlformats.org/drawingml/2006/main" xmlns:p="http://schemas.openxmlformats.org/presentationml/2006/main" xmlns:r="http://schemas.openxmlformats.org/officeDocument/2006/relationships">
-  <p:cSld>
-    <p:bg>
-      <p:bgPr>
-        <a:solidFill>
-          <a:srgbClr val="FBF9F8"/>
-        </a:solidFill>
-        <a:effectLst/>
-      </p:bgPr>
-    </p:bg>
-    <p:spTree>
-      <p:nvGrpSpPr>
-        <p:cNvPr id="1" name=""/>
-        <p:cNvGrpSpPr/>
-        <p:nvPr/>
-      </p:nvGrpSpPr>
-      <p:grpSpPr/>
-      <p:sp>
-        <p:nvSpPr>
-          <p:cNvPr id="2" name="Rectangle 1"/>
-          <p:cNvSpPr/>
-          <p:nvPr/>
-        </p:nvSpPr>
-        <p:spPr>
-          <a:xfrm>
-            <a:off x="0" y="0"/>
-            <a:ext cx="12191695" cy="45720"/>
-          </a:xfrm>
-          <a:prstGeom prst="rect">
-            <a:avLst/>
-          </a:prstGeom>
-          <a:solidFill>
-            <a:srgbClr val="CC0000"/>
-          </a:solidFill>
-          <a:ln>
-            <a:noFill/>
-          </a:ln>
-          <a:effectLst/>
-        </p:spPr>
-        <p:style>
-          <a:lnRef idx="1">
-            <a:schemeClr val="accent1"/>
-          </a:lnRef>
-          <a:fillRef idx="3">
-            <a:schemeClr val="accent1"/>
-          </a:fillRef>
-          <a:effectRef idx="2">
-            <a:schemeClr val="accent1"/>
-          </a:effectRef>
-          <a:fontRef idx="minor">
-            <a:schemeClr val="lt1"/>
-          </a:fontRef>
-        </p:style>
-        <p:txBody>
-          <a:bodyPr rtlCol="0" anchor="ctr"/>
-          <a:lstStyle/>
-          <a:p>
-            <a:pPr algn="ctr"/>
-          </a:p>
-        </p:txBody>
-      </p:sp>
-      <p:sp>
-        <p:nvSpPr>
-          <p:cNvPr id="3" name="TextBox 2"/>
-          <p:cNvSpPr txBox="1"/>
-          <p:nvPr/>
-        </p:nvSpPr>
-        <p:spPr>
-          <a:xfrm>
-            <a:off x="777240" y="502920"/>
-            <a:ext cx="10637215" cy="310896"/>
-          </a:xfrm>
-          <a:prstGeom prst="rect">
-            <a:avLst/>
-          </a:prstGeom>
-          <a:noFill/>
-        </p:spPr>
-        <p:txBody>
-          <a:bodyPr wrap="square">
-            <a:spAutoFit/>
-          </a:bodyPr>
-          <a:lstStyle/>
-          <a:p>
-            <a:pPr algn="l">
-              <a:spcAft>
-                <a:spcPts val="0"/>
-              </a:spcAft>
-            </a:pPr>
-            <a:r>
-              <a:rPr sz="1100" b="1">
-                <a:solidFill>
-                  <a:srgbClr val="7E6A64"/>
-                </a:solidFill>
-                <a:latin typeface="Red Hat Mono"/>
-              </a:rPr>
-              <a:t>NEXT STEPS</a:t>
-            </a:r>
-          </a:p>
-        </p:txBody>
-      </p:sp>
-      <p:sp>
-        <p:nvSpPr>
-          <p:cNvPr id="4" name="TextBox 3"/>
-          <p:cNvSpPr txBox="1"/>
-          <p:nvPr/>
-        </p:nvSpPr>
-        <p:spPr>
-          <a:xfrm>
-            <a:off x="777240" y="868680"/>
-            <a:ext cx="10637215" cy="822960"/>
-          </a:xfrm>
-          <a:prstGeom prst="rect">
-            <a:avLst/>
-          </a:prstGeom>
-          <a:noFill/>
-        </p:spPr>
-        <p:txBody>
-          <a:bodyPr wrap="square">
-            <a:spAutoFit/>
-          </a:bodyPr>
-          <a:lstStyle/>
-          <a:p>
-            <a:pPr algn="l">
-              <a:spcAft>
-                <a:spcPts val="0"/>
-              </a:spcAft>
-            </a:pPr>
-            <a:r>
-              <a:rPr sz="3400" b="1">
-                <a:solidFill>
-                  <a:srgbClr val="1B1211"/>
-                </a:solidFill>
-                <a:latin typeface="Red Hat Display"/>
-              </a:rPr>
-              <a:t>What happens after this hour</a:t>
-            </a:r>
-          </a:p>
-        </p:txBody>
-      </p:sp>
-      <p:sp>
-        <p:nvSpPr>
-          <p:cNvPr id="5" name="Rectangle 4"/>
-          <p:cNvSpPr/>
-          <p:nvPr/>
-        </p:nvSpPr>
-        <p:spPr>
-          <a:xfrm>
-            <a:off x="777240" y="2240280"/>
-            <a:ext cx="41148" cy="1737360"/>
-          </a:xfrm>
-          <a:prstGeom prst="rect">
-            <a:avLst/>
-          </a:prstGeom>
-          <a:solidFill>
-            <a:srgbClr val="CC0000"/>
-          </a:solidFill>
-          <a:ln>
-            <a:noFill/>
-          </a:ln>
-          <a:effectLst/>
-        </p:spPr>
-        <p:style>
-          <a:lnRef idx="1">
-            <a:schemeClr val="accent1"/>
-          </a:lnRef>
-          <a:fillRef idx="3">
-            <a:schemeClr val="accent1"/>
-          </a:fillRef>
-          <a:effectRef idx="2">
-            <a:schemeClr val="accent1"/>
-          </a:effectRef>
-          <a:fontRef idx="minor">
-            <a:schemeClr val="lt1"/>
-          </a:fontRef>
-        </p:style>
-        <p:txBody>
-          <a:bodyPr rtlCol="0" anchor="ctr"/>
-          <a:lstStyle/>
-          <a:p>
-            <a:pPr algn="ctr"/>
-          </a:p>
-        </p:txBody>
-      </p:sp>
-      <p:sp>
-        <p:nvSpPr>
-          <p:cNvPr id="6" name="TextBox 5"/>
-          <p:cNvSpPr txBox="1"/>
-          <p:nvPr/>
-        </p:nvSpPr>
-        <p:spPr>
-          <a:xfrm>
-            <a:off x="941832" y="2240280"/>
-            <a:ext cx="3186074" cy="1737360"/>
-          </a:xfrm>
-          <a:prstGeom prst="rect">
-            <a:avLst/>
-          </a:prstGeom>
-          <a:noFill/>
-        </p:spPr>
-        <p:txBody>
-          <a:bodyPr wrap="square">
-            <a:spAutoFit/>
-          </a:bodyPr>
-          <a:lstStyle/>
-          <a:p>
-            <a:pPr algn="l">
-              <a:spcAft>
-                <a:spcPts val="600"/>
-              </a:spcAft>
-            </a:pPr>
-            <a:r>
-              <a:rPr sz="1500" b="1">
-                <a:solidFill>
-                  <a:srgbClr val="1B1211"/>
-                </a:solidFill>
-                <a:latin typeface="Red Hat Display"/>
-              </a:rPr>
-              <a:t>Architecture workshop</a:t>
-            </a:r>
-          </a:p>
-          <a:p>
-            <a:pPr algn="l">
-              <a:spcAft>
-                <a:spcPts val="0"/>
-              </a:spcAft>
-            </a:pPr>
-            <a:r>
-              <a:rPr sz="1200" b="0">
-                <a:solidFill>
-                  <a:srgbClr val="54423E"/>
-                </a:solidFill>
-                <a:latin typeface="Red Hat Text"/>
-              </a:rPr>
-              <a:t>Half a day with your platform and security teams to size accelerators, place the first workload and name the data classes in scope.</a:t>
-            </a:r>
-          </a:p>
-        </p:txBody>
-      </p:sp>
-      <p:sp>
-        <p:nvSpPr>
-          <p:cNvPr id="7" name="Rectangle 6"/>
-          <p:cNvSpPr/>
-          <p:nvPr/>
-        </p:nvSpPr>
-        <p:spPr>
-          <a:xfrm>
-            <a:off x="4420514" y="2240280"/>
-            <a:ext cx="41148" cy="1737360"/>
-          </a:xfrm>
-          <a:prstGeom prst="rect">
-            <a:avLst/>
-          </a:prstGeom>
-          <a:solidFill>
-            <a:srgbClr val="CC0000"/>
-          </a:solidFill>
-          <a:ln>
-            <a:noFill/>
-          </a:ln>
-          <a:effectLst/>
-        </p:spPr>
-        <p:style>
-          <a:lnRef idx="1">
-            <a:schemeClr val="accent1"/>
-          </a:lnRef>
-          <a:fillRef idx="3">
-            <a:schemeClr val="accent1"/>
-          </a:fillRef>
-          <a:effectRef idx="2">
-            <a:schemeClr val="accent1"/>
-          </a:effectRef>
-          <a:fontRef idx="minor">
-            <a:schemeClr val="lt1"/>
-          </a:fontRef>
-        </p:style>
-        <p:txBody>
-          <a:bodyPr rtlCol="0" anchor="ctr"/>
-          <a:lstStyle/>
-          <a:p>
-            <a:pPr algn="ctr"/>
-          </a:p>
-        </p:txBody>
-      </p:sp>
-      <p:sp>
-        <p:nvSpPr>
-          <p:cNvPr id="8" name="TextBox 7"/>
-          <p:cNvSpPr txBox="1"/>
-          <p:nvPr/>
-        </p:nvSpPr>
-        <p:spPr>
-          <a:xfrm>
-            <a:off x="4585106" y="2240280"/>
-            <a:ext cx="3186074" cy="1737360"/>
-          </a:xfrm>
-          <a:prstGeom prst="rect">
-            <a:avLst/>
-          </a:prstGeom>
-          <a:noFill/>
-        </p:spPr>
-        <p:txBody>
-          <a:bodyPr wrap="square">
-            <a:spAutoFit/>
-          </a:bodyPr>
-          <a:lstStyle/>
-          <a:p>
-            <a:pPr algn="l">
-              <a:spcAft>
-                <a:spcPts val="600"/>
-              </a:spcAft>
-            </a:pPr>
-            <a:r>
-              <a:rPr sz="1500" b="1">
-                <a:solidFill>
-                  <a:srgbClr val="1B1211"/>
-                </a:solidFill>
-                <a:latin typeface="Red Hat Display"/>
-              </a:rPr>
-              <a:t>Guided pilot</a:t>
-            </a:r>
-          </a:p>
-          <a:p>
-            <a:pPr algn="l">
-              <a:spcAft>
-                <a:spcPts val="0"/>
-              </a:spcAft>
-            </a:pPr>
-            <a:r>
-              <a:rPr sz="1200" b="0">
-                <a:solidFill>
-                  <a:srgbClr val="54423E"/>
-                </a:solidFill>
-                <a:latin typeface="Red Hat Text"/>
-              </a:rPr>
-              <a:t>One workflow, on your infrastructure, with a measured baseline and an agreed definition of success before we start.</a:t>
-            </a:r>
-          </a:p>
-        </p:txBody>
-      </p:sp>
-      <p:sp>
-        <p:nvSpPr>
-          <p:cNvPr id="9" name="Rectangle 8"/>
-          <p:cNvSpPr/>
-          <p:nvPr/>
-        </p:nvSpPr>
-        <p:spPr>
-          <a:xfrm>
-            <a:off x="8063788" y="2240280"/>
-            <a:ext cx="41148" cy="1737360"/>
-          </a:xfrm>
-          <a:prstGeom prst="rect">
-            <a:avLst/>
-          </a:prstGeom>
-          <a:solidFill>
-            <a:srgbClr val="CC0000"/>
-          </a:solidFill>
-          <a:ln>
-            <a:noFill/>
-          </a:ln>
-          <a:effectLst/>
-        </p:spPr>
-        <p:style>
-          <a:lnRef idx="1">
-            <a:schemeClr val="accent1"/>
-          </a:lnRef>
-          <a:fillRef idx="3">
-            <a:schemeClr val="accent1"/>
-          </a:fillRef>
-          <a:effectRef idx="2">
-            <a:schemeClr val="accent1"/>
-          </a:effectRef>
-          <a:fontRef idx="minor">
-            <a:schemeClr val="lt1"/>
-          </a:fontRef>
-        </p:style>
-        <p:txBody>
-          <a:bodyPr rtlCol="0" anchor="ctr"/>
-          <a:lstStyle/>
-          <a:p>
-            <a:pPr algn="ctr"/>
-          </a:p>
-        </p:txBody>
-      </p:sp>
-      <p:sp>
-        <p:nvSpPr>
-          <p:cNvPr id="10" name="TextBox 9"/>
-          <p:cNvSpPr txBox="1"/>
-          <p:nvPr/>
-        </p:nvSpPr>
-        <p:spPr>
-          <a:xfrm>
-            <a:off x="8228380" y="2240280"/>
-            <a:ext cx="3186074" cy="1737360"/>
-          </a:xfrm>
-          <a:prstGeom prst="rect">
-            <a:avLst/>
-          </a:prstGeom>
-          <a:noFill/>
-        </p:spPr>
-        <p:txBody>
-          <a:bodyPr wrap="square">
-            <a:spAutoFit/>
-          </a:bodyPr>
-          <a:lstStyle/>
-          <a:p>
-            <a:pPr algn="l">
-              <a:spcAft>
-                <a:spcPts val="600"/>
-              </a:spcAft>
-            </a:pPr>
-            <a:r>
-              <a:rPr sz="1500" b="1">
-                <a:solidFill>
-                  <a:srgbClr val="1B1211"/>
-                </a:solidFill>
-                <a:latin typeface="Red Hat Display"/>
-              </a:rPr>
-              <a:t>Acquisition path</a:t>
-            </a:r>
-          </a:p>
-          <a:p>
-            <a:pPr algn="l">
-              <a:spcAft>
-                <a:spcPts val="0"/>
-              </a:spcAft>
-            </a:pPr>
-            <a:r>
-              <a:rPr sz="1200" b="0">
-                <a:solidFill>
-                  <a:srgbClr val="54423E"/>
-                </a:solidFill>
-                <a:latin typeface="Red Hat Text"/>
-              </a:rPr>
-              <a:t>Four Inc. and Carahsoft carry the vehicles and pricing. Bring them into the conversation early, not at the end.</a:t>
-            </a:r>
-          </a:p>
-        </p:txBody>
-      </p:sp>
-      <p:sp>
-        <p:nvSpPr>
-          <p:cNvPr id="11" name="TextBox 10"/>
-          <p:cNvSpPr txBox="1"/>
-          <p:nvPr/>
-        </p:nvSpPr>
-        <p:spPr>
-          <a:xfrm>
-            <a:off x="777240" y="4663440"/>
-            <a:ext cx="10515600" cy="1188720"/>
-          </a:xfrm>
-          <a:prstGeom prst="rect">
-            <a:avLst/>
-          </a:prstGeom>
-          <a:noFill/>
-        </p:spPr>
-        <p:txBody>
-          <a:bodyPr wrap="square">
-            <a:spAutoFit/>
-          </a:bodyPr>
-          <a:lstStyle/>
-          <a:p>
-            <a:pPr algn="l">
-              <a:spcAft>
-                <a:spcPts val="800"/>
-              </a:spcAft>
-            </a:pPr>
-            <a:r>
-              <a:rPr sz="1700" b="1">
-                <a:solidFill>
-                  <a:srgbClr val="1B1211"/>
-                </a:solidFill>
-                <a:latin typeface="Red Hat Display"/>
-              </a:rPr>
-              <a:t>One thing to remember</a:t>
-            </a:r>
-          </a:p>
-          <a:p>
-            <a:pPr algn="l">
-              <a:spcAft>
-                <a:spcPts val="0"/>
-              </a:spcAft>
-            </a:pPr>
-            <a:r>
-              <a:rPr sz="1400" b="0">
-                <a:solidFill>
-                  <a:srgbClr val="54423E"/>
-                </a:solidFill>
-                <a:latin typeface="Red Hat Text"/>
-              </a:rPr>
-              <a:t>Nothing in these six labs required a public model endpoint, an internet connection at inference time, or a rewrite of a system of record. That is the whole argument.</a:t>
-            </a:r>
-          </a:p>
-        </p:txBody>
-      </p:sp>
     </p:spTree>
   </p:cSld>
   <p:clrMapOvr>

--- a/slides/exports/redhat-ai-tax-administration.pptx
+++ b/slides/exports/redhat-ai-tax-administration.pptx
@@ -5324,7 +5324,7 @@
             <a:avLst/>
           </a:prstGeom>
           <a:solidFill>
-            <a:srgbClr val="286C88"/>
+            <a:srgbClr val="CC0000"/>
           </a:solidFill>
           <a:ln>
             <a:noFill/>
@@ -5383,7 +5383,7 @@
             <a:r>
               <a:rPr sz="1100" b="1">
                 <a:solidFill>
-                  <a:srgbClr val="286C88"/>
+                  <a:srgbClr val="CC0000"/>
                 </a:solidFill>
                 <a:latin typeface="Red Hat Mono"/>
               </a:rPr>
@@ -5439,7 +5439,7 @@
             <a:avLst/>
           </a:prstGeom>
           <a:solidFill>
-            <a:srgbClr val="286C88"/>
+            <a:srgbClr val="CC0000"/>
           </a:solidFill>
           <a:ln>
             <a:noFill/>
@@ -5531,7 +5531,7 @@
             <a:avLst/>
           </a:prstGeom>
           <a:solidFill>
-            <a:srgbClr val="96620A"/>
+            <a:srgbClr val="C2410C"/>
           </a:solidFill>
           <a:ln>
             <a:noFill/>
@@ -5590,7 +5590,7 @@
             <a:r>
               <a:rPr sz="1100" b="1">
                 <a:solidFill>
-                  <a:srgbClr val="96620A"/>
+                  <a:srgbClr val="C2410C"/>
                 </a:solidFill>
                 <a:latin typeface="Red Hat Mono"/>
               </a:rPr>
@@ -5646,7 +5646,7 @@
             <a:avLst/>
           </a:prstGeom>
           <a:solidFill>
-            <a:srgbClr val="96620A"/>
+            <a:srgbClr val="C2410C"/>
           </a:solidFill>
           <a:ln>
             <a:noFill/>
@@ -5738,7 +5738,7 @@
             <a:avLst/>
           </a:prstGeom>
           <a:solidFill>
-            <a:srgbClr val="CC0000"/>
+            <a:srgbClr val="1E7A55"/>
           </a:solidFill>
           <a:ln>
             <a:noFill/>
@@ -5797,7 +5797,7 @@
             <a:r>
               <a:rPr sz="1100" b="1">
                 <a:solidFill>
-                  <a:srgbClr val="CC0000"/>
+                  <a:srgbClr val="1E7A55"/>
                 </a:solidFill>
                 <a:latin typeface="Red Hat Mono"/>
               </a:rPr>
@@ -5853,7 +5853,7 @@
             <a:avLst/>
           </a:prstGeom>
           <a:solidFill>
-            <a:srgbClr val="CC0000"/>
+            <a:srgbClr val="1E7A55"/>
           </a:solidFill>
           <a:ln>
             <a:noFill/>
@@ -5945,7 +5945,7 @@
             <a:avLst/>
           </a:prstGeom>
           <a:solidFill>
-            <a:srgbClr val="1E7A55"/>
+            <a:srgbClr val="5B2E91"/>
           </a:solidFill>
           <a:ln>
             <a:noFill/>
@@ -6004,7 +6004,7 @@
             <a:r>
               <a:rPr sz="1100" b="1">
                 <a:solidFill>
-                  <a:srgbClr val="1E7A55"/>
+                  <a:srgbClr val="5B2E91"/>
                 </a:solidFill>
                 <a:latin typeface="Red Hat Mono"/>
               </a:rPr>

--- a/slides/exports/redhat-ai-tax-administration.pptx
+++ b/slides/exports/redhat-ai-tax-administration.pptx
@@ -4350,7 +4350,7 @@
                 </a:solidFill>
                 <a:latin typeface="Red Hat Text"/>
               </a:rPr>
-              <a:t>Presented by Jon Keam and Brad Scalio</a:t>
+              <a:t>Presented by Jon Keam (jkeam@redhat.com) and Brad Scalio (bscalio@redhat.com)</a:t>
             </a:r>
           </a:p>
         </p:txBody>
